--- a/slides/pptx/week01.pptx
+++ b/slides/pptx/week01.pptx
@@ -22,9 +22,10 @@
     <p:sldId id="270" r:id="rId16"/>
     <p:sldId id="271" r:id="rId17"/>
     <p:sldId id="272" r:id="rId18"/>
+    <p:sldId id="273" r:id="rId19"/>
   </p:sldIdLst>
   <p:notesMasterIdLst>
-    <p:notesMasterId r:id="rId19"/>
+    <p:notesMasterId r:id="rId20"/>
   </p:notesMasterIdLst>
   <p:sldSz cx="9144000" cy="5143500"/>
   <p:notesSz cx="5143500" cy="9144000"/>
@@ -606,7 +607,7 @@
           <a:p>
             <a:r>
               <a:rPr lang="en-US" dirty="0"/>
-              <a:t>Orient them to the references we'll cite weekly. OWASP = what to prevent; CWE = the precise weakness id (e.g., CWE-22 path traversal); ATT&amp;CK = how real adversaries operate. They'll map every finding to a CWE/OWASP id all term. ~3 min.</a:t>
+              <a:t>Orient them to the references we'll cite weekly. OWASP = what to prevent; CWE = the precise weakness id; ATT&amp;CK = how real adversaries operate. Name CWE-501 explicitly here — the worksheet's Reflection Q1 asks them to map their /upload finding to a CWE, and this is the answer the course has already committed to (fixed 2026-07-25, after CWE-1059 turned out to be MITRE-prohibited for vulnerability mapping). They'll map every finding to a CWE/OWASP id all term. ~3 min.</a:t>
             </a:r>
             <a:endParaRPr lang="en-US" dirty="0"/>
           </a:p>
@@ -694,7 +695,7 @@
           <a:p>
             <a:r>
               <a:rPr lang="en-US" dirty="0"/>
-              <a:t>Tie the mindset to the current policy moment (CISA, memory-safety roadmaps). Key idea: threat modeling catches design flaws *before* code exists — cheapest place to fix. Contrast cost of fixing at design vs in production (orders of magnitude). ~4 min.</a:t>
+              <a:t>Tie the mindset to the current policy moment (CISA, memory-safety roadmaps). Key idea: threat modeling catches design flaws *before* code exists — cheapest place to fix. This slide's own thesis is Task 8's actual grading question — make the connection explicit, don't leave it implicit. Contrast cost of fixing at design vs in production (orders of magnitude). ~4 min.</a:t>
             </a:r>
             <a:endParaRPr lang="en-US" dirty="0"/>
           </a:p>
@@ -958,7 +959,7 @@
           <a:p>
             <a:r>
               <a:rPr lang="en-US" dirty="0"/>
-              <a:t>The main lab. They repeat today's /upload worked example across the whole sample app. Remind: rank by likelihood × impact (not everything is critical), and propose a concrete mitigation each. Point them to THREAT-MODEL-TEMPLATE.md. Also: kick off the term project by threat-modeling NoteVault (see worksheet).</a:t>
+              <a:t>This grew from a 4-step propose-only exercise into an 8-part build-and-prove lab (task numbering in the worksheet is 0-8, with a 3b for the systems-level pass) — don't teach the old 4-step version. Two things are new and graded, cite them explicitly: the systems-level pass (step 4, research-grounded — STRIDE-only modeling makes people miss system-level threats) and the implemented-and-evidenced defense (step 8 — this is where "Secure by Design" 4 slides ago stops being theory). Point them to THREAT-MODEL-TEMPLATE.md. Step 6 kicks off the term project.</a:t>
             </a:r>
             <a:endParaRPr lang="en-US" dirty="0"/>
           </a:p>
@@ -1046,7 +1047,7 @@
           <a:p>
             <a:r>
               <a:rPr lang="en-US" dirty="0"/>
-              <a:t>Address AI head-on, week 1. Frame it as a professional skill: future engineers use AI but must verify it. The Audit-the-AI task turns its weakness into the lesson. Be explicit about the integrity controls so expectations are set early. ~4 min.</a:t>
+              <a:t>This grew from a 4-step propose-only exercise into an 8-part build-and-prove lab (task numbering in the worksheet is 0-8, with a 3b for the systems-level pass) — don't teach the old 4-step version. Two things are new and graded, cite them explicitly: the systems-level pass (step 4, research-grounded — STRIDE-only modeling makes people miss system-level threats) and the implemented-and-evidenced defense (step 8 — this is where "Secure by Design" 4 slides ago stops being theory). Point them to THREAT-MODEL-TEMPLATE.md. Step 6 kicks off the term project.</a:t>
             </a:r>
             <a:endParaRPr lang="en-US" dirty="0"/>
           </a:p>
@@ -1134,7 +1135,7 @@
           <a:p>
             <a:r>
               <a:rPr lang="en-US" dirty="0"/>
-              <a:t>Recap in 3 lines. Cold-call 2 students: "give me one STRIDE threat for a login page." Confirm they can do the lab. ~2 min.</a:t>
+              <a:t>Address AI head-on, week 1. Frame it as a professional skill: future engineers use AI but must verify it. The Audit-the-AI task turns its weakness into the lesson. Be explicit about the integrity controls so expectations are set early. ~4 min.</a:t>
             </a:r>
             <a:endParaRPr lang="en-US" dirty="0"/>
           </a:p>
@@ -1222,7 +1223,7 @@
           <a:p>
             <a:r>
               <a:rPr lang="en-US" dirty="0"/>
-              <a:t>Cliffhanger: "Next week we automate finding these bugs — and race to triage them. Get your VM working before then." Take questions; remind about the ethics acknowledgment + Lab 0.</a:t>
+              <a:t>Recap in 3 lines. Cold-call 2 students: "give me one STRIDE threat for a login page." Confirm they can do the lab. ~2 min.</a:t>
             </a:r>
             <a:endParaRPr lang="en-US" dirty="0"/>
           </a:p>
@@ -1246,6 +1247,94 @@
             <a:fld id="{F7021451-1387-4CA6-816F-3879F97B5CBC}" type="slidenum">
               <a:rPr lang="en-US"/>
               <a:t>17</a:t>
+            </a:fld>
+            <a:endParaRPr lang="en-US"/>
+          </a:p>
+        </p:txBody>
+      </p:sp>
+    </p:spTree>
+    <p:extLst>
+      <p:ext uri="{BB962C8B-B14F-4D97-AF65-F5344CB8AC3E}">
+        <p14:creationId xmlns:p14="http://schemas.microsoft.com/office/powerpoint/2010/main" val="1024086991"/>
+      </p:ext>
+    </p:extLst>
+  </p:cSld>
+  <p:clrMapOvr>
+    <a:masterClrMapping/>
+  </p:clrMapOvr>
+</p:notes>
+</file>
+
+<file path=ppt/notesSlides/notesSlide18.xml><?xml version="1.0" encoding="utf-8"?>
+<p:notes xmlns:a="http://schemas.openxmlformats.org/drawingml/2006/main" xmlns:r="http://schemas.openxmlformats.org/officeDocument/2006/relationships" xmlns:p="http://schemas.openxmlformats.org/presentationml/2006/main">
+  <p:cSld>
+    <p:spTree>
+      <p:nvGrpSpPr>
+        <p:cNvPr id="1" name=""/>
+        <p:cNvGrpSpPr/>
+        <p:nvPr/>
+      </p:nvGrpSpPr>
+      <p:grpSpPr>
+        <a:xfrm>
+          <a:off x="0" y="0"/>
+          <a:ext cx="0" cy="0"/>
+          <a:chOff x="0" y="0"/>
+          <a:chExt cx="0" cy="0"/>
+        </a:xfrm>
+      </p:grpSpPr>
+      <p:sp>
+        <p:nvSpPr>
+          <p:cNvPr id="2" name="Slide Image Placeholder 1"/>
+          <p:cNvSpPr>
+            <a:spLocks noGrp="1" noRot="1" noChangeAspect="1"/>
+          </p:cNvSpPr>
+          <p:nvPr>
+            <p:ph type="sldImg"/>
+          </p:nvPr>
+        </p:nvSpPr>
+        <p:spPr/>
+      </p:sp>
+      <p:sp>
+        <p:nvSpPr>
+          <p:cNvPr id="3" name="Notes Placeholder 2"/>
+          <p:cNvSpPr>
+            <a:spLocks noGrp="1"/>
+          </p:cNvSpPr>
+          <p:nvPr>
+            <p:ph type="body" idx="1"/>
+          </p:nvPr>
+        </p:nvSpPr>
+        <p:spPr/>
+        <p:txBody>
+          <a:bodyPr/>
+          <a:lstStyle/>
+          <a:p>
+            <a:r>
+              <a:rPr lang="en-US" dirty="0"/>
+              <a:t>Cliffhanger: "Next week we automate finding these bugs — and race to triage them. Get your VM working before then." Take questions; remind about the ethics acknowledgment + Lab 0.</a:t>
+            </a:r>
+            <a:endParaRPr lang="en-US" dirty="0"/>
+          </a:p>
+        </p:txBody>
+      </p:sp>
+      <p:sp>
+        <p:nvSpPr>
+          <p:cNvPr id="4" name="Slide Number Placeholder 3"/>
+          <p:cNvSpPr>
+            <a:spLocks noGrp="1"/>
+          </p:cNvSpPr>
+          <p:nvPr>
+            <p:ph type="sldNum" sz="quarter" idx="10"/>
+          </p:nvPr>
+        </p:nvSpPr>
+        <p:spPr/>
+        <p:txBody>
+          <a:bodyPr/>
+          <a:lstStyle/>
+          <a:p>
+            <a:fld id="{F7021451-1387-4CA6-816F-3879F97B5CBC}" type="slidenum">
+              <a:rPr lang="en-US"/>
+              <a:t>18</a:t>
             </a:fld>
             <a:endParaRPr lang="en-US"/>
           </a:p>
@@ -1310,7 +1399,7 @@
           <a:p>
             <a:r>
               <a:rPr lang="en-US" dirty="0"/>
-              <a:t>Roadmap slide — 1 min. Tell them the lecture is ~2 h, then a 3 h lab where they threat-model a real app and play the card game. Flag the deliverable early: a 2–3 page threat model. Ask: "Who has heard the word 'threat model' before?" gauge the room.</a:t>
+              <a:t>Roadmap slide — 1 min. Tell them the lecture is ~2 h, then a 3 h lab where they threat-model a real app, play the card game, AND implement one real fix (this grew from a propose-only exercise to a build-and-prove one — see Lab 1 slide). Ask: "Who has heard the word 'threat model' before?" gauge the room.</a:t>
             </a:r>
             <a:endParaRPr lang="en-US" dirty="0"/>
           </a:p>
@@ -1574,7 +1663,7 @@
           <a:p>
             <a:r>
               <a:rPr lang="en-US" dirty="0"/>
-              <a:t>The asymmetry is the whole reason security is hard. Contrast a "use case" (user logs in) with a "misuse case" (attacker logs in as someone else). Exercise: pick the classroom projector login and ask "how would you abuse this?" Get 3 answers. ~5 min.</a:t>
+              <a:t>The asymmetry is the whole reason security is hard. Contrast a "use case" (user logs in) with an "abuse case" (attacker logs in as someone else) — say "abuse case," not "misuse case," to match the worksheet's term (Task 4: 2 personas × 2 abuse cases, graded). Exercise: pick the classroom projector login and ask "how would you abuse this?" Get 3 answers. ~5 min.</a:t>
             </a:r>
             <a:endParaRPr lang="en-US" dirty="0"/>
           </a:p>
@@ -1750,7 +1839,7 @@
           <a:p>
             <a:r>
               <a:rPr lang="en-US" dirty="0"/>
-              <a:t>This is the "make it concrete" moment — walk the data flow on the board. Ask: "what does the app trust here?" (it trusts the filename). Show how a crafted filename escapes the folder. We'll STRIDE this exact element next slide. This worked example is what makes the abstract method click. ~7 min.</a:t>
+              <a:t>This is the "make it concrete" moment — walk the data flow on the board. Ask: "what does the app trust here?" (it trusts the filename, unsanitized, on save). Verified live: /upload writes outside uploads/ with no auth; /files/&lt;name&gt; refuses every traversal encoding tried. Get the direction right — it's a WRITE bug, not a read bug — the rest of today's STRIDE pass depends on this. ~7 min.</a:t>
             </a:r>
             <a:endParaRPr lang="en-US" dirty="0"/>
           </a:p>
@@ -1926,7 +2015,7 @@
           <a:p>
             <a:r>
               <a:rPr lang="en-US" dirty="0"/>
-              <a:t>Pay-off slide: the full STRIDE pass on one element. Let the class call out threats before revealing each line. This models exactly what they'll do in the lab. End with: "6 threats from ONE endpoint — now imagine the whole app." ~6 min.</a:t>
+              <a:t>Pay-off slide: the full STRIDE pass on one element. Let the class call out threats before revealing each line. Verified by running the real sample-app: the traversal bug is a WRITE primitive (Tampering), and the naive "I = read outside the folder" claim does NOT reproduce against /files/&lt;name&gt; — Werkzeug's safe_join blocks it. Don't let this STRIDE pass repeat that error. End with: "5-6 threats from ONE endpoint — now imagine the whole app." ~6 min.</a:t>
             </a:r>
             <a:endParaRPr lang="en-US" dirty="0"/>
           </a:p>
@@ -2574,11 +2663,11 @@
         <p:spPr>
           <a:xfrm>
             <a:off x="457200" y="1325880"/>
-            <a:ext cx="8229600" cy="1517904"/>
+            <a:ext cx="8229600" cy="1719072"/>
           </a:xfrm>
           <a:prstGeom prst="roundRect">
             <a:avLst>
-              <a:gd name="adj" fmla="val 4819"/>
+              <a:gd name="adj" fmla="val 4255"/>
             </a:avLst>
           </a:prstGeom>
           <a:solidFill>
@@ -2603,7 +2692,7 @@
         <p:spPr>
           <a:xfrm>
             <a:off x="731520" y="1435608"/>
-            <a:ext cx="7680960" cy="1298448"/>
+            <a:ext cx="7680960" cy="1499616"/>
           </a:xfrm>
           <a:prstGeom prst="rect">
             <a:avLst/>
@@ -2612,7 +2701,9 @@
           <a:ln/>
         </p:spPr>
         <p:txBody>
-          <a:bodyPr wrap="square" lIns="0" tIns="0" rIns="0" bIns="0" rtlCol="0" anchor="t"/>
+          <a:bodyPr wrap="square" lIns="0" tIns="0" rIns="0" bIns="0" rtlCol="0" anchor="t">
+            <a:normAutofit/>
+          </a:bodyPr>
           <a:lstStyle/>
           <a:p>
             <a:pPr marL="342900" indent="-342900">
@@ -2673,7 +2764,7 @@
                 <a:ea typeface="Calibri" pitchFamily="34" charset="-122"/>
                 <a:cs typeface="Calibri" pitchFamily="34" charset="-120"/>
               </a:rPr>
-              <a:t>MITRE CWE — catalogue of weaknesses</a:t>
+              <a:t>MITRE CWE — catalogue of weaknesses (this week's finding maps to CWE-501, Trust Boundary Violation)</a:t>
             </a:r>
             <a:endParaRPr lang="en-US" sz="1400" dirty="0"/>
           </a:p>
@@ -2894,11 +2985,11 @@
         <p:spPr>
           <a:xfrm>
             <a:off x="457200" y="1325880"/>
-            <a:ext cx="8229600" cy="1517904"/>
+            <a:ext cx="8229600" cy="2029968"/>
           </a:xfrm>
           <a:prstGeom prst="roundRect">
             <a:avLst>
-              <a:gd name="adj" fmla="val 4819"/>
+              <a:gd name="adj" fmla="val 3604"/>
             </a:avLst>
           </a:prstGeom>
           <a:solidFill>
@@ -2923,7 +3014,7 @@
         <p:spPr>
           <a:xfrm>
             <a:off x="731520" y="1435608"/>
-            <a:ext cx="7680960" cy="1298448"/>
+            <a:ext cx="7680960" cy="1810512"/>
           </a:xfrm>
           <a:prstGeom prst="rect">
             <a:avLst/>
@@ -2932,7 +3023,9 @@
           <a:ln/>
         </p:spPr>
         <p:txBody>
-          <a:bodyPr wrap="square" lIns="0" tIns="0" rIns="0" bIns="0" rtlCol="0" anchor="t"/>
+          <a:bodyPr wrap="square" lIns="0" tIns="0" rIns="0" bIns="0" rtlCol="0" anchor="t">
+            <a:normAutofit/>
+          </a:bodyPr>
           <a:lstStyle/>
           <a:p>
             <a:pPr marL="342900" indent="-342900">
@@ -3015,6 +3108,27 @@
                 <a:cs typeface="Calibri" pitchFamily="34" charset="-120"/>
               </a:rPr>
               <a:t>Some bugs are design flaws, not coding slips → A06: Insecure Design</a:t>
+            </a:r>
+            <a:endParaRPr lang="en-US" sz="1400" dirty="0"/>
+          </a:p>
+          <a:p>
+            <a:pPr marL="342900" indent="-342900">
+              <a:spcAft>
+                <a:spcPts val="600"/>
+              </a:spcAft>
+              <a:buSzPct val="100000"/>
+              <a:buChar char="•"/>
+            </a:pPr>
+            <a:r>
+              <a:rPr lang="en-US" sz="1400" dirty="0">
+                <a:solidFill>
+                  <a:srgbClr val="1F2937"/>
+                </a:solidFill>
+                <a:latin typeface="Calibri" pitchFamily="34" charset="0"/>
+                <a:ea typeface="Calibri" pitchFamily="34" charset="-122"/>
+                <a:cs typeface="Calibri" pitchFamily="34" charset="-120"/>
+              </a:rPr>
+              <a:t>Today's lab makes you do this: after you fix /upload, you'll argue whether your fix closes the class of bug or just this one instance</a:t>
             </a:r>
             <a:endParaRPr lang="en-US" sz="1400" dirty="0"/>
           </a:p>
@@ -3252,7 +3366,9 @@
           <a:ln/>
         </p:spPr>
         <p:txBody>
-          <a:bodyPr wrap="square" lIns="0" tIns="0" rIns="0" bIns="0" rtlCol="0" anchor="t"/>
+          <a:bodyPr wrap="square" lIns="0" tIns="0" rIns="0" bIns="0" rtlCol="0" anchor="t">
+            <a:normAutofit/>
+          </a:bodyPr>
           <a:lstStyle/>
           <a:p>
             <a:pPr marL="342900" indent="-342900">
@@ -3593,7 +3709,7 @@
         <p:spPr>
           <a:xfrm>
             <a:off x="1051560" y="1325880"/>
-            <a:ext cx="7589520" cy="384048"/>
+            <a:ext cx="7589520" cy="402336"/>
           </a:xfrm>
           <a:prstGeom prst="rect">
             <a:avLst/>
@@ -3602,7 +3718,9 @@
           <a:ln/>
         </p:spPr>
         <p:txBody>
-          <a:bodyPr wrap="square" lIns="0" tIns="0" rIns="0" bIns="0" rtlCol="0" anchor="ctr"/>
+          <a:bodyPr wrap="square" lIns="0" tIns="0" rIns="0" bIns="0" rtlCol="0" anchor="ctr">
+            <a:normAutofit/>
+          </a:bodyPr>
           <a:lstStyle/>
           <a:p>
             <a:pPr indent="0" marL="0">
@@ -3631,7 +3749,7 @@
         </p:nvSpPr>
         <p:spPr>
           <a:xfrm>
-            <a:off x="502920" y="1783080"/>
+            <a:off x="502920" y="1801368"/>
             <a:ext cx="384048" cy="384048"/>
           </a:xfrm>
           <a:prstGeom prst="ellipse">
@@ -3651,7 +3769,7 @@
         </p:nvSpPr>
         <p:spPr>
           <a:xfrm>
-            <a:off x="502920" y="1783080"/>
+            <a:off x="502920" y="1801368"/>
             <a:ext cx="384048" cy="384048"/>
           </a:xfrm>
           <a:prstGeom prst="rect">
@@ -3690,8 +3808,8 @@
         </p:nvSpPr>
         <p:spPr>
           <a:xfrm>
-            <a:off x="1051560" y="1783080"/>
-            <a:ext cx="7589520" cy="384048"/>
+            <a:off x="1051560" y="1801368"/>
+            <a:ext cx="7589520" cy="402336"/>
           </a:xfrm>
           <a:prstGeom prst="rect">
             <a:avLst/>
@@ -3700,7 +3818,9 @@
           <a:ln/>
         </p:spPr>
         <p:txBody>
-          <a:bodyPr wrap="square" lIns="0" tIns="0" rIns="0" bIns="0" rtlCol="0" anchor="ctr"/>
+          <a:bodyPr wrap="square" lIns="0" tIns="0" rIns="0" bIns="0" rtlCol="0" anchor="ctr">
+            <a:normAutofit/>
+          </a:bodyPr>
           <a:lstStyle/>
           <a:p>
             <a:pPr indent="0" marL="0">
@@ -3729,7 +3849,7 @@
         </p:nvSpPr>
         <p:spPr>
           <a:xfrm>
-            <a:off x="502920" y="2240280"/>
+            <a:off x="502920" y="2276856"/>
             <a:ext cx="384048" cy="384048"/>
           </a:xfrm>
           <a:prstGeom prst="ellipse">
@@ -3749,7 +3869,7 @@
         </p:nvSpPr>
         <p:spPr>
           <a:xfrm>
-            <a:off x="502920" y="2240280"/>
+            <a:off x="502920" y="2276856"/>
             <a:ext cx="384048" cy="384048"/>
           </a:xfrm>
           <a:prstGeom prst="rect">
@@ -3788,8 +3908,8 @@
         </p:nvSpPr>
         <p:spPr>
           <a:xfrm>
-            <a:off x="1051560" y="2240280"/>
-            <a:ext cx="7589520" cy="384048"/>
+            <a:off x="1051560" y="2276856"/>
+            <a:ext cx="7589520" cy="402336"/>
           </a:xfrm>
           <a:prstGeom prst="rect">
             <a:avLst/>
@@ -3798,7 +3918,9 @@
           <a:ln/>
         </p:spPr>
         <p:txBody>
-          <a:bodyPr wrap="square" lIns="0" tIns="0" rIns="0" bIns="0" rtlCol="0" anchor="ctr"/>
+          <a:bodyPr wrap="square" lIns="0" tIns="0" rIns="0" bIns="0" rtlCol="0" anchor="ctr">
+            <a:normAutofit/>
+          </a:bodyPr>
           <a:lstStyle/>
           <a:p>
             <a:pPr indent="0" marL="0">
@@ -3827,7 +3949,7 @@
         </p:nvSpPr>
         <p:spPr>
           <a:xfrm>
-            <a:off x="502920" y="2697480"/>
+            <a:off x="502920" y="2752344"/>
             <a:ext cx="384048" cy="384048"/>
           </a:xfrm>
           <a:prstGeom prst="ellipse">
@@ -3847,7 +3969,7 @@
         </p:nvSpPr>
         <p:spPr>
           <a:xfrm>
-            <a:off x="502920" y="2697480"/>
+            <a:off x="502920" y="2752344"/>
             <a:ext cx="384048" cy="384048"/>
           </a:xfrm>
           <a:prstGeom prst="rect">
@@ -3886,8 +4008,8 @@
         </p:nvSpPr>
         <p:spPr>
           <a:xfrm>
-            <a:off x="1051560" y="2697480"/>
-            <a:ext cx="7589520" cy="384048"/>
+            <a:off x="1051560" y="2752344"/>
+            <a:ext cx="7589520" cy="402336"/>
           </a:xfrm>
           <a:prstGeom prst="rect">
             <a:avLst/>
@@ -3896,7 +4018,9 @@
           <a:ln/>
         </p:spPr>
         <p:txBody>
-          <a:bodyPr wrap="square" lIns="0" tIns="0" rIns="0" bIns="0" rtlCol="0" anchor="ctr"/>
+          <a:bodyPr wrap="square" lIns="0" tIns="0" rIns="0" bIns="0" rtlCol="0" anchor="ctr">
+            <a:normAutofit/>
+          </a:bodyPr>
           <a:lstStyle/>
           <a:p>
             <a:pPr indent="0" marL="0">
@@ -3925,7 +4049,7 @@
         </p:nvSpPr>
         <p:spPr>
           <a:xfrm>
-            <a:off x="502920" y="3154680"/>
+            <a:off x="502920" y="3227832"/>
             <a:ext cx="384048" cy="384048"/>
           </a:xfrm>
           <a:prstGeom prst="ellipse">
@@ -3945,7 +4069,7 @@
         </p:nvSpPr>
         <p:spPr>
           <a:xfrm>
-            <a:off x="502920" y="3154680"/>
+            <a:off x="502920" y="3227832"/>
             <a:ext cx="384048" cy="384048"/>
           </a:xfrm>
           <a:prstGeom prst="rect">
@@ -3984,8 +4108,8 @@
         </p:nvSpPr>
         <p:spPr>
           <a:xfrm>
-            <a:off x="1051560" y="3154680"/>
-            <a:ext cx="7589520" cy="384048"/>
+            <a:off x="1051560" y="3227832"/>
+            <a:ext cx="7589520" cy="402336"/>
           </a:xfrm>
           <a:prstGeom prst="rect">
             <a:avLst/>
@@ -3994,7 +4118,9 @@
           <a:ln/>
         </p:spPr>
         <p:txBody>
-          <a:bodyPr wrap="square" lIns="0" tIns="0" rIns="0" bIns="0" rtlCol="0" anchor="ctr"/>
+          <a:bodyPr wrap="square" lIns="0" tIns="0" rIns="0" bIns="0" rtlCol="0" anchor="ctr">
+            <a:normAutofit/>
+          </a:bodyPr>
           <a:lstStyle/>
           <a:p>
             <a:pPr indent="0" marL="0">
@@ -4240,7 +4366,9 @@
           <a:ln/>
         </p:spPr>
         <p:txBody>
-          <a:bodyPr wrap="square" lIns="0" tIns="0" rIns="0" bIns="0" rtlCol="0" anchor="ctr"/>
+          <a:bodyPr wrap="square" lIns="0" tIns="0" rIns="0" bIns="0" rtlCol="0" anchor="ctr">
+            <a:normAutofit/>
+          </a:bodyPr>
           <a:lstStyle/>
           <a:p>
             <a:pPr indent="0" marL="0">
@@ -4329,7 +4457,7 @@
         <p:spPr>
           <a:xfrm>
             <a:off x="1051560" y="2313432"/>
-            <a:ext cx="7589520" cy="384048"/>
+            <a:ext cx="7589520" cy="402336"/>
           </a:xfrm>
           <a:prstGeom prst="rect">
             <a:avLst/>
@@ -4338,7 +4466,9 @@
           <a:ln/>
         </p:spPr>
         <p:txBody>
-          <a:bodyPr wrap="square" lIns="0" tIns="0" rIns="0" bIns="0" rtlCol="0" anchor="ctr"/>
+          <a:bodyPr wrap="square" lIns="0" tIns="0" rIns="0" bIns="0" rtlCol="0" anchor="ctr">
+            <a:normAutofit/>
+          </a:bodyPr>
           <a:lstStyle/>
           <a:p>
             <a:pPr indent="0" marL="0">
@@ -4353,7 +4483,7 @@
                 <a:ea typeface="Calibri" pitchFamily="34" charset="-122"/>
                 <a:cs typeface="Calibri" pitchFamily="34" charset="-120"/>
               </a:rPr>
-              <a:t>Run the provided app (docker compose up)</a:t>
+              <a:t>Run the app; draw a DFD; apply STRIDE to each element</a:t>
             </a:r>
             <a:endParaRPr lang="en-US" sz="1350" dirty="0"/>
           </a:p>
@@ -4367,7 +4497,7 @@
         </p:nvSpPr>
         <p:spPr>
           <a:xfrm>
-            <a:off x="502920" y="2770632"/>
+            <a:off x="502920" y="2788920"/>
             <a:ext cx="384048" cy="384048"/>
           </a:xfrm>
           <a:prstGeom prst="ellipse">
@@ -4387,7 +4517,7 @@
         </p:nvSpPr>
         <p:spPr>
           <a:xfrm>
-            <a:off x="502920" y="2770632"/>
+            <a:off x="502920" y="2788920"/>
             <a:ext cx="384048" cy="384048"/>
           </a:xfrm>
           <a:prstGeom prst="rect">
@@ -4426,8 +4556,8 @@
         </p:nvSpPr>
         <p:spPr>
           <a:xfrm>
-            <a:off x="1051560" y="2770632"/>
-            <a:ext cx="7589520" cy="384048"/>
+            <a:off x="1051560" y="2788920"/>
+            <a:ext cx="7589520" cy="402336"/>
           </a:xfrm>
           <a:prstGeom prst="rect">
             <a:avLst/>
@@ -4436,7 +4566,9 @@
           <a:ln/>
         </p:spPr>
         <p:txBody>
-          <a:bodyPr wrap="square" lIns="0" tIns="0" rIns="0" bIns="0" rtlCol="0" anchor="ctr"/>
+          <a:bodyPr wrap="square" lIns="0" tIns="0" rIns="0" bIns="0" rtlCol="0" anchor="ctr">
+            <a:normAutofit/>
+          </a:bodyPr>
           <a:lstStyle/>
           <a:p>
             <a:pPr indent="0" marL="0">
@@ -4451,7 +4583,7 @@
                 <a:ea typeface="Calibri" pitchFamily="34" charset="-122"/>
                 <a:cs typeface="Calibri" pitchFamily="34" charset="-120"/>
               </a:rPr>
-              <a:t>Draw a DFD: processes, stores, external entities, trust boundaries</a:t>
+              <a:t>Abuse cases: 2 personas × 2 abuse cases</a:t>
             </a:r>
             <a:endParaRPr lang="en-US" sz="1350" dirty="0"/>
           </a:p>
@@ -4465,7 +4597,7 @@
         </p:nvSpPr>
         <p:spPr>
           <a:xfrm>
-            <a:off x="502920" y="3227832"/>
+            <a:off x="502920" y="3264408"/>
             <a:ext cx="384048" cy="384048"/>
           </a:xfrm>
           <a:prstGeom prst="ellipse">
@@ -4485,7 +4617,7 @@
         </p:nvSpPr>
         <p:spPr>
           <a:xfrm>
-            <a:off x="502920" y="3227832"/>
+            <a:off x="502920" y="3264408"/>
             <a:ext cx="384048" cy="384048"/>
           </a:xfrm>
           <a:prstGeom prst="rect">
@@ -4524,8 +4656,8 @@
         </p:nvSpPr>
         <p:spPr>
           <a:xfrm>
-            <a:off x="1051560" y="3227832"/>
-            <a:ext cx="7589520" cy="384048"/>
+            <a:off x="1051560" y="3264408"/>
+            <a:ext cx="7589520" cy="402336"/>
           </a:xfrm>
           <a:prstGeom prst="rect">
             <a:avLst/>
@@ -4534,7 +4666,9 @@
           <a:ln/>
         </p:spPr>
         <p:txBody>
-          <a:bodyPr wrap="square" lIns="0" tIns="0" rIns="0" bIns="0" rtlCol="0" anchor="ctr"/>
+          <a:bodyPr wrap="square" lIns="0" tIns="0" rIns="0" bIns="0" rtlCol="0" anchor="ctr">
+            <a:normAutofit/>
+          </a:bodyPr>
           <a:lstStyle/>
           <a:p>
             <a:pPr indent="0" marL="0">
@@ -4549,7 +4683,7 @@
                 <a:ea typeface="Calibri" pitchFamily="34" charset="-122"/>
                 <a:cs typeface="Calibri" pitchFamily="34" charset="-120"/>
               </a:rPr>
-              <a:t>Apply STRIDE to each element</a:t>
+              <a:t>Deep-dive the /upload path-traversal finding</a:t>
             </a:r>
             <a:endParaRPr lang="en-US" sz="1350" dirty="0"/>
           </a:p>
@@ -4563,7 +4697,7 @@
         </p:nvSpPr>
         <p:spPr>
           <a:xfrm>
-            <a:off x="502920" y="3685032"/>
+            <a:off x="502920" y="3739896"/>
             <a:ext cx="384048" cy="384048"/>
           </a:xfrm>
           <a:prstGeom prst="ellipse">
@@ -4583,7 +4717,7 @@
         </p:nvSpPr>
         <p:spPr>
           <a:xfrm>
-            <a:off x="502920" y="3685032"/>
+            <a:off x="502920" y="3739896"/>
             <a:ext cx="384048" cy="384048"/>
           </a:xfrm>
           <a:prstGeom prst="rect">
@@ -4622,8 +4756,8 @@
         </p:nvSpPr>
         <p:spPr>
           <a:xfrm>
-            <a:off x="1051560" y="3685032"/>
-            <a:ext cx="7589520" cy="384048"/>
+            <a:off x="1051560" y="3739896"/>
+            <a:ext cx="7589520" cy="658368"/>
           </a:xfrm>
           <a:prstGeom prst="rect">
             <a:avLst/>
@@ -4632,7 +4766,9 @@
           <a:ln/>
         </p:spPr>
         <p:txBody>
-          <a:bodyPr wrap="square" lIns="0" tIns="0" rIns="0" bIns="0" rtlCol="0" anchor="ctr"/>
+          <a:bodyPr wrap="square" lIns="0" tIns="0" rIns="0" bIns="0" rtlCol="0" anchor="ctr">
+            <a:normAutofit/>
+          </a:bodyPr>
           <a:lstStyle/>
           <a:p>
             <a:pPr indent="0" marL="0">
@@ -4647,7 +4783,7 @@
                 <a:ea typeface="Calibri" pitchFamily="34" charset="-122"/>
                 <a:cs typeface="Calibri" pitchFamily="34" charset="-120"/>
               </a:rPr>
-              <a:t>Rank top 5 risks (likelihood × impact) + one mitigation each</a:t>
+              <a:t>Systems-level pass: assume one element is owned — what does it reach? Chain two low findings into one system-level claim</a:t>
             </a:r>
             <a:endParaRPr lang="en-US" sz="1350" dirty="0"/>
           </a:p>
@@ -4832,7 +4968,7 @@
                 <a:ea typeface="Arial" pitchFamily="34" charset="-122"/>
                 <a:cs typeface="Arial" pitchFamily="34" charset="-120"/>
               </a:rPr>
-              <a:t>Using AI in this course</a:t>
+              <a:t>Lab 1 — Threat-model a sample app (cont.)</a:t>
             </a:r>
             <a:endParaRPr lang="en-US" sz="2600" dirty="0"/>
           </a:p>
@@ -4846,25 +4982,16 @@
         </p:nvSpPr>
         <p:spPr>
           <a:xfrm>
-            <a:off x="457200" y="1325880"/>
-            <a:ext cx="8229600" cy="2450592"/>
-          </a:xfrm>
-          <a:prstGeom prst="roundRect">
-            <a:avLst>
-              <a:gd name="adj" fmla="val 2985"/>
-            </a:avLst>
+            <a:off x="502920" y="1325880"/>
+            <a:ext cx="384048" cy="384048"/>
+          </a:xfrm>
+          <a:prstGeom prst="ellipse">
+            <a:avLst/>
           </a:prstGeom>
           <a:solidFill>
-            <a:srgbClr val="F1F5F9"/>
+            <a:srgbClr val="E35205"/>
           </a:solidFill>
           <a:ln/>
-          <a:effectLst>
-            <a:outerShdw sx="100000" sy="100000" kx="0" ky="0" algn="bl" rotWithShape="0" blurRad="76200" dist="25400" dir="5400000">
-              <a:srgbClr val="000000">
-                <a:alpha val="12000"/>
-              </a:srgbClr>
-            </a:outerShdw>
-          </a:effectLst>
         </p:spPr>
       </p:sp>
       <p:sp>
@@ -4875,8 +5002,8 @@
         </p:nvSpPr>
         <p:spPr>
           <a:xfrm>
-            <a:off x="731520" y="1435608"/>
-            <a:ext cx="7680960" cy="2231136"/>
+            <a:off x="502920" y="1325880"/>
+            <a:ext cx="384048" cy="384048"/>
           </a:xfrm>
           <a:prstGeom prst="rect">
             <a:avLst/>
@@ -4885,18 +5012,55 @@
           <a:ln/>
         </p:spPr>
         <p:txBody>
-          <a:bodyPr wrap="square" lIns="0" tIns="0" rIns="0" bIns="0" rtlCol="0" anchor="t"/>
-          <a:lstStyle/>
-          <a:p>
-            <a:pPr marL="342900" indent="-342900">
-              <a:spcAft>
-                <a:spcPts val="600"/>
-              </a:spcAft>
-              <a:buSzPct val="100000"/>
-              <a:buChar char="•"/>
-            </a:pPr>
-            <a:r>
-              <a:rPr lang="en-US" sz="1400" dirty="0">
+          <a:bodyPr wrap="square" lIns="0" tIns="0" rIns="0" bIns="0" rtlCol="0" anchor="ctr"/>
+          <a:lstStyle/>
+          <a:p>
+            <a:pPr algn="ctr" indent="0" marL="0">
+              <a:buNone/>
+            </a:pPr>
+            <a:r>
+              <a:rPr lang="en-US" sz="1500" b="1" dirty="0">
+                <a:solidFill>
+                  <a:srgbClr val="0E1726"/>
+                </a:solidFill>
+                <a:latin typeface="Arial" pitchFamily="34" charset="0"/>
+                <a:ea typeface="Arial" pitchFamily="34" charset="-122"/>
+                <a:cs typeface="Arial" pitchFamily="34" charset="-120"/>
+              </a:rPr>
+              <a:t>5</a:t>
+            </a:r>
+            <a:endParaRPr lang="en-US" sz="1500" dirty="0"/>
+          </a:p>
+        </p:txBody>
+      </p:sp>
+      <p:sp>
+        <p:nvSpPr>
+          <p:cNvPr id="7" name="Text 4"/>
+          <p:cNvSpPr/>
+          <p:nvPr/>
+        </p:nvSpPr>
+        <p:spPr>
+          <a:xfrm>
+            <a:off x="1051560" y="1325880"/>
+            <a:ext cx="7589520" cy="402336"/>
+          </a:xfrm>
+          <a:prstGeom prst="rect">
+            <a:avLst/>
+          </a:prstGeom>
+          <a:noFill/>
+          <a:ln/>
+        </p:spPr>
+        <p:txBody>
+          <a:bodyPr wrap="square" lIns="0" tIns="0" rIns="0" bIns="0" rtlCol="0" anchor="ctr">
+            <a:normAutofit/>
+          </a:bodyPr>
+          <a:lstStyle/>
+          <a:p>
+            <a:pPr indent="0" marL="0">
+              <a:buNone/>
+            </a:pPr>
+            <a:r>
+              <a:rPr lang="en-US" sz="1350" dirty="0">
                 <a:solidFill>
                   <a:srgbClr val="1F2937"/>
                 </a:solidFill>
@@ -4904,20 +5068,99 @@
                 <a:ea typeface="Calibri" pitchFamily="34" charset="-122"/>
                 <a:cs typeface="Calibri" pitchFamily="34" charset="-120"/>
               </a:rPr>
-              <a:t>AI is allowed — and you must disclose how you used it</a:t>
-            </a:r>
-            <a:endParaRPr lang="en-US" sz="1400" dirty="0"/>
-          </a:p>
-          <a:p>
-            <a:pPr marL="342900" indent="-342900">
-              <a:spcAft>
-                <a:spcPts val="600"/>
-              </a:spcAft>
-              <a:buSzPct val="100000"/>
-              <a:buChar char="•"/>
-            </a:pPr>
-            <a:r>
-              <a:rPr lang="en-US" sz="1400" dirty="0">
+              <a:t>Turn threats into testable security requirements ("the system must … so that …")</a:t>
+            </a:r>
+            <a:endParaRPr lang="en-US" sz="1350" dirty="0"/>
+          </a:p>
+        </p:txBody>
+      </p:sp>
+      <p:sp>
+        <p:nvSpPr>
+          <p:cNvPr id="8" name="Shape 5"/>
+          <p:cNvSpPr/>
+          <p:nvPr/>
+        </p:nvSpPr>
+        <p:spPr>
+          <a:xfrm>
+            <a:off x="502920" y="1801368"/>
+            <a:ext cx="384048" cy="384048"/>
+          </a:xfrm>
+          <a:prstGeom prst="ellipse">
+            <a:avLst/>
+          </a:prstGeom>
+          <a:solidFill>
+            <a:srgbClr val="E35205"/>
+          </a:solidFill>
+          <a:ln/>
+        </p:spPr>
+      </p:sp>
+      <p:sp>
+        <p:nvSpPr>
+          <p:cNvPr id="9" name="Text 6"/>
+          <p:cNvSpPr/>
+          <p:nvPr/>
+        </p:nvSpPr>
+        <p:spPr>
+          <a:xfrm>
+            <a:off x="502920" y="1801368"/>
+            <a:ext cx="384048" cy="384048"/>
+          </a:xfrm>
+          <a:prstGeom prst="rect">
+            <a:avLst/>
+          </a:prstGeom>
+          <a:noFill/>
+          <a:ln/>
+        </p:spPr>
+        <p:txBody>
+          <a:bodyPr wrap="square" lIns="0" tIns="0" rIns="0" bIns="0" rtlCol="0" anchor="ctr"/>
+          <a:lstStyle/>
+          <a:p>
+            <a:pPr algn="ctr" indent="0" marL="0">
+              <a:buNone/>
+            </a:pPr>
+            <a:r>
+              <a:rPr lang="en-US" sz="1500" b="1" dirty="0">
+                <a:solidFill>
+                  <a:srgbClr val="0E1726"/>
+                </a:solidFill>
+                <a:latin typeface="Arial" pitchFamily="34" charset="0"/>
+                <a:ea typeface="Arial" pitchFamily="34" charset="-122"/>
+                <a:cs typeface="Arial" pitchFamily="34" charset="-120"/>
+              </a:rPr>
+              <a:t>6</a:t>
+            </a:r>
+            <a:endParaRPr lang="en-US" sz="1500" dirty="0"/>
+          </a:p>
+        </p:txBody>
+      </p:sp>
+      <p:sp>
+        <p:nvSpPr>
+          <p:cNvPr id="10" name="Text 7"/>
+          <p:cNvSpPr/>
+          <p:nvPr/>
+        </p:nvSpPr>
+        <p:spPr>
+          <a:xfrm>
+            <a:off x="1051560" y="1801368"/>
+            <a:ext cx="7589520" cy="402336"/>
+          </a:xfrm>
+          <a:prstGeom prst="rect">
+            <a:avLst/>
+          </a:prstGeom>
+          <a:noFill/>
+          <a:ln/>
+        </p:spPr>
+        <p:txBody>
+          <a:bodyPr wrap="square" lIns="0" tIns="0" rIns="0" bIns="0" rtlCol="0" anchor="ctr">
+            <a:normAutofit/>
+          </a:bodyPr>
+          <a:lstStyle/>
+          <a:p>
+            <a:pPr indent="0" marL="0">
+              <a:buNone/>
+            </a:pPr>
+            <a:r>
+              <a:rPr lang="en-US" sz="1350" dirty="0">
                 <a:solidFill>
                   <a:srgbClr val="1F2937"/>
                 </a:solidFill>
@@ -4925,20 +5168,99 @@
                 <a:ea typeface="Calibri" pitchFamily="34" charset="-122"/>
                 <a:cs typeface="Calibri" pitchFamily="34" charset="-120"/>
               </a:rPr>
-              <a:t>But AI hallucinates APIs/CVEs and writes insecure code</a:t>
-            </a:r>
-            <a:endParaRPr lang="en-US" sz="1400" dirty="0"/>
-          </a:p>
-          <a:p>
-            <a:pPr marL="342900" indent="-342900">
-              <a:spcAft>
-                <a:spcPts val="600"/>
-              </a:spcAft>
-              <a:buSzPct val="100000"/>
-              <a:buChar char="•"/>
-            </a:pPr>
-            <a:r>
-              <a:rPr lang="en-US" sz="1400" dirty="0">
+              <a:t>NoteVault (term project): DFD + top-3 threats — this kicks off your project</a:t>
+            </a:r>
+            <a:endParaRPr lang="en-US" sz="1350" dirty="0"/>
+          </a:p>
+        </p:txBody>
+      </p:sp>
+      <p:sp>
+        <p:nvSpPr>
+          <p:cNvPr id="11" name="Shape 8"/>
+          <p:cNvSpPr/>
+          <p:nvPr/>
+        </p:nvSpPr>
+        <p:spPr>
+          <a:xfrm>
+            <a:off x="502920" y="2276856"/>
+            <a:ext cx="384048" cy="384048"/>
+          </a:xfrm>
+          <a:prstGeom prst="ellipse">
+            <a:avLst/>
+          </a:prstGeom>
+          <a:solidFill>
+            <a:srgbClr val="E35205"/>
+          </a:solidFill>
+          <a:ln/>
+        </p:spPr>
+      </p:sp>
+      <p:sp>
+        <p:nvSpPr>
+          <p:cNvPr id="12" name="Text 9"/>
+          <p:cNvSpPr/>
+          <p:nvPr/>
+        </p:nvSpPr>
+        <p:spPr>
+          <a:xfrm>
+            <a:off x="502920" y="2276856"/>
+            <a:ext cx="384048" cy="384048"/>
+          </a:xfrm>
+          <a:prstGeom prst="rect">
+            <a:avLst/>
+          </a:prstGeom>
+          <a:noFill/>
+          <a:ln/>
+        </p:spPr>
+        <p:txBody>
+          <a:bodyPr wrap="square" lIns="0" tIns="0" rIns="0" bIns="0" rtlCol="0" anchor="ctr"/>
+          <a:lstStyle/>
+          <a:p>
+            <a:pPr algn="ctr" indent="0" marL="0">
+              <a:buNone/>
+            </a:pPr>
+            <a:r>
+              <a:rPr lang="en-US" sz="1500" b="1" dirty="0">
+                <a:solidFill>
+                  <a:srgbClr val="0E1726"/>
+                </a:solidFill>
+                <a:latin typeface="Arial" pitchFamily="34" charset="0"/>
+                <a:ea typeface="Arial" pitchFamily="34" charset="-122"/>
+                <a:cs typeface="Arial" pitchFamily="34" charset="-120"/>
+              </a:rPr>
+              <a:t>7</a:t>
+            </a:r>
+            <a:endParaRPr lang="en-US" sz="1500" dirty="0"/>
+          </a:p>
+        </p:txBody>
+      </p:sp>
+      <p:sp>
+        <p:nvSpPr>
+          <p:cNvPr id="13" name="Text 10"/>
+          <p:cNvSpPr/>
+          <p:nvPr/>
+        </p:nvSpPr>
+        <p:spPr>
+          <a:xfrm>
+            <a:off x="1051560" y="2276856"/>
+            <a:ext cx="7589520" cy="402336"/>
+          </a:xfrm>
+          <a:prstGeom prst="rect">
+            <a:avLst/>
+          </a:prstGeom>
+          <a:noFill/>
+          <a:ln/>
+        </p:spPr>
+        <p:txBody>
+          <a:bodyPr wrap="square" lIns="0" tIns="0" rIns="0" bIns="0" rtlCol="0" anchor="ctr">
+            <a:normAutofit/>
+          </a:bodyPr>
+          <a:lstStyle/>
+          <a:p>
+            <a:pPr indent="0" marL="0">
+              <a:buNone/>
+            </a:pPr>
+            <a:r>
+              <a:rPr lang="en-US" sz="1350" dirty="0">
                 <a:solidFill>
                   <a:srgbClr val="1F2937"/>
                 </a:solidFill>
@@ -4946,20 +5268,99 @@
                 <a:ea typeface="Calibri" pitchFamily="34" charset="-122"/>
                 <a:cs typeface="Calibri" pitchFamily="34" charset="-120"/>
               </a:rPr>
-              <a:t>You're graded on understanding, not the answer:</a:t>
-            </a:r>
-            <a:endParaRPr lang="en-US" sz="1400" dirty="0"/>
-          </a:p>
-          <a:p>
-            <a:pPr lvl="1" marL="685800" indent="-342900">
-              <a:spcAft>
-                <a:spcPts val="600"/>
-              </a:spcAft>
-              <a:buSzPct val="100000"/>
-              <a:buChar char="•"/>
-            </a:pPr>
-            <a:r>
-              <a:rPr lang="en-US" sz="1400" dirty="0">
+              <a:t>Rank top 5 risks (likelihood × impact)</a:t>
+            </a:r>
+            <a:endParaRPr lang="en-US" sz="1350" dirty="0"/>
+          </a:p>
+        </p:txBody>
+      </p:sp>
+      <p:sp>
+        <p:nvSpPr>
+          <p:cNvPr id="14" name="Shape 11"/>
+          <p:cNvSpPr/>
+          <p:nvPr/>
+        </p:nvSpPr>
+        <p:spPr>
+          <a:xfrm>
+            <a:off x="502920" y="2752344"/>
+            <a:ext cx="384048" cy="384048"/>
+          </a:xfrm>
+          <a:prstGeom prst="ellipse">
+            <a:avLst/>
+          </a:prstGeom>
+          <a:solidFill>
+            <a:srgbClr val="E35205"/>
+          </a:solidFill>
+          <a:ln/>
+        </p:spPr>
+      </p:sp>
+      <p:sp>
+        <p:nvSpPr>
+          <p:cNvPr id="15" name="Text 12"/>
+          <p:cNvSpPr/>
+          <p:nvPr/>
+        </p:nvSpPr>
+        <p:spPr>
+          <a:xfrm>
+            <a:off x="502920" y="2752344"/>
+            <a:ext cx="384048" cy="384048"/>
+          </a:xfrm>
+          <a:prstGeom prst="rect">
+            <a:avLst/>
+          </a:prstGeom>
+          <a:noFill/>
+          <a:ln/>
+        </p:spPr>
+        <p:txBody>
+          <a:bodyPr wrap="square" lIns="0" tIns="0" rIns="0" bIns="0" rtlCol="0" anchor="ctr"/>
+          <a:lstStyle/>
+          <a:p>
+            <a:pPr algn="ctr" indent="0" marL="0">
+              <a:buNone/>
+            </a:pPr>
+            <a:r>
+              <a:rPr lang="en-US" sz="1500" b="1" dirty="0">
+                <a:solidFill>
+                  <a:srgbClr val="0E1726"/>
+                </a:solidFill>
+                <a:latin typeface="Arial" pitchFamily="34" charset="0"/>
+                <a:ea typeface="Arial" pitchFamily="34" charset="-122"/>
+                <a:cs typeface="Arial" pitchFamily="34" charset="-120"/>
+              </a:rPr>
+              <a:t>8</a:t>
+            </a:r>
+            <a:endParaRPr lang="en-US" sz="1500" dirty="0"/>
+          </a:p>
+        </p:txBody>
+      </p:sp>
+      <p:sp>
+        <p:nvSpPr>
+          <p:cNvPr id="16" name="Text 13"/>
+          <p:cNvSpPr/>
+          <p:nvPr/>
+        </p:nvSpPr>
+        <p:spPr>
+          <a:xfrm>
+            <a:off x="1051560" y="2752344"/>
+            <a:ext cx="7589520" cy="658368"/>
+          </a:xfrm>
+          <a:prstGeom prst="rect">
+            <a:avLst/>
+          </a:prstGeom>
+          <a:noFill/>
+          <a:ln/>
+        </p:spPr>
+        <p:txBody>
+          <a:bodyPr wrap="square" lIns="0" tIns="0" rIns="0" bIns="0" rtlCol="0" anchor="ctr">
+            <a:normAutofit/>
+          </a:bodyPr>
+          <a:lstStyle/>
+          <a:p>
+            <a:pPr indent="0" marL="0">
+              <a:buNone/>
+            </a:pPr>
+            <a:r>
+              <a:rPr lang="en-US" sz="1350" dirty="0">
                 <a:solidFill>
                   <a:srgbClr val="1F2937"/>
                 </a:solidFill>
@@ -4967,108 +5368,45 @@
                 <a:ea typeface="Calibri" pitchFamily="34" charset="-122"/>
                 <a:cs typeface="Calibri" pitchFamily="34" charset="-120"/>
               </a:rPr>
-              <a:t>random live re-demos — explain it or score zero</a:t>
-            </a:r>
-            <a:endParaRPr lang="en-US" sz="1400" dirty="0"/>
-          </a:p>
-          <a:p>
-            <a:pPr lvl="1" marL="685800" indent="-342900">
-              <a:spcAft>
-                <a:spcPts val="600"/>
-              </a:spcAft>
-              <a:buSzPct val="100000"/>
-              <a:buChar char="•"/>
-            </a:pPr>
-            <a:r>
-              <a:rPr lang="en-US" sz="1400" dirty="0">
-                <a:solidFill>
-                  <a:srgbClr val="1F2937"/>
+              <a:t>Defend: implement one real mitigation — diff, before/after evidence, and argue whether your fix closes the bug class or just this instance</a:t>
+            </a:r>
+            <a:endParaRPr lang="en-US" sz="1350" dirty="0"/>
+          </a:p>
+        </p:txBody>
+      </p:sp>
+      <p:sp>
+        <p:nvSpPr>
+          <p:cNvPr id="17" name="Text 14"/>
+          <p:cNvSpPr/>
+          <p:nvPr/>
+        </p:nvSpPr>
+        <p:spPr>
+          <a:xfrm>
+            <a:off x="457200" y="4800600"/>
+            <a:ext cx="6949440" cy="274320"/>
+          </a:xfrm>
+          <a:prstGeom prst="rect">
+            <a:avLst/>
+          </a:prstGeom>
+          <a:noFill/>
+          <a:ln/>
+        </p:spPr>
+        <p:txBody>
+          <a:bodyPr wrap="square" lIns="0" tIns="0" rIns="0" bIns="0" rtlCol="0" anchor="ctr"/>
+          <a:lstStyle/>
+          <a:p>
+            <a:pPr indent="0" marL="0">
+              <a:buNone/>
+            </a:pPr>
+            <a:r>
+              <a:rPr lang="en-US" sz="900" dirty="0">
+                <a:solidFill>
+                  <a:srgbClr val="64748B"/>
                 </a:solidFill>
                 <a:latin typeface="Calibri" pitchFamily="34" charset="0"/>
                 <a:ea typeface="Calibri" pitchFamily="34" charset="-122"/>
                 <a:cs typeface="Calibri" pitchFamily="34" charset="-120"/>
               </a:rPr>
-              <a:t>your flags are unique to you — copying is traceable</a:t>
-            </a:r>
-            <a:endParaRPr lang="en-US" sz="1400" dirty="0"/>
-          </a:p>
-          <a:p>
-            <a:pPr lvl="1" marL="685800" indent="-342900">
-              <a:spcAft>
-                <a:spcPts val="600"/>
-              </a:spcAft>
-              <a:buSzPct val="100000"/>
-              <a:buChar char="•"/>
-            </a:pPr>
-            <a:r>
-              <a:rPr lang="en-US" sz="1400" dirty="0">
-                <a:solidFill>
-                  <a:srgbClr val="1F2937"/>
-                </a:solidFill>
-                <a:latin typeface="Calibri" pitchFamily="34" charset="0"/>
-                <a:ea typeface="Calibri" pitchFamily="34" charset="-122"/>
-                <a:cs typeface="Calibri" pitchFamily="34" charset="-120"/>
-              </a:rPr>
-              <a:t>every lab has an "Audit the AI" task: find what its answer gets wrong</a:t>
-            </a:r>
-            <a:endParaRPr lang="en-US" sz="1400" dirty="0"/>
-          </a:p>
-          <a:p>
-            <a:pPr marL="342900" indent="-342900">
-              <a:spcAft>
-                <a:spcPts val="600"/>
-              </a:spcAft>
-              <a:buSzPct val="100000"/>
-              <a:buChar char="•"/>
-            </a:pPr>
-            <a:r>
-              <a:rPr lang="en-US" sz="1400" dirty="0">
-                <a:solidFill>
-                  <a:srgbClr val="1F2937"/>
-                </a:solidFill>
-                <a:latin typeface="Calibri" pitchFamily="34" charset="0"/>
-                <a:ea typeface="Calibri" pitchFamily="34" charset="-122"/>
-                <a:cs typeface="Calibri" pitchFamily="34" charset="-120"/>
-              </a:rPr>
-              <a:t>Use AI to learn faster — never to skip the thinking</a:t>
-            </a:r>
-            <a:endParaRPr lang="en-US" sz="1400" dirty="0"/>
-          </a:p>
-        </p:txBody>
-      </p:sp>
-      <p:sp>
-        <p:nvSpPr>
-          <p:cNvPr id="7" name="Text 4"/>
-          <p:cNvSpPr/>
-          <p:nvPr/>
-        </p:nvSpPr>
-        <p:spPr>
-          <a:xfrm>
-            <a:off x="457200" y="4800600"/>
-            <a:ext cx="6949440" cy="274320"/>
-          </a:xfrm>
-          <a:prstGeom prst="rect">
-            <a:avLst/>
-          </a:prstGeom>
-          <a:noFill/>
-          <a:ln/>
-        </p:spPr>
-        <p:txBody>
-          <a:bodyPr wrap="square" lIns="0" tIns="0" rIns="0" bIns="0" rtlCol="0" anchor="ctr"/>
-          <a:lstStyle/>
-          <a:p>
-            <a:pPr indent="0" marL="0">
-              <a:buNone/>
-            </a:pPr>
-            <a:r>
-              <a:rPr lang="en-US" sz="900" dirty="0">
-                <a:solidFill>
-                  <a:srgbClr val="64748B"/>
-                </a:solidFill>
-                <a:latin typeface="Calibri" pitchFamily="34" charset="0"/>
-                <a:ea typeface="Calibri" pitchFamily="34" charset="-122"/>
-                <a:cs typeface="Calibri" pitchFamily="34" charset="-120"/>
-              </a:rPr>
               <a:t>Software Security · Week 1</a:t>
             </a:r>
             <a:endParaRPr lang="en-US" sz="900" dirty="0"/>
@@ -5077,7 +5415,7 @@
       </p:sp>
       <p:pic>
         <p:nvPicPr>
-          <p:cNvPr id="8" name="Image 1" descr="/Users/pop7/Library/CloudStorage/OneDrive-MonsterConnectCo.,Ltd/Lecture/KOSEN69 - software-security/slides/pptx/assets/logo-small.png">    </p:cNvPr>
+          <p:cNvPr id="18" name="Image 1" descr="/Users/pop7/Library/CloudStorage/OneDrive-MonsterConnectCo.,Ltd/Lecture/KOSEN69 - software-security/slides/pptx/assets/logo-small.png">    </p:cNvPr>
           <p:cNvPicPr>
             <a:picLocks noChangeAspect="1"/>
           </p:cNvPicPr>
@@ -5215,7 +5553,7 @@
                 <a:ea typeface="Arial" pitchFamily="34" charset="-122"/>
                 <a:cs typeface="Arial" pitchFamily="34" charset="-120"/>
               </a:rPr>
-              <a:t>Key takeaways</a:t>
+              <a:t>Using AI in this course</a:t>
             </a:r>
             <a:endParaRPr lang="en-US" sz="2600" dirty="0"/>
           </a:p>
@@ -5230,11 +5568,11 @@
         <p:spPr>
           <a:xfrm>
             <a:off x="457200" y="1325880"/>
-            <a:ext cx="8229600" cy="1207008"/>
+            <a:ext cx="8229600" cy="2450592"/>
           </a:xfrm>
           <a:prstGeom prst="roundRect">
             <a:avLst>
-              <a:gd name="adj" fmla="val 6061"/>
+              <a:gd name="adj" fmla="val 2985"/>
             </a:avLst>
           </a:prstGeom>
           <a:solidFill>
@@ -5259,7 +5597,7 @@
         <p:spPr>
           <a:xfrm>
             <a:off x="731520" y="1435608"/>
-            <a:ext cx="7680960" cy="987552"/>
+            <a:ext cx="7680960" cy="2231136"/>
           </a:xfrm>
           <a:prstGeom prst="rect">
             <a:avLst/>
@@ -5268,7 +5606,9 @@
           <a:ln/>
         </p:spPr>
         <p:txBody>
-          <a:bodyPr wrap="square" lIns="0" tIns="0" rIns="0" bIns="0" rtlCol="0" anchor="t"/>
+          <a:bodyPr wrap="square" lIns="0" tIns="0" rIns="0" bIns="0" rtlCol="0" anchor="t">
+            <a:normAutofit/>
+          </a:bodyPr>
           <a:lstStyle/>
           <a:p>
             <a:pPr marL="342900" indent="-342900">
@@ -5287,7 +5627,7 @@
                 <a:ea typeface="Calibri" pitchFamily="34" charset="-122"/>
                 <a:cs typeface="Calibri" pitchFamily="34" charset="-120"/>
               </a:rPr>
-              <a:t>Design for security; don't bolt it on</a:t>
+              <a:t>AI is allowed — and you must disclose how you used it</a:t>
             </a:r>
             <a:endParaRPr lang="en-US" sz="1400" dirty="0"/>
           </a:p>
@@ -5308,7 +5648,7 @@
                 <a:ea typeface="Calibri" pitchFamily="34" charset="-122"/>
                 <a:cs typeface="Calibri" pitchFamily="34" charset="-120"/>
               </a:rPr>
-              <a:t>Attackers need one gap — model the whole surface</a:t>
+              <a:t>But AI hallucinates APIs/CVEs and writes insecure code</a:t>
             </a:r>
             <a:endParaRPr lang="en-US" sz="1400" dirty="0"/>
           </a:p>
@@ -5329,7 +5669,91 @@
                 <a:ea typeface="Calibri" pitchFamily="34" charset="-122"/>
                 <a:cs typeface="Calibri" pitchFamily="34" charset="-120"/>
               </a:rPr>
-              <a:t>STRIDE + DFD = a repeatable way to find design flaws</a:t>
+              <a:t>You're graded on understanding, not the answer:</a:t>
+            </a:r>
+            <a:endParaRPr lang="en-US" sz="1400" dirty="0"/>
+          </a:p>
+          <a:p>
+            <a:pPr lvl="1" marL="685800" indent="-342900">
+              <a:spcAft>
+                <a:spcPts val="600"/>
+              </a:spcAft>
+              <a:buSzPct val="100000"/>
+              <a:buChar char="•"/>
+            </a:pPr>
+            <a:r>
+              <a:rPr lang="en-US" sz="1400" dirty="0">
+                <a:solidFill>
+                  <a:srgbClr val="1F2937"/>
+                </a:solidFill>
+                <a:latin typeface="Calibri" pitchFamily="34" charset="0"/>
+                <a:ea typeface="Calibri" pitchFamily="34" charset="-122"/>
+                <a:cs typeface="Calibri" pitchFamily="34" charset="-120"/>
+              </a:rPr>
+              <a:t>random live re-demos — explain it or score zero</a:t>
+            </a:r>
+            <a:endParaRPr lang="en-US" sz="1400" dirty="0"/>
+          </a:p>
+          <a:p>
+            <a:pPr lvl="1" marL="685800" indent="-342900">
+              <a:spcAft>
+                <a:spcPts val="600"/>
+              </a:spcAft>
+              <a:buSzPct val="100000"/>
+              <a:buChar char="•"/>
+            </a:pPr>
+            <a:r>
+              <a:rPr lang="en-US" sz="1400" dirty="0">
+                <a:solidFill>
+                  <a:srgbClr val="1F2937"/>
+                </a:solidFill>
+                <a:latin typeface="Calibri" pitchFamily="34" charset="0"/>
+                <a:ea typeface="Calibri" pitchFamily="34" charset="-122"/>
+                <a:cs typeface="Calibri" pitchFamily="34" charset="-120"/>
+              </a:rPr>
+              <a:t>your flags are unique to you — copying is traceable</a:t>
+            </a:r>
+            <a:endParaRPr lang="en-US" sz="1400" dirty="0"/>
+          </a:p>
+          <a:p>
+            <a:pPr lvl="1" marL="685800" indent="-342900">
+              <a:spcAft>
+                <a:spcPts val="600"/>
+              </a:spcAft>
+              <a:buSzPct val="100000"/>
+              <a:buChar char="•"/>
+            </a:pPr>
+            <a:r>
+              <a:rPr lang="en-US" sz="1400" dirty="0">
+                <a:solidFill>
+                  <a:srgbClr val="1F2937"/>
+                </a:solidFill>
+                <a:latin typeface="Calibri" pitchFamily="34" charset="0"/>
+                <a:ea typeface="Calibri" pitchFamily="34" charset="-122"/>
+                <a:cs typeface="Calibri" pitchFamily="34" charset="-120"/>
+              </a:rPr>
+              <a:t>every lab has an "Audit the AI" task: find what its answer gets wrong</a:t>
+            </a:r>
+            <a:endParaRPr lang="en-US" sz="1400" dirty="0"/>
+          </a:p>
+          <a:p>
+            <a:pPr marL="342900" indent="-342900">
+              <a:spcAft>
+                <a:spcPts val="600"/>
+              </a:spcAft>
+              <a:buSzPct val="100000"/>
+              <a:buChar char="•"/>
+            </a:pPr>
+            <a:r>
+              <a:rPr lang="en-US" sz="1400" dirty="0">
+                <a:solidFill>
+                  <a:srgbClr val="1F2937"/>
+                </a:solidFill>
+                <a:latin typeface="Calibri" pitchFamily="34" charset="0"/>
+                <a:ea typeface="Calibri" pitchFamily="34" charset="-122"/>
+                <a:cs typeface="Calibri" pitchFamily="34" charset="-120"/>
+              </a:rPr>
+              <a:t>Use AI to learn faster — never to skip the thinking</a:t>
             </a:r>
             <a:endParaRPr lang="en-US" sz="1400" dirty="0"/>
           </a:p>
@@ -5432,6 +5856,307 @@
       </p:grpSpPr>
       <p:sp>
         <p:nvSpPr>
+          <p:cNvPr id="2" name="Shape 0"/>
+          <p:cNvSpPr/>
+          <p:nvPr/>
+        </p:nvSpPr>
+        <p:spPr>
+          <a:xfrm>
+            <a:off x="457200" y="384048"/>
+            <a:ext cx="530352" cy="530352"/>
+          </a:xfrm>
+          <a:prstGeom prst="ellipse">
+            <a:avLst/>
+          </a:prstGeom>
+          <a:solidFill>
+            <a:srgbClr val="E35205"/>
+          </a:solidFill>
+          <a:ln/>
+          <a:effectLst>
+            <a:outerShdw sx="100000" sy="100000" kx="0" ky="0" algn="bl" rotWithShape="0" blurRad="76200" dist="25400" dir="5400000">
+              <a:srgbClr val="000000">
+                <a:alpha val="12000"/>
+              </a:srgbClr>
+            </a:outerShdw>
+          </a:effectLst>
+        </p:spPr>
+      </p:sp>
+      <p:pic>
+        <p:nvPicPr>
+          <p:cNvPr id="3" name="Image 0" descr="preencoded.png">    </p:cNvPr>
+          <p:cNvPicPr>
+            <a:picLocks noChangeAspect="1"/>
+          </p:cNvPicPr>
+          <p:nvPr/>
+        </p:nvPicPr>
+        <p:blipFill>
+          <a:blip r:embed="rId1"/>
+          <a:stretch>
+            <a:fillRect/>
+          </a:stretch>
+        </p:blipFill>
+        <p:spPr>
+          <a:xfrm>
+            <a:off x="594360" y="521208"/>
+            <a:ext cx="256032" cy="256032"/>
+          </a:xfrm>
+          <a:prstGeom prst="rect">
+            <a:avLst/>
+          </a:prstGeom>
+        </p:spPr>
+      </p:pic>
+      <p:sp>
+        <p:nvSpPr>
+          <p:cNvPr id="4" name="Text 1"/>
+          <p:cNvSpPr/>
+          <p:nvPr/>
+        </p:nvSpPr>
+        <p:spPr>
+          <a:xfrm>
+            <a:off x="1143000" y="329184"/>
+            <a:ext cx="7498080" cy="603504"/>
+          </a:xfrm>
+          <a:prstGeom prst="rect">
+            <a:avLst/>
+          </a:prstGeom>
+          <a:noFill/>
+          <a:ln/>
+        </p:spPr>
+        <p:txBody>
+          <a:bodyPr wrap="square" lIns="0" tIns="0" rIns="0" bIns="0" rtlCol="0" anchor="ctr"/>
+          <a:lstStyle/>
+          <a:p>
+            <a:pPr indent="0" marL="0">
+              <a:buNone/>
+            </a:pPr>
+            <a:r>
+              <a:rPr lang="en-US" sz="2600" b="1" dirty="0">
+                <a:solidFill>
+                  <a:srgbClr val="1F2937"/>
+                </a:solidFill>
+                <a:latin typeface="Arial" pitchFamily="34" charset="0"/>
+                <a:ea typeface="Arial" pitchFamily="34" charset="-122"/>
+                <a:cs typeface="Arial" pitchFamily="34" charset="-120"/>
+              </a:rPr>
+              <a:t>Key takeaways</a:t>
+            </a:r>
+            <a:endParaRPr lang="en-US" sz="2600" dirty="0"/>
+          </a:p>
+        </p:txBody>
+      </p:sp>
+      <p:sp>
+        <p:nvSpPr>
+          <p:cNvPr id="5" name="Shape 2"/>
+          <p:cNvSpPr/>
+          <p:nvPr/>
+        </p:nvSpPr>
+        <p:spPr>
+          <a:xfrm>
+            <a:off x="457200" y="1325880"/>
+            <a:ext cx="8229600" cy="1207008"/>
+          </a:xfrm>
+          <a:prstGeom prst="roundRect">
+            <a:avLst>
+              <a:gd name="adj" fmla="val 6061"/>
+            </a:avLst>
+          </a:prstGeom>
+          <a:solidFill>
+            <a:srgbClr val="F1F5F9"/>
+          </a:solidFill>
+          <a:ln/>
+          <a:effectLst>
+            <a:outerShdw sx="100000" sy="100000" kx="0" ky="0" algn="bl" rotWithShape="0" blurRad="76200" dist="25400" dir="5400000">
+              <a:srgbClr val="000000">
+                <a:alpha val="12000"/>
+              </a:srgbClr>
+            </a:outerShdw>
+          </a:effectLst>
+        </p:spPr>
+      </p:sp>
+      <p:sp>
+        <p:nvSpPr>
+          <p:cNvPr id="6" name="Text 3"/>
+          <p:cNvSpPr/>
+          <p:nvPr/>
+        </p:nvSpPr>
+        <p:spPr>
+          <a:xfrm>
+            <a:off x="731520" y="1435608"/>
+            <a:ext cx="7680960" cy="987552"/>
+          </a:xfrm>
+          <a:prstGeom prst="rect">
+            <a:avLst/>
+          </a:prstGeom>
+          <a:noFill/>
+          <a:ln/>
+        </p:spPr>
+        <p:txBody>
+          <a:bodyPr wrap="square" lIns="0" tIns="0" rIns="0" bIns="0" rtlCol="0" anchor="t">
+            <a:normAutofit/>
+          </a:bodyPr>
+          <a:lstStyle/>
+          <a:p>
+            <a:pPr marL="342900" indent="-342900">
+              <a:spcAft>
+                <a:spcPts val="600"/>
+              </a:spcAft>
+              <a:buSzPct val="100000"/>
+              <a:buChar char="•"/>
+            </a:pPr>
+            <a:r>
+              <a:rPr lang="en-US" sz="1400" dirty="0">
+                <a:solidFill>
+                  <a:srgbClr val="1F2937"/>
+                </a:solidFill>
+                <a:latin typeface="Calibri" pitchFamily="34" charset="0"/>
+                <a:ea typeface="Calibri" pitchFamily="34" charset="-122"/>
+                <a:cs typeface="Calibri" pitchFamily="34" charset="-120"/>
+              </a:rPr>
+              <a:t>Design for security; don't bolt it on</a:t>
+            </a:r>
+            <a:endParaRPr lang="en-US" sz="1400" dirty="0"/>
+          </a:p>
+          <a:p>
+            <a:pPr marL="342900" indent="-342900">
+              <a:spcAft>
+                <a:spcPts val="600"/>
+              </a:spcAft>
+              <a:buSzPct val="100000"/>
+              <a:buChar char="•"/>
+            </a:pPr>
+            <a:r>
+              <a:rPr lang="en-US" sz="1400" dirty="0">
+                <a:solidFill>
+                  <a:srgbClr val="1F2937"/>
+                </a:solidFill>
+                <a:latin typeface="Calibri" pitchFamily="34" charset="0"/>
+                <a:ea typeface="Calibri" pitchFamily="34" charset="-122"/>
+                <a:cs typeface="Calibri" pitchFamily="34" charset="-120"/>
+              </a:rPr>
+              <a:t>Attackers need one gap — model the whole surface</a:t>
+            </a:r>
+            <a:endParaRPr lang="en-US" sz="1400" dirty="0"/>
+          </a:p>
+          <a:p>
+            <a:pPr marL="342900" indent="-342900">
+              <a:spcAft>
+                <a:spcPts val="600"/>
+              </a:spcAft>
+              <a:buSzPct val="100000"/>
+              <a:buChar char="•"/>
+            </a:pPr>
+            <a:r>
+              <a:rPr lang="en-US" sz="1400" dirty="0">
+                <a:solidFill>
+                  <a:srgbClr val="1F2937"/>
+                </a:solidFill>
+                <a:latin typeface="Calibri" pitchFamily="34" charset="0"/>
+                <a:ea typeface="Calibri" pitchFamily="34" charset="-122"/>
+                <a:cs typeface="Calibri" pitchFamily="34" charset="-120"/>
+              </a:rPr>
+              <a:t>STRIDE + DFD = a repeatable way to find design flaws</a:t>
+            </a:r>
+            <a:endParaRPr lang="en-US" sz="1400" dirty="0"/>
+          </a:p>
+        </p:txBody>
+      </p:sp>
+      <p:sp>
+        <p:nvSpPr>
+          <p:cNvPr id="7" name="Text 4"/>
+          <p:cNvSpPr/>
+          <p:nvPr/>
+        </p:nvSpPr>
+        <p:spPr>
+          <a:xfrm>
+            <a:off x="457200" y="4800600"/>
+            <a:ext cx="6949440" cy="274320"/>
+          </a:xfrm>
+          <a:prstGeom prst="rect">
+            <a:avLst/>
+          </a:prstGeom>
+          <a:noFill/>
+          <a:ln/>
+        </p:spPr>
+        <p:txBody>
+          <a:bodyPr wrap="square" lIns="0" tIns="0" rIns="0" bIns="0" rtlCol="0" anchor="ctr"/>
+          <a:lstStyle/>
+          <a:p>
+            <a:pPr indent="0" marL="0">
+              <a:buNone/>
+            </a:pPr>
+            <a:r>
+              <a:rPr lang="en-US" sz="900" dirty="0">
+                <a:solidFill>
+                  <a:srgbClr val="64748B"/>
+                </a:solidFill>
+                <a:latin typeface="Calibri" pitchFamily="34" charset="0"/>
+                <a:ea typeface="Calibri" pitchFamily="34" charset="-122"/>
+                <a:cs typeface="Calibri" pitchFamily="34" charset="-120"/>
+              </a:rPr>
+              <a:t>Software Security · Week 1</a:t>
+            </a:r>
+            <a:endParaRPr lang="en-US" sz="900" dirty="0"/>
+          </a:p>
+        </p:txBody>
+      </p:sp>
+      <p:pic>
+        <p:nvPicPr>
+          <p:cNvPr id="8" name="Image 1" descr="/Users/pop7/Library/CloudStorage/OneDrive-MonsterConnectCo.,Ltd/Lecture/KOSEN69 - software-security/slides/pptx/assets/logo-small.png">    </p:cNvPr>
+          <p:cNvPicPr>
+            <a:picLocks noChangeAspect="1"/>
+          </p:cNvPicPr>
+          <p:nvPr/>
+        </p:nvPicPr>
+        <p:blipFill>
+          <a:blip r:embed="rId2"/>
+          <a:stretch>
+            <a:fillRect/>
+          </a:stretch>
+        </p:blipFill>
+        <p:spPr>
+          <a:xfrm>
+            <a:off x="7882128" y="4700016"/>
+            <a:ext cx="768096" cy="356616"/>
+          </a:xfrm>
+          <a:prstGeom prst="rect">
+            <a:avLst/>
+          </a:prstGeom>
+        </p:spPr>
+      </p:pic>
+    </p:spTree>
+  </p:cSld>
+  <p:clrMapOvr>
+    <a:masterClrMapping/>
+  </p:clrMapOvr>
+</p:sld>
+</file>
+
+<file path=ppt/slides/slide18.xml><?xml version="1.0" encoding="utf-8"?>
+<p:sld xmlns:a="http://schemas.openxmlformats.org/drawingml/2006/main" xmlns:r="http://schemas.openxmlformats.org/officeDocument/2006/relationships" xmlns:p="http://schemas.openxmlformats.org/presentationml/2006/main">
+  <p:cSld name="Slide 18">
+    <p:bg>
+      <p:bgPr>
+        <a:solidFill>
+          <a:srgbClr val="FFFFFF"/>
+        </a:solidFill>
+      </p:bgPr>
+    </p:bg>
+    <p:spTree>
+      <p:nvGrpSpPr>
+        <p:cNvPr id="1" name=""/>
+        <p:cNvGrpSpPr/>
+        <p:nvPr/>
+      </p:nvGrpSpPr>
+      <p:grpSpPr>
+        <a:xfrm>
+          <a:off x="0" y="0"/>
+          <a:ext cx="0" cy="0"/>
+          <a:chOff x="0" y="0"/>
+          <a:chExt cx="0" cy="0"/>
+        </a:xfrm>
+      </p:grpSpPr>
+      <p:sp>
+        <p:nvSpPr>
           <p:cNvPr id="2" name="Text 0"/>
           <p:cNvSpPr/>
           <p:nvPr/>
@@ -5701,7 +6426,9 @@
           <a:ln/>
         </p:spPr>
         <p:txBody>
-          <a:bodyPr wrap="square" lIns="0" tIns="0" rIns="0" bIns="0" rtlCol="0" anchor="t"/>
+          <a:bodyPr wrap="square" lIns="0" tIns="0" rIns="0" bIns="0" rtlCol="0" anchor="t">
+            <a:normAutofit/>
+          </a:bodyPr>
           <a:lstStyle/>
           <a:p>
             <a:pPr marL="342900" indent="-342900">
@@ -6063,7 +6790,9 @@
           <a:ln/>
         </p:spPr>
         <p:txBody>
-          <a:bodyPr wrap="square" lIns="0" tIns="0" rIns="0" bIns="0" rtlCol="0" anchor="t"/>
+          <a:bodyPr wrap="square" lIns="0" tIns="0" rIns="0" bIns="0" rtlCol="0" anchor="t">
+            <a:normAutofit/>
+          </a:bodyPr>
           <a:lstStyle/>
           <a:p>
             <a:pPr marL="342900" indent="-342900">
@@ -6383,7 +7112,9 @@
           <a:ln/>
         </p:spPr>
         <p:txBody>
-          <a:bodyPr wrap="square" lIns="0" tIns="0" rIns="0" bIns="0" rtlCol="0" anchor="t"/>
+          <a:bodyPr wrap="square" lIns="0" tIns="0" rIns="0" bIns="0" rtlCol="0" anchor="t">
+            <a:normAutofit/>
+          </a:bodyPr>
           <a:lstStyle/>
           <a:p>
             <a:pPr marL="342900" indent="-342900">
@@ -6490,7 +7221,9 @@
           <a:ln/>
         </p:spPr>
         <p:txBody>
-          <a:bodyPr wrap="square" lIns="0" tIns="0" rIns="0" bIns="0" rtlCol="0" anchor="ctr"/>
+          <a:bodyPr wrap="square" lIns="0" tIns="0" rIns="0" bIns="0" rtlCol="0" anchor="ctr">
+            <a:normAutofit/>
+          </a:bodyPr>
           <a:lstStyle/>
           <a:p>
             <a:pPr indent="0" marL="0">
@@ -6743,7 +7476,9 @@
           <a:ln/>
         </p:spPr>
         <p:txBody>
-          <a:bodyPr wrap="square" lIns="0" tIns="0" rIns="0" bIns="0" rtlCol="0" anchor="t"/>
+          <a:bodyPr wrap="square" lIns="0" tIns="0" rIns="0" bIns="0" rtlCol="0" anchor="t">
+            <a:normAutofit/>
+          </a:bodyPr>
           <a:lstStyle/>
           <a:p>
             <a:pPr marL="342900" indent="-342900">
@@ -6804,7 +7539,7 @@
                 <a:ea typeface="Calibri" pitchFamily="34" charset="-122"/>
                 <a:cs typeface="Calibri" pitchFamily="34" charset="-120"/>
               </a:rPr>
-              <a:t>Think in misuse cases, not just use cases</a:t>
+              <a:t>Think in abuse cases, not just use cases</a:t>
             </a:r>
             <a:endParaRPr lang="en-US" sz="1400" dirty="0"/>
           </a:p>
@@ -7063,7 +7798,9 @@
           <a:ln/>
         </p:spPr>
         <p:txBody>
-          <a:bodyPr wrap="square" lIns="0" tIns="0" rIns="0" bIns="0" rtlCol="0" anchor="t"/>
+          <a:bodyPr wrap="square" lIns="0" tIns="0" rIns="0" bIns="0" rtlCol="0" anchor="t">
+            <a:normAutofit/>
+          </a:bodyPr>
           <a:lstStyle/>
           <a:p>
             <a:pPr marL="342900" indent="-342900">
@@ -7324,11 +8061,11 @@
         <p:spPr>
           <a:xfrm>
             <a:off x="457200" y="1325880"/>
-            <a:ext cx="8229600" cy="1042416"/>
+            <a:ext cx="8229600" cy="932688"/>
           </a:xfrm>
           <a:prstGeom prst="roundRect">
             <a:avLst>
-              <a:gd name="adj" fmla="val 5263"/>
+              <a:gd name="adj" fmla="val 5882"/>
             </a:avLst>
           </a:prstGeom>
           <a:solidFill>
@@ -7351,7 +8088,7 @@
         <p:spPr>
           <a:xfrm>
             <a:off x="640080" y="1399032"/>
-            <a:ext cx="7863840" cy="896112"/>
+            <a:ext cx="7863840" cy="786384"/>
           </a:xfrm>
           <a:prstGeom prst="rect">
             <a:avLst/>
@@ -7360,7 +8097,9 @@
           <a:ln/>
         </p:spPr>
         <p:txBody>
-          <a:bodyPr wrap="square" lIns="0" tIns="0" rIns="0" bIns="0" rtlCol="0" anchor="t"/>
+          <a:bodyPr wrap="square" lIns="0" tIns="0" rIns="0" bIns="0" rtlCol="0" anchor="t">
+            <a:normAutofit/>
+          </a:bodyPr>
           <a:lstStyle/>
           <a:p>
             <a:pPr indent="0" marL="0">
@@ -7423,12 +8162,12 @@
         </p:nvSpPr>
         <p:spPr>
           <a:xfrm>
-            <a:off x="457200" y="2532888"/>
-            <a:ext cx="8229600" cy="1207008"/>
+            <a:off x="457200" y="2423160"/>
+            <a:ext cx="8229600" cy="2121408"/>
           </a:xfrm>
           <a:prstGeom prst="roundRect">
             <a:avLst>
-              <a:gd name="adj" fmla="val 6061"/>
+              <a:gd name="adj" fmla="val 3448"/>
             </a:avLst>
           </a:prstGeom>
           <a:solidFill>
@@ -7452,8 +8191,8 @@
         </p:nvSpPr>
         <p:spPr>
           <a:xfrm>
-            <a:off x="731520" y="2642616"/>
-            <a:ext cx="7680960" cy="987552"/>
+            <a:off x="731520" y="2532888"/>
+            <a:ext cx="7680960" cy="1901952"/>
           </a:xfrm>
           <a:prstGeom prst="rect">
             <a:avLst/>
@@ -7462,7 +8201,9 @@
           <a:ln/>
         </p:spPr>
         <p:txBody>
-          <a:bodyPr wrap="square" lIns="0" tIns="0" rIns="0" bIns="0" rtlCol="0" anchor="t"/>
+          <a:bodyPr wrap="square" lIns="0" tIns="0" rIns="0" bIns="0" rtlCol="0" anchor="t">
+            <a:normAutofit/>
+          </a:bodyPr>
           <a:lstStyle/>
           <a:p>
             <a:pPr marL="342900" indent="-342900">
@@ -7523,7 +8264,28 @@
                 <a:ea typeface="Calibri" pitchFamily="34" charset="-122"/>
                 <a:cs typeface="Calibri" pitchFamily="34" charset="-120"/>
               </a:rPr>
-              <a:t>../../etc/passwd as a filename → path traversal (read outside uploads/)</a:t>
+              <a:t>../../escaped.txt as a filename → the app saves it there — arbitrary-file-write, unauthenticated, anywhere the process can reach (not "overwrite a same-name file" — write to a path you chose)</a:t>
+            </a:r>
+            <a:endParaRPr lang="en-US" sz="1400" dirty="0"/>
+          </a:p>
+          <a:p>
+            <a:pPr marL="342900" indent="-342900">
+              <a:spcAft>
+                <a:spcPts val="600"/>
+              </a:spcAft>
+              <a:buSzPct val="100000"/>
+              <a:buChar char="•"/>
+            </a:pPr>
+            <a:r>
+              <a:rPr lang="en-US" sz="1400" dirty="0">
+                <a:solidFill>
+                  <a:srgbClr val="1F2937"/>
+                </a:solidFill>
+                <a:latin typeface="Calibri" pitchFamily="34" charset="0"/>
+                <a:ea typeface="Calibri" pitchFamily="34" charset="-122"/>
+                <a:cs typeface="Calibri" pitchFamily="34" charset="-120"/>
+              </a:rPr>
+              <a:t>/files/&lt;name&gt; (the read path) is comparatively well-defended — Werkzeug's safe_join blocks the same trick</a:t>
             </a:r>
             <a:endParaRPr lang="en-US" sz="1400" dirty="0"/>
           </a:p>
@@ -9234,11 +9996,11 @@
         <p:spPr>
           <a:xfrm>
             <a:off x="457200" y="1325880"/>
-            <a:ext cx="8229600" cy="2139696"/>
+            <a:ext cx="8229600" cy="2743200"/>
           </a:xfrm>
           <a:prstGeom prst="roundRect">
             <a:avLst>
-              <a:gd name="adj" fmla="val 3419"/>
+              <a:gd name="adj" fmla="val 2667"/>
             </a:avLst>
           </a:prstGeom>
           <a:solidFill>
@@ -9263,7 +10025,7 @@
         <p:spPr>
           <a:xfrm>
             <a:off x="731520" y="1435608"/>
-            <a:ext cx="7680960" cy="1920240"/>
+            <a:ext cx="7680960" cy="2523744"/>
           </a:xfrm>
           <a:prstGeom prst="rect">
             <a:avLst/>
@@ -9272,7 +10034,9 @@
           <a:ln/>
         </p:spPr>
         <p:txBody>
-          <a:bodyPr wrap="square" lIns="0" tIns="0" rIns="0" bIns="0" rtlCol="0" anchor="t"/>
+          <a:bodyPr wrap="square" lIns="0" tIns="0" rIns="0" bIns="0" rtlCol="0" anchor="t">
+            <a:normAutofit/>
+          </a:bodyPr>
           <a:lstStyle/>
           <a:p>
             <a:pPr marL="342900" indent="-342900">
@@ -9312,7 +10076,7 @@
                 <a:ea typeface="Calibri" pitchFamily="34" charset="-122"/>
                 <a:cs typeface="Calibri" pitchFamily="34" charset="-120"/>
               </a:rPr>
-              <a:t>T — overwrite another user's file (same name)</a:t>
+              <a:t>T — ../ filename writes outside uploads/ — arbitrary-file-write, not just an overwrite</a:t>
             </a:r>
             <a:endParaRPr lang="en-US" sz="1400" dirty="0"/>
           </a:p>
@@ -9354,7 +10118,7 @@
                 <a:ea typeface="Calibri" pitchFamily="34" charset="-122"/>
                 <a:cs typeface="Calibri" pitchFamily="34" charset="-120"/>
               </a:rPr>
-              <a:t>I — ../ filename reads files outside the folder</a:t>
+              <a:t>I — the read path (/files/&lt;name&gt;) is comparatively well-defended (Werkzeug blocks traversal there) — this element's real risk is on the write side, not this letter</a:t>
             </a:r>
             <a:endParaRPr lang="en-US" sz="1400" dirty="0"/>
           </a:p>

--- a/slides/pptx/week01.pptx
+++ b/slides/pptx/week01.pptx
@@ -23,9 +23,13 @@
     <p:sldId id="271" r:id="rId17"/>
     <p:sldId id="272" r:id="rId18"/>
     <p:sldId id="273" r:id="rId19"/>
+    <p:sldId id="274" r:id="rId20"/>
+    <p:sldId id="275" r:id="rId21"/>
+    <p:sldId id="276" r:id="rId22"/>
+    <p:sldId id="277" r:id="rId23"/>
   </p:sldIdLst>
   <p:notesMasterIdLst>
-    <p:notesMasterId r:id="rId20"/>
+    <p:notesMasterId r:id="rId24"/>
   </p:notesMasterIdLst>
   <p:sldSz cx="9144000" cy="5143500"/>
   <p:notesSz cx="5143500" cy="9144000"/>
@@ -607,7 +611,7 @@
           <a:p>
             <a:r>
               <a:rPr lang="en-US" dirty="0"/>
-              <a:t>Orient them to the references we'll cite weekly. OWASP = what to prevent; CWE = the precise weakness id; ATT&amp;CK = how real adversaries operate. Name CWE-501 explicitly here — the worksheet's Reflection Q1 asks them to map their /upload finding to a CWE, and this is the answer the course has already committed to (fixed 2026-07-25, after CWE-1059 turned out to be MITRE-prohibited for vulnerability mapping). They'll map every finding to a CWE/OWASP id all term. ~3 min.</a:t>
+              <a:t>Let them drive this one themselves if the room has laptops open, otherwise drive it from the front and call for filename suggestions. Make sure `../../../../etc/passwd` gets tried before moving on — watching the write side turn orange while the read side stays blocked is the moment this stops being an abstract claim. Ties directly to worksheet Task 3's Reflection Q1 (map the finding to a CWE — CWE-501, named explicitly two slides from now). ~5 min.</a:t>
             </a:r>
             <a:endParaRPr lang="en-US" dirty="0"/>
           </a:p>
@@ -695,7 +699,7 @@
           <a:p>
             <a:r>
               <a:rPr lang="en-US" dirty="0"/>
-              <a:t>Tie the mindset to the current policy moment (CISA, memory-safety roadmaps). Key idea: threat modeling catches design flaws *before* code exists — cheapest place to fix. This slide's own thesis is Task 8's actual grading question — make the connection explicit, don't leave it implicit. Contrast cost of fixing at design vs in production (orders of magnitude). ~4 min.</a:t>
+              <a:t>STRIDE is a checklist so you don't forget a category. Go letter by letter, 1 example each, ideally tied to /upload: T = swap a file; I = read another user's upload; D = upload a 10 GB file; E = upload a .php and execute it. Tell them: apply STRIDE to every element of the DFD. ~8 min.</a:t>
             </a:r>
             <a:endParaRPr lang="en-US" dirty="0"/>
           </a:p>
@@ -783,7 +787,7 @@
           <a:p>
             <a:r>
               <a:rPr lang="en-US" dirty="0"/>
-              <a:t>Explain the game before the lab: it gamifies the STRIDE pass we just did. Each suit = a STRIDE category; you play a card by naming a concrete threat on the DFD. Make it competitive (leaderboard). It lowers the barrier for students who freeze on a blank page. ~3 min.</a:t>
+              <a:t>Pay-off slide: the full STRIDE pass on one element. Let the class call out threats before revealing each line. Verified by running the real sample-app: the traversal bug is a WRITE primitive (Tampering), and the naive "I = read outside the folder" claim does NOT reproduce against /files/&lt;name&gt;. If asked why: for the common `../../etc/passwd`-style payload, Flask's URL router rejects any `&lt;name&gt;` segment containing `/` before the view ever runs — `safe_join` inside `send_from_directory` only gets exercised by a slash-free segment like a bare `..`, and blocks that too. Don't attribute it to safe_join alone; the router does most of the work for the payload shape students actually try. Don't let this STRIDE pass repeat that error. End with: "5-6 threats from ONE endpoint — now imagine the whole app." ~6 min.</a:t>
             </a:r>
             <a:endParaRPr lang="en-US" dirty="0"/>
           </a:p>
@@ -871,7 +875,7 @@
           <a:p>
             <a:r>
               <a:rPr lang="en-US" dirty="0"/>
-              <a:t>Logistics — get everyone's environment working today; setup pain derails later weeks. Have TAs circulate. Tell them to fork the course repo now. This is graded only on "it runs." ~ start of lab.</a:t>
+              <a:t>Cold-call while this is on screen — it's the same six findings they just watched you reveal, so this checks whether it actually landed, not whether they can read a table. The I item is the one that catches people: watch for anyone answering "I" out of habit rather than working through why the read path is the defended side here. ~4 min.</a:t>
             </a:r>
             <a:endParaRPr lang="en-US" dirty="0"/>
           </a:p>
@@ -959,7 +963,7 @@
           <a:p>
             <a:r>
               <a:rPr lang="en-US" dirty="0"/>
-              <a:t>This grew from a 4-step propose-only exercise into an 8-part build-and-prove lab (task numbering in the worksheet is 0-8, with a 3b for the systems-level pass) — don't teach the old 4-step version. Two things are new and graded, cite them explicitly: the systems-level pass (step 4, research-grounded — STRIDE-only modeling makes people miss system-level threats) and the implemented-and-evidenced defense (step 8 — this is where "Secure by Design" 4 slides ago stops being theory). Point them to THREAT-MODEL-TEMPLATE.md. Step 6 kicks off the term project.</a:t>
+              <a:t>Orient them to the references we'll cite weekly. OWASP = what to prevent; CWE = the precise weakness id; ATT&amp;CK = how real adversaries operate. Name CWE-501 explicitly here — the worksheet's Reflection Q1 asks them to map their /upload finding to a CWE, and this is the answer the course has already committed to (fixed 2026-07-25, after CWE-1059 turned out to be MITRE-prohibited for vulnerability mapping). They'll map every finding to a CWE/OWASP id all term. ~3 min.</a:t>
             </a:r>
             <a:endParaRPr lang="en-US" dirty="0"/>
           </a:p>
@@ -1047,7 +1051,7 @@
           <a:p>
             <a:r>
               <a:rPr lang="en-US" dirty="0"/>
-              <a:t>This grew from a 4-step propose-only exercise into an 8-part build-and-prove lab (task numbering in the worksheet is 0-8, with a 3b for the systems-level pass) — don't teach the old 4-step version. Two things are new and graded, cite them explicitly: the systems-level pass (step 4, research-grounded — STRIDE-only modeling makes people miss system-level threats) and the implemented-and-evidenced defense (step 8 — this is where "Secure by Design" 4 slides ago stops being theory). Point them to THREAT-MODEL-TEMPLATE.md. Step 6 kicks off the term project.</a:t>
+              <a:t>Tie the mindset to the current policy moment (CISA, memory-safety roadmaps). Key idea: threat modeling catches design flaws *before* code exists — cheapest place to fix. This slide's own thesis is Task 8's actual grading question — make the connection explicit, don't leave it implicit. Contrast cost of fixing at design vs in production (orders of magnitude). ~4 min.</a:t>
             </a:r>
             <a:endParaRPr lang="en-US" dirty="0"/>
           </a:p>
@@ -1135,7 +1139,7 @@
           <a:p>
             <a:r>
               <a:rPr lang="en-US" dirty="0"/>
-              <a:t>Address AI head-on, week 1. Frame it as a professional skill: future engineers use AI but must verify it. The Audit-the-AI task turns its weakness into the lesson. Be explicit about the integrity controls so expectations are set early. ~4 min.</a:t>
+              <a:t>Explain the game before the lab: it gamifies the STRIDE pass we just did. Each suit = a STRIDE category; you play a card by naming a concrete threat on the DFD. Make it competitive (leaderboard). It lowers the barrier for students who freeze on a blank page. ~3 min.</a:t>
             </a:r>
             <a:endParaRPr lang="en-US" dirty="0"/>
           </a:p>
@@ -1223,7 +1227,7 @@
           <a:p>
             <a:r>
               <a:rPr lang="en-US" dirty="0"/>
-              <a:t>Recap in 3 lines. Cold-call 2 students: "give me one STRIDE threat for a login page." Confirm they can do the lab. ~2 min.</a:t>
+              <a:t>Logistics — get everyone's environment working today; setup pain derails later weeks. Have TAs circulate. Tell them to fork the course repo now. This is graded only on "it runs." ~ start of lab.</a:t>
             </a:r>
             <a:endParaRPr lang="en-US" dirty="0"/>
           </a:p>
@@ -1311,7 +1315,7 @@
           <a:p>
             <a:r>
               <a:rPr lang="en-US" dirty="0"/>
-              <a:t>Cliffhanger: "Next week we automate finding these bugs — and race to triage them. Get your VM working before then." Take questions; remind about the ethics acknowledgment + Lab 0.</a:t>
+              <a:t>This grew from a 4-step propose-only exercise into an 8-part build-and-prove lab (task numbering in the worksheet is 0-8, with a 3b for the systems-level pass) — don't teach the old 4-step version. Two things are new and graded, cite them explicitly: the systems-level pass (step 4, research-grounded — STRIDE-only modeling makes people miss system-level threats) and the implemented-and-evidenced defense (step 8 — this is where "Secure by Design" 4 slides ago stops being theory). Point them to THREAT-MODEL-TEMPLATE.md. Step 6 kicks off the term project.</a:t>
             </a:r>
             <a:endParaRPr lang="en-US" dirty="0"/>
           </a:p>
@@ -1335,6 +1339,94 @@
             <a:fld id="{F7021451-1387-4CA6-816F-3879F97B5CBC}" type="slidenum">
               <a:rPr lang="en-US"/>
               <a:t>18</a:t>
+            </a:fld>
+            <a:endParaRPr lang="en-US"/>
+          </a:p>
+        </p:txBody>
+      </p:sp>
+    </p:spTree>
+    <p:extLst>
+      <p:ext uri="{BB962C8B-B14F-4D97-AF65-F5344CB8AC3E}">
+        <p14:creationId xmlns:p14="http://schemas.microsoft.com/office/powerpoint/2010/main" val="1024086991"/>
+      </p:ext>
+    </p:extLst>
+  </p:cSld>
+  <p:clrMapOvr>
+    <a:masterClrMapping/>
+  </p:clrMapOvr>
+</p:notes>
+</file>
+
+<file path=ppt/notesSlides/notesSlide19.xml><?xml version="1.0" encoding="utf-8"?>
+<p:notes xmlns:a="http://schemas.openxmlformats.org/drawingml/2006/main" xmlns:r="http://schemas.openxmlformats.org/officeDocument/2006/relationships" xmlns:p="http://schemas.openxmlformats.org/presentationml/2006/main">
+  <p:cSld>
+    <p:spTree>
+      <p:nvGrpSpPr>
+        <p:cNvPr id="1" name=""/>
+        <p:cNvGrpSpPr/>
+        <p:nvPr/>
+      </p:nvGrpSpPr>
+      <p:grpSpPr>
+        <a:xfrm>
+          <a:off x="0" y="0"/>
+          <a:ext cx="0" cy="0"/>
+          <a:chOff x="0" y="0"/>
+          <a:chExt cx="0" cy="0"/>
+        </a:xfrm>
+      </p:grpSpPr>
+      <p:sp>
+        <p:nvSpPr>
+          <p:cNvPr id="2" name="Slide Image Placeholder 1"/>
+          <p:cNvSpPr>
+            <a:spLocks noGrp="1" noRot="1" noChangeAspect="1"/>
+          </p:cNvSpPr>
+          <p:nvPr>
+            <p:ph type="sldImg"/>
+          </p:nvPr>
+        </p:nvSpPr>
+        <p:spPr/>
+      </p:sp>
+      <p:sp>
+        <p:nvSpPr>
+          <p:cNvPr id="3" name="Notes Placeholder 2"/>
+          <p:cNvSpPr>
+            <a:spLocks noGrp="1"/>
+          </p:cNvSpPr>
+          <p:nvPr>
+            <p:ph type="body" idx="1"/>
+          </p:nvPr>
+        </p:nvSpPr>
+        <p:spPr/>
+        <p:txBody>
+          <a:bodyPr/>
+          <a:lstStyle/>
+          <a:p>
+            <a:r>
+              <a:rPr lang="en-US" dirty="0"/>
+              <a:t>This grew from a 4-step propose-only exercise into an 8-part build-and-prove lab (task numbering in the worksheet is 0-8, with a 3b for the systems-level pass) — don't teach the old 4-step version. Two things are new and graded, cite them explicitly: the systems-level pass (step 4, research-grounded — STRIDE-only modeling makes people miss system-level threats) and the implemented-and-evidenced defense (step 8 — this is where "Secure by Design" 4 slides ago stops being theory). Point them to THREAT-MODEL-TEMPLATE.md. Step 6 kicks off the term project.</a:t>
+            </a:r>
+            <a:endParaRPr lang="en-US" dirty="0"/>
+          </a:p>
+        </p:txBody>
+      </p:sp>
+      <p:sp>
+        <p:nvSpPr>
+          <p:cNvPr id="4" name="Slide Number Placeholder 3"/>
+          <p:cNvSpPr>
+            <a:spLocks noGrp="1"/>
+          </p:cNvSpPr>
+          <p:nvPr>
+            <p:ph type="sldNum" sz="quarter" idx="10"/>
+          </p:nvPr>
+        </p:nvSpPr>
+        <p:spPr/>
+        <p:txBody>
+          <a:bodyPr/>
+          <a:lstStyle/>
+          <a:p>
+            <a:fld id="{F7021451-1387-4CA6-816F-3879F97B5CBC}" type="slidenum">
+              <a:rPr lang="en-US"/>
+              <a:t>19</a:t>
             </a:fld>
             <a:endParaRPr lang="en-US"/>
           </a:p>
@@ -1441,6 +1533,270 @@
 </p:notes>
 </file>
 
+<file path=ppt/notesSlides/notesSlide20.xml><?xml version="1.0" encoding="utf-8"?>
+<p:notes xmlns:a="http://schemas.openxmlformats.org/drawingml/2006/main" xmlns:r="http://schemas.openxmlformats.org/officeDocument/2006/relationships" xmlns:p="http://schemas.openxmlformats.org/presentationml/2006/main">
+  <p:cSld>
+    <p:spTree>
+      <p:nvGrpSpPr>
+        <p:cNvPr id="1" name=""/>
+        <p:cNvGrpSpPr/>
+        <p:nvPr/>
+      </p:nvGrpSpPr>
+      <p:grpSpPr>
+        <a:xfrm>
+          <a:off x="0" y="0"/>
+          <a:ext cx="0" cy="0"/>
+          <a:chOff x="0" y="0"/>
+          <a:chExt cx="0" cy="0"/>
+        </a:xfrm>
+      </p:grpSpPr>
+      <p:sp>
+        <p:nvSpPr>
+          <p:cNvPr id="2" name="Slide Image Placeholder 1"/>
+          <p:cNvSpPr>
+            <a:spLocks noGrp="1" noRot="1" noChangeAspect="1"/>
+          </p:cNvSpPr>
+          <p:nvPr>
+            <p:ph type="sldImg"/>
+          </p:nvPr>
+        </p:nvSpPr>
+        <p:spPr/>
+      </p:sp>
+      <p:sp>
+        <p:nvSpPr>
+          <p:cNvPr id="3" name="Notes Placeholder 2"/>
+          <p:cNvSpPr>
+            <a:spLocks noGrp="1"/>
+          </p:cNvSpPr>
+          <p:nvPr>
+            <p:ph type="body" idx="1"/>
+          </p:nvPr>
+        </p:nvSpPr>
+        <p:spPr/>
+        <p:txBody>
+          <a:bodyPr/>
+          <a:lstStyle/>
+          <a:p>
+            <a:r>
+              <a:rPr lang="en-US" dirty="0"/>
+              <a:t>Address AI head-on, week 1. Frame it as a professional skill: future engineers use AI but must verify it. The Audit-the-AI task turns its weakness into the lesson. Be explicit about the integrity controls so expectations are set early. ~4 min.</a:t>
+            </a:r>
+            <a:endParaRPr lang="en-US" dirty="0"/>
+          </a:p>
+        </p:txBody>
+      </p:sp>
+      <p:sp>
+        <p:nvSpPr>
+          <p:cNvPr id="4" name="Slide Number Placeholder 3"/>
+          <p:cNvSpPr>
+            <a:spLocks noGrp="1"/>
+          </p:cNvSpPr>
+          <p:nvPr>
+            <p:ph type="sldNum" sz="quarter" idx="10"/>
+          </p:nvPr>
+        </p:nvSpPr>
+        <p:spPr/>
+        <p:txBody>
+          <a:bodyPr/>
+          <a:lstStyle/>
+          <a:p>
+            <a:fld id="{F7021451-1387-4CA6-816F-3879F97B5CBC}" type="slidenum">
+              <a:rPr lang="en-US"/>
+              <a:t>20</a:t>
+            </a:fld>
+            <a:endParaRPr lang="en-US"/>
+          </a:p>
+        </p:txBody>
+      </p:sp>
+    </p:spTree>
+    <p:extLst>
+      <p:ext uri="{BB962C8B-B14F-4D97-AF65-F5344CB8AC3E}">
+        <p14:creationId xmlns:p14="http://schemas.microsoft.com/office/powerpoint/2010/main" val="1024086991"/>
+      </p:ext>
+    </p:extLst>
+  </p:cSld>
+  <p:clrMapOvr>
+    <a:masterClrMapping/>
+  </p:clrMapOvr>
+</p:notes>
+</file>
+
+<file path=ppt/notesSlides/notesSlide21.xml><?xml version="1.0" encoding="utf-8"?>
+<p:notes xmlns:a="http://schemas.openxmlformats.org/drawingml/2006/main" xmlns:r="http://schemas.openxmlformats.org/officeDocument/2006/relationships" xmlns:p="http://schemas.openxmlformats.org/presentationml/2006/main">
+  <p:cSld>
+    <p:spTree>
+      <p:nvGrpSpPr>
+        <p:cNvPr id="1" name=""/>
+        <p:cNvGrpSpPr/>
+        <p:nvPr/>
+      </p:nvGrpSpPr>
+      <p:grpSpPr>
+        <a:xfrm>
+          <a:off x="0" y="0"/>
+          <a:ext cx="0" cy="0"/>
+          <a:chOff x="0" y="0"/>
+          <a:chExt cx="0" cy="0"/>
+        </a:xfrm>
+      </p:grpSpPr>
+      <p:sp>
+        <p:nvSpPr>
+          <p:cNvPr id="2" name="Slide Image Placeholder 1"/>
+          <p:cNvSpPr>
+            <a:spLocks noGrp="1" noRot="1" noChangeAspect="1"/>
+          </p:cNvSpPr>
+          <p:nvPr>
+            <p:ph type="sldImg"/>
+          </p:nvPr>
+        </p:nvSpPr>
+        <p:spPr/>
+      </p:sp>
+      <p:sp>
+        <p:nvSpPr>
+          <p:cNvPr id="3" name="Notes Placeholder 2"/>
+          <p:cNvSpPr>
+            <a:spLocks noGrp="1"/>
+          </p:cNvSpPr>
+          <p:nvPr>
+            <p:ph type="body" idx="1"/>
+          </p:nvPr>
+        </p:nvSpPr>
+        <p:spPr/>
+        <p:txBody>
+          <a:bodyPr/>
+          <a:lstStyle/>
+          <a:p>
+            <a:r>
+              <a:rPr lang="en-US" dirty="0"/>
+              <a:t>Recap in 3 lines. Cold-call 2 students: "give me one STRIDE threat for a login page." Confirm they can do the lab. ~2 min.</a:t>
+            </a:r>
+            <a:endParaRPr lang="en-US" dirty="0"/>
+          </a:p>
+        </p:txBody>
+      </p:sp>
+      <p:sp>
+        <p:nvSpPr>
+          <p:cNvPr id="4" name="Slide Number Placeholder 3"/>
+          <p:cNvSpPr>
+            <a:spLocks noGrp="1"/>
+          </p:cNvSpPr>
+          <p:nvPr>
+            <p:ph type="sldNum" sz="quarter" idx="10"/>
+          </p:nvPr>
+        </p:nvSpPr>
+        <p:spPr/>
+        <p:txBody>
+          <a:bodyPr/>
+          <a:lstStyle/>
+          <a:p>
+            <a:fld id="{F7021451-1387-4CA6-816F-3879F97B5CBC}" type="slidenum">
+              <a:rPr lang="en-US"/>
+              <a:t>21</a:t>
+            </a:fld>
+            <a:endParaRPr lang="en-US"/>
+          </a:p>
+        </p:txBody>
+      </p:sp>
+    </p:spTree>
+    <p:extLst>
+      <p:ext uri="{BB962C8B-B14F-4D97-AF65-F5344CB8AC3E}">
+        <p14:creationId xmlns:p14="http://schemas.microsoft.com/office/powerpoint/2010/main" val="1024086991"/>
+      </p:ext>
+    </p:extLst>
+  </p:cSld>
+  <p:clrMapOvr>
+    <a:masterClrMapping/>
+  </p:clrMapOvr>
+</p:notes>
+</file>
+
+<file path=ppt/notesSlides/notesSlide22.xml><?xml version="1.0" encoding="utf-8"?>
+<p:notes xmlns:a="http://schemas.openxmlformats.org/drawingml/2006/main" xmlns:r="http://schemas.openxmlformats.org/officeDocument/2006/relationships" xmlns:p="http://schemas.openxmlformats.org/presentationml/2006/main">
+  <p:cSld>
+    <p:spTree>
+      <p:nvGrpSpPr>
+        <p:cNvPr id="1" name=""/>
+        <p:cNvGrpSpPr/>
+        <p:nvPr/>
+      </p:nvGrpSpPr>
+      <p:grpSpPr>
+        <a:xfrm>
+          <a:off x="0" y="0"/>
+          <a:ext cx="0" cy="0"/>
+          <a:chOff x="0" y="0"/>
+          <a:chExt cx="0" cy="0"/>
+        </a:xfrm>
+      </p:grpSpPr>
+      <p:sp>
+        <p:nvSpPr>
+          <p:cNvPr id="2" name="Slide Image Placeholder 1"/>
+          <p:cNvSpPr>
+            <a:spLocks noGrp="1" noRot="1" noChangeAspect="1"/>
+          </p:cNvSpPr>
+          <p:nvPr>
+            <p:ph type="sldImg"/>
+          </p:nvPr>
+        </p:nvSpPr>
+        <p:spPr/>
+      </p:sp>
+      <p:sp>
+        <p:nvSpPr>
+          <p:cNvPr id="3" name="Notes Placeholder 2"/>
+          <p:cNvSpPr>
+            <a:spLocks noGrp="1"/>
+          </p:cNvSpPr>
+          <p:nvPr>
+            <p:ph type="body" idx="1"/>
+          </p:nvPr>
+        </p:nvSpPr>
+        <p:spPr/>
+        <p:txBody>
+          <a:bodyPr/>
+          <a:lstStyle/>
+          <a:p>
+            <a:r>
+              <a:rPr lang="en-US" dirty="0"/>
+              <a:t>Cliffhanger: "Next week we automate finding these bugs — and race to triage them. Get your VM working before then." Take questions; remind about the ethics acknowledgment + Lab 0.</a:t>
+            </a:r>
+            <a:endParaRPr lang="en-US" dirty="0"/>
+          </a:p>
+        </p:txBody>
+      </p:sp>
+      <p:sp>
+        <p:nvSpPr>
+          <p:cNvPr id="4" name="Slide Number Placeholder 3"/>
+          <p:cNvSpPr>
+            <a:spLocks noGrp="1"/>
+          </p:cNvSpPr>
+          <p:nvPr>
+            <p:ph type="sldNum" sz="quarter" idx="10"/>
+          </p:nvPr>
+        </p:nvSpPr>
+        <p:spPr/>
+        <p:txBody>
+          <a:bodyPr/>
+          <a:lstStyle/>
+          <a:p>
+            <a:fld id="{F7021451-1387-4CA6-816F-3879F97B5CBC}" type="slidenum">
+              <a:rPr lang="en-US"/>
+              <a:t>22</a:t>
+            </a:fld>
+            <a:endParaRPr lang="en-US"/>
+          </a:p>
+        </p:txBody>
+      </p:sp>
+    </p:spTree>
+    <p:extLst>
+      <p:ext uri="{BB962C8B-B14F-4D97-AF65-F5344CB8AC3E}">
+        <p14:creationId xmlns:p14="http://schemas.microsoft.com/office/powerpoint/2010/main" val="1024086991"/>
+      </p:ext>
+    </p:extLst>
+  </p:cSld>
+  <p:clrMapOvr>
+    <a:masterClrMapping/>
+  </p:clrMapOvr>
+</p:notes>
+</file>
+
 <file path=ppt/notesSlides/notesSlide3.xml><?xml version="1.0" encoding="utf-8"?>
 <p:notes xmlns:a="http://schemas.openxmlformats.org/drawingml/2006/main" xmlns:r="http://schemas.openxmlformats.org/officeDocument/2006/relationships" xmlns:p="http://schemas.openxmlformats.org/presentationml/2006/main">
   <p:cSld>
@@ -1663,7 +2019,7 @@
           <a:p>
             <a:r>
               <a:rPr lang="en-US" dirty="0"/>
-              <a:t>The asymmetry is the whole reason security is hard. Contrast a "use case" (user logs in) with an "abuse case" (attacker logs in as someone else) — say "abuse case," not "misuse case," to match the worksheet's term (Task 4: 2 personas × 2 abuse cases, graded). Exercise: pick the classroom projector login and ask "how would you abuse this?" Get 3 answers. ~5 min.</a:t>
+              <a:t>Live in the room: put it on screen, read each scenario out loud, take a show-of-hands before revealing. Item 4 (ransomware) is the one to slow down on — most students say "Availability" instantly and miss that real ransomware usually exfiltrates first, so a breach report often has to also disclose C. That nuance is exactly why this drills the PRIMARY hit, not the only one. ~5 min.</a:t>
             </a:r>
             <a:endParaRPr lang="en-US" dirty="0"/>
           </a:p>
@@ -1751,7 +2107,7 @@
           <a:p>
             <a:r>
               <a:rPr lang="en-US" dirty="0"/>
-              <a:t>Define both precisely — these terms drive the whole DFD/STRIDE method. Draw on the board: browser | (boundary) | server | (boundary) | database. Anything crossing a boundary is where you scrutinize. Ask the class to list inputs of a login page → that's its attack surface. ~6 min.</a:t>
+              <a:t>The asymmetry is the whole reason security is hard. Contrast a "use case" (user logs in) with an "abuse case" (attacker logs in as someone else) — say "abuse case," not "misuse case," to match the worksheet's term (Task 4: 2 personas × 2 abuse cases, graded). Exercise: pick the classroom projector login and ask "how would you abuse this?" Get 3 answers. ~5 min.</a:t>
             </a:r>
             <a:endParaRPr lang="en-US" dirty="0"/>
           </a:p>
@@ -1839,7 +2195,7 @@
           <a:p>
             <a:r>
               <a:rPr lang="en-US" dirty="0"/>
-              <a:t>This is the "make it concrete" moment — walk the data flow on the board. Ask: "what does the app trust here?" (it trusts the filename, unsanitized, on save). Verified live: /upload writes outside uploads/ with no auth; /files/&lt;name&gt; refuses every traversal encoding tried. Get the direction right — it's a WRITE bug, not a read bug — the rest of today's STRIDE pass depends on this. ~7 min.</a:t>
+              <a:t>Define both precisely — these terms drive the whole DFD/STRIDE method. Walk the diagram left to right: browser | (boundary) | app | (boundary) | data. Anything crossing a boundary is where you scrutinize. Ask the class to list inputs of a login page → that's its attack surface. Same diagram the worksheet's Task 3b reuses, so pointing back at "the picture from lecture" during the lab actually works. ~6 min.</a:t>
             </a:r>
             <a:endParaRPr lang="en-US" dirty="0"/>
           </a:p>
@@ -1927,7 +2283,7 @@
           <a:p>
             <a:r>
               <a:rPr lang="en-US" dirty="0"/>
-              <a:t>STRIDE is a checklist so you don't forget a category. Go letter by letter, 1 example each, ideally tied to /upload: T = swap a file; I = read another user's upload; D = upload a 10 GB file; E = upload a .php and execute it. Tell them: apply STRIDE to every element of the DFD. ~8 min.</a:t>
+              <a:t>This is the "make it concrete" moment — walk the data flow on the board. Ask: "what does the app trust here?" (it trusts the filename, unsanitized, on save). Verified live: /upload writes outside uploads/ with no auth; /files/&lt;name&gt; refuses every traversal encoding tried. Get the direction right — it's a WRITE bug, not a read bug — the rest of today's STRIDE pass depends on this. ~7 min.</a:t>
             </a:r>
             <a:endParaRPr lang="en-US" dirty="0"/>
           </a:p>
@@ -2015,7 +2371,7 @@
           <a:p>
             <a:r>
               <a:rPr lang="en-US" dirty="0"/>
-              <a:t>Pay-off slide: the full STRIDE pass on one element. Let the class call out threats before revealing each line. Verified by running the real sample-app: the traversal bug is a WRITE primitive (Tampering), and the naive "I = read outside the folder" claim does NOT reproduce against /files/&lt;name&gt; — Werkzeug's safe_join blocks it. Don't let this STRIDE pass repeat that error. End with: "5-6 threats from ONE endpoint — now imagine the whole app." ~6 min.</a:t>
+              <a:t>This is the "make it concrete" moment — walk the data flow on the board. Ask: "what does the app trust here?" (it trusts the filename, unsanitized, on save). Verified live: /upload writes outside uploads/ with no auth; /files/&lt;name&gt; refuses every traversal encoding tried. Get the direction right — it's a WRITE bug, not a read bug — the rest of today's STRIDE pass depends on this. ~7 min.</a:t>
             </a:r>
             <a:endParaRPr lang="en-US" dirty="0"/>
           </a:p>
@@ -2648,7 +3004,7 @@
                 <a:ea typeface="Arial" pitchFamily="34" charset="-122"/>
                 <a:cs typeface="Arial" pitchFamily="34" charset="-120"/>
               </a:rPr>
-              <a:t>The landscape you'll use all term</a:t>
+              <a:t>Try it — same input, opposite outcomes</a:t>
             </a:r>
             <a:endParaRPr lang="en-US" sz="2600" dirty="0"/>
           </a:p>
@@ -2656,43 +3012,14 @@
       </p:sp>
       <p:sp>
         <p:nvSpPr>
-          <p:cNvPr id="5" name="Shape 2"/>
-          <p:cNvSpPr/>
-          <p:nvPr/>
-        </p:nvSpPr>
-        <p:spPr>
-          <a:xfrm>
-            <a:off x="457200" y="1325880"/>
-            <a:ext cx="8229600" cy="1719072"/>
-          </a:xfrm>
-          <a:prstGeom prst="roundRect">
-            <a:avLst>
-              <a:gd name="adj" fmla="val 4255"/>
-            </a:avLst>
-          </a:prstGeom>
-          <a:solidFill>
-            <a:srgbClr val="F1F5F9"/>
-          </a:solidFill>
-          <a:ln/>
-          <a:effectLst>
-            <a:outerShdw sx="100000" sy="100000" kx="0" ky="0" algn="bl" rotWithShape="0" blurRad="76200" dist="25400" dir="5400000">
-              <a:srgbClr val="000000">
-                <a:alpha val="12000"/>
-              </a:srgbClr>
-            </a:outerShdw>
-          </a:effectLst>
-        </p:spPr>
-      </p:sp>
-      <p:sp>
-        <p:nvSpPr>
-          <p:cNvPr id="6" name="Text 3"/>
-          <p:cNvSpPr/>
-          <p:nvPr/>
-        </p:nvSpPr>
-        <p:spPr>
-          <a:xfrm>
-            <a:off x="731520" y="1435608"/>
-            <a:ext cx="7680960" cy="1499616"/>
+          <p:cNvPr id="5" name="Text 2"/>
+          <p:cNvSpPr/>
+          <p:nvPr/>
+        </p:nvSpPr>
+        <p:spPr>
+          <a:xfrm>
+            <a:off x="548640" y="1325880"/>
+            <a:ext cx="8046720" cy="1097280"/>
           </a:xfrm>
           <a:prstGeom prst="rect">
             <a:avLst/>
@@ -2706,12 +3033,8 @@
           </a:bodyPr>
           <a:lstStyle/>
           <a:p>
-            <a:pPr marL="342900" indent="-342900">
-              <a:spcAft>
-                <a:spcPts val="600"/>
-              </a:spcAft>
-              <a:buSzPct val="100000"/>
-              <a:buChar char="•"/>
+            <a:pPr indent="0" marL="0">
+              <a:buNone/>
             </a:pPr>
             <a:r>
               <a:rPr lang="en-US" sz="1400" dirty="0">
@@ -2722,17 +3045,13 @@
                 <a:ea typeface="Calibri" pitchFamily="34" charset="-122"/>
                 <a:cs typeface="Calibri" pitchFamily="34" charset="-120"/>
               </a:rPr>
-              <a:t>OWASP Top 10 (2025) — most critical web risks</a:t>
+              <a:t>Type a filename below, or pick a preset. The resolved path is computed live, not looked up.</a:t>
             </a:r>
             <a:endParaRPr lang="en-US" sz="1400" dirty="0"/>
           </a:p>
           <a:p>
-            <a:pPr marL="342900" indent="-342900">
-              <a:spcAft>
-                <a:spcPts val="600"/>
-              </a:spcAft>
-              <a:buSzPct val="100000"/>
-              <a:buChar char="•"/>
+            <a:pPr indent="0" marL="0">
+              <a:buNone/>
             </a:pPr>
             <a:r>
               <a:rPr lang="en-US" sz="1400" dirty="0">
@@ -2743,87 +3062,45 @@
                 <a:ea typeface="Calibri" pitchFamily="34" charset="-122"/>
                 <a:cs typeface="Calibri" pitchFamily="34" charset="-120"/>
               </a:rPr>
-              <a:t>OWASP LLM Top 10 (2025) — AI app risks</a:t>
+              <a:t>Try it live: /sim/path-traversal (interactive simulation, web only)</a:t>
             </a:r>
             <a:endParaRPr lang="en-US" sz="1400" dirty="0"/>
           </a:p>
-          <a:p>
-            <a:pPr marL="342900" indent="-342900">
-              <a:spcAft>
-                <a:spcPts val="600"/>
-              </a:spcAft>
-              <a:buSzPct val="100000"/>
-              <a:buChar char="•"/>
-            </a:pPr>
-            <a:r>
-              <a:rPr lang="en-US" sz="1400" dirty="0">
-                <a:solidFill>
-                  <a:srgbClr val="1F2937"/>
+        </p:txBody>
+      </p:sp>
+      <p:sp>
+        <p:nvSpPr>
+          <p:cNvPr id="6" name="Text 3"/>
+          <p:cNvSpPr/>
+          <p:nvPr/>
+        </p:nvSpPr>
+        <p:spPr>
+          <a:xfrm>
+            <a:off x="457200" y="4800600"/>
+            <a:ext cx="6949440" cy="274320"/>
+          </a:xfrm>
+          <a:prstGeom prst="rect">
+            <a:avLst/>
+          </a:prstGeom>
+          <a:noFill/>
+          <a:ln/>
+        </p:spPr>
+        <p:txBody>
+          <a:bodyPr wrap="square" lIns="0" tIns="0" rIns="0" bIns="0" rtlCol="0" anchor="ctr"/>
+          <a:lstStyle/>
+          <a:p>
+            <a:pPr indent="0" marL="0">
+              <a:buNone/>
+            </a:pPr>
+            <a:r>
+              <a:rPr lang="en-US" sz="900" dirty="0">
+                <a:solidFill>
+                  <a:srgbClr val="64748B"/>
                 </a:solidFill>
                 <a:latin typeface="Calibri" pitchFamily="34" charset="0"/>
                 <a:ea typeface="Calibri" pitchFamily="34" charset="-122"/>
                 <a:cs typeface="Calibri" pitchFamily="34" charset="-120"/>
               </a:rPr>
-              <a:t>MITRE CWE — catalogue of weaknesses (this week's finding maps to CWE-501, Trust Boundary Violation)</a:t>
-            </a:r>
-            <a:endParaRPr lang="en-US" sz="1400" dirty="0"/>
-          </a:p>
-          <a:p>
-            <a:pPr marL="342900" indent="-342900">
-              <a:spcAft>
-                <a:spcPts val="600"/>
-              </a:spcAft>
-              <a:buSzPct val="100000"/>
-              <a:buChar char="•"/>
-            </a:pPr>
-            <a:r>
-              <a:rPr lang="en-US" sz="1400" dirty="0">
-                <a:solidFill>
-                  <a:srgbClr val="1F2937"/>
-                </a:solidFill>
-                <a:latin typeface="Calibri" pitchFamily="34" charset="0"/>
-                <a:ea typeface="Calibri" pitchFamily="34" charset="-122"/>
-                <a:cs typeface="Calibri" pitchFamily="34" charset="-120"/>
-              </a:rPr>
-              <a:t>MITRE ATT&amp;CK — adversary tactics &amp; techniques</a:t>
-            </a:r>
-            <a:endParaRPr lang="en-US" sz="1400" dirty="0"/>
-          </a:p>
-        </p:txBody>
-      </p:sp>
-      <p:sp>
-        <p:nvSpPr>
-          <p:cNvPr id="7" name="Text 4"/>
-          <p:cNvSpPr/>
-          <p:nvPr/>
-        </p:nvSpPr>
-        <p:spPr>
-          <a:xfrm>
-            <a:off x="457200" y="4800600"/>
-            <a:ext cx="6949440" cy="274320"/>
-          </a:xfrm>
-          <a:prstGeom prst="rect">
-            <a:avLst/>
-          </a:prstGeom>
-          <a:noFill/>
-          <a:ln/>
-        </p:spPr>
-        <p:txBody>
-          <a:bodyPr wrap="square" lIns="0" tIns="0" rIns="0" bIns="0" rtlCol="0" anchor="ctr"/>
-          <a:lstStyle/>
-          <a:p>
-            <a:pPr indent="0" marL="0">
-              <a:buNone/>
-            </a:pPr>
-            <a:r>
-              <a:rPr lang="en-US" sz="900" dirty="0">
-                <a:solidFill>
-                  <a:srgbClr val="64748B"/>
-                </a:solidFill>
-                <a:latin typeface="Calibri" pitchFamily="34" charset="0"/>
-                <a:ea typeface="Calibri" pitchFamily="34" charset="-122"/>
-                <a:cs typeface="Calibri" pitchFamily="34" charset="-120"/>
-              </a:rPr>
               <a:t>Software Security · Week 1</a:t>
             </a:r>
             <a:endParaRPr lang="en-US" sz="900" dirty="0"/>
@@ -2832,7 +3109,7 @@
       </p:sp>
       <p:pic>
         <p:nvPicPr>
-          <p:cNvPr id="8" name="Image 1" descr="/Users/pop7/Library/CloudStorage/OneDrive-MonsterConnectCo.,Ltd/Lecture/KOSEN69 - software-security/slides/pptx/assets/logo-small.png">    </p:cNvPr>
+          <p:cNvPr id="7" name="Image 1" descr="/Users/pop7/Library/CloudStorage/OneDrive-MonsterConnectCo.,Ltd/Lecture/KOSEN69 - software-security/slides/pptx/assets/logo-small.png">    </p:cNvPr>
           <p:cNvPicPr>
             <a:picLocks noChangeAspect="1"/>
           </p:cNvPicPr>
@@ -2970,7 +3247,7 @@
                 <a:ea typeface="Arial" pitchFamily="34" charset="-122"/>
                 <a:cs typeface="Arial" pitchFamily="34" charset="-120"/>
               </a:rPr>
-              <a:t>Secure by Design</a:t>
+              <a:t>STRIDE</a:t>
             </a:r>
             <a:endParaRPr lang="en-US" sz="2600" dirty="0"/>
           </a:p>
@@ -2978,43 +3255,14 @@
       </p:sp>
       <p:sp>
         <p:nvSpPr>
-          <p:cNvPr id="5" name="Shape 2"/>
-          <p:cNvSpPr/>
-          <p:nvPr/>
-        </p:nvSpPr>
-        <p:spPr>
-          <a:xfrm>
-            <a:off x="457200" y="1325880"/>
-            <a:ext cx="8229600" cy="2029968"/>
-          </a:xfrm>
-          <a:prstGeom prst="roundRect">
-            <a:avLst>
-              <a:gd name="adj" fmla="val 3604"/>
-            </a:avLst>
-          </a:prstGeom>
-          <a:solidFill>
-            <a:srgbClr val="F1F5F9"/>
-          </a:solidFill>
-          <a:ln/>
-          <a:effectLst>
-            <a:outerShdw sx="100000" sy="100000" kx="0" ky="0" algn="bl" rotWithShape="0" blurRad="76200" dist="25400" dir="5400000">
-              <a:srgbClr val="000000">
-                <a:alpha val="12000"/>
-              </a:srgbClr>
-            </a:outerShdw>
-          </a:effectLst>
-        </p:spPr>
-      </p:sp>
-      <p:sp>
-        <p:nvSpPr>
-          <p:cNvPr id="6" name="Text 3"/>
-          <p:cNvSpPr/>
-          <p:nvPr/>
-        </p:nvSpPr>
-        <p:spPr>
-          <a:xfrm>
-            <a:off x="731520" y="1435608"/>
-            <a:ext cx="7680960" cy="1810512"/>
+          <p:cNvPr id="5" name="Text 2"/>
+          <p:cNvSpPr/>
+          <p:nvPr/>
+        </p:nvSpPr>
+        <p:spPr>
+          <a:xfrm>
+            <a:off x="548640" y="1325880"/>
+            <a:ext cx="8046720" cy="1371600"/>
           </a:xfrm>
           <a:prstGeom prst="rect">
             <a:avLst/>
@@ -3028,12 +3276,8 @@
           </a:bodyPr>
           <a:lstStyle/>
           <a:p>
-            <a:pPr marL="342900" indent="-342900">
-              <a:spcAft>
-                <a:spcPts val="600"/>
-              </a:spcAft>
-              <a:buSzPct val="100000"/>
-              <a:buChar char="•"/>
+            <a:pPr indent="0" marL="0">
+              <a:buNone/>
             </a:pPr>
             <a:r>
               <a:rPr lang="en-US" sz="1400" dirty="0">
@@ -3044,129 +3288,45 @@
                 <a:ea typeface="Calibri" pitchFamily="34" charset="-122"/>
                 <a:cs typeface="Calibri" pitchFamily="34" charset="-120"/>
               </a:rPr>
-              <a:t>CISA "Secure by Design": safety is the vendor's job, on by default</a:t>
+              <a:t>See diagram: Six STRIDE categories, each mapped to the property it violates. Spoofing violates authentication. Tampering violates integrity. Repudiation violates non-repudiation. Information disclosure violates confidentiality. Denial of service violates availability. Elevation of privilege violates authorization. (web only)</a:t>
             </a:r>
             <a:endParaRPr lang="en-US" sz="1400" dirty="0"/>
           </a:p>
-          <a:p>
-            <a:pPr marL="342900" indent="-342900">
-              <a:spcAft>
-                <a:spcPts val="600"/>
-              </a:spcAft>
-              <a:buSzPct val="100000"/>
-              <a:buChar char="•"/>
-            </a:pPr>
-            <a:r>
-              <a:rPr lang="en-US" sz="1400" dirty="0">
-                <a:solidFill>
-                  <a:srgbClr val="1F2937"/>
+        </p:txBody>
+      </p:sp>
+      <p:sp>
+        <p:nvSpPr>
+          <p:cNvPr id="6" name="Text 3"/>
+          <p:cNvSpPr/>
+          <p:nvPr/>
+        </p:nvSpPr>
+        <p:spPr>
+          <a:xfrm>
+            <a:off x="457200" y="4800600"/>
+            <a:ext cx="6949440" cy="274320"/>
+          </a:xfrm>
+          <a:prstGeom prst="rect">
+            <a:avLst/>
+          </a:prstGeom>
+          <a:noFill/>
+          <a:ln/>
+        </p:spPr>
+        <p:txBody>
+          <a:bodyPr wrap="square" lIns="0" tIns="0" rIns="0" bIns="0" rtlCol="0" anchor="ctr"/>
+          <a:lstStyle/>
+          <a:p>
+            <a:pPr indent="0" marL="0">
+              <a:buNone/>
+            </a:pPr>
+            <a:r>
+              <a:rPr lang="en-US" sz="900" dirty="0">
+                <a:solidFill>
+                  <a:srgbClr val="64748B"/>
                 </a:solidFill>
                 <a:latin typeface="Calibri" pitchFamily="34" charset="0"/>
                 <a:ea typeface="Calibri" pitchFamily="34" charset="-122"/>
                 <a:cs typeface="Calibri" pitchFamily="34" charset="-120"/>
               </a:rPr>
-              <a:t>Shift from "patch later" to design out the bug class</a:t>
-            </a:r>
-            <a:endParaRPr lang="en-US" sz="1400" dirty="0"/>
-          </a:p>
-          <a:p>
-            <a:pPr marL="342900" indent="-342900">
-              <a:spcAft>
-                <a:spcPts val="600"/>
-              </a:spcAft>
-              <a:buSzPct val="100000"/>
-              <a:buChar char="•"/>
-            </a:pPr>
-            <a:r>
-              <a:rPr lang="en-US" sz="1400" dirty="0">
-                <a:solidFill>
-                  <a:srgbClr val="1F2937"/>
-                </a:solidFill>
-                <a:latin typeface="Calibri" pitchFamily="34" charset="0"/>
-                <a:ea typeface="Calibri" pitchFamily="34" charset="-122"/>
-                <a:cs typeface="Calibri" pitchFamily="34" charset="-120"/>
-              </a:rPr>
-              <a:t>Industry &amp; government push toward memory-safe languages (more in Wk 11)</a:t>
-            </a:r>
-            <a:endParaRPr lang="en-US" sz="1400" dirty="0"/>
-          </a:p>
-          <a:p>
-            <a:pPr marL="342900" indent="-342900">
-              <a:spcAft>
-                <a:spcPts val="600"/>
-              </a:spcAft>
-              <a:buSzPct val="100000"/>
-              <a:buChar char="•"/>
-            </a:pPr>
-            <a:r>
-              <a:rPr lang="en-US" sz="1400" dirty="0">
-                <a:solidFill>
-                  <a:srgbClr val="1F2937"/>
-                </a:solidFill>
-                <a:latin typeface="Calibri" pitchFamily="34" charset="0"/>
-                <a:ea typeface="Calibri" pitchFamily="34" charset="-122"/>
-                <a:cs typeface="Calibri" pitchFamily="34" charset="-120"/>
-              </a:rPr>
-              <a:t>Some bugs are design flaws, not coding slips → A06: Insecure Design</a:t>
-            </a:r>
-            <a:endParaRPr lang="en-US" sz="1400" dirty="0"/>
-          </a:p>
-          <a:p>
-            <a:pPr marL="342900" indent="-342900">
-              <a:spcAft>
-                <a:spcPts val="600"/>
-              </a:spcAft>
-              <a:buSzPct val="100000"/>
-              <a:buChar char="•"/>
-            </a:pPr>
-            <a:r>
-              <a:rPr lang="en-US" sz="1400" dirty="0">
-                <a:solidFill>
-                  <a:srgbClr val="1F2937"/>
-                </a:solidFill>
-                <a:latin typeface="Calibri" pitchFamily="34" charset="0"/>
-                <a:ea typeface="Calibri" pitchFamily="34" charset="-122"/>
-                <a:cs typeface="Calibri" pitchFamily="34" charset="-120"/>
-              </a:rPr>
-              <a:t>Today's lab makes you do this: after you fix /upload, you'll argue whether your fix closes the class of bug or just this one instance</a:t>
-            </a:r>
-            <a:endParaRPr lang="en-US" sz="1400" dirty="0"/>
-          </a:p>
-        </p:txBody>
-      </p:sp>
-      <p:sp>
-        <p:nvSpPr>
-          <p:cNvPr id="7" name="Text 4"/>
-          <p:cNvSpPr/>
-          <p:nvPr/>
-        </p:nvSpPr>
-        <p:spPr>
-          <a:xfrm>
-            <a:off x="457200" y="4800600"/>
-            <a:ext cx="6949440" cy="274320"/>
-          </a:xfrm>
-          <a:prstGeom prst="rect">
-            <a:avLst/>
-          </a:prstGeom>
-          <a:noFill/>
-          <a:ln/>
-        </p:spPr>
-        <p:txBody>
-          <a:bodyPr wrap="square" lIns="0" tIns="0" rIns="0" bIns="0" rtlCol="0" anchor="ctr"/>
-          <a:lstStyle/>
-          <a:p>
-            <a:pPr indent="0" marL="0">
-              <a:buNone/>
-            </a:pPr>
-            <a:r>
-              <a:rPr lang="en-US" sz="900" dirty="0">
-                <a:solidFill>
-                  <a:srgbClr val="64748B"/>
-                </a:solidFill>
-                <a:latin typeface="Calibri" pitchFamily="34" charset="0"/>
-                <a:ea typeface="Calibri" pitchFamily="34" charset="-122"/>
-                <a:cs typeface="Calibri" pitchFamily="34" charset="-120"/>
-              </a:rPr>
               <a:t>Software Security · Week 1</a:t>
             </a:r>
             <a:endParaRPr lang="en-US" sz="900" dirty="0"/>
@@ -3175,7 +3335,7 @@
       </p:sp>
       <p:pic>
         <p:nvPicPr>
-          <p:cNvPr id="8" name="Image 1" descr="/Users/pop7/Library/CloudStorage/OneDrive-MonsterConnectCo.,Ltd/Lecture/KOSEN69 - software-security/slides/pptx/assets/logo-small.png">    </p:cNvPr>
+          <p:cNvPr id="7" name="Image 1" descr="/Users/pop7/Library/CloudStorage/OneDrive-MonsterConnectCo.,Ltd/Lecture/KOSEN69 - software-security/slides/pptx/assets/logo-small.png">    </p:cNvPr>
           <p:cNvPicPr>
             <a:picLocks noChangeAspect="1"/>
           </p:cNvPicPr>
@@ -3313,7 +3473,7 @@
                 <a:ea typeface="Arial" pitchFamily="34" charset="-122"/>
                 <a:cs typeface="Arial" pitchFamily="34" charset="-120"/>
               </a:rPr>
-              <a:t>🎲 Game — Elevation of Privilege</a:t>
+              <a:t>STRIDE applied to /upload</a:t>
             </a:r>
             <a:endParaRPr lang="en-US" sz="2600" dirty="0"/>
           </a:p>
@@ -3328,11 +3488,11 @@
         <p:spPr>
           <a:xfrm>
             <a:off x="457200" y="1325880"/>
-            <a:ext cx="8229600" cy="1517904"/>
+            <a:ext cx="8229600" cy="2743200"/>
           </a:xfrm>
           <a:prstGeom prst="roundRect">
             <a:avLst>
-              <a:gd name="adj" fmla="val 4819"/>
+              <a:gd name="adj" fmla="val 2667"/>
             </a:avLst>
           </a:prstGeom>
           <a:solidFill>
@@ -3357,7 +3517,7 @@
         <p:spPr>
           <a:xfrm>
             <a:off x="731520" y="1435608"/>
-            <a:ext cx="7680960" cy="1298448"/>
+            <a:ext cx="7680960" cy="2523744"/>
           </a:xfrm>
           <a:prstGeom prst="rect">
             <a:avLst/>
@@ -3387,7 +3547,7 @@
                 <a:ea typeface="Calibri" pitchFamily="34" charset="-122"/>
                 <a:cs typeface="Calibri" pitchFamily="34" charset="-120"/>
               </a:rPr>
-              <a:t>Microsoft's free STRIDE card deck</a:t>
+              <a:t>S — no auth: anyone can upload as "anyone"</a:t>
             </a:r>
             <a:endParaRPr lang="en-US" sz="1400" dirty="0"/>
           </a:p>
@@ -3408,7 +3568,7 @@
                 <a:ea typeface="Calibri" pitchFamily="34" charset="-122"/>
                 <a:cs typeface="Calibri" pitchFamily="34" charset="-120"/>
               </a:rPr>
-              <a:t>Play cards against the sample app's data-flow diagram</a:t>
+              <a:t>T — ../ filename writes outside uploads/ — arbitrary-file-write, not just an overwrite</a:t>
             </a:r>
             <a:endParaRPr lang="en-US" sz="1400" dirty="0"/>
           </a:p>
@@ -3429,7 +3589,7 @@
                 <a:ea typeface="Calibri" pitchFamily="34" charset="-122"/>
                 <a:cs typeface="Calibri" pitchFamily="34" charset="-120"/>
               </a:rPr>
-              <a:t>Each valid threat tied to a real element = a point</a:t>
+              <a:t>R — no logs → can't prove who uploaded the malware</a:t>
             </a:r>
             <a:endParaRPr lang="en-US" sz="1400" dirty="0"/>
           </a:p>
@@ -3450,7 +3610,49 @@
                 <a:ea typeface="Calibri" pitchFamily="34" charset="-122"/>
                 <a:cs typeface="Calibri" pitchFamily="34" charset="-120"/>
               </a:rPr>
-              <a:t>Outcome: a team-built STRIDE model</a:t>
+              <a:t>I — the read path (/files/&lt;name&gt;) is comparatively well-defended (Werkzeug blocks traversal there) — this element's real risk is on the write side, not this letter</a:t>
+            </a:r>
+            <a:endParaRPr lang="en-US" sz="1400" dirty="0"/>
+          </a:p>
+          <a:p>
+            <a:pPr marL="342900" indent="-342900">
+              <a:spcAft>
+                <a:spcPts val="600"/>
+              </a:spcAft>
+              <a:buSzPct val="100000"/>
+              <a:buChar char="•"/>
+            </a:pPr>
+            <a:r>
+              <a:rPr lang="en-US" sz="1400" dirty="0">
+                <a:solidFill>
+                  <a:srgbClr val="1F2937"/>
+                </a:solidFill>
+                <a:latin typeface="Calibri" pitchFamily="34" charset="0"/>
+                <a:ea typeface="Calibri" pitchFamily="34" charset="-122"/>
+                <a:cs typeface="Calibri" pitchFamily="34" charset="-120"/>
+              </a:rPr>
+              <a:t>D — no size limit → fill the disk</a:t>
+            </a:r>
+            <a:endParaRPr lang="en-US" sz="1400" dirty="0"/>
+          </a:p>
+          <a:p>
+            <a:pPr marL="342900" indent="-342900">
+              <a:spcAft>
+                <a:spcPts val="600"/>
+              </a:spcAft>
+              <a:buSzPct val="100000"/>
+              <a:buChar char="•"/>
+            </a:pPr>
+            <a:r>
+              <a:rPr lang="en-US" sz="1400" dirty="0">
+                <a:solidFill>
+                  <a:srgbClr val="1F2937"/>
+                </a:solidFill>
+                <a:latin typeface="Calibri" pitchFamily="34" charset="0"/>
+                <a:ea typeface="Calibri" pitchFamily="34" charset="-122"/>
+                <a:cs typeface="Calibri" pitchFamily="34" charset="-120"/>
+              </a:rPr>
+              <a:t>E — upload shell.php, then request it → code execution</a:t>
             </a:r>
             <a:endParaRPr lang="en-US" sz="1400" dirty="0"/>
           </a:p>
@@ -3635,7 +3837,7 @@
                 <a:ea typeface="Arial" pitchFamily="34" charset="-122"/>
                 <a:cs typeface="Arial" pitchFamily="34" charset="-120"/>
               </a:rPr>
-              <a:t>Lab 0 — Environment setup (once)</a:t>
+              <a:t>Now without the bullet list</a:t>
             </a:r>
             <a:endParaRPr lang="en-US" sz="2600" dirty="0"/>
           </a:p>
@@ -3643,34 +3845,14 @@
       </p:sp>
       <p:sp>
         <p:nvSpPr>
-          <p:cNvPr id="5" name="Shape 2"/>
-          <p:cNvSpPr/>
-          <p:nvPr/>
-        </p:nvSpPr>
-        <p:spPr>
-          <a:xfrm>
-            <a:off x="502920" y="1325880"/>
-            <a:ext cx="384048" cy="384048"/>
-          </a:xfrm>
-          <a:prstGeom prst="ellipse">
-            <a:avLst/>
-          </a:prstGeom>
-          <a:solidFill>
-            <a:srgbClr val="E35205"/>
-          </a:solidFill>
-          <a:ln/>
-        </p:spPr>
-      </p:sp>
-      <p:sp>
-        <p:nvSpPr>
-          <p:cNvPr id="6" name="Text 3"/>
-          <p:cNvSpPr/>
-          <p:nvPr/>
-        </p:nvSpPr>
-        <p:spPr>
-          <a:xfrm>
-            <a:off x="502920" y="1325880"/>
-            <a:ext cx="384048" cy="384048"/>
+          <p:cNvPr id="5" name="Text 2"/>
+          <p:cNvSpPr/>
+          <p:nvPr/>
+        </p:nvSpPr>
+        <p:spPr>
+          <a:xfrm>
+            <a:off x="548640" y="1325880"/>
+            <a:ext cx="8046720" cy="822960"/>
           </a:xfrm>
           <a:prstGeom prst="rect">
             <a:avLst/>
@@ -3679,46 +3861,7 @@
           <a:ln/>
         </p:spPr>
         <p:txBody>
-          <a:bodyPr wrap="square" lIns="0" tIns="0" rIns="0" bIns="0" rtlCol="0" anchor="ctr"/>
-          <a:lstStyle/>
-          <a:p>
-            <a:pPr algn="ctr" indent="0" marL="0">
-              <a:buNone/>
-            </a:pPr>
-            <a:r>
-              <a:rPr lang="en-US" sz="1500" b="1" dirty="0">
-                <a:solidFill>
-                  <a:srgbClr val="0E1726"/>
-                </a:solidFill>
-                <a:latin typeface="Arial" pitchFamily="34" charset="0"/>
-                <a:ea typeface="Arial" pitchFamily="34" charset="-122"/>
-                <a:cs typeface="Arial" pitchFamily="34" charset="-120"/>
-              </a:rPr>
-              <a:t>1</a:t>
-            </a:r>
-            <a:endParaRPr lang="en-US" sz="1500" dirty="0"/>
-          </a:p>
-        </p:txBody>
-      </p:sp>
-      <p:sp>
-        <p:nvSpPr>
-          <p:cNvPr id="7" name="Text 4"/>
-          <p:cNvSpPr/>
-          <p:nvPr/>
-        </p:nvSpPr>
-        <p:spPr>
-          <a:xfrm>
-            <a:off x="1051560" y="1325880"/>
-            <a:ext cx="7589520" cy="402336"/>
-          </a:xfrm>
-          <a:prstGeom prst="rect">
-            <a:avLst/>
-          </a:prstGeom>
-          <a:noFill/>
-          <a:ln/>
-        </p:spPr>
-        <p:txBody>
-          <a:bodyPr wrap="square" lIns="0" tIns="0" rIns="0" bIns="0" rtlCol="0" anchor="ctr">
+          <a:bodyPr wrap="square" lIns="0" tIns="0" rIns="0" bIns="0" rtlCol="0" anchor="t">
             <a:normAutofit/>
           </a:bodyPr>
           <a:lstStyle/>
@@ -3727,7 +3870,7 @@
               <a:buNone/>
             </a:pPr>
             <a:r>
-              <a:rPr lang="en-US" sz="1350" dirty="0">
+              <a:rPr lang="en-US" sz="1400" dirty="0">
                 <a:solidFill>
                   <a:srgbClr val="1F2937"/>
                 </a:solidFill>
@@ -3735,99 +3878,16 @@
                 <a:ea typeface="Calibri" pitchFamily="34" charset="-122"/>
                 <a:cs typeface="Calibri" pitchFamily="34" charset="-120"/>
               </a:rPr>
-              <a:t>Docker Desktop (Win/macOS/Linux) — runs every lab target</a:t>
-            </a:r>
-            <a:endParaRPr lang="en-US" sz="1350" dirty="0"/>
-          </a:p>
-        </p:txBody>
-      </p:sp>
-      <p:sp>
-        <p:nvSpPr>
-          <p:cNvPr id="8" name="Shape 5"/>
-          <p:cNvSpPr/>
-          <p:nvPr/>
-        </p:nvSpPr>
-        <p:spPr>
-          <a:xfrm>
-            <a:off x="502920" y="1801368"/>
-            <a:ext cx="384048" cy="384048"/>
-          </a:xfrm>
-          <a:prstGeom prst="ellipse">
-            <a:avLst/>
-          </a:prstGeom>
-          <a:solidFill>
-            <a:srgbClr val="E35205"/>
-          </a:solidFill>
-          <a:ln/>
-        </p:spPr>
-      </p:sp>
-      <p:sp>
-        <p:nvSpPr>
-          <p:cNvPr id="9" name="Text 6"/>
-          <p:cNvSpPr/>
-          <p:nvPr/>
-        </p:nvSpPr>
-        <p:spPr>
-          <a:xfrm>
-            <a:off x="502920" y="1801368"/>
-            <a:ext cx="384048" cy="384048"/>
-          </a:xfrm>
-          <a:prstGeom prst="rect">
-            <a:avLst/>
-          </a:prstGeom>
-          <a:noFill/>
-          <a:ln/>
-        </p:spPr>
-        <p:txBody>
-          <a:bodyPr wrap="square" lIns="0" tIns="0" rIns="0" bIns="0" rtlCol="0" anchor="ctr"/>
-          <a:lstStyle/>
-          <a:p>
-            <a:pPr algn="ctr" indent="0" marL="0">
-              <a:buNone/>
-            </a:pPr>
-            <a:r>
-              <a:rPr lang="en-US" sz="1500" b="1" dirty="0">
-                <a:solidFill>
-                  <a:srgbClr val="0E1726"/>
-                </a:solidFill>
-                <a:latin typeface="Arial" pitchFamily="34" charset="0"/>
-                <a:ea typeface="Arial" pitchFamily="34" charset="-122"/>
-                <a:cs typeface="Arial" pitchFamily="34" charset="-120"/>
-              </a:rPr>
-              <a:t>2</a:t>
-            </a:r>
-            <a:endParaRPr lang="en-US" sz="1500" dirty="0"/>
-          </a:p>
-        </p:txBody>
-      </p:sp>
-      <p:sp>
-        <p:nvSpPr>
-          <p:cNvPr id="10" name="Text 7"/>
-          <p:cNvSpPr/>
-          <p:nvPr/>
-        </p:nvSpPr>
-        <p:spPr>
-          <a:xfrm>
-            <a:off x="1051560" y="1801368"/>
-            <a:ext cx="7589520" cy="402336"/>
-          </a:xfrm>
-          <a:prstGeom prst="rect">
-            <a:avLst/>
-          </a:prstGeom>
-          <a:noFill/>
-          <a:ln/>
-        </p:spPr>
-        <p:txBody>
-          <a:bodyPr wrap="square" lIns="0" tIns="0" rIns="0" bIns="0" rtlCol="0" anchor="ctr">
-            <a:normAutofit/>
-          </a:bodyPr>
-          <a:lstStyle/>
+              <a:t>Same six findings, letters hidden. Guess before it reveals.</a:t>
+            </a:r>
+            <a:endParaRPr lang="en-US" sz="1400" dirty="0"/>
+          </a:p>
           <a:p>
             <a:pPr indent="0" marL="0">
               <a:buNone/>
             </a:pPr>
             <a:r>
-              <a:rPr lang="en-US" sz="1350" dirty="0">
+              <a:rPr lang="en-US" sz="1400" dirty="0">
                 <a:solidFill>
                   <a:srgbClr val="1F2937"/>
                 </a:solidFill>
@@ -3835,42 +3895,22 @@
                 <a:ea typeface="Calibri" pitchFamily="34" charset="-122"/>
                 <a:cs typeface="Calibri" pitchFamily="34" charset="-120"/>
               </a:rPr>
-              <a:t>Browser + proxy: Burp Suite Community or OWASP ZAP</a:t>
-            </a:r>
-            <a:endParaRPr lang="en-US" sz="1350" dirty="0"/>
-          </a:p>
-        </p:txBody>
-      </p:sp>
-      <p:sp>
-        <p:nvSpPr>
-          <p:cNvPr id="11" name="Shape 8"/>
-          <p:cNvSpPr/>
-          <p:nvPr/>
-        </p:nvSpPr>
-        <p:spPr>
-          <a:xfrm>
-            <a:off x="502920" y="2276856"/>
-            <a:ext cx="384048" cy="384048"/>
-          </a:xfrm>
-          <a:prstGeom prst="ellipse">
-            <a:avLst/>
-          </a:prstGeom>
-          <a:solidFill>
-            <a:srgbClr val="E35205"/>
-          </a:solidFill>
-          <a:ln/>
-        </p:spPr>
-      </p:sp>
-      <p:sp>
-        <p:nvSpPr>
-          <p:cNvPr id="12" name="Text 9"/>
-          <p:cNvSpPr/>
-          <p:nvPr/>
-        </p:nvSpPr>
-        <p:spPr>
-          <a:xfrm>
-            <a:off x="502920" y="2276856"/>
-            <a:ext cx="384048" cy="384048"/>
+              <a:t>Try it live: /sim/stride-drill (interactive simulation, web only)</a:t>
+            </a:r>
+            <a:endParaRPr lang="en-US" sz="1400" dirty="0"/>
+          </a:p>
+        </p:txBody>
+      </p:sp>
+      <p:sp>
+        <p:nvSpPr>
+          <p:cNvPr id="6" name="Text 3"/>
+          <p:cNvSpPr/>
+          <p:nvPr/>
+        </p:nvSpPr>
+        <p:spPr>
+          <a:xfrm>
+            <a:off x="457200" y="4800600"/>
+            <a:ext cx="6949440" cy="274320"/>
           </a:xfrm>
           <a:prstGeom prst="rect">
             <a:avLst/>
@@ -3880,300 +3920,20 @@
         </p:spPr>
         <p:txBody>
           <a:bodyPr wrap="square" lIns="0" tIns="0" rIns="0" bIns="0" rtlCol="0" anchor="ctr"/>
-          <a:lstStyle/>
-          <a:p>
-            <a:pPr algn="ctr" indent="0" marL="0">
-              <a:buNone/>
-            </a:pPr>
-            <a:r>
-              <a:rPr lang="en-US" sz="1500" b="1" dirty="0">
-                <a:solidFill>
-                  <a:srgbClr val="0E1726"/>
-                </a:solidFill>
-                <a:latin typeface="Arial" pitchFamily="34" charset="0"/>
-                <a:ea typeface="Arial" pitchFamily="34" charset="-122"/>
-                <a:cs typeface="Arial" pitchFamily="34" charset="-120"/>
-              </a:rPr>
-              <a:t>3</a:t>
-            </a:r>
-            <a:endParaRPr lang="en-US" sz="1500" dirty="0"/>
-          </a:p>
-        </p:txBody>
-      </p:sp>
-      <p:sp>
-        <p:nvSpPr>
-          <p:cNvPr id="13" name="Text 10"/>
-          <p:cNvSpPr/>
-          <p:nvPr/>
-        </p:nvSpPr>
-        <p:spPr>
-          <a:xfrm>
-            <a:off x="1051560" y="2276856"/>
-            <a:ext cx="7589520" cy="402336"/>
-          </a:xfrm>
-          <a:prstGeom prst="rect">
-            <a:avLst/>
-          </a:prstGeom>
-          <a:noFill/>
-          <a:ln/>
-        </p:spPr>
-        <p:txBody>
-          <a:bodyPr wrap="square" lIns="0" tIns="0" rIns="0" bIns="0" rtlCol="0" anchor="ctr">
-            <a:normAutofit/>
-          </a:bodyPr>
           <a:lstStyle/>
           <a:p>
             <a:pPr indent="0" marL="0">
               <a:buNone/>
             </a:pPr>
             <a:r>
-              <a:rPr lang="en-US" sz="1350" dirty="0">
-                <a:solidFill>
-                  <a:srgbClr val="1F2937"/>
+              <a:rPr lang="en-US" sz="900" dirty="0">
+                <a:solidFill>
+                  <a:srgbClr val="64748B"/>
                 </a:solidFill>
                 <a:latin typeface="Calibri" pitchFamily="34" charset="0"/>
                 <a:ea typeface="Calibri" pitchFamily="34" charset="-122"/>
                 <a:cs typeface="Calibri" pitchFamily="34" charset="-120"/>
               </a:rPr>
-              <a:t>Toolbox container (for W11 + recon): docker build -t softsec-toolbox labs/toolbox</a:t>
-            </a:r>
-            <a:endParaRPr lang="en-US" sz="1350" dirty="0"/>
-          </a:p>
-        </p:txBody>
-      </p:sp>
-      <p:sp>
-        <p:nvSpPr>
-          <p:cNvPr id="14" name="Shape 11"/>
-          <p:cNvSpPr/>
-          <p:nvPr/>
-        </p:nvSpPr>
-        <p:spPr>
-          <a:xfrm>
-            <a:off x="502920" y="2752344"/>
-            <a:ext cx="384048" cy="384048"/>
-          </a:xfrm>
-          <a:prstGeom prst="ellipse">
-            <a:avLst/>
-          </a:prstGeom>
-          <a:solidFill>
-            <a:srgbClr val="E35205"/>
-          </a:solidFill>
-          <a:ln/>
-        </p:spPr>
-      </p:sp>
-      <p:sp>
-        <p:nvSpPr>
-          <p:cNvPr id="15" name="Text 12"/>
-          <p:cNvSpPr/>
-          <p:nvPr/>
-        </p:nvSpPr>
-        <p:spPr>
-          <a:xfrm>
-            <a:off x="502920" y="2752344"/>
-            <a:ext cx="384048" cy="384048"/>
-          </a:xfrm>
-          <a:prstGeom prst="rect">
-            <a:avLst/>
-          </a:prstGeom>
-          <a:noFill/>
-          <a:ln/>
-        </p:spPr>
-        <p:txBody>
-          <a:bodyPr wrap="square" lIns="0" tIns="0" rIns="0" bIns="0" rtlCol="0" anchor="ctr"/>
-          <a:lstStyle/>
-          <a:p>
-            <a:pPr algn="ctr" indent="0" marL="0">
-              <a:buNone/>
-            </a:pPr>
-            <a:r>
-              <a:rPr lang="en-US" sz="1500" b="1" dirty="0">
-                <a:solidFill>
-                  <a:srgbClr val="0E1726"/>
-                </a:solidFill>
-                <a:latin typeface="Arial" pitchFamily="34" charset="0"/>
-                <a:ea typeface="Arial" pitchFamily="34" charset="-122"/>
-                <a:cs typeface="Arial" pitchFamily="34" charset="-120"/>
-              </a:rPr>
-              <a:t>4</a:t>
-            </a:r>
-            <a:endParaRPr lang="en-US" sz="1500" dirty="0"/>
-          </a:p>
-        </p:txBody>
-      </p:sp>
-      <p:sp>
-        <p:nvSpPr>
-          <p:cNvPr id="16" name="Text 13"/>
-          <p:cNvSpPr/>
-          <p:nvPr/>
-        </p:nvSpPr>
-        <p:spPr>
-          <a:xfrm>
-            <a:off x="1051560" y="2752344"/>
-            <a:ext cx="7589520" cy="402336"/>
-          </a:xfrm>
-          <a:prstGeom prst="rect">
-            <a:avLst/>
-          </a:prstGeom>
-          <a:noFill/>
-          <a:ln/>
-        </p:spPr>
-        <p:txBody>
-          <a:bodyPr wrap="square" lIns="0" tIns="0" rIns="0" bIns="0" rtlCol="0" anchor="ctr">
-            <a:normAutofit/>
-          </a:bodyPr>
-          <a:lstStyle/>
-          <a:p>
-            <a:pPr indent="0" marL="0">
-              <a:buNone/>
-            </a:pPr>
-            <a:r>
-              <a:rPr lang="en-US" sz="1350" dirty="0">
-                <a:solidFill>
-                  <a:srgbClr val="1F2937"/>
-                </a:solidFill>
-                <a:latin typeface="Calibri" pitchFamily="34" charset="0"/>
-                <a:ea typeface="Calibri" pitchFamily="34" charset="-122"/>
-                <a:cs typeface="Calibri" pitchFamily="34" charset="-120"/>
-              </a:rPr>
-              <a:t>Optional fallback: a Kali/Ubuntu VM if your host can't run Docker</a:t>
-            </a:r>
-            <a:endParaRPr lang="en-US" sz="1350" dirty="0"/>
-          </a:p>
-        </p:txBody>
-      </p:sp>
-      <p:sp>
-        <p:nvSpPr>
-          <p:cNvPr id="17" name="Shape 14"/>
-          <p:cNvSpPr/>
-          <p:nvPr/>
-        </p:nvSpPr>
-        <p:spPr>
-          <a:xfrm>
-            <a:off x="502920" y="3227832"/>
-            <a:ext cx="384048" cy="384048"/>
-          </a:xfrm>
-          <a:prstGeom prst="ellipse">
-            <a:avLst/>
-          </a:prstGeom>
-          <a:solidFill>
-            <a:srgbClr val="E35205"/>
-          </a:solidFill>
-          <a:ln/>
-        </p:spPr>
-      </p:sp>
-      <p:sp>
-        <p:nvSpPr>
-          <p:cNvPr id="18" name="Text 15"/>
-          <p:cNvSpPr/>
-          <p:nvPr/>
-        </p:nvSpPr>
-        <p:spPr>
-          <a:xfrm>
-            <a:off x="502920" y="3227832"/>
-            <a:ext cx="384048" cy="384048"/>
-          </a:xfrm>
-          <a:prstGeom prst="rect">
-            <a:avLst/>
-          </a:prstGeom>
-          <a:noFill/>
-          <a:ln/>
-        </p:spPr>
-        <p:txBody>
-          <a:bodyPr wrap="square" lIns="0" tIns="0" rIns="0" bIns="0" rtlCol="0" anchor="ctr"/>
-          <a:lstStyle/>
-          <a:p>
-            <a:pPr algn="ctr" indent="0" marL="0">
-              <a:buNone/>
-            </a:pPr>
-            <a:r>
-              <a:rPr lang="en-US" sz="1500" b="1" dirty="0">
-                <a:solidFill>
-                  <a:srgbClr val="0E1726"/>
-                </a:solidFill>
-                <a:latin typeface="Arial" pitchFamily="34" charset="0"/>
-                <a:ea typeface="Arial" pitchFamily="34" charset="-122"/>
-                <a:cs typeface="Arial" pitchFamily="34" charset="-120"/>
-              </a:rPr>
-              <a:t>5</a:t>
-            </a:r>
-            <a:endParaRPr lang="en-US" sz="1500" dirty="0"/>
-          </a:p>
-        </p:txBody>
-      </p:sp>
-      <p:sp>
-        <p:nvSpPr>
-          <p:cNvPr id="19" name="Text 16"/>
-          <p:cNvSpPr/>
-          <p:nvPr/>
-        </p:nvSpPr>
-        <p:spPr>
-          <a:xfrm>
-            <a:off x="1051560" y="3227832"/>
-            <a:ext cx="7589520" cy="402336"/>
-          </a:xfrm>
-          <a:prstGeom prst="rect">
-            <a:avLst/>
-          </a:prstGeom>
-          <a:noFill/>
-          <a:ln/>
-        </p:spPr>
-        <p:txBody>
-          <a:bodyPr wrap="square" lIns="0" tIns="0" rIns="0" bIns="0" rtlCol="0" anchor="ctr">
-            <a:normAutofit/>
-          </a:bodyPr>
-          <a:lstStyle/>
-          <a:p>
-            <a:pPr indent="0" marL="0">
-              <a:buNone/>
-            </a:pPr>
-            <a:r>
-              <a:rPr lang="en-US" sz="1350" dirty="0">
-                <a:solidFill>
-                  <a:srgbClr val="1F2937"/>
-                </a:solidFill>
-                <a:latin typeface="Calibri" pitchFamily="34" charset="0"/>
-                <a:ea typeface="Calibri" pitchFamily="34" charset="-122"/>
-                <a:cs typeface="Calibri" pitchFamily="34" charset="-120"/>
-              </a:rPr>
-              <a:t>Verify: docker run hello-world, git --version</a:t>
-            </a:r>
-            <a:endParaRPr lang="en-US" sz="1350" dirty="0"/>
-          </a:p>
-        </p:txBody>
-      </p:sp>
-      <p:sp>
-        <p:nvSpPr>
-          <p:cNvPr id="20" name="Text 17"/>
-          <p:cNvSpPr/>
-          <p:nvPr/>
-        </p:nvSpPr>
-        <p:spPr>
-          <a:xfrm>
-            <a:off x="457200" y="4800600"/>
-            <a:ext cx="6949440" cy="274320"/>
-          </a:xfrm>
-          <a:prstGeom prst="rect">
-            <a:avLst/>
-          </a:prstGeom>
-          <a:noFill/>
-          <a:ln/>
-        </p:spPr>
-        <p:txBody>
-          <a:bodyPr wrap="square" lIns="0" tIns="0" rIns="0" bIns="0" rtlCol="0" anchor="ctr"/>
-          <a:lstStyle/>
-          <a:p>
-            <a:pPr indent="0" marL="0">
-              <a:buNone/>
-            </a:pPr>
-            <a:r>
-              <a:rPr lang="en-US" sz="900" dirty="0">
-                <a:solidFill>
-                  <a:srgbClr val="64748B"/>
-                </a:solidFill>
-                <a:latin typeface="Calibri" pitchFamily="34" charset="0"/>
-                <a:ea typeface="Calibri" pitchFamily="34" charset="-122"/>
-                <a:cs typeface="Calibri" pitchFamily="34" charset="-120"/>
-              </a:rPr>
               <a:t>Software Security · Week 1</a:t>
             </a:r>
             <a:endParaRPr lang="en-US" sz="900" dirty="0"/>
@@ -4182,7 +3942,7 @@
       </p:sp>
       <p:pic>
         <p:nvPicPr>
-          <p:cNvPr id="21" name="Image 1" descr="/Users/pop7/Library/CloudStorage/OneDrive-MonsterConnectCo.,Ltd/Lecture/KOSEN69 - software-security/slides/pptx/assets/logo-small.png">    </p:cNvPr>
+          <p:cNvPr id="7" name="Image 1" descr="/Users/pop7/Library/CloudStorage/OneDrive-MonsterConnectCo.,Ltd/Lecture/KOSEN69 - software-security/slides/pptx/assets/logo-small.png">    </p:cNvPr>
           <p:cNvPicPr>
             <a:picLocks noChangeAspect="1"/>
           </p:cNvPicPr>
@@ -4320,7 +4080,7 @@
                 <a:ea typeface="Arial" pitchFamily="34" charset="-122"/>
                 <a:cs typeface="Arial" pitchFamily="34" charset="-120"/>
               </a:rPr>
-              <a:t>Lab 1 — Threat-model a sample app</a:t>
+              <a:t>The landscape you'll use all term</a:t>
             </a:r>
             <a:endParaRPr lang="en-US" sz="2600" dirty="0"/>
           </a:p>
@@ -4335,17 +4095,24 @@
         <p:spPr>
           <a:xfrm>
             <a:off x="457200" y="1325880"/>
-            <a:ext cx="8229600" cy="822960"/>
+            <a:ext cx="8229600" cy="1719072"/>
           </a:xfrm>
           <a:prstGeom prst="roundRect">
             <a:avLst>
-              <a:gd name="adj" fmla="val 8889"/>
+              <a:gd name="adj" fmla="val 4255"/>
             </a:avLst>
           </a:prstGeom>
           <a:solidFill>
-            <a:srgbClr val="E8EDF3"/>
+            <a:srgbClr val="F1F5F9"/>
           </a:solidFill>
           <a:ln/>
+          <a:effectLst>
+            <a:outerShdw sx="100000" sy="100000" kx="0" ky="0" algn="bl" rotWithShape="0" blurRad="76200" dist="25400" dir="5400000">
+              <a:srgbClr val="000000">
+                <a:alpha val="12000"/>
+              </a:srgbClr>
+            </a:outerShdw>
+          </a:effectLst>
         </p:spPr>
       </p:sp>
       <p:sp>
@@ -4356,8 +4123,8 @@
         </p:nvSpPr>
         <p:spPr>
           <a:xfrm>
-            <a:off x="731520" y="1325880"/>
-            <a:ext cx="7680960" cy="822960"/>
+            <a:off x="731520" y="1435608"/>
+            <a:ext cx="7680960" cy="1499616"/>
           </a:xfrm>
           <a:prstGeom prst="rect">
             <a:avLst/>
@@ -4366,116 +4133,41 @@
           <a:ln/>
         </p:spPr>
         <p:txBody>
-          <a:bodyPr wrap="square" lIns="0" tIns="0" rIns="0" bIns="0" rtlCol="0" anchor="ctr">
+          <a:bodyPr wrap="square" lIns="0" tIns="0" rIns="0" bIns="0" rtlCol="0" anchor="t">
             <a:normAutofit/>
           </a:bodyPr>
           <a:lstStyle/>
           <a:p>
-            <a:pPr indent="0" marL="0">
-              <a:buNone/>
-            </a:pPr>
-            <a:r>
-              <a:rPr lang="en-US" sz="1400" i="1" dirty="0">
-                <a:solidFill>
-                  <a:srgbClr val="E35205"/>
+            <a:pPr marL="342900" indent="-342900">
+              <a:spcAft>
+                <a:spcPts val="600"/>
+              </a:spcAft>
+              <a:buSzPct val="100000"/>
+              <a:buChar char="•"/>
+            </a:pPr>
+            <a:r>
+              <a:rPr lang="en-US" sz="1400" dirty="0">
+                <a:solidFill>
+                  <a:srgbClr val="1F2937"/>
                 </a:solidFill>
                 <a:latin typeface="Calibri" pitchFamily="34" charset="0"/>
                 <a:ea typeface="Calibri" pitchFamily="34" charset="-122"/>
                 <a:cs typeface="Calibri" pitchFamily="34" charset="-120"/>
               </a:rPr>
-              <a:t>📋 Worksheet 1 — labs/week01-threat-modeling/worksheet.md (Part 3) · kickoff: docker compose up → http://localhost:8080</a:t>
+              <a:t>OWASP Top 10 (2025) — most critical web risks</a:t>
             </a:r>
             <a:endParaRPr lang="en-US" sz="1400" dirty="0"/>
           </a:p>
-        </p:txBody>
-      </p:sp>
-      <p:sp>
-        <p:nvSpPr>
-          <p:cNvPr id="7" name="Shape 4"/>
-          <p:cNvSpPr/>
-          <p:nvPr/>
-        </p:nvSpPr>
-        <p:spPr>
-          <a:xfrm>
-            <a:off x="502920" y="2313432"/>
-            <a:ext cx="384048" cy="384048"/>
-          </a:xfrm>
-          <a:prstGeom prst="ellipse">
-            <a:avLst/>
-          </a:prstGeom>
-          <a:solidFill>
-            <a:srgbClr val="E35205"/>
-          </a:solidFill>
-          <a:ln/>
-        </p:spPr>
-      </p:sp>
-      <p:sp>
-        <p:nvSpPr>
-          <p:cNvPr id="8" name="Text 5"/>
-          <p:cNvSpPr/>
-          <p:nvPr/>
-        </p:nvSpPr>
-        <p:spPr>
-          <a:xfrm>
-            <a:off x="502920" y="2313432"/>
-            <a:ext cx="384048" cy="384048"/>
-          </a:xfrm>
-          <a:prstGeom prst="rect">
-            <a:avLst/>
-          </a:prstGeom>
-          <a:noFill/>
-          <a:ln/>
-        </p:spPr>
-        <p:txBody>
-          <a:bodyPr wrap="square" lIns="0" tIns="0" rIns="0" bIns="0" rtlCol="0" anchor="ctr"/>
-          <a:lstStyle/>
-          <a:p>
-            <a:pPr algn="ctr" indent="0" marL="0">
-              <a:buNone/>
-            </a:pPr>
-            <a:r>
-              <a:rPr lang="en-US" sz="1500" b="1" dirty="0">
-                <a:solidFill>
-                  <a:srgbClr val="0E1726"/>
-                </a:solidFill>
-                <a:latin typeface="Arial" pitchFamily="34" charset="0"/>
-                <a:ea typeface="Arial" pitchFamily="34" charset="-122"/>
-                <a:cs typeface="Arial" pitchFamily="34" charset="-120"/>
-              </a:rPr>
-              <a:t>1</a:t>
-            </a:r>
-            <a:endParaRPr lang="en-US" sz="1500" dirty="0"/>
-          </a:p>
-        </p:txBody>
-      </p:sp>
-      <p:sp>
-        <p:nvSpPr>
-          <p:cNvPr id="9" name="Text 6"/>
-          <p:cNvSpPr/>
-          <p:nvPr/>
-        </p:nvSpPr>
-        <p:spPr>
-          <a:xfrm>
-            <a:off x="1051560" y="2313432"/>
-            <a:ext cx="7589520" cy="402336"/>
-          </a:xfrm>
-          <a:prstGeom prst="rect">
-            <a:avLst/>
-          </a:prstGeom>
-          <a:noFill/>
-          <a:ln/>
-        </p:spPr>
-        <p:txBody>
-          <a:bodyPr wrap="square" lIns="0" tIns="0" rIns="0" bIns="0" rtlCol="0" anchor="ctr">
-            <a:normAutofit/>
-          </a:bodyPr>
-          <a:lstStyle/>
-          <a:p>
-            <a:pPr indent="0" marL="0">
-              <a:buNone/>
-            </a:pPr>
-            <a:r>
-              <a:rPr lang="en-US" sz="1350" dirty="0">
+          <a:p>
+            <a:pPr marL="342900" indent="-342900">
+              <a:spcAft>
+                <a:spcPts val="600"/>
+              </a:spcAft>
+              <a:buSzPct val="100000"/>
+              <a:buChar char="•"/>
+            </a:pPr>
+            <a:r>
+              <a:rPr lang="en-US" sz="1400" dirty="0">
                 <a:solidFill>
                   <a:srgbClr val="1F2937"/>
                 </a:solidFill>
@@ -4483,99 +4175,20 @@
                 <a:ea typeface="Calibri" pitchFamily="34" charset="-122"/>
                 <a:cs typeface="Calibri" pitchFamily="34" charset="-120"/>
               </a:rPr>
-              <a:t>Run the app; draw a DFD; apply STRIDE to each element</a:t>
-            </a:r>
-            <a:endParaRPr lang="en-US" sz="1350" dirty="0"/>
-          </a:p>
-        </p:txBody>
-      </p:sp>
-      <p:sp>
-        <p:nvSpPr>
-          <p:cNvPr id="10" name="Shape 7"/>
-          <p:cNvSpPr/>
-          <p:nvPr/>
-        </p:nvSpPr>
-        <p:spPr>
-          <a:xfrm>
-            <a:off x="502920" y="2788920"/>
-            <a:ext cx="384048" cy="384048"/>
-          </a:xfrm>
-          <a:prstGeom prst="ellipse">
-            <a:avLst/>
-          </a:prstGeom>
-          <a:solidFill>
-            <a:srgbClr val="E35205"/>
-          </a:solidFill>
-          <a:ln/>
-        </p:spPr>
-      </p:sp>
-      <p:sp>
-        <p:nvSpPr>
-          <p:cNvPr id="11" name="Text 8"/>
-          <p:cNvSpPr/>
-          <p:nvPr/>
-        </p:nvSpPr>
-        <p:spPr>
-          <a:xfrm>
-            <a:off x="502920" y="2788920"/>
-            <a:ext cx="384048" cy="384048"/>
-          </a:xfrm>
-          <a:prstGeom prst="rect">
-            <a:avLst/>
-          </a:prstGeom>
-          <a:noFill/>
-          <a:ln/>
-        </p:spPr>
-        <p:txBody>
-          <a:bodyPr wrap="square" lIns="0" tIns="0" rIns="0" bIns="0" rtlCol="0" anchor="ctr"/>
-          <a:lstStyle/>
-          <a:p>
-            <a:pPr algn="ctr" indent="0" marL="0">
-              <a:buNone/>
-            </a:pPr>
-            <a:r>
-              <a:rPr lang="en-US" sz="1500" b="1" dirty="0">
-                <a:solidFill>
-                  <a:srgbClr val="0E1726"/>
-                </a:solidFill>
-                <a:latin typeface="Arial" pitchFamily="34" charset="0"/>
-                <a:ea typeface="Arial" pitchFamily="34" charset="-122"/>
-                <a:cs typeface="Arial" pitchFamily="34" charset="-120"/>
-              </a:rPr>
-              <a:t>2</a:t>
-            </a:r>
-            <a:endParaRPr lang="en-US" sz="1500" dirty="0"/>
-          </a:p>
-        </p:txBody>
-      </p:sp>
-      <p:sp>
-        <p:nvSpPr>
-          <p:cNvPr id="12" name="Text 9"/>
-          <p:cNvSpPr/>
-          <p:nvPr/>
-        </p:nvSpPr>
-        <p:spPr>
-          <a:xfrm>
-            <a:off x="1051560" y="2788920"/>
-            <a:ext cx="7589520" cy="402336"/>
-          </a:xfrm>
-          <a:prstGeom prst="rect">
-            <a:avLst/>
-          </a:prstGeom>
-          <a:noFill/>
-          <a:ln/>
-        </p:spPr>
-        <p:txBody>
-          <a:bodyPr wrap="square" lIns="0" tIns="0" rIns="0" bIns="0" rtlCol="0" anchor="ctr">
-            <a:normAutofit/>
-          </a:bodyPr>
-          <a:lstStyle/>
-          <a:p>
-            <a:pPr indent="0" marL="0">
-              <a:buNone/>
-            </a:pPr>
-            <a:r>
-              <a:rPr lang="en-US" sz="1350" dirty="0">
+              <a:t>OWASP LLM Top 10 (2025) — AI app risks</a:t>
+            </a:r>
+            <a:endParaRPr lang="en-US" sz="1400" dirty="0"/>
+          </a:p>
+          <a:p>
+            <a:pPr marL="342900" indent="-342900">
+              <a:spcAft>
+                <a:spcPts val="600"/>
+              </a:spcAft>
+              <a:buSzPct val="100000"/>
+              <a:buChar char="•"/>
+            </a:pPr>
+            <a:r>
+              <a:rPr lang="en-US" sz="1400" dirty="0">
                 <a:solidFill>
                   <a:srgbClr val="1F2937"/>
                 </a:solidFill>
@@ -4583,99 +4196,20 @@
                 <a:ea typeface="Calibri" pitchFamily="34" charset="-122"/>
                 <a:cs typeface="Calibri" pitchFamily="34" charset="-120"/>
               </a:rPr>
-              <a:t>Abuse cases: 2 personas × 2 abuse cases</a:t>
-            </a:r>
-            <a:endParaRPr lang="en-US" sz="1350" dirty="0"/>
-          </a:p>
-        </p:txBody>
-      </p:sp>
-      <p:sp>
-        <p:nvSpPr>
-          <p:cNvPr id="13" name="Shape 10"/>
-          <p:cNvSpPr/>
-          <p:nvPr/>
-        </p:nvSpPr>
-        <p:spPr>
-          <a:xfrm>
-            <a:off x="502920" y="3264408"/>
-            <a:ext cx="384048" cy="384048"/>
-          </a:xfrm>
-          <a:prstGeom prst="ellipse">
-            <a:avLst/>
-          </a:prstGeom>
-          <a:solidFill>
-            <a:srgbClr val="E35205"/>
-          </a:solidFill>
-          <a:ln/>
-        </p:spPr>
-      </p:sp>
-      <p:sp>
-        <p:nvSpPr>
-          <p:cNvPr id="14" name="Text 11"/>
-          <p:cNvSpPr/>
-          <p:nvPr/>
-        </p:nvSpPr>
-        <p:spPr>
-          <a:xfrm>
-            <a:off x="502920" y="3264408"/>
-            <a:ext cx="384048" cy="384048"/>
-          </a:xfrm>
-          <a:prstGeom prst="rect">
-            <a:avLst/>
-          </a:prstGeom>
-          <a:noFill/>
-          <a:ln/>
-        </p:spPr>
-        <p:txBody>
-          <a:bodyPr wrap="square" lIns="0" tIns="0" rIns="0" bIns="0" rtlCol="0" anchor="ctr"/>
-          <a:lstStyle/>
-          <a:p>
-            <a:pPr algn="ctr" indent="0" marL="0">
-              <a:buNone/>
-            </a:pPr>
-            <a:r>
-              <a:rPr lang="en-US" sz="1500" b="1" dirty="0">
-                <a:solidFill>
-                  <a:srgbClr val="0E1726"/>
-                </a:solidFill>
-                <a:latin typeface="Arial" pitchFamily="34" charset="0"/>
-                <a:ea typeface="Arial" pitchFamily="34" charset="-122"/>
-                <a:cs typeface="Arial" pitchFamily="34" charset="-120"/>
-              </a:rPr>
-              <a:t>3</a:t>
-            </a:r>
-            <a:endParaRPr lang="en-US" sz="1500" dirty="0"/>
-          </a:p>
-        </p:txBody>
-      </p:sp>
-      <p:sp>
-        <p:nvSpPr>
-          <p:cNvPr id="15" name="Text 12"/>
-          <p:cNvSpPr/>
-          <p:nvPr/>
-        </p:nvSpPr>
-        <p:spPr>
-          <a:xfrm>
-            <a:off x="1051560" y="3264408"/>
-            <a:ext cx="7589520" cy="402336"/>
-          </a:xfrm>
-          <a:prstGeom prst="rect">
-            <a:avLst/>
-          </a:prstGeom>
-          <a:noFill/>
-          <a:ln/>
-        </p:spPr>
-        <p:txBody>
-          <a:bodyPr wrap="square" lIns="0" tIns="0" rIns="0" bIns="0" rtlCol="0" anchor="ctr">
-            <a:normAutofit/>
-          </a:bodyPr>
-          <a:lstStyle/>
-          <a:p>
-            <a:pPr indent="0" marL="0">
-              <a:buNone/>
-            </a:pPr>
-            <a:r>
-              <a:rPr lang="en-US" sz="1350" dirty="0">
+              <a:t>MITRE CWE — catalogue of weaknesses (this week's finding maps to CWE-501, Trust Boundary Violation)</a:t>
+            </a:r>
+            <a:endParaRPr lang="en-US" sz="1400" dirty="0"/>
+          </a:p>
+          <a:p>
+            <a:pPr marL="342900" indent="-342900">
+              <a:spcAft>
+                <a:spcPts val="600"/>
+              </a:spcAft>
+              <a:buSzPct val="100000"/>
+              <a:buChar char="•"/>
+            </a:pPr>
+            <a:r>
+              <a:rPr lang="en-US" sz="1400" dirty="0">
                 <a:solidFill>
                   <a:srgbClr val="1F2937"/>
                 </a:solidFill>
@@ -4683,42 +4217,22 @@
                 <a:ea typeface="Calibri" pitchFamily="34" charset="-122"/>
                 <a:cs typeface="Calibri" pitchFamily="34" charset="-120"/>
               </a:rPr>
-              <a:t>Deep-dive the /upload path-traversal finding</a:t>
-            </a:r>
-            <a:endParaRPr lang="en-US" sz="1350" dirty="0"/>
-          </a:p>
-        </p:txBody>
-      </p:sp>
-      <p:sp>
-        <p:nvSpPr>
-          <p:cNvPr id="16" name="Shape 13"/>
-          <p:cNvSpPr/>
-          <p:nvPr/>
-        </p:nvSpPr>
-        <p:spPr>
-          <a:xfrm>
-            <a:off x="502920" y="3739896"/>
-            <a:ext cx="384048" cy="384048"/>
-          </a:xfrm>
-          <a:prstGeom prst="ellipse">
-            <a:avLst/>
-          </a:prstGeom>
-          <a:solidFill>
-            <a:srgbClr val="E35205"/>
-          </a:solidFill>
-          <a:ln/>
-        </p:spPr>
-      </p:sp>
-      <p:sp>
-        <p:nvSpPr>
-          <p:cNvPr id="17" name="Text 14"/>
-          <p:cNvSpPr/>
-          <p:nvPr/>
-        </p:nvSpPr>
-        <p:spPr>
-          <a:xfrm>
-            <a:off x="502920" y="3739896"/>
-            <a:ext cx="384048" cy="384048"/>
+              <a:t>MITRE ATT&amp;CK — adversary tactics &amp; techniques</a:t>
+            </a:r>
+            <a:endParaRPr lang="en-US" sz="1400" dirty="0"/>
+          </a:p>
+        </p:txBody>
+      </p:sp>
+      <p:sp>
+        <p:nvSpPr>
+          <p:cNvPr id="7" name="Text 4"/>
+          <p:cNvSpPr/>
+          <p:nvPr/>
+        </p:nvSpPr>
+        <p:spPr>
+          <a:xfrm>
+            <a:off x="457200" y="4800600"/>
+            <a:ext cx="6949440" cy="274320"/>
           </a:xfrm>
           <a:prstGeom prst="rect">
             <a:avLst/>
@@ -4728,100 +4242,20 @@
         </p:spPr>
         <p:txBody>
           <a:bodyPr wrap="square" lIns="0" tIns="0" rIns="0" bIns="0" rtlCol="0" anchor="ctr"/>
-          <a:lstStyle/>
-          <a:p>
-            <a:pPr algn="ctr" indent="0" marL="0">
-              <a:buNone/>
-            </a:pPr>
-            <a:r>
-              <a:rPr lang="en-US" sz="1500" b="1" dirty="0">
-                <a:solidFill>
-                  <a:srgbClr val="0E1726"/>
-                </a:solidFill>
-                <a:latin typeface="Arial" pitchFamily="34" charset="0"/>
-                <a:ea typeface="Arial" pitchFamily="34" charset="-122"/>
-                <a:cs typeface="Arial" pitchFamily="34" charset="-120"/>
-              </a:rPr>
-              <a:t>4</a:t>
-            </a:r>
-            <a:endParaRPr lang="en-US" sz="1500" dirty="0"/>
-          </a:p>
-        </p:txBody>
-      </p:sp>
-      <p:sp>
-        <p:nvSpPr>
-          <p:cNvPr id="18" name="Text 15"/>
-          <p:cNvSpPr/>
-          <p:nvPr/>
-        </p:nvSpPr>
-        <p:spPr>
-          <a:xfrm>
-            <a:off x="1051560" y="3739896"/>
-            <a:ext cx="7589520" cy="658368"/>
-          </a:xfrm>
-          <a:prstGeom prst="rect">
-            <a:avLst/>
-          </a:prstGeom>
-          <a:noFill/>
-          <a:ln/>
-        </p:spPr>
-        <p:txBody>
-          <a:bodyPr wrap="square" lIns="0" tIns="0" rIns="0" bIns="0" rtlCol="0" anchor="ctr">
-            <a:normAutofit/>
-          </a:bodyPr>
           <a:lstStyle/>
           <a:p>
             <a:pPr indent="0" marL="0">
               <a:buNone/>
             </a:pPr>
             <a:r>
-              <a:rPr lang="en-US" sz="1350" dirty="0">
-                <a:solidFill>
-                  <a:srgbClr val="1F2937"/>
+              <a:rPr lang="en-US" sz="900" dirty="0">
+                <a:solidFill>
+                  <a:srgbClr val="64748B"/>
                 </a:solidFill>
                 <a:latin typeface="Calibri" pitchFamily="34" charset="0"/>
                 <a:ea typeface="Calibri" pitchFamily="34" charset="-122"/>
                 <a:cs typeface="Calibri" pitchFamily="34" charset="-120"/>
               </a:rPr>
-              <a:t>Systems-level pass: assume one element is owned — what does it reach? Chain two low findings into one system-level claim</a:t>
-            </a:r>
-            <a:endParaRPr lang="en-US" sz="1350" dirty="0"/>
-          </a:p>
-        </p:txBody>
-      </p:sp>
-      <p:sp>
-        <p:nvSpPr>
-          <p:cNvPr id="19" name="Text 16"/>
-          <p:cNvSpPr/>
-          <p:nvPr/>
-        </p:nvSpPr>
-        <p:spPr>
-          <a:xfrm>
-            <a:off x="457200" y="4800600"/>
-            <a:ext cx="6949440" cy="274320"/>
-          </a:xfrm>
-          <a:prstGeom prst="rect">
-            <a:avLst/>
-          </a:prstGeom>
-          <a:noFill/>
-          <a:ln/>
-        </p:spPr>
-        <p:txBody>
-          <a:bodyPr wrap="square" lIns="0" tIns="0" rIns="0" bIns="0" rtlCol="0" anchor="ctr"/>
-          <a:lstStyle/>
-          <a:p>
-            <a:pPr indent="0" marL="0">
-              <a:buNone/>
-            </a:pPr>
-            <a:r>
-              <a:rPr lang="en-US" sz="900" dirty="0">
-                <a:solidFill>
-                  <a:srgbClr val="64748B"/>
-                </a:solidFill>
-                <a:latin typeface="Calibri" pitchFamily="34" charset="0"/>
-                <a:ea typeface="Calibri" pitchFamily="34" charset="-122"/>
-                <a:cs typeface="Calibri" pitchFamily="34" charset="-120"/>
-              </a:rPr>
               <a:t>Software Security · Week 1</a:t>
             </a:r>
             <a:endParaRPr lang="en-US" sz="900" dirty="0"/>
@@ -4830,7 +4264,7 @@
       </p:sp>
       <p:pic>
         <p:nvPicPr>
-          <p:cNvPr id="20" name="Image 1" descr="/Users/pop7/Library/CloudStorage/OneDrive-MonsterConnectCo.,Ltd/Lecture/KOSEN69 - software-security/slides/pptx/assets/logo-small.png">    </p:cNvPr>
+          <p:cNvPr id="8" name="Image 1" descr="/Users/pop7/Library/CloudStorage/OneDrive-MonsterConnectCo.,Ltd/Lecture/KOSEN69 - software-security/slides/pptx/assets/logo-small.png">    </p:cNvPr>
           <p:cNvPicPr>
             <a:picLocks noChangeAspect="1"/>
           </p:cNvPicPr>
@@ -4968,7 +4402,7 @@
                 <a:ea typeface="Arial" pitchFamily="34" charset="-122"/>
                 <a:cs typeface="Arial" pitchFamily="34" charset="-120"/>
               </a:rPr>
-              <a:t>Lab 1 — Threat-model a sample app (cont.)</a:t>
+              <a:t>Secure by Design</a:t>
             </a:r>
             <a:endParaRPr lang="en-US" sz="2600" dirty="0"/>
           </a:p>
@@ -4976,34 +4410,14 @@
       </p:sp>
       <p:sp>
         <p:nvSpPr>
-          <p:cNvPr id="5" name="Shape 2"/>
-          <p:cNvSpPr/>
-          <p:nvPr/>
-        </p:nvSpPr>
-        <p:spPr>
-          <a:xfrm>
-            <a:off x="502920" y="1325880"/>
-            <a:ext cx="384048" cy="384048"/>
-          </a:xfrm>
-          <a:prstGeom prst="ellipse">
-            <a:avLst/>
-          </a:prstGeom>
-          <a:solidFill>
-            <a:srgbClr val="E35205"/>
-          </a:solidFill>
-          <a:ln/>
-        </p:spPr>
-      </p:sp>
-      <p:sp>
-        <p:nvSpPr>
-          <p:cNvPr id="6" name="Text 3"/>
-          <p:cNvSpPr/>
-          <p:nvPr/>
-        </p:nvSpPr>
-        <p:spPr>
-          <a:xfrm>
-            <a:off x="502920" y="1325880"/>
-            <a:ext cx="384048" cy="384048"/>
+          <p:cNvPr id="5" name="Text 2"/>
+          <p:cNvSpPr/>
+          <p:nvPr/>
+        </p:nvSpPr>
+        <p:spPr>
+          <a:xfrm>
+            <a:off x="548640" y="1325880"/>
+            <a:ext cx="8046720" cy="1920240"/>
           </a:xfrm>
           <a:prstGeom prst="rect">
             <a:avLst/>
@@ -5012,46 +4426,7 @@
           <a:ln/>
         </p:spPr>
         <p:txBody>
-          <a:bodyPr wrap="square" lIns="0" tIns="0" rIns="0" bIns="0" rtlCol="0" anchor="ctr"/>
-          <a:lstStyle/>
-          <a:p>
-            <a:pPr algn="ctr" indent="0" marL="0">
-              <a:buNone/>
-            </a:pPr>
-            <a:r>
-              <a:rPr lang="en-US" sz="1500" b="1" dirty="0">
-                <a:solidFill>
-                  <a:srgbClr val="0E1726"/>
-                </a:solidFill>
-                <a:latin typeface="Arial" pitchFamily="34" charset="0"/>
-                <a:ea typeface="Arial" pitchFamily="34" charset="-122"/>
-                <a:cs typeface="Arial" pitchFamily="34" charset="-120"/>
-              </a:rPr>
-              <a:t>5</a:t>
-            </a:r>
-            <a:endParaRPr lang="en-US" sz="1500" dirty="0"/>
-          </a:p>
-        </p:txBody>
-      </p:sp>
-      <p:sp>
-        <p:nvSpPr>
-          <p:cNvPr id="7" name="Text 4"/>
-          <p:cNvSpPr/>
-          <p:nvPr/>
-        </p:nvSpPr>
-        <p:spPr>
-          <a:xfrm>
-            <a:off x="1051560" y="1325880"/>
-            <a:ext cx="7589520" cy="402336"/>
-          </a:xfrm>
-          <a:prstGeom prst="rect">
-            <a:avLst/>
-          </a:prstGeom>
-          <a:noFill/>
-          <a:ln/>
-        </p:spPr>
-        <p:txBody>
-          <a:bodyPr wrap="square" lIns="0" tIns="0" rIns="0" bIns="0" rtlCol="0" anchor="ctr">
+          <a:bodyPr wrap="square" lIns="0" tIns="0" rIns="0" bIns="0" rtlCol="0" anchor="t">
             <a:normAutofit/>
           </a:bodyPr>
           <a:lstStyle/>
@@ -5060,7 +4435,7 @@
               <a:buNone/>
             </a:pPr>
             <a:r>
-              <a:rPr lang="en-US" sz="1350" dirty="0">
+              <a:rPr lang="en-US" sz="1400" dirty="0">
                 <a:solidFill>
                   <a:srgbClr val="1F2937"/>
                 </a:solidFill>
@@ -5068,42 +4443,22 @@
                 <a:ea typeface="Calibri" pitchFamily="34" charset="-122"/>
                 <a:cs typeface="Calibri" pitchFamily="34" charset="-120"/>
               </a:rPr>
-              <a:t>Turn threats into testable security requirements ("the system must … so that …")</a:t>
-            </a:r>
-            <a:endParaRPr lang="en-US" sz="1350" dirty="0"/>
-          </a:p>
-        </p:txBody>
-      </p:sp>
-      <p:sp>
-        <p:nvSpPr>
-          <p:cNvPr id="8" name="Shape 5"/>
-          <p:cNvSpPr/>
-          <p:nvPr/>
-        </p:nvSpPr>
-        <p:spPr>
-          <a:xfrm>
-            <a:off x="502920" y="1801368"/>
-            <a:ext cx="384048" cy="384048"/>
-          </a:xfrm>
-          <a:prstGeom prst="ellipse">
-            <a:avLst/>
-          </a:prstGeom>
-          <a:solidFill>
-            <a:srgbClr val="E35205"/>
-          </a:solidFill>
-          <a:ln/>
-        </p:spPr>
-      </p:sp>
-      <p:sp>
-        <p:nvSpPr>
-          <p:cNvPr id="9" name="Text 6"/>
-          <p:cNvSpPr/>
-          <p:nvPr/>
-        </p:nvSpPr>
-        <p:spPr>
-          <a:xfrm>
-            <a:off x="502920" y="1801368"/>
-            <a:ext cx="384048" cy="384048"/>
+              <a:t>See diagram: A shift from the old model to Secure by Design. Old model: ship fast, patch later — bugs found after ship, fixed one instance at a time. Secure by Design: design out the bug class — safe by default, it's the vendor's job, designed out before code exists. Design flaws aren't coding slips, mapped to OWASP A06: Insecure Design. Driven by CISA policy and an industry push toward memory-safe languages, covered more in Week 11. (web only)</a:t>
+            </a:r>
+            <a:endParaRPr lang="en-US" sz="1400" dirty="0"/>
+          </a:p>
+        </p:txBody>
+      </p:sp>
+      <p:sp>
+        <p:nvSpPr>
+          <p:cNvPr id="6" name="Text 3"/>
+          <p:cNvSpPr/>
+          <p:nvPr/>
+        </p:nvSpPr>
+        <p:spPr>
+          <a:xfrm>
+            <a:off x="457200" y="4800600"/>
+            <a:ext cx="6949440" cy="274320"/>
           </a:xfrm>
           <a:prstGeom prst="rect">
             <a:avLst/>
@@ -5113,300 +4468,20 @@
         </p:spPr>
         <p:txBody>
           <a:bodyPr wrap="square" lIns="0" tIns="0" rIns="0" bIns="0" rtlCol="0" anchor="ctr"/>
-          <a:lstStyle/>
-          <a:p>
-            <a:pPr algn="ctr" indent="0" marL="0">
-              <a:buNone/>
-            </a:pPr>
-            <a:r>
-              <a:rPr lang="en-US" sz="1500" b="1" dirty="0">
-                <a:solidFill>
-                  <a:srgbClr val="0E1726"/>
-                </a:solidFill>
-                <a:latin typeface="Arial" pitchFamily="34" charset="0"/>
-                <a:ea typeface="Arial" pitchFamily="34" charset="-122"/>
-                <a:cs typeface="Arial" pitchFamily="34" charset="-120"/>
-              </a:rPr>
-              <a:t>6</a:t>
-            </a:r>
-            <a:endParaRPr lang="en-US" sz="1500" dirty="0"/>
-          </a:p>
-        </p:txBody>
-      </p:sp>
-      <p:sp>
-        <p:nvSpPr>
-          <p:cNvPr id="10" name="Text 7"/>
-          <p:cNvSpPr/>
-          <p:nvPr/>
-        </p:nvSpPr>
-        <p:spPr>
-          <a:xfrm>
-            <a:off x="1051560" y="1801368"/>
-            <a:ext cx="7589520" cy="402336"/>
-          </a:xfrm>
-          <a:prstGeom prst="rect">
-            <a:avLst/>
-          </a:prstGeom>
-          <a:noFill/>
-          <a:ln/>
-        </p:spPr>
-        <p:txBody>
-          <a:bodyPr wrap="square" lIns="0" tIns="0" rIns="0" bIns="0" rtlCol="0" anchor="ctr">
-            <a:normAutofit/>
-          </a:bodyPr>
           <a:lstStyle/>
           <a:p>
             <a:pPr indent="0" marL="0">
               <a:buNone/>
             </a:pPr>
             <a:r>
-              <a:rPr lang="en-US" sz="1350" dirty="0">
-                <a:solidFill>
-                  <a:srgbClr val="1F2937"/>
+              <a:rPr lang="en-US" sz="900" dirty="0">
+                <a:solidFill>
+                  <a:srgbClr val="64748B"/>
                 </a:solidFill>
                 <a:latin typeface="Calibri" pitchFamily="34" charset="0"/>
                 <a:ea typeface="Calibri" pitchFamily="34" charset="-122"/>
                 <a:cs typeface="Calibri" pitchFamily="34" charset="-120"/>
               </a:rPr>
-              <a:t>NoteVault (term project): DFD + top-3 threats — this kicks off your project</a:t>
-            </a:r>
-            <a:endParaRPr lang="en-US" sz="1350" dirty="0"/>
-          </a:p>
-        </p:txBody>
-      </p:sp>
-      <p:sp>
-        <p:nvSpPr>
-          <p:cNvPr id="11" name="Shape 8"/>
-          <p:cNvSpPr/>
-          <p:nvPr/>
-        </p:nvSpPr>
-        <p:spPr>
-          <a:xfrm>
-            <a:off x="502920" y="2276856"/>
-            <a:ext cx="384048" cy="384048"/>
-          </a:xfrm>
-          <a:prstGeom prst="ellipse">
-            <a:avLst/>
-          </a:prstGeom>
-          <a:solidFill>
-            <a:srgbClr val="E35205"/>
-          </a:solidFill>
-          <a:ln/>
-        </p:spPr>
-      </p:sp>
-      <p:sp>
-        <p:nvSpPr>
-          <p:cNvPr id="12" name="Text 9"/>
-          <p:cNvSpPr/>
-          <p:nvPr/>
-        </p:nvSpPr>
-        <p:spPr>
-          <a:xfrm>
-            <a:off x="502920" y="2276856"/>
-            <a:ext cx="384048" cy="384048"/>
-          </a:xfrm>
-          <a:prstGeom prst="rect">
-            <a:avLst/>
-          </a:prstGeom>
-          <a:noFill/>
-          <a:ln/>
-        </p:spPr>
-        <p:txBody>
-          <a:bodyPr wrap="square" lIns="0" tIns="0" rIns="0" bIns="0" rtlCol="0" anchor="ctr"/>
-          <a:lstStyle/>
-          <a:p>
-            <a:pPr algn="ctr" indent="0" marL="0">
-              <a:buNone/>
-            </a:pPr>
-            <a:r>
-              <a:rPr lang="en-US" sz="1500" b="1" dirty="0">
-                <a:solidFill>
-                  <a:srgbClr val="0E1726"/>
-                </a:solidFill>
-                <a:latin typeface="Arial" pitchFamily="34" charset="0"/>
-                <a:ea typeface="Arial" pitchFamily="34" charset="-122"/>
-                <a:cs typeface="Arial" pitchFamily="34" charset="-120"/>
-              </a:rPr>
-              <a:t>7</a:t>
-            </a:r>
-            <a:endParaRPr lang="en-US" sz="1500" dirty="0"/>
-          </a:p>
-        </p:txBody>
-      </p:sp>
-      <p:sp>
-        <p:nvSpPr>
-          <p:cNvPr id="13" name="Text 10"/>
-          <p:cNvSpPr/>
-          <p:nvPr/>
-        </p:nvSpPr>
-        <p:spPr>
-          <a:xfrm>
-            <a:off x="1051560" y="2276856"/>
-            <a:ext cx="7589520" cy="402336"/>
-          </a:xfrm>
-          <a:prstGeom prst="rect">
-            <a:avLst/>
-          </a:prstGeom>
-          <a:noFill/>
-          <a:ln/>
-        </p:spPr>
-        <p:txBody>
-          <a:bodyPr wrap="square" lIns="0" tIns="0" rIns="0" bIns="0" rtlCol="0" anchor="ctr">
-            <a:normAutofit/>
-          </a:bodyPr>
-          <a:lstStyle/>
-          <a:p>
-            <a:pPr indent="0" marL="0">
-              <a:buNone/>
-            </a:pPr>
-            <a:r>
-              <a:rPr lang="en-US" sz="1350" dirty="0">
-                <a:solidFill>
-                  <a:srgbClr val="1F2937"/>
-                </a:solidFill>
-                <a:latin typeface="Calibri" pitchFamily="34" charset="0"/>
-                <a:ea typeface="Calibri" pitchFamily="34" charset="-122"/>
-                <a:cs typeface="Calibri" pitchFamily="34" charset="-120"/>
-              </a:rPr>
-              <a:t>Rank top 5 risks (likelihood × impact)</a:t>
-            </a:r>
-            <a:endParaRPr lang="en-US" sz="1350" dirty="0"/>
-          </a:p>
-        </p:txBody>
-      </p:sp>
-      <p:sp>
-        <p:nvSpPr>
-          <p:cNvPr id="14" name="Shape 11"/>
-          <p:cNvSpPr/>
-          <p:nvPr/>
-        </p:nvSpPr>
-        <p:spPr>
-          <a:xfrm>
-            <a:off x="502920" y="2752344"/>
-            <a:ext cx="384048" cy="384048"/>
-          </a:xfrm>
-          <a:prstGeom prst="ellipse">
-            <a:avLst/>
-          </a:prstGeom>
-          <a:solidFill>
-            <a:srgbClr val="E35205"/>
-          </a:solidFill>
-          <a:ln/>
-        </p:spPr>
-      </p:sp>
-      <p:sp>
-        <p:nvSpPr>
-          <p:cNvPr id="15" name="Text 12"/>
-          <p:cNvSpPr/>
-          <p:nvPr/>
-        </p:nvSpPr>
-        <p:spPr>
-          <a:xfrm>
-            <a:off x="502920" y="2752344"/>
-            <a:ext cx="384048" cy="384048"/>
-          </a:xfrm>
-          <a:prstGeom prst="rect">
-            <a:avLst/>
-          </a:prstGeom>
-          <a:noFill/>
-          <a:ln/>
-        </p:spPr>
-        <p:txBody>
-          <a:bodyPr wrap="square" lIns="0" tIns="0" rIns="0" bIns="0" rtlCol="0" anchor="ctr"/>
-          <a:lstStyle/>
-          <a:p>
-            <a:pPr algn="ctr" indent="0" marL="0">
-              <a:buNone/>
-            </a:pPr>
-            <a:r>
-              <a:rPr lang="en-US" sz="1500" b="1" dirty="0">
-                <a:solidFill>
-                  <a:srgbClr val="0E1726"/>
-                </a:solidFill>
-                <a:latin typeface="Arial" pitchFamily="34" charset="0"/>
-                <a:ea typeface="Arial" pitchFamily="34" charset="-122"/>
-                <a:cs typeface="Arial" pitchFamily="34" charset="-120"/>
-              </a:rPr>
-              <a:t>8</a:t>
-            </a:r>
-            <a:endParaRPr lang="en-US" sz="1500" dirty="0"/>
-          </a:p>
-        </p:txBody>
-      </p:sp>
-      <p:sp>
-        <p:nvSpPr>
-          <p:cNvPr id="16" name="Text 13"/>
-          <p:cNvSpPr/>
-          <p:nvPr/>
-        </p:nvSpPr>
-        <p:spPr>
-          <a:xfrm>
-            <a:off x="1051560" y="2752344"/>
-            <a:ext cx="7589520" cy="658368"/>
-          </a:xfrm>
-          <a:prstGeom prst="rect">
-            <a:avLst/>
-          </a:prstGeom>
-          <a:noFill/>
-          <a:ln/>
-        </p:spPr>
-        <p:txBody>
-          <a:bodyPr wrap="square" lIns="0" tIns="0" rIns="0" bIns="0" rtlCol="0" anchor="ctr">
-            <a:normAutofit/>
-          </a:bodyPr>
-          <a:lstStyle/>
-          <a:p>
-            <a:pPr indent="0" marL="0">
-              <a:buNone/>
-            </a:pPr>
-            <a:r>
-              <a:rPr lang="en-US" sz="1350" dirty="0">
-                <a:solidFill>
-                  <a:srgbClr val="1F2937"/>
-                </a:solidFill>
-                <a:latin typeface="Calibri" pitchFamily="34" charset="0"/>
-                <a:ea typeface="Calibri" pitchFamily="34" charset="-122"/>
-                <a:cs typeface="Calibri" pitchFamily="34" charset="-120"/>
-              </a:rPr>
-              <a:t>Defend: implement one real mitigation — diff, before/after evidence, and argue whether your fix closes the bug class or just this instance</a:t>
-            </a:r>
-            <a:endParaRPr lang="en-US" sz="1350" dirty="0"/>
-          </a:p>
-        </p:txBody>
-      </p:sp>
-      <p:sp>
-        <p:nvSpPr>
-          <p:cNvPr id="17" name="Text 14"/>
-          <p:cNvSpPr/>
-          <p:nvPr/>
-        </p:nvSpPr>
-        <p:spPr>
-          <a:xfrm>
-            <a:off x="457200" y="4800600"/>
-            <a:ext cx="6949440" cy="274320"/>
-          </a:xfrm>
-          <a:prstGeom prst="rect">
-            <a:avLst/>
-          </a:prstGeom>
-          <a:noFill/>
-          <a:ln/>
-        </p:spPr>
-        <p:txBody>
-          <a:bodyPr wrap="square" lIns="0" tIns="0" rIns="0" bIns="0" rtlCol="0" anchor="ctr"/>
-          <a:lstStyle/>
-          <a:p>
-            <a:pPr indent="0" marL="0">
-              <a:buNone/>
-            </a:pPr>
-            <a:r>
-              <a:rPr lang="en-US" sz="900" dirty="0">
-                <a:solidFill>
-                  <a:srgbClr val="64748B"/>
-                </a:solidFill>
-                <a:latin typeface="Calibri" pitchFamily="34" charset="0"/>
-                <a:ea typeface="Calibri" pitchFamily="34" charset="-122"/>
-                <a:cs typeface="Calibri" pitchFamily="34" charset="-120"/>
-              </a:rPr>
               <a:t>Software Security · Week 1</a:t>
             </a:r>
             <a:endParaRPr lang="en-US" sz="900" dirty="0"/>
@@ -5415,7 +4490,7 @@
       </p:sp>
       <p:pic>
         <p:nvPicPr>
-          <p:cNvPr id="18" name="Image 1" descr="/Users/pop7/Library/CloudStorage/OneDrive-MonsterConnectCo.,Ltd/Lecture/KOSEN69 - software-security/slides/pptx/assets/logo-small.png">    </p:cNvPr>
+          <p:cNvPr id="7" name="Image 1" descr="/Users/pop7/Library/CloudStorage/OneDrive-MonsterConnectCo.,Ltd/Lecture/KOSEN69 - software-security/slides/pptx/assets/logo-small.png">    </p:cNvPr>
           <p:cNvPicPr>
             <a:picLocks noChangeAspect="1"/>
           </p:cNvPicPr>
@@ -5553,7 +4628,7 @@
                 <a:ea typeface="Arial" pitchFamily="34" charset="-122"/>
                 <a:cs typeface="Arial" pitchFamily="34" charset="-120"/>
               </a:rPr>
-              <a:t>Using AI in this course</a:t>
+              <a:t>🎲 Game — Elevation of Privilege</a:t>
             </a:r>
             <a:endParaRPr lang="en-US" sz="2600" dirty="0"/>
           </a:p>
@@ -5568,11 +4643,11 @@
         <p:spPr>
           <a:xfrm>
             <a:off x="457200" y="1325880"/>
-            <a:ext cx="8229600" cy="2450592"/>
+            <a:ext cx="8229600" cy="1517904"/>
           </a:xfrm>
           <a:prstGeom prst="roundRect">
             <a:avLst>
-              <a:gd name="adj" fmla="val 2985"/>
+              <a:gd name="adj" fmla="val 4819"/>
             </a:avLst>
           </a:prstGeom>
           <a:solidFill>
@@ -5597,7 +4672,7 @@
         <p:spPr>
           <a:xfrm>
             <a:off x="731520" y="1435608"/>
-            <a:ext cx="7680960" cy="2231136"/>
+            <a:ext cx="7680960" cy="1298448"/>
           </a:xfrm>
           <a:prstGeom prst="rect">
             <a:avLst/>
@@ -5627,7 +4702,7 @@
                 <a:ea typeface="Calibri" pitchFamily="34" charset="-122"/>
                 <a:cs typeface="Calibri" pitchFamily="34" charset="-120"/>
               </a:rPr>
-              <a:t>AI is allowed — and you must disclose how you used it</a:t>
+              <a:t>Microsoft's free STRIDE card deck</a:t>
             </a:r>
             <a:endParaRPr lang="en-US" sz="1400" dirty="0"/>
           </a:p>
@@ -5648,7 +4723,7 @@
                 <a:ea typeface="Calibri" pitchFamily="34" charset="-122"/>
                 <a:cs typeface="Calibri" pitchFamily="34" charset="-120"/>
               </a:rPr>
-              <a:t>But AI hallucinates APIs/CVEs and writes insecure code</a:t>
+              <a:t>Play cards against the sample app's data-flow diagram</a:t>
             </a:r>
             <a:endParaRPr lang="en-US" sz="1400" dirty="0"/>
           </a:p>
@@ -5669,70 +4744,7 @@
                 <a:ea typeface="Calibri" pitchFamily="34" charset="-122"/>
                 <a:cs typeface="Calibri" pitchFamily="34" charset="-120"/>
               </a:rPr>
-              <a:t>You're graded on understanding, not the answer:</a:t>
-            </a:r>
-            <a:endParaRPr lang="en-US" sz="1400" dirty="0"/>
-          </a:p>
-          <a:p>
-            <a:pPr lvl="1" marL="685800" indent="-342900">
-              <a:spcAft>
-                <a:spcPts val="600"/>
-              </a:spcAft>
-              <a:buSzPct val="100000"/>
-              <a:buChar char="•"/>
-            </a:pPr>
-            <a:r>
-              <a:rPr lang="en-US" sz="1400" dirty="0">
-                <a:solidFill>
-                  <a:srgbClr val="1F2937"/>
-                </a:solidFill>
-                <a:latin typeface="Calibri" pitchFamily="34" charset="0"/>
-                <a:ea typeface="Calibri" pitchFamily="34" charset="-122"/>
-                <a:cs typeface="Calibri" pitchFamily="34" charset="-120"/>
-              </a:rPr>
-              <a:t>random live re-demos — explain it or score zero</a:t>
-            </a:r>
-            <a:endParaRPr lang="en-US" sz="1400" dirty="0"/>
-          </a:p>
-          <a:p>
-            <a:pPr lvl="1" marL="685800" indent="-342900">
-              <a:spcAft>
-                <a:spcPts val="600"/>
-              </a:spcAft>
-              <a:buSzPct val="100000"/>
-              <a:buChar char="•"/>
-            </a:pPr>
-            <a:r>
-              <a:rPr lang="en-US" sz="1400" dirty="0">
-                <a:solidFill>
-                  <a:srgbClr val="1F2937"/>
-                </a:solidFill>
-                <a:latin typeface="Calibri" pitchFamily="34" charset="0"/>
-                <a:ea typeface="Calibri" pitchFamily="34" charset="-122"/>
-                <a:cs typeface="Calibri" pitchFamily="34" charset="-120"/>
-              </a:rPr>
-              <a:t>your flags are unique to you — copying is traceable</a:t>
-            </a:r>
-            <a:endParaRPr lang="en-US" sz="1400" dirty="0"/>
-          </a:p>
-          <a:p>
-            <a:pPr lvl="1" marL="685800" indent="-342900">
-              <a:spcAft>
-                <a:spcPts val="600"/>
-              </a:spcAft>
-              <a:buSzPct val="100000"/>
-              <a:buChar char="•"/>
-            </a:pPr>
-            <a:r>
-              <a:rPr lang="en-US" sz="1400" dirty="0">
-                <a:solidFill>
-                  <a:srgbClr val="1F2937"/>
-                </a:solidFill>
-                <a:latin typeface="Calibri" pitchFamily="34" charset="0"/>
-                <a:ea typeface="Calibri" pitchFamily="34" charset="-122"/>
-                <a:cs typeface="Calibri" pitchFamily="34" charset="-120"/>
-              </a:rPr>
-              <a:t>every lab has an "Audit the AI" task: find what its answer gets wrong</a:t>
+              <a:t>Each valid threat tied to a real element = a point</a:t>
             </a:r>
             <a:endParaRPr lang="en-US" sz="1400" dirty="0"/>
           </a:p>
@@ -5753,7 +4765,7 @@
                 <a:ea typeface="Calibri" pitchFamily="34" charset="-122"/>
                 <a:cs typeface="Calibri" pitchFamily="34" charset="-120"/>
               </a:rPr>
-              <a:t>Use AI to learn faster — never to skip the thinking</a:t>
+              <a:t>Outcome: a team-built STRIDE model</a:t>
             </a:r>
             <a:endParaRPr lang="en-US" sz="1400" dirty="0"/>
           </a:p>
@@ -5938,7 +4950,7 @@
                 <a:ea typeface="Arial" pitchFamily="34" charset="-122"/>
                 <a:cs typeface="Arial" pitchFamily="34" charset="-120"/>
               </a:rPr>
-              <a:t>Key takeaways</a:t>
+              <a:t>Lab 0 — Environment setup (once)</a:t>
             </a:r>
             <a:endParaRPr lang="en-US" sz="2600" dirty="0"/>
           </a:p>
@@ -5952,25 +4964,16 @@
         </p:nvSpPr>
         <p:spPr>
           <a:xfrm>
-            <a:off x="457200" y="1325880"/>
-            <a:ext cx="8229600" cy="1207008"/>
-          </a:xfrm>
-          <a:prstGeom prst="roundRect">
-            <a:avLst>
-              <a:gd name="adj" fmla="val 6061"/>
-            </a:avLst>
+            <a:off x="502920" y="1325880"/>
+            <a:ext cx="384048" cy="384048"/>
+          </a:xfrm>
+          <a:prstGeom prst="ellipse">
+            <a:avLst/>
           </a:prstGeom>
           <a:solidFill>
-            <a:srgbClr val="F1F5F9"/>
+            <a:srgbClr val="E35205"/>
           </a:solidFill>
           <a:ln/>
-          <a:effectLst>
-            <a:outerShdw sx="100000" sy="100000" kx="0" ky="0" algn="bl" rotWithShape="0" blurRad="76200" dist="25400" dir="5400000">
-              <a:srgbClr val="000000">
-                <a:alpha val="12000"/>
-              </a:srgbClr>
-            </a:outerShdw>
-          </a:effectLst>
         </p:spPr>
       </p:sp>
       <p:sp>
@@ -5981,8 +4984,8 @@
         </p:nvSpPr>
         <p:spPr>
           <a:xfrm>
-            <a:off x="731520" y="1435608"/>
-            <a:ext cx="7680960" cy="987552"/>
+            <a:off x="502920" y="1325880"/>
+            <a:ext cx="384048" cy="384048"/>
           </a:xfrm>
           <a:prstGeom prst="rect">
             <a:avLst/>
@@ -5991,20 +4994,55 @@
           <a:ln/>
         </p:spPr>
         <p:txBody>
-          <a:bodyPr wrap="square" lIns="0" tIns="0" rIns="0" bIns="0" rtlCol="0" anchor="t">
+          <a:bodyPr wrap="square" lIns="0" tIns="0" rIns="0" bIns="0" rtlCol="0" anchor="ctr"/>
+          <a:lstStyle/>
+          <a:p>
+            <a:pPr algn="ctr" indent="0" marL="0">
+              <a:buNone/>
+            </a:pPr>
+            <a:r>
+              <a:rPr lang="en-US" sz="1500" b="1" dirty="0">
+                <a:solidFill>
+                  <a:srgbClr val="0E1726"/>
+                </a:solidFill>
+                <a:latin typeface="Arial" pitchFamily="34" charset="0"/>
+                <a:ea typeface="Arial" pitchFamily="34" charset="-122"/>
+                <a:cs typeface="Arial" pitchFamily="34" charset="-120"/>
+              </a:rPr>
+              <a:t>1</a:t>
+            </a:r>
+            <a:endParaRPr lang="en-US" sz="1500" dirty="0"/>
+          </a:p>
+        </p:txBody>
+      </p:sp>
+      <p:sp>
+        <p:nvSpPr>
+          <p:cNvPr id="7" name="Text 4"/>
+          <p:cNvSpPr/>
+          <p:nvPr/>
+        </p:nvSpPr>
+        <p:spPr>
+          <a:xfrm>
+            <a:off x="1051560" y="1325880"/>
+            <a:ext cx="7589520" cy="402336"/>
+          </a:xfrm>
+          <a:prstGeom prst="rect">
+            <a:avLst/>
+          </a:prstGeom>
+          <a:noFill/>
+          <a:ln/>
+        </p:spPr>
+        <p:txBody>
+          <a:bodyPr wrap="square" lIns="0" tIns="0" rIns="0" bIns="0" rtlCol="0" anchor="ctr">
             <a:normAutofit/>
           </a:bodyPr>
           <a:lstStyle/>
           <a:p>
-            <a:pPr marL="342900" indent="-342900">
-              <a:spcAft>
-                <a:spcPts val="600"/>
-              </a:spcAft>
-              <a:buSzPct val="100000"/>
-              <a:buChar char="•"/>
-            </a:pPr>
-            <a:r>
-              <a:rPr lang="en-US" sz="1400" dirty="0">
+            <a:pPr indent="0" marL="0">
+              <a:buNone/>
+            </a:pPr>
+            <a:r>
+              <a:rPr lang="en-US" sz="1350" dirty="0">
                 <a:solidFill>
                   <a:srgbClr val="1F2937"/>
                 </a:solidFill>
@@ -6012,20 +5050,99 @@
                 <a:ea typeface="Calibri" pitchFamily="34" charset="-122"/>
                 <a:cs typeface="Calibri" pitchFamily="34" charset="-120"/>
               </a:rPr>
-              <a:t>Design for security; don't bolt it on</a:t>
-            </a:r>
-            <a:endParaRPr lang="en-US" sz="1400" dirty="0"/>
-          </a:p>
-          <a:p>
-            <a:pPr marL="342900" indent="-342900">
-              <a:spcAft>
-                <a:spcPts val="600"/>
-              </a:spcAft>
-              <a:buSzPct val="100000"/>
-              <a:buChar char="•"/>
-            </a:pPr>
-            <a:r>
-              <a:rPr lang="en-US" sz="1400" dirty="0">
+              <a:t>Docker Desktop (Win/macOS/Linux) — runs every lab target</a:t>
+            </a:r>
+            <a:endParaRPr lang="en-US" sz="1350" dirty="0"/>
+          </a:p>
+        </p:txBody>
+      </p:sp>
+      <p:sp>
+        <p:nvSpPr>
+          <p:cNvPr id="8" name="Shape 5"/>
+          <p:cNvSpPr/>
+          <p:nvPr/>
+        </p:nvSpPr>
+        <p:spPr>
+          <a:xfrm>
+            <a:off x="502920" y="1801368"/>
+            <a:ext cx="384048" cy="384048"/>
+          </a:xfrm>
+          <a:prstGeom prst="ellipse">
+            <a:avLst/>
+          </a:prstGeom>
+          <a:solidFill>
+            <a:srgbClr val="E35205"/>
+          </a:solidFill>
+          <a:ln/>
+        </p:spPr>
+      </p:sp>
+      <p:sp>
+        <p:nvSpPr>
+          <p:cNvPr id="9" name="Text 6"/>
+          <p:cNvSpPr/>
+          <p:nvPr/>
+        </p:nvSpPr>
+        <p:spPr>
+          <a:xfrm>
+            <a:off x="502920" y="1801368"/>
+            <a:ext cx="384048" cy="384048"/>
+          </a:xfrm>
+          <a:prstGeom prst="rect">
+            <a:avLst/>
+          </a:prstGeom>
+          <a:noFill/>
+          <a:ln/>
+        </p:spPr>
+        <p:txBody>
+          <a:bodyPr wrap="square" lIns="0" tIns="0" rIns="0" bIns="0" rtlCol="0" anchor="ctr"/>
+          <a:lstStyle/>
+          <a:p>
+            <a:pPr algn="ctr" indent="0" marL="0">
+              <a:buNone/>
+            </a:pPr>
+            <a:r>
+              <a:rPr lang="en-US" sz="1500" b="1" dirty="0">
+                <a:solidFill>
+                  <a:srgbClr val="0E1726"/>
+                </a:solidFill>
+                <a:latin typeface="Arial" pitchFamily="34" charset="0"/>
+                <a:ea typeface="Arial" pitchFamily="34" charset="-122"/>
+                <a:cs typeface="Arial" pitchFamily="34" charset="-120"/>
+              </a:rPr>
+              <a:t>2</a:t>
+            </a:r>
+            <a:endParaRPr lang="en-US" sz="1500" dirty="0"/>
+          </a:p>
+        </p:txBody>
+      </p:sp>
+      <p:sp>
+        <p:nvSpPr>
+          <p:cNvPr id="10" name="Text 7"/>
+          <p:cNvSpPr/>
+          <p:nvPr/>
+        </p:nvSpPr>
+        <p:spPr>
+          <a:xfrm>
+            <a:off x="1051560" y="1801368"/>
+            <a:ext cx="7589520" cy="402336"/>
+          </a:xfrm>
+          <a:prstGeom prst="rect">
+            <a:avLst/>
+          </a:prstGeom>
+          <a:noFill/>
+          <a:ln/>
+        </p:spPr>
+        <p:txBody>
+          <a:bodyPr wrap="square" lIns="0" tIns="0" rIns="0" bIns="0" rtlCol="0" anchor="ctr">
+            <a:normAutofit/>
+          </a:bodyPr>
+          <a:lstStyle/>
+          <a:p>
+            <a:pPr indent="0" marL="0">
+              <a:buNone/>
+            </a:pPr>
+            <a:r>
+              <a:rPr lang="en-US" sz="1350" dirty="0">
                 <a:solidFill>
                   <a:srgbClr val="1F2937"/>
                 </a:solidFill>
@@ -6033,20 +5150,99 @@
                 <a:ea typeface="Calibri" pitchFamily="34" charset="-122"/>
                 <a:cs typeface="Calibri" pitchFamily="34" charset="-120"/>
               </a:rPr>
-              <a:t>Attackers need one gap — model the whole surface</a:t>
-            </a:r>
-            <a:endParaRPr lang="en-US" sz="1400" dirty="0"/>
-          </a:p>
-          <a:p>
-            <a:pPr marL="342900" indent="-342900">
-              <a:spcAft>
-                <a:spcPts val="600"/>
-              </a:spcAft>
-              <a:buSzPct val="100000"/>
-              <a:buChar char="•"/>
-            </a:pPr>
-            <a:r>
-              <a:rPr lang="en-US" sz="1400" dirty="0">
+              <a:t>Browser + proxy: Burp Suite Community or OWASP ZAP</a:t>
+            </a:r>
+            <a:endParaRPr lang="en-US" sz="1350" dirty="0"/>
+          </a:p>
+        </p:txBody>
+      </p:sp>
+      <p:sp>
+        <p:nvSpPr>
+          <p:cNvPr id="11" name="Shape 8"/>
+          <p:cNvSpPr/>
+          <p:nvPr/>
+        </p:nvSpPr>
+        <p:spPr>
+          <a:xfrm>
+            <a:off x="502920" y="2276856"/>
+            <a:ext cx="384048" cy="384048"/>
+          </a:xfrm>
+          <a:prstGeom prst="ellipse">
+            <a:avLst/>
+          </a:prstGeom>
+          <a:solidFill>
+            <a:srgbClr val="E35205"/>
+          </a:solidFill>
+          <a:ln/>
+        </p:spPr>
+      </p:sp>
+      <p:sp>
+        <p:nvSpPr>
+          <p:cNvPr id="12" name="Text 9"/>
+          <p:cNvSpPr/>
+          <p:nvPr/>
+        </p:nvSpPr>
+        <p:spPr>
+          <a:xfrm>
+            <a:off x="502920" y="2276856"/>
+            <a:ext cx="384048" cy="384048"/>
+          </a:xfrm>
+          <a:prstGeom prst="rect">
+            <a:avLst/>
+          </a:prstGeom>
+          <a:noFill/>
+          <a:ln/>
+        </p:spPr>
+        <p:txBody>
+          <a:bodyPr wrap="square" lIns="0" tIns="0" rIns="0" bIns="0" rtlCol="0" anchor="ctr"/>
+          <a:lstStyle/>
+          <a:p>
+            <a:pPr algn="ctr" indent="0" marL="0">
+              <a:buNone/>
+            </a:pPr>
+            <a:r>
+              <a:rPr lang="en-US" sz="1500" b="1" dirty="0">
+                <a:solidFill>
+                  <a:srgbClr val="0E1726"/>
+                </a:solidFill>
+                <a:latin typeface="Arial" pitchFamily="34" charset="0"/>
+                <a:ea typeface="Arial" pitchFamily="34" charset="-122"/>
+                <a:cs typeface="Arial" pitchFamily="34" charset="-120"/>
+              </a:rPr>
+              <a:t>3</a:t>
+            </a:r>
+            <a:endParaRPr lang="en-US" sz="1500" dirty="0"/>
+          </a:p>
+        </p:txBody>
+      </p:sp>
+      <p:sp>
+        <p:nvSpPr>
+          <p:cNvPr id="13" name="Text 10"/>
+          <p:cNvSpPr/>
+          <p:nvPr/>
+        </p:nvSpPr>
+        <p:spPr>
+          <a:xfrm>
+            <a:off x="1051560" y="2276856"/>
+            <a:ext cx="7589520" cy="402336"/>
+          </a:xfrm>
+          <a:prstGeom prst="rect">
+            <a:avLst/>
+          </a:prstGeom>
+          <a:noFill/>
+          <a:ln/>
+        </p:spPr>
+        <p:txBody>
+          <a:bodyPr wrap="square" lIns="0" tIns="0" rIns="0" bIns="0" rtlCol="0" anchor="ctr">
+            <a:normAutofit/>
+          </a:bodyPr>
+          <a:lstStyle/>
+          <a:p>
+            <a:pPr indent="0" marL="0">
+              <a:buNone/>
+            </a:pPr>
+            <a:r>
+              <a:rPr lang="en-US" sz="1350" dirty="0">
                 <a:solidFill>
                   <a:srgbClr val="1F2937"/>
                 </a:solidFill>
@@ -6054,22 +5250,42 @@
                 <a:ea typeface="Calibri" pitchFamily="34" charset="-122"/>
                 <a:cs typeface="Calibri" pitchFamily="34" charset="-120"/>
               </a:rPr>
-              <a:t>STRIDE + DFD = a repeatable way to find design flaws</a:t>
-            </a:r>
-            <a:endParaRPr lang="en-US" sz="1400" dirty="0"/>
-          </a:p>
-        </p:txBody>
-      </p:sp>
-      <p:sp>
-        <p:nvSpPr>
-          <p:cNvPr id="7" name="Text 4"/>
-          <p:cNvSpPr/>
-          <p:nvPr/>
-        </p:nvSpPr>
-        <p:spPr>
-          <a:xfrm>
-            <a:off x="457200" y="4800600"/>
-            <a:ext cx="6949440" cy="274320"/>
+              <a:t>Toolbox container (for W11 + recon): docker build -t softsec-toolbox labs/toolbox</a:t>
+            </a:r>
+            <a:endParaRPr lang="en-US" sz="1350" dirty="0"/>
+          </a:p>
+        </p:txBody>
+      </p:sp>
+      <p:sp>
+        <p:nvSpPr>
+          <p:cNvPr id="14" name="Shape 11"/>
+          <p:cNvSpPr/>
+          <p:nvPr/>
+        </p:nvSpPr>
+        <p:spPr>
+          <a:xfrm>
+            <a:off x="502920" y="2752344"/>
+            <a:ext cx="384048" cy="384048"/>
+          </a:xfrm>
+          <a:prstGeom prst="ellipse">
+            <a:avLst/>
+          </a:prstGeom>
+          <a:solidFill>
+            <a:srgbClr val="E35205"/>
+          </a:solidFill>
+          <a:ln/>
+        </p:spPr>
+      </p:sp>
+      <p:sp>
+        <p:nvSpPr>
+          <p:cNvPr id="15" name="Text 12"/>
+          <p:cNvSpPr/>
+          <p:nvPr/>
+        </p:nvSpPr>
+        <p:spPr>
+          <a:xfrm>
+            <a:off x="502920" y="2752344"/>
+            <a:ext cx="384048" cy="384048"/>
           </a:xfrm>
           <a:prstGeom prst="rect">
             <a:avLst/>
@@ -6079,20 +5295,200 @@
         </p:spPr>
         <p:txBody>
           <a:bodyPr wrap="square" lIns="0" tIns="0" rIns="0" bIns="0" rtlCol="0" anchor="ctr"/>
+          <a:lstStyle/>
+          <a:p>
+            <a:pPr algn="ctr" indent="0" marL="0">
+              <a:buNone/>
+            </a:pPr>
+            <a:r>
+              <a:rPr lang="en-US" sz="1500" b="1" dirty="0">
+                <a:solidFill>
+                  <a:srgbClr val="0E1726"/>
+                </a:solidFill>
+                <a:latin typeface="Arial" pitchFamily="34" charset="0"/>
+                <a:ea typeface="Arial" pitchFamily="34" charset="-122"/>
+                <a:cs typeface="Arial" pitchFamily="34" charset="-120"/>
+              </a:rPr>
+              <a:t>4</a:t>
+            </a:r>
+            <a:endParaRPr lang="en-US" sz="1500" dirty="0"/>
+          </a:p>
+        </p:txBody>
+      </p:sp>
+      <p:sp>
+        <p:nvSpPr>
+          <p:cNvPr id="16" name="Text 13"/>
+          <p:cNvSpPr/>
+          <p:nvPr/>
+        </p:nvSpPr>
+        <p:spPr>
+          <a:xfrm>
+            <a:off x="1051560" y="2752344"/>
+            <a:ext cx="7589520" cy="402336"/>
+          </a:xfrm>
+          <a:prstGeom prst="rect">
+            <a:avLst/>
+          </a:prstGeom>
+          <a:noFill/>
+          <a:ln/>
+        </p:spPr>
+        <p:txBody>
+          <a:bodyPr wrap="square" lIns="0" tIns="0" rIns="0" bIns="0" rtlCol="0" anchor="ctr">
+            <a:normAutofit/>
+          </a:bodyPr>
           <a:lstStyle/>
           <a:p>
             <a:pPr indent="0" marL="0">
               <a:buNone/>
             </a:pPr>
             <a:r>
-              <a:rPr lang="en-US" sz="900" dirty="0">
-                <a:solidFill>
-                  <a:srgbClr val="64748B"/>
+              <a:rPr lang="en-US" sz="1350" dirty="0">
+                <a:solidFill>
+                  <a:srgbClr val="1F2937"/>
                 </a:solidFill>
                 <a:latin typeface="Calibri" pitchFamily="34" charset="0"/>
                 <a:ea typeface="Calibri" pitchFamily="34" charset="-122"/>
                 <a:cs typeface="Calibri" pitchFamily="34" charset="-120"/>
               </a:rPr>
+              <a:t>Optional fallback: a Kali/Ubuntu VM if your host can't run Docker</a:t>
+            </a:r>
+            <a:endParaRPr lang="en-US" sz="1350" dirty="0"/>
+          </a:p>
+        </p:txBody>
+      </p:sp>
+      <p:sp>
+        <p:nvSpPr>
+          <p:cNvPr id="17" name="Shape 14"/>
+          <p:cNvSpPr/>
+          <p:nvPr/>
+        </p:nvSpPr>
+        <p:spPr>
+          <a:xfrm>
+            <a:off x="502920" y="3227832"/>
+            <a:ext cx="384048" cy="384048"/>
+          </a:xfrm>
+          <a:prstGeom prst="ellipse">
+            <a:avLst/>
+          </a:prstGeom>
+          <a:solidFill>
+            <a:srgbClr val="E35205"/>
+          </a:solidFill>
+          <a:ln/>
+        </p:spPr>
+      </p:sp>
+      <p:sp>
+        <p:nvSpPr>
+          <p:cNvPr id="18" name="Text 15"/>
+          <p:cNvSpPr/>
+          <p:nvPr/>
+        </p:nvSpPr>
+        <p:spPr>
+          <a:xfrm>
+            <a:off x="502920" y="3227832"/>
+            <a:ext cx="384048" cy="384048"/>
+          </a:xfrm>
+          <a:prstGeom prst="rect">
+            <a:avLst/>
+          </a:prstGeom>
+          <a:noFill/>
+          <a:ln/>
+        </p:spPr>
+        <p:txBody>
+          <a:bodyPr wrap="square" lIns="0" tIns="0" rIns="0" bIns="0" rtlCol="0" anchor="ctr"/>
+          <a:lstStyle/>
+          <a:p>
+            <a:pPr algn="ctr" indent="0" marL="0">
+              <a:buNone/>
+            </a:pPr>
+            <a:r>
+              <a:rPr lang="en-US" sz="1500" b="1" dirty="0">
+                <a:solidFill>
+                  <a:srgbClr val="0E1726"/>
+                </a:solidFill>
+                <a:latin typeface="Arial" pitchFamily="34" charset="0"/>
+                <a:ea typeface="Arial" pitchFamily="34" charset="-122"/>
+                <a:cs typeface="Arial" pitchFamily="34" charset="-120"/>
+              </a:rPr>
+              <a:t>5</a:t>
+            </a:r>
+            <a:endParaRPr lang="en-US" sz="1500" dirty="0"/>
+          </a:p>
+        </p:txBody>
+      </p:sp>
+      <p:sp>
+        <p:nvSpPr>
+          <p:cNvPr id="19" name="Text 16"/>
+          <p:cNvSpPr/>
+          <p:nvPr/>
+        </p:nvSpPr>
+        <p:spPr>
+          <a:xfrm>
+            <a:off x="1051560" y="3227832"/>
+            <a:ext cx="7589520" cy="402336"/>
+          </a:xfrm>
+          <a:prstGeom prst="rect">
+            <a:avLst/>
+          </a:prstGeom>
+          <a:noFill/>
+          <a:ln/>
+        </p:spPr>
+        <p:txBody>
+          <a:bodyPr wrap="square" lIns="0" tIns="0" rIns="0" bIns="0" rtlCol="0" anchor="ctr">
+            <a:normAutofit/>
+          </a:bodyPr>
+          <a:lstStyle/>
+          <a:p>
+            <a:pPr indent="0" marL="0">
+              <a:buNone/>
+            </a:pPr>
+            <a:r>
+              <a:rPr lang="en-US" sz="1350" dirty="0">
+                <a:solidFill>
+                  <a:srgbClr val="1F2937"/>
+                </a:solidFill>
+                <a:latin typeface="Calibri" pitchFamily="34" charset="0"/>
+                <a:ea typeface="Calibri" pitchFamily="34" charset="-122"/>
+                <a:cs typeface="Calibri" pitchFamily="34" charset="-120"/>
+              </a:rPr>
+              <a:t>Verify: docker run hello-world, git --version</a:t>
+            </a:r>
+            <a:endParaRPr lang="en-US" sz="1350" dirty="0"/>
+          </a:p>
+        </p:txBody>
+      </p:sp>
+      <p:sp>
+        <p:nvSpPr>
+          <p:cNvPr id="20" name="Text 17"/>
+          <p:cNvSpPr/>
+          <p:nvPr/>
+        </p:nvSpPr>
+        <p:spPr>
+          <a:xfrm>
+            <a:off x="457200" y="4800600"/>
+            <a:ext cx="6949440" cy="274320"/>
+          </a:xfrm>
+          <a:prstGeom prst="rect">
+            <a:avLst/>
+          </a:prstGeom>
+          <a:noFill/>
+          <a:ln/>
+        </p:spPr>
+        <p:txBody>
+          <a:bodyPr wrap="square" lIns="0" tIns="0" rIns="0" bIns="0" rtlCol="0" anchor="ctr"/>
+          <a:lstStyle/>
+          <a:p>
+            <a:pPr indent="0" marL="0">
+              <a:buNone/>
+            </a:pPr>
+            <a:r>
+              <a:rPr lang="en-US" sz="900" dirty="0">
+                <a:solidFill>
+                  <a:srgbClr val="64748B"/>
+                </a:solidFill>
+                <a:latin typeface="Calibri" pitchFamily="34" charset="0"/>
+                <a:ea typeface="Calibri" pitchFamily="34" charset="-122"/>
+                <a:cs typeface="Calibri" pitchFamily="34" charset="-120"/>
+              </a:rPr>
               <a:t>Software Security · Week 1</a:t>
             </a:r>
             <a:endParaRPr lang="en-US" sz="900" dirty="0"/>
@@ -6101,7 +5497,7 @@
       </p:sp>
       <p:pic>
         <p:nvPicPr>
-          <p:cNvPr id="8" name="Image 1" descr="/Users/pop7/Library/CloudStorage/OneDrive-MonsterConnectCo.,Ltd/Lecture/KOSEN69 - software-security/slides/pptx/assets/logo-small.png">    </p:cNvPr>
+          <p:cNvPr id="21" name="Image 1" descr="/Users/pop7/Library/CloudStorage/OneDrive-MonsterConnectCo.,Ltd/Lecture/KOSEN69 - software-security/slides/pptx/assets/logo-small.png">    </p:cNvPr>
           <p:cNvPicPr>
             <a:picLocks noChangeAspect="1"/>
           </p:cNvPicPr>
@@ -6157,14 +5553,65 @@
       </p:grpSpPr>
       <p:sp>
         <p:nvSpPr>
-          <p:cNvPr id="2" name="Text 0"/>
-          <p:cNvSpPr/>
-          <p:nvPr/>
-        </p:nvSpPr>
-        <p:spPr>
-          <a:xfrm>
-            <a:off x="640080" y="1737360"/>
-            <a:ext cx="7863840" cy="1097280"/>
+          <p:cNvPr id="2" name="Shape 0"/>
+          <p:cNvSpPr/>
+          <p:nvPr/>
+        </p:nvSpPr>
+        <p:spPr>
+          <a:xfrm>
+            <a:off x="457200" y="384048"/>
+            <a:ext cx="530352" cy="530352"/>
+          </a:xfrm>
+          <a:prstGeom prst="ellipse">
+            <a:avLst/>
+          </a:prstGeom>
+          <a:solidFill>
+            <a:srgbClr val="E35205"/>
+          </a:solidFill>
+          <a:ln/>
+          <a:effectLst>
+            <a:outerShdw sx="100000" sy="100000" kx="0" ky="0" algn="bl" rotWithShape="0" blurRad="76200" dist="25400" dir="5400000">
+              <a:srgbClr val="000000">
+                <a:alpha val="12000"/>
+              </a:srgbClr>
+            </a:outerShdw>
+          </a:effectLst>
+        </p:spPr>
+      </p:sp>
+      <p:pic>
+        <p:nvPicPr>
+          <p:cNvPr id="3" name="Image 0" descr="preencoded.png">    </p:cNvPr>
+          <p:cNvPicPr>
+            <a:picLocks noChangeAspect="1"/>
+          </p:cNvPicPr>
+          <p:nvPr/>
+        </p:nvPicPr>
+        <p:blipFill>
+          <a:blip r:embed="rId1"/>
+          <a:stretch>
+            <a:fillRect/>
+          </a:stretch>
+        </p:blipFill>
+        <p:spPr>
+          <a:xfrm>
+            <a:off x="594360" y="521208"/>
+            <a:ext cx="256032" cy="256032"/>
+          </a:xfrm>
+          <a:prstGeom prst="rect">
+            <a:avLst/>
+          </a:prstGeom>
+        </p:spPr>
+      </p:pic>
+      <p:sp>
+        <p:nvSpPr>
+          <p:cNvPr id="4" name="Text 1"/>
+          <p:cNvSpPr/>
+          <p:nvPr/>
+        </p:nvSpPr>
+        <p:spPr>
+          <a:xfrm>
+            <a:off x="1143000" y="329184"/>
+            <a:ext cx="7498080" cy="603504"/>
           </a:xfrm>
           <a:prstGeom prst="rect">
             <a:avLst/>
@@ -6180,7 +5627,7 @@
               <a:buNone/>
             </a:pPr>
             <a:r>
-              <a:rPr lang="en-US" sz="4600" b="1" dirty="0">
+              <a:rPr lang="en-US" sz="2600" b="1" dirty="0">
                 <a:solidFill>
                   <a:srgbClr val="1F2937"/>
                 </a:solidFill>
@@ -6188,22 +5635,44 @@
                 <a:ea typeface="Arial" pitchFamily="34" charset="-122"/>
                 <a:cs typeface="Arial" pitchFamily="34" charset="-120"/>
               </a:rPr>
-              <a:t>Questions?</a:t>
-            </a:r>
-            <a:endParaRPr lang="en-US" sz="4600" dirty="0"/>
-          </a:p>
-        </p:txBody>
-      </p:sp>
-      <p:sp>
-        <p:nvSpPr>
-          <p:cNvPr id="3" name="Text 1"/>
-          <p:cNvSpPr/>
-          <p:nvPr/>
-        </p:nvSpPr>
-        <p:spPr>
-          <a:xfrm>
-            <a:off x="658368" y="2834640"/>
-            <a:ext cx="7863840" cy="731520"/>
+              <a:t>Lab 1 — Threat-model a sample app</a:t>
+            </a:r>
+            <a:endParaRPr lang="en-US" sz="2600" dirty="0"/>
+          </a:p>
+        </p:txBody>
+      </p:sp>
+      <p:sp>
+        <p:nvSpPr>
+          <p:cNvPr id="5" name="Shape 2"/>
+          <p:cNvSpPr/>
+          <p:nvPr/>
+        </p:nvSpPr>
+        <p:spPr>
+          <a:xfrm>
+            <a:off x="457200" y="1325880"/>
+            <a:ext cx="8229600" cy="822960"/>
+          </a:xfrm>
+          <a:prstGeom prst="roundRect">
+            <a:avLst>
+              <a:gd name="adj" fmla="val 8889"/>
+            </a:avLst>
+          </a:prstGeom>
+          <a:solidFill>
+            <a:srgbClr val="E8EDF3"/>
+          </a:solidFill>
+          <a:ln/>
+        </p:spPr>
+      </p:sp>
+      <p:sp>
+        <p:nvSpPr>
+          <p:cNvPr id="6" name="Text 3"/>
+          <p:cNvSpPr/>
+          <p:nvPr/>
+        </p:nvSpPr>
+        <p:spPr>
+          <a:xfrm>
+            <a:off x="731520" y="1325880"/>
+            <a:ext cx="7680960" cy="822960"/>
           </a:xfrm>
           <a:prstGeom prst="rect">
             <a:avLst/>
@@ -6212,14 +5681,16 @@
           <a:ln/>
         </p:spPr>
         <p:txBody>
-          <a:bodyPr wrap="square" lIns="0" tIns="0" rIns="0" bIns="0" rtlCol="0" anchor="ctr"/>
+          <a:bodyPr wrap="square" lIns="0" tIns="0" rIns="0" bIns="0" rtlCol="0" anchor="ctr">
+            <a:normAutofit/>
+          </a:bodyPr>
           <a:lstStyle/>
           <a:p>
             <a:pPr indent="0" marL="0">
               <a:buNone/>
             </a:pPr>
             <a:r>
-              <a:rPr lang="en-US" sz="1800" dirty="0">
+              <a:rPr lang="en-US" sz="1400" i="1" dirty="0">
                 <a:solidFill>
                   <a:srgbClr val="E35205"/>
                 </a:solidFill>
@@ -6227,22 +5698,1046 @@
                 <a:ea typeface="Calibri" pitchFamily="34" charset="-122"/>
                 <a:cs typeface="Calibri" pitchFamily="34" charset="-120"/>
               </a:rPr>
-              <a:t>Next week: Secure SDLC, tooling &amp; fuzzing</a:t>
-            </a:r>
-            <a:endParaRPr lang="en-US" sz="1800" dirty="0"/>
+              <a:t>📋 Worksheet 1 — labs/week01-threat-modeling/worksheet.md (Part 3) · kickoff: docker compose up → http://localhost:8080</a:t>
+            </a:r>
+            <a:endParaRPr lang="en-US" sz="1400" dirty="0"/>
+          </a:p>
+        </p:txBody>
+      </p:sp>
+      <p:sp>
+        <p:nvSpPr>
+          <p:cNvPr id="7" name="Shape 4"/>
+          <p:cNvSpPr/>
+          <p:nvPr/>
+        </p:nvSpPr>
+        <p:spPr>
+          <a:xfrm>
+            <a:off x="502920" y="2313432"/>
+            <a:ext cx="384048" cy="384048"/>
+          </a:xfrm>
+          <a:prstGeom prst="ellipse">
+            <a:avLst/>
+          </a:prstGeom>
+          <a:solidFill>
+            <a:srgbClr val="E35205"/>
+          </a:solidFill>
+          <a:ln/>
+        </p:spPr>
+      </p:sp>
+      <p:sp>
+        <p:nvSpPr>
+          <p:cNvPr id="8" name="Text 5"/>
+          <p:cNvSpPr/>
+          <p:nvPr/>
+        </p:nvSpPr>
+        <p:spPr>
+          <a:xfrm>
+            <a:off x="502920" y="2313432"/>
+            <a:ext cx="384048" cy="384048"/>
+          </a:xfrm>
+          <a:prstGeom prst="rect">
+            <a:avLst/>
+          </a:prstGeom>
+          <a:noFill/>
+          <a:ln/>
+        </p:spPr>
+        <p:txBody>
+          <a:bodyPr wrap="square" lIns="0" tIns="0" rIns="0" bIns="0" rtlCol="0" anchor="ctr"/>
+          <a:lstStyle/>
+          <a:p>
+            <a:pPr algn="ctr" indent="0" marL="0">
+              <a:buNone/>
+            </a:pPr>
+            <a:r>
+              <a:rPr lang="en-US" sz="1500" b="1" dirty="0">
+                <a:solidFill>
+                  <a:srgbClr val="0E1726"/>
+                </a:solidFill>
+                <a:latin typeface="Arial" pitchFamily="34" charset="0"/>
+                <a:ea typeface="Arial" pitchFamily="34" charset="-122"/>
+                <a:cs typeface="Arial" pitchFamily="34" charset="-120"/>
+              </a:rPr>
+              <a:t>1</a:t>
+            </a:r>
+            <a:endParaRPr lang="en-US" sz="1500" dirty="0"/>
+          </a:p>
+        </p:txBody>
+      </p:sp>
+      <p:sp>
+        <p:nvSpPr>
+          <p:cNvPr id="9" name="Text 6"/>
+          <p:cNvSpPr/>
+          <p:nvPr/>
+        </p:nvSpPr>
+        <p:spPr>
+          <a:xfrm>
+            <a:off x="1051560" y="2313432"/>
+            <a:ext cx="7589520" cy="402336"/>
+          </a:xfrm>
+          <a:prstGeom prst="rect">
+            <a:avLst/>
+          </a:prstGeom>
+          <a:noFill/>
+          <a:ln/>
+        </p:spPr>
+        <p:txBody>
+          <a:bodyPr wrap="square" lIns="0" tIns="0" rIns="0" bIns="0" rtlCol="0" anchor="ctr">
+            <a:normAutofit/>
+          </a:bodyPr>
+          <a:lstStyle/>
+          <a:p>
+            <a:pPr indent="0" marL="0">
+              <a:buNone/>
+            </a:pPr>
+            <a:r>
+              <a:rPr lang="en-US" sz="1350" dirty="0">
+                <a:solidFill>
+                  <a:srgbClr val="1F2937"/>
+                </a:solidFill>
+                <a:latin typeface="Calibri" pitchFamily="34" charset="0"/>
+                <a:ea typeface="Calibri" pitchFamily="34" charset="-122"/>
+                <a:cs typeface="Calibri" pitchFamily="34" charset="-120"/>
+              </a:rPr>
+              <a:t>Run the app; draw a DFD; apply STRIDE to each element</a:t>
+            </a:r>
+            <a:endParaRPr lang="en-US" sz="1350" dirty="0"/>
+          </a:p>
+        </p:txBody>
+      </p:sp>
+      <p:sp>
+        <p:nvSpPr>
+          <p:cNvPr id="10" name="Shape 7"/>
+          <p:cNvSpPr/>
+          <p:nvPr/>
+        </p:nvSpPr>
+        <p:spPr>
+          <a:xfrm>
+            <a:off x="502920" y="2788920"/>
+            <a:ext cx="384048" cy="384048"/>
+          </a:xfrm>
+          <a:prstGeom prst="ellipse">
+            <a:avLst/>
+          </a:prstGeom>
+          <a:solidFill>
+            <a:srgbClr val="E35205"/>
+          </a:solidFill>
+          <a:ln/>
+        </p:spPr>
+      </p:sp>
+      <p:sp>
+        <p:nvSpPr>
+          <p:cNvPr id="11" name="Text 8"/>
+          <p:cNvSpPr/>
+          <p:nvPr/>
+        </p:nvSpPr>
+        <p:spPr>
+          <a:xfrm>
+            <a:off x="502920" y="2788920"/>
+            <a:ext cx="384048" cy="384048"/>
+          </a:xfrm>
+          <a:prstGeom prst="rect">
+            <a:avLst/>
+          </a:prstGeom>
+          <a:noFill/>
+          <a:ln/>
+        </p:spPr>
+        <p:txBody>
+          <a:bodyPr wrap="square" lIns="0" tIns="0" rIns="0" bIns="0" rtlCol="0" anchor="ctr"/>
+          <a:lstStyle/>
+          <a:p>
+            <a:pPr algn="ctr" indent="0" marL="0">
+              <a:buNone/>
+            </a:pPr>
+            <a:r>
+              <a:rPr lang="en-US" sz="1500" b="1" dirty="0">
+                <a:solidFill>
+                  <a:srgbClr val="0E1726"/>
+                </a:solidFill>
+                <a:latin typeface="Arial" pitchFamily="34" charset="0"/>
+                <a:ea typeface="Arial" pitchFamily="34" charset="-122"/>
+                <a:cs typeface="Arial" pitchFamily="34" charset="-120"/>
+              </a:rPr>
+              <a:t>2</a:t>
+            </a:r>
+            <a:endParaRPr lang="en-US" sz="1500" dirty="0"/>
+          </a:p>
+        </p:txBody>
+      </p:sp>
+      <p:sp>
+        <p:nvSpPr>
+          <p:cNvPr id="12" name="Text 9"/>
+          <p:cNvSpPr/>
+          <p:nvPr/>
+        </p:nvSpPr>
+        <p:spPr>
+          <a:xfrm>
+            <a:off x="1051560" y="2788920"/>
+            <a:ext cx="7589520" cy="402336"/>
+          </a:xfrm>
+          <a:prstGeom prst="rect">
+            <a:avLst/>
+          </a:prstGeom>
+          <a:noFill/>
+          <a:ln/>
+        </p:spPr>
+        <p:txBody>
+          <a:bodyPr wrap="square" lIns="0" tIns="0" rIns="0" bIns="0" rtlCol="0" anchor="ctr">
+            <a:normAutofit/>
+          </a:bodyPr>
+          <a:lstStyle/>
+          <a:p>
+            <a:pPr indent="0" marL="0">
+              <a:buNone/>
+            </a:pPr>
+            <a:r>
+              <a:rPr lang="en-US" sz="1350" dirty="0">
+                <a:solidFill>
+                  <a:srgbClr val="1F2937"/>
+                </a:solidFill>
+                <a:latin typeface="Calibri" pitchFamily="34" charset="0"/>
+                <a:ea typeface="Calibri" pitchFamily="34" charset="-122"/>
+                <a:cs typeface="Calibri" pitchFamily="34" charset="-120"/>
+              </a:rPr>
+              <a:t>Abuse cases: 2 personas × 2 abuse cases</a:t>
+            </a:r>
+            <a:endParaRPr lang="en-US" sz="1350" dirty="0"/>
+          </a:p>
+        </p:txBody>
+      </p:sp>
+      <p:sp>
+        <p:nvSpPr>
+          <p:cNvPr id="13" name="Shape 10"/>
+          <p:cNvSpPr/>
+          <p:nvPr/>
+        </p:nvSpPr>
+        <p:spPr>
+          <a:xfrm>
+            <a:off x="502920" y="3264408"/>
+            <a:ext cx="384048" cy="384048"/>
+          </a:xfrm>
+          <a:prstGeom prst="ellipse">
+            <a:avLst/>
+          </a:prstGeom>
+          <a:solidFill>
+            <a:srgbClr val="E35205"/>
+          </a:solidFill>
+          <a:ln/>
+        </p:spPr>
+      </p:sp>
+      <p:sp>
+        <p:nvSpPr>
+          <p:cNvPr id="14" name="Text 11"/>
+          <p:cNvSpPr/>
+          <p:nvPr/>
+        </p:nvSpPr>
+        <p:spPr>
+          <a:xfrm>
+            <a:off x="502920" y="3264408"/>
+            <a:ext cx="384048" cy="384048"/>
+          </a:xfrm>
+          <a:prstGeom prst="rect">
+            <a:avLst/>
+          </a:prstGeom>
+          <a:noFill/>
+          <a:ln/>
+        </p:spPr>
+        <p:txBody>
+          <a:bodyPr wrap="square" lIns="0" tIns="0" rIns="0" bIns="0" rtlCol="0" anchor="ctr"/>
+          <a:lstStyle/>
+          <a:p>
+            <a:pPr algn="ctr" indent="0" marL="0">
+              <a:buNone/>
+            </a:pPr>
+            <a:r>
+              <a:rPr lang="en-US" sz="1500" b="1" dirty="0">
+                <a:solidFill>
+                  <a:srgbClr val="0E1726"/>
+                </a:solidFill>
+                <a:latin typeface="Arial" pitchFamily="34" charset="0"/>
+                <a:ea typeface="Arial" pitchFamily="34" charset="-122"/>
+                <a:cs typeface="Arial" pitchFamily="34" charset="-120"/>
+              </a:rPr>
+              <a:t>3</a:t>
+            </a:r>
+            <a:endParaRPr lang="en-US" sz="1500" dirty="0"/>
+          </a:p>
+        </p:txBody>
+      </p:sp>
+      <p:sp>
+        <p:nvSpPr>
+          <p:cNvPr id="15" name="Text 12"/>
+          <p:cNvSpPr/>
+          <p:nvPr/>
+        </p:nvSpPr>
+        <p:spPr>
+          <a:xfrm>
+            <a:off x="1051560" y="3264408"/>
+            <a:ext cx="7589520" cy="402336"/>
+          </a:xfrm>
+          <a:prstGeom prst="rect">
+            <a:avLst/>
+          </a:prstGeom>
+          <a:noFill/>
+          <a:ln/>
+        </p:spPr>
+        <p:txBody>
+          <a:bodyPr wrap="square" lIns="0" tIns="0" rIns="0" bIns="0" rtlCol="0" anchor="ctr">
+            <a:normAutofit/>
+          </a:bodyPr>
+          <a:lstStyle/>
+          <a:p>
+            <a:pPr indent="0" marL="0">
+              <a:buNone/>
+            </a:pPr>
+            <a:r>
+              <a:rPr lang="en-US" sz="1350" dirty="0">
+                <a:solidFill>
+                  <a:srgbClr val="1F2937"/>
+                </a:solidFill>
+                <a:latin typeface="Calibri" pitchFamily="34" charset="0"/>
+                <a:ea typeface="Calibri" pitchFamily="34" charset="-122"/>
+                <a:cs typeface="Calibri" pitchFamily="34" charset="-120"/>
+              </a:rPr>
+              <a:t>Deep-dive the /upload path-traversal finding</a:t>
+            </a:r>
+            <a:endParaRPr lang="en-US" sz="1350" dirty="0"/>
+          </a:p>
+        </p:txBody>
+      </p:sp>
+      <p:sp>
+        <p:nvSpPr>
+          <p:cNvPr id="16" name="Shape 13"/>
+          <p:cNvSpPr/>
+          <p:nvPr/>
+        </p:nvSpPr>
+        <p:spPr>
+          <a:xfrm>
+            <a:off x="502920" y="3739896"/>
+            <a:ext cx="384048" cy="384048"/>
+          </a:xfrm>
+          <a:prstGeom prst="ellipse">
+            <a:avLst/>
+          </a:prstGeom>
+          <a:solidFill>
+            <a:srgbClr val="E35205"/>
+          </a:solidFill>
+          <a:ln/>
+        </p:spPr>
+      </p:sp>
+      <p:sp>
+        <p:nvSpPr>
+          <p:cNvPr id="17" name="Text 14"/>
+          <p:cNvSpPr/>
+          <p:nvPr/>
+        </p:nvSpPr>
+        <p:spPr>
+          <a:xfrm>
+            <a:off x="502920" y="3739896"/>
+            <a:ext cx="384048" cy="384048"/>
+          </a:xfrm>
+          <a:prstGeom prst="rect">
+            <a:avLst/>
+          </a:prstGeom>
+          <a:noFill/>
+          <a:ln/>
+        </p:spPr>
+        <p:txBody>
+          <a:bodyPr wrap="square" lIns="0" tIns="0" rIns="0" bIns="0" rtlCol="0" anchor="ctr"/>
+          <a:lstStyle/>
+          <a:p>
+            <a:pPr algn="ctr" indent="0" marL="0">
+              <a:buNone/>
+            </a:pPr>
+            <a:r>
+              <a:rPr lang="en-US" sz="1500" b="1" dirty="0">
+                <a:solidFill>
+                  <a:srgbClr val="0E1726"/>
+                </a:solidFill>
+                <a:latin typeface="Arial" pitchFamily="34" charset="0"/>
+                <a:ea typeface="Arial" pitchFamily="34" charset="-122"/>
+                <a:cs typeface="Arial" pitchFamily="34" charset="-120"/>
+              </a:rPr>
+              <a:t>4</a:t>
+            </a:r>
+            <a:endParaRPr lang="en-US" sz="1500" dirty="0"/>
+          </a:p>
+        </p:txBody>
+      </p:sp>
+      <p:sp>
+        <p:nvSpPr>
+          <p:cNvPr id="18" name="Text 15"/>
+          <p:cNvSpPr/>
+          <p:nvPr/>
+        </p:nvSpPr>
+        <p:spPr>
+          <a:xfrm>
+            <a:off x="1051560" y="3739896"/>
+            <a:ext cx="7589520" cy="658368"/>
+          </a:xfrm>
+          <a:prstGeom prst="rect">
+            <a:avLst/>
+          </a:prstGeom>
+          <a:noFill/>
+          <a:ln/>
+        </p:spPr>
+        <p:txBody>
+          <a:bodyPr wrap="square" lIns="0" tIns="0" rIns="0" bIns="0" rtlCol="0" anchor="ctr">
+            <a:normAutofit/>
+          </a:bodyPr>
+          <a:lstStyle/>
+          <a:p>
+            <a:pPr indent="0" marL="0">
+              <a:buNone/>
+            </a:pPr>
+            <a:r>
+              <a:rPr lang="en-US" sz="1350" dirty="0">
+                <a:solidFill>
+                  <a:srgbClr val="1F2937"/>
+                </a:solidFill>
+                <a:latin typeface="Calibri" pitchFamily="34" charset="0"/>
+                <a:ea typeface="Calibri" pitchFamily="34" charset="-122"/>
+                <a:cs typeface="Calibri" pitchFamily="34" charset="-120"/>
+              </a:rPr>
+              <a:t>Systems-level pass: assume one element is owned — what does it reach? Chain two low findings into one system-level claim</a:t>
+            </a:r>
+            <a:endParaRPr lang="en-US" sz="1350" dirty="0"/>
+          </a:p>
+        </p:txBody>
+      </p:sp>
+      <p:sp>
+        <p:nvSpPr>
+          <p:cNvPr id="19" name="Text 16"/>
+          <p:cNvSpPr/>
+          <p:nvPr/>
+        </p:nvSpPr>
+        <p:spPr>
+          <a:xfrm>
+            <a:off x="457200" y="4800600"/>
+            <a:ext cx="6949440" cy="274320"/>
+          </a:xfrm>
+          <a:prstGeom prst="rect">
+            <a:avLst/>
+          </a:prstGeom>
+          <a:noFill/>
+          <a:ln/>
+        </p:spPr>
+        <p:txBody>
+          <a:bodyPr wrap="square" lIns="0" tIns="0" rIns="0" bIns="0" rtlCol="0" anchor="ctr"/>
+          <a:lstStyle/>
+          <a:p>
+            <a:pPr indent="0" marL="0">
+              <a:buNone/>
+            </a:pPr>
+            <a:r>
+              <a:rPr lang="en-US" sz="900" dirty="0">
+                <a:solidFill>
+                  <a:srgbClr val="64748B"/>
+                </a:solidFill>
+                <a:latin typeface="Calibri" pitchFamily="34" charset="0"/>
+                <a:ea typeface="Calibri" pitchFamily="34" charset="-122"/>
+                <a:cs typeface="Calibri" pitchFamily="34" charset="-120"/>
+              </a:rPr>
+              <a:t>Software Security · Week 1</a:t>
+            </a:r>
+            <a:endParaRPr lang="en-US" sz="900" dirty="0"/>
           </a:p>
         </p:txBody>
       </p:sp>
       <p:pic>
         <p:nvPicPr>
-          <p:cNvPr id="4" name="Image 0" descr="/Users/pop7/Library/CloudStorage/OneDrive-MonsterConnectCo.,Ltd/Lecture/KOSEN69 - software-security/slides/pptx/assets/logo-small.png">    </p:cNvPr>
+          <p:cNvPr id="20" name="Image 1" descr="/Users/pop7/Library/CloudStorage/OneDrive-MonsterConnectCo.,Ltd/Lecture/KOSEN69 - software-security/slides/pptx/assets/logo-small.png">    </p:cNvPr>
           <p:cNvPicPr>
             <a:picLocks noChangeAspect="1"/>
           </p:cNvPicPr>
           <p:nvPr/>
         </p:nvPicPr>
         <p:blipFill>
+          <a:blip r:embed="rId2"/>
+          <a:stretch>
+            <a:fillRect/>
+          </a:stretch>
+        </p:blipFill>
+        <p:spPr>
+          <a:xfrm>
+            <a:off x="7882128" y="4700016"/>
+            <a:ext cx="768096" cy="356616"/>
+          </a:xfrm>
+          <a:prstGeom prst="rect">
+            <a:avLst/>
+          </a:prstGeom>
+        </p:spPr>
+      </p:pic>
+    </p:spTree>
+  </p:cSld>
+  <p:clrMapOvr>
+    <a:masterClrMapping/>
+  </p:clrMapOvr>
+</p:sld>
+</file>
+
+<file path=ppt/slides/slide19.xml><?xml version="1.0" encoding="utf-8"?>
+<p:sld xmlns:a="http://schemas.openxmlformats.org/drawingml/2006/main" xmlns:r="http://schemas.openxmlformats.org/officeDocument/2006/relationships" xmlns:p="http://schemas.openxmlformats.org/presentationml/2006/main">
+  <p:cSld name="Slide 19">
+    <p:bg>
+      <p:bgPr>
+        <a:solidFill>
+          <a:srgbClr val="FFFFFF"/>
+        </a:solidFill>
+      </p:bgPr>
+    </p:bg>
+    <p:spTree>
+      <p:nvGrpSpPr>
+        <p:cNvPr id="1" name=""/>
+        <p:cNvGrpSpPr/>
+        <p:nvPr/>
+      </p:nvGrpSpPr>
+      <p:grpSpPr>
+        <a:xfrm>
+          <a:off x="0" y="0"/>
+          <a:ext cx="0" cy="0"/>
+          <a:chOff x="0" y="0"/>
+          <a:chExt cx="0" cy="0"/>
+        </a:xfrm>
+      </p:grpSpPr>
+      <p:sp>
+        <p:nvSpPr>
+          <p:cNvPr id="2" name="Shape 0"/>
+          <p:cNvSpPr/>
+          <p:nvPr/>
+        </p:nvSpPr>
+        <p:spPr>
+          <a:xfrm>
+            <a:off x="457200" y="384048"/>
+            <a:ext cx="530352" cy="530352"/>
+          </a:xfrm>
+          <a:prstGeom prst="ellipse">
+            <a:avLst/>
+          </a:prstGeom>
+          <a:solidFill>
+            <a:srgbClr val="E35205"/>
+          </a:solidFill>
+          <a:ln/>
+          <a:effectLst>
+            <a:outerShdw sx="100000" sy="100000" kx="0" ky="0" algn="bl" rotWithShape="0" blurRad="76200" dist="25400" dir="5400000">
+              <a:srgbClr val="000000">
+                <a:alpha val="12000"/>
+              </a:srgbClr>
+            </a:outerShdw>
+          </a:effectLst>
+        </p:spPr>
+      </p:sp>
+      <p:pic>
+        <p:nvPicPr>
+          <p:cNvPr id="3" name="Image 0" descr="preencoded.png">    </p:cNvPr>
+          <p:cNvPicPr>
+            <a:picLocks noChangeAspect="1"/>
+          </p:cNvPicPr>
+          <p:nvPr/>
+        </p:nvPicPr>
+        <p:blipFill>
           <a:blip r:embed="rId1"/>
+          <a:stretch>
+            <a:fillRect/>
+          </a:stretch>
+        </p:blipFill>
+        <p:spPr>
+          <a:xfrm>
+            <a:off x="594360" y="521208"/>
+            <a:ext cx="256032" cy="256032"/>
+          </a:xfrm>
+          <a:prstGeom prst="rect">
+            <a:avLst/>
+          </a:prstGeom>
+        </p:spPr>
+      </p:pic>
+      <p:sp>
+        <p:nvSpPr>
+          <p:cNvPr id="4" name="Text 1"/>
+          <p:cNvSpPr/>
+          <p:nvPr/>
+        </p:nvSpPr>
+        <p:spPr>
+          <a:xfrm>
+            <a:off x="1143000" y="329184"/>
+            <a:ext cx="7498080" cy="603504"/>
+          </a:xfrm>
+          <a:prstGeom prst="rect">
+            <a:avLst/>
+          </a:prstGeom>
+          <a:noFill/>
+          <a:ln/>
+        </p:spPr>
+        <p:txBody>
+          <a:bodyPr wrap="square" lIns="0" tIns="0" rIns="0" bIns="0" rtlCol="0" anchor="ctr"/>
+          <a:lstStyle/>
+          <a:p>
+            <a:pPr indent="0" marL="0">
+              <a:buNone/>
+            </a:pPr>
+            <a:r>
+              <a:rPr lang="en-US" sz="2600" b="1" dirty="0">
+                <a:solidFill>
+                  <a:srgbClr val="1F2937"/>
+                </a:solidFill>
+                <a:latin typeface="Arial" pitchFamily="34" charset="0"/>
+                <a:ea typeface="Arial" pitchFamily="34" charset="-122"/>
+                <a:cs typeface="Arial" pitchFamily="34" charset="-120"/>
+              </a:rPr>
+              <a:t>Lab 1 — Threat-model a sample app (cont.)</a:t>
+            </a:r>
+            <a:endParaRPr lang="en-US" sz="2600" dirty="0"/>
+          </a:p>
+        </p:txBody>
+      </p:sp>
+      <p:sp>
+        <p:nvSpPr>
+          <p:cNvPr id="5" name="Shape 2"/>
+          <p:cNvSpPr/>
+          <p:nvPr/>
+        </p:nvSpPr>
+        <p:spPr>
+          <a:xfrm>
+            <a:off x="502920" y="1325880"/>
+            <a:ext cx="384048" cy="384048"/>
+          </a:xfrm>
+          <a:prstGeom prst="ellipse">
+            <a:avLst/>
+          </a:prstGeom>
+          <a:solidFill>
+            <a:srgbClr val="E35205"/>
+          </a:solidFill>
+          <a:ln/>
+        </p:spPr>
+      </p:sp>
+      <p:sp>
+        <p:nvSpPr>
+          <p:cNvPr id="6" name="Text 3"/>
+          <p:cNvSpPr/>
+          <p:nvPr/>
+        </p:nvSpPr>
+        <p:spPr>
+          <a:xfrm>
+            <a:off x="502920" y="1325880"/>
+            <a:ext cx="384048" cy="384048"/>
+          </a:xfrm>
+          <a:prstGeom prst="rect">
+            <a:avLst/>
+          </a:prstGeom>
+          <a:noFill/>
+          <a:ln/>
+        </p:spPr>
+        <p:txBody>
+          <a:bodyPr wrap="square" lIns="0" tIns="0" rIns="0" bIns="0" rtlCol="0" anchor="ctr"/>
+          <a:lstStyle/>
+          <a:p>
+            <a:pPr algn="ctr" indent="0" marL="0">
+              <a:buNone/>
+            </a:pPr>
+            <a:r>
+              <a:rPr lang="en-US" sz="1500" b="1" dirty="0">
+                <a:solidFill>
+                  <a:srgbClr val="0E1726"/>
+                </a:solidFill>
+                <a:latin typeface="Arial" pitchFamily="34" charset="0"/>
+                <a:ea typeface="Arial" pitchFamily="34" charset="-122"/>
+                <a:cs typeface="Arial" pitchFamily="34" charset="-120"/>
+              </a:rPr>
+              <a:t>5</a:t>
+            </a:r>
+            <a:endParaRPr lang="en-US" sz="1500" dirty="0"/>
+          </a:p>
+        </p:txBody>
+      </p:sp>
+      <p:sp>
+        <p:nvSpPr>
+          <p:cNvPr id="7" name="Text 4"/>
+          <p:cNvSpPr/>
+          <p:nvPr/>
+        </p:nvSpPr>
+        <p:spPr>
+          <a:xfrm>
+            <a:off x="1051560" y="1325880"/>
+            <a:ext cx="7589520" cy="402336"/>
+          </a:xfrm>
+          <a:prstGeom prst="rect">
+            <a:avLst/>
+          </a:prstGeom>
+          <a:noFill/>
+          <a:ln/>
+        </p:spPr>
+        <p:txBody>
+          <a:bodyPr wrap="square" lIns="0" tIns="0" rIns="0" bIns="0" rtlCol="0" anchor="ctr">
+            <a:normAutofit/>
+          </a:bodyPr>
+          <a:lstStyle/>
+          <a:p>
+            <a:pPr indent="0" marL="0">
+              <a:buNone/>
+            </a:pPr>
+            <a:r>
+              <a:rPr lang="en-US" sz="1350" dirty="0">
+                <a:solidFill>
+                  <a:srgbClr val="1F2937"/>
+                </a:solidFill>
+                <a:latin typeface="Calibri" pitchFamily="34" charset="0"/>
+                <a:ea typeface="Calibri" pitchFamily="34" charset="-122"/>
+                <a:cs typeface="Calibri" pitchFamily="34" charset="-120"/>
+              </a:rPr>
+              <a:t>Turn threats into testable security requirements ("the system must … so that …")</a:t>
+            </a:r>
+            <a:endParaRPr lang="en-US" sz="1350" dirty="0"/>
+          </a:p>
+        </p:txBody>
+      </p:sp>
+      <p:sp>
+        <p:nvSpPr>
+          <p:cNvPr id="8" name="Shape 5"/>
+          <p:cNvSpPr/>
+          <p:nvPr/>
+        </p:nvSpPr>
+        <p:spPr>
+          <a:xfrm>
+            <a:off x="502920" y="1801368"/>
+            <a:ext cx="384048" cy="384048"/>
+          </a:xfrm>
+          <a:prstGeom prst="ellipse">
+            <a:avLst/>
+          </a:prstGeom>
+          <a:solidFill>
+            <a:srgbClr val="E35205"/>
+          </a:solidFill>
+          <a:ln/>
+        </p:spPr>
+      </p:sp>
+      <p:sp>
+        <p:nvSpPr>
+          <p:cNvPr id="9" name="Text 6"/>
+          <p:cNvSpPr/>
+          <p:nvPr/>
+        </p:nvSpPr>
+        <p:spPr>
+          <a:xfrm>
+            <a:off x="502920" y="1801368"/>
+            <a:ext cx="384048" cy="384048"/>
+          </a:xfrm>
+          <a:prstGeom prst="rect">
+            <a:avLst/>
+          </a:prstGeom>
+          <a:noFill/>
+          <a:ln/>
+        </p:spPr>
+        <p:txBody>
+          <a:bodyPr wrap="square" lIns="0" tIns="0" rIns="0" bIns="0" rtlCol="0" anchor="ctr"/>
+          <a:lstStyle/>
+          <a:p>
+            <a:pPr algn="ctr" indent="0" marL="0">
+              <a:buNone/>
+            </a:pPr>
+            <a:r>
+              <a:rPr lang="en-US" sz="1500" b="1" dirty="0">
+                <a:solidFill>
+                  <a:srgbClr val="0E1726"/>
+                </a:solidFill>
+                <a:latin typeface="Arial" pitchFamily="34" charset="0"/>
+                <a:ea typeface="Arial" pitchFamily="34" charset="-122"/>
+                <a:cs typeface="Arial" pitchFamily="34" charset="-120"/>
+              </a:rPr>
+              <a:t>6</a:t>
+            </a:r>
+            <a:endParaRPr lang="en-US" sz="1500" dirty="0"/>
+          </a:p>
+        </p:txBody>
+      </p:sp>
+      <p:sp>
+        <p:nvSpPr>
+          <p:cNvPr id="10" name="Text 7"/>
+          <p:cNvSpPr/>
+          <p:nvPr/>
+        </p:nvSpPr>
+        <p:spPr>
+          <a:xfrm>
+            <a:off x="1051560" y="1801368"/>
+            <a:ext cx="7589520" cy="402336"/>
+          </a:xfrm>
+          <a:prstGeom prst="rect">
+            <a:avLst/>
+          </a:prstGeom>
+          <a:noFill/>
+          <a:ln/>
+        </p:spPr>
+        <p:txBody>
+          <a:bodyPr wrap="square" lIns="0" tIns="0" rIns="0" bIns="0" rtlCol="0" anchor="ctr">
+            <a:normAutofit/>
+          </a:bodyPr>
+          <a:lstStyle/>
+          <a:p>
+            <a:pPr indent="0" marL="0">
+              <a:buNone/>
+            </a:pPr>
+            <a:r>
+              <a:rPr lang="en-US" sz="1350" dirty="0">
+                <a:solidFill>
+                  <a:srgbClr val="1F2937"/>
+                </a:solidFill>
+                <a:latin typeface="Calibri" pitchFamily="34" charset="0"/>
+                <a:ea typeface="Calibri" pitchFamily="34" charset="-122"/>
+                <a:cs typeface="Calibri" pitchFamily="34" charset="-120"/>
+              </a:rPr>
+              <a:t>NoteVault (term project): DFD + top-3 threats — this kicks off your project</a:t>
+            </a:r>
+            <a:endParaRPr lang="en-US" sz="1350" dirty="0"/>
+          </a:p>
+        </p:txBody>
+      </p:sp>
+      <p:sp>
+        <p:nvSpPr>
+          <p:cNvPr id="11" name="Shape 8"/>
+          <p:cNvSpPr/>
+          <p:nvPr/>
+        </p:nvSpPr>
+        <p:spPr>
+          <a:xfrm>
+            <a:off x="502920" y="2276856"/>
+            <a:ext cx="384048" cy="384048"/>
+          </a:xfrm>
+          <a:prstGeom prst="ellipse">
+            <a:avLst/>
+          </a:prstGeom>
+          <a:solidFill>
+            <a:srgbClr val="E35205"/>
+          </a:solidFill>
+          <a:ln/>
+        </p:spPr>
+      </p:sp>
+      <p:sp>
+        <p:nvSpPr>
+          <p:cNvPr id="12" name="Text 9"/>
+          <p:cNvSpPr/>
+          <p:nvPr/>
+        </p:nvSpPr>
+        <p:spPr>
+          <a:xfrm>
+            <a:off x="502920" y="2276856"/>
+            <a:ext cx="384048" cy="384048"/>
+          </a:xfrm>
+          <a:prstGeom prst="rect">
+            <a:avLst/>
+          </a:prstGeom>
+          <a:noFill/>
+          <a:ln/>
+        </p:spPr>
+        <p:txBody>
+          <a:bodyPr wrap="square" lIns="0" tIns="0" rIns="0" bIns="0" rtlCol="0" anchor="ctr"/>
+          <a:lstStyle/>
+          <a:p>
+            <a:pPr algn="ctr" indent="0" marL="0">
+              <a:buNone/>
+            </a:pPr>
+            <a:r>
+              <a:rPr lang="en-US" sz="1500" b="1" dirty="0">
+                <a:solidFill>
+                  <a:srgbClr val="0E1726"/>
+                </a:solidFill>
+                <a:latin typeface="Arial" pitchFamily="34" charset="0"/>
+                <a:ea typeface="Arial" pitchFamily="34" charset="-122"/>
+                <a:cs typeface="Arial" pitchFamily="34" charset="-120"/>
+              </a:rPr>
+              <a:t>7</a:t>
+            </a:r>
+            <a:endParaRPr lang="en-US" sz="1500" dirty="0"/>
+          </a:p>
+        </p:txBody>
+      </p:sp>
+      <p:sp>
+        <p:nvSpPr>
+          <p:cNvPr id="13" name="Text 10"/>
+          <p:cNvSpPr/>
+          <p:nvPr/>
+        </p:nvSpPr>
+        <p:spPr>
+          <a:xfrm>
+            <a:off x="1051560" y="2276856"/>
+            <a:ext cx="7589520" cy="402336"/>
+          </a:xfrm>
+          <a:prstGeom prst="rect">
+            <a:avLst/>
+          </a:prstGeom>
+          <a:noFill/>
+          <a:ln/>
+        </p:spPr>
+        <p:txBody>
+          <a:bodyPr wrap="square" lIns="0" tIns="0" rIns="0" bIns="0" rtlCol="0" anchor="ctr">
+            <a:normAutofit/>
+          </a:bodyPr>
+          <a:lstStyle/>
+          <a:p>
+            <a:pPr indent="0" marL="0">
+              <a:buNone/>
+            </a:pPr>
+            <a:r>
+              <a:rPr lang="en-US" sz="1350" dirty="0">
+                <a:solidFill>
+                  <a:srgbClr val="1F2937"/>
+                </a:solidFill>
+                <a:latin typeface="Calibri" pitchFamily="34" charset="0"/>
+                <a:ea typeface="Calibri" pitchFamily="34" charset="-122"/>
+                <a:cs typeface="Calibri" pitchFamily="34" charset="-120"/>
+              </a:rPr>
+              <a:t>Rank top 5 risks (likelihood × impact)</a:t>
+            </a:r>
+            <a:endParaRPr lang="en-US" sz="1350" dirty="0"/>
+          </a:p>
+        </p:txBody>
+      </p:sp>
+      <p:sp>
+        <p:nvSpPr>
+          <p:cNvPr id="14" name="Shape 11"/>
+          <p:cNvSpPr/>
+          <p:nvPr/>
+        </p:nvSpPr>
+        <p:spPr>
+          <a:xfrm>
+            <a:off x="502920" y="2752344"/>
+            <a:ext cx="384048" cy="384048"/>
+          </a:xfrm>
+          <a:prstGeom prst="ellipse">
+            <a:avLst/>
+          </a:prstGeom>
+          <a:solidFill>
+            <a:srgbClr val="E35205"/>
+          </a:solidFill>
+          <a:ln/>
+        </p:spPr>
+      </p:sp>
+      <p:sp>
+        <p:nvSpPr>
+          <p:cNvPr id="15" name="Text 12"/>
+          <p:cNvSpPr/>
+          <p:nvPr/>
+        </p:nvSpPr>
+        <p:spPr>
+          <a:xfrm>
+            <a:off x="502920" y="2752344"/>
+            <a:ext cx="384048" cy="384048"/>
+          </a:xfrm>
+          <a:prstGeom prst="rect">
+            <a:avLst/>
+          </a:prstGeom>
+          <a:noFill/>
+          <a:ln/>
+        </p:spPr>
+        <p:txBody>
+          <a:bodyPr wrap="square" lIns="0" tIns="0" rIns="0" bIns="0" rtlCol="0" anchor="ctr"/>
+          <a:lstStyle/>
+          <a:p>
+            <a:pPr algn="ctr" indent="0" marL="0">
+              <a:buNone/>
+            </a:pPr>
+            <a:r>
+              <a:rPr lang="en-US" sz="1500" b="1" dirty="0">
+                <a:solidFill>
+                  <a:srgbClr val="0E1726"/>
+                </a:solidFill>
+                <a:latin typeface="Arial" pitchFamily="34" charset="0"/>
+                <a:ea typeface="Arial" pitchFamily="34" charset="-122"/>
+                <a:cs typeface="Arial" pitchFamily="34" charset="-120"/>
+              </a:rPr>
+              <a:t>8</a:t>
+            </a:r>
+            <a:endParaRPr lang="en-US" sz="1500" dirty="0"/>
+          </a:p>
+        </p:txBody>
+      </p:sp>
+      <p:sp>
+        <p:nvSpPr>
+          <p:cNvPr id="16" name="Text 13"/>
+          <p:cNvSpPr/>
+          <p:nvPr/>
+        </p:nvSpPr>
+        <p:spPr>
+          <a:xfrm>
+            <a:off x="1051560" y="2752344"/>
+            <a:ext cx="7589520" cy="658368"/>
+          </a:xfrm>
+          <a:prstGeom prst="rect">
+            <a:avLst/>
+          </a:prstGeom>
+          <a:noFill/>
+          <a:ln/>
+        </p:spPr>
+        <p:txBody>
+          <a:bodyPr wrap="square" lIns="0" tIns="0" rIns="0" bIns="0" rtlCol="0" anchor="ctr">
+            <a:normAutofit/>
+          </a:bodyPr>
+          <a:lstStyle/>
+          <a:p>
+            <a:pPr indent="0" marL="0">
+              <a:buNone/>
+            </a:pPr>
+            <a:r>
+              <a:rPr lang="en-US" sz="1350" dirty="0">
+                <a:solidFill>
+                  <a:srgbClr val="1F2937"/>
+                </a:solidFill>
+                <a:latin typeface="Calibri" pitchFamily="34" charset="0"/>
+                <a:ea typeface="Calibri" pitchFamily="34" charset="-122"/>
+                <a:cs typeface="Calibri" pitchFamily="34" charset="-120"/>
+              </a:rPr>
+              <a:t>Defend: implement one real mitigation — diff, before/after evidence, and argue whether your fix closes the bug class or just this instance</a:t>
+            </a:r>
+            <a:endParaRPr lang="en-US" sz="1350" dirty="0"/>
+          </a:p>
+        </p:txBody>
+      </p:sp>
+      <p:sp>
+        <p:nvSpPr>
+          <p:cNvPr id="17" name="Text 14"/>
+          <p:cNvSpPr/>
+          <p:nvPr/>
+        </p:nvSpPr>
+        <p:spPr>
+          <a:xfrm>
+            <a:off x="457200" y="4800600"/>
+            <a:ext cx="6949440" cy="274320"/>
+          </a:xfrm>
+          <a:prstGeom prst="rect">
+            <a:avLst/>
+          </a:prstGeom>
+          <a:noFill/>
+          <a:ln/>
+        </p:spPr>
+        <p:txBody>
+          <a:bodyPr wrap="square" lIns="0" tIns="0" rIns="0" bIns="0" rtlCol="0" anchor="ctr"/>
+          <a:lstStyle/>
+          <a:p>
+            <a:pPr indent="0" marL="0">
+              <a:buNone/>
+            </a:pPr>
+            <a:r>
+              <a:rPr lang="en-US" sz="900" dirty="0">
+                <a:solidFill>
+                  <a:srgbClr val="64748B"/>
+                </a:solidFill>
+                <a:latin typeface="Calibri" pitchFamily="34" charset="0"/>
+                <a:ea typeface="Calibri" pitchFamily="34" charset="-122"/>
+                <a:cs typeface="Calibri" pitchFamily="34" charset="-120"/>
+              </a:rPr>
+              <a:t>Software Security · Week 1</a:t>
+            </a:r>
+            <a:endParaRPr lang="en-US" sz="900" dirty="0"/>
+          </a:p>
+        </p:txBody>
+      </p:sp>
+      <p:pic>
+        <p:nvPicPr>
+          <p:cNvPr id="18" name="Image 1" descr="/Users/pop7/Library/CloudStorage/OneDrive-MonsterConnectCo.,Ltd/Lecture/KOSEN69 - software-security/slides/pptx/assets/logo-small.png">    </p:cNvPr>
+          <p:cNvPicPr>
+            <a:picLocks noChangeAspect="1"/>
+          </p:cNvPicPr>
+          <p:nvPr/>
+        </p:nvPicPr>
+        <p:blipFill>
+          <a:blip r:embed="rId2"/>
           <a:stretch>
             <a:fillRect/>
           </a:stretch>
@@ -6629,6 +7124,826 @@
 </p:sld>
 </file>
 
+<file path=ppt/slides/slide20.xml><?xml version="1.0" encoding="utf-8"?>
+<p:sld xmlns:a="http://schemas.openxmlformats.org/drawingml/2006/main" xmlns:r="http://schemas.openxmlformats.org/officeDocument/2006/relationships" xmlns:p="http://schemas.openxmlformats.org/presentationml/2006/main">
+  <p:cSld name="Slide 20">
+    <p:bg>
+      <p:bgPr>
+        <a:solidFill>
+          <a:srgbClr val="FFFFFF"/>
+        </a:solidFill>
+      </p:bgPr>
+    </p:bg>
+    <p:spTree>
+      <p:nvGrpSpPr>
+        <p:cNvPr id="1" name=""/>
+        <p:cNvGrpSpPr/>
+        <p:nvPr/>
+      </p:nvGrpSpPr>
+      <p:grpSpPr>
+        <a:xfrm>
+          <a:off x="0" y="0"/>
+          <a:ext cx="0" cy="0"/>
+          <a:chOff x="0" y="0"/>
+          <a:chExt cx="0" cy="0"/>
+        </a:xfrm>
+      </p:grpSpPr>
+      <p:sp>
+        <p:nvSpPr>
+          <p:cNvPr id="2" name="Shape 0"/>
+          <p:cNvSpPr/>
+          <p:nvPr/>
+        </p:nvSpPr>
+        <p:spPr>
+          <a:xfrm>
+            <a:off x="457200" y="384048"/>
+            <a:ext cx="530352" cy="530352"/>
+          </a:xfrm>
+          <a:prstGeom prst="ellipse">
+            <a:avLst/>
+          </a:prstGeom>
+          <a:solidFill>
+            <a:srgbClr val="E35205"/>
+          </a:solidFill>
+          <a:ln/>
+          <a:effectLst>
+            <a:outerShdw sx="100000" sy="100000" kx="0" ky="0" algn="bl" rotWithShape="0" blurRad="76200" dist="25400" dir="5400000">
+              <a:srgbClr val="000000">
+                <a:alpha val="12000"/>
+              </a:srgbClr>
+            </a:outerShdw>
+          </a:effectLst>
+        </p:spPr>
+      </p:sp>
+      <p:pic>
+        <p:nvPicPr>
+          <p:cNvPr id="3" name="Image 0" descr="preencoded.png">    </p:cNvPr>
+          <p:cNvPicPr>
+            <a:picLocks noChangeAspect="1"/>
+          </p:cNvPicPr>
+          <p:nvPr/>
+        </p:nvPicPr>
+        <p:blipFill>
+          <a:blip r:embed="rId1"/>
+          <a:stretch>
+            <a:fillRect/>
+          </a:stretch>
+        </p:blipFill>
+        <p:spPr>
+          <a:xfrm>
+            <a:off x="594360" y="521208"/>
+            <a:ext cx="256032" cy="256032"/>
+          </a:xfrm>
+          <a:prstGeom prst="rect">
+            <a:avLst/>
+          </a:prstGeom>
+        </p:spPr>
+      </p:pic>
+      <p:sp>
+        <p:nvSpPr>
+          <p:cNvPr id="4" name="Text 1"/>
+          <p:cNvSpPr/>
+          <p:nvPr/>
+        </p:nvSpPr>
+        <p:spPr>
+          <a:xfrm>
+            <a:off x="1143000" y="329184"/>
+            <a:ext cx="7498080" cy="603504"/>
+          </a:xfrm>
+          <a:prstGeom prst="rect">
+            <a:avLst/>
+          </a:prstGeom>
+          <a:noFill/>
+          <a:ln/>
+        </p:spPr>
+        <p:txBody>
+          <a:bodyPr wrap="square" lIns="0" tIns="0" rIns="0" bIns="0" rtlCol="0" anchor="ctr"/>
+          <a:lstStyle/>
+          <a:p>
+            <a:pPr indent="0" marL="0">
+              <a:buNone/>
+            </a:pPr>
+            <a:r>
+              <a:rPr lang="en-US" sz="2600" b="1" dirty="0">
+                <a:solidFill>
+                  <a:srgbClr val="1F2937"/>
+                </a:solidFill>
+                <a:latin typeface="Arial" pitchFamily="34" charset="0"/>
+                <a:ea typeface="Arial" pitchFamily="34" charset="-122"/>
+                <a:cs typeface="Arial" pitchFamily="34" charset="-120"/>
+              </a:rPr>
+              <a:t>Using AI in this course</a:t>
+            </a:r>
+            <a:endParaRPr lang="en-US" sz="2600" dirty="0"/>
+          </a:p>
+        </p:txBody>
+      </p:sp>
+      <p:sp>
+        <p:nvSpPr>
+          <p:cNvPr id="5" name="Shape 2"/>
+          <p:cNvSpPr/>
+          <p:nvPr/>
+        </p:nvSpPr>
+        <p:spPr>
+          <a:xfrm>
+            <a:off x="457200" y="1325880"/>
+            <a:ext cx="8229600" cy="2450592"/>
+          </a:xfrm>
+          <a:prstGeom prst="roundRect">
+            <a:avLst>
+              <a:gd name="adj" fmla="val 2985"/>
+            </a:avLst>
+          </a:prstGeom>
+          <a:solidFill>
+            <a:srgbClr val="F1F5F9"/>
+          </a:solidFill>
+          <a:ln/>
+          <a:effectLst>
+            <a:outerShdw sx="100000" sy="100000" kx="0" ky="0" algn="bl" rotWithShape="0" blurRad="76200" dist="25400" dir="5400000">
+              <a:srgbClr val="000000">
+                <a:alpha val="12000"/>
+              </a:srgbClr>
+            </a:outerShdw>
+          </a:effectLst>
+        </p:spPr>
+      </p:sp>
+      <p:sp>
+        <p:nvSpPr>
+          <p:cNvPr id="6" name="Text 3"/>
+          <p:cNvSpPr/>
+          <p:nvPr/>
+        </p:nvSpPr>
+        <p:spPr>
+          <a:xfrm>
+            <a:off x="731520" y="1435608"/>
+            <a:ext cx="7680960" cy="2231136"/>
+          </a:xfrm>
+          <a:prstGeom prst="rect">
+            <a:avLst/>
+          </a:prstGeom>
+          <a:noFill/>
+          <a:ln/>
+        </p:spPr>
+        <p:txBody>
+          <a:bodyPr wrap="square" lIns="0" tIns="0" rIns="0" bIns="0" rtlCol="0" anchor="t">
+            <a:normAutofit/>
+          </a:bodyPr>
+          <a:lstStyle/>
+          <a:p>
+            <a:pPr marL="342900" indent="-342900">
+              <a:spcAft>
+                <a:spcPts val="600"/>
+              </a:spcAft>
+              <a:buSzPct val="100000"/>
+              <a:buChar char="•"/>
+            </a:pPr>
+            <a:r>
+              <a:rPr lang="en-US" sz="1400" dirty="0">
+                <a:solidFill>
+                  <a:srgbClr val="1F2937"/>
+                </a:solidFill>
+                <a:latin typeface="Calibri" pitchFamily="34" charset="0"/>
+                <a:ea typeface="Calibri" pitchFamily="34" charset="-122"/>
+                <a:cs typeface="Calibri" pitchFamily="34" charset="-120"/>
+              </a:rPr>
+              <a:t>AI is allowed — and you must disclose how you used it</a:t>
+            </a:r>
+            <a:endParaRPr lang="en-US" sz="1400" dirty="0"/>
+          </a:p>
+          <a:p>
+            <a:pPr marL="342900" indent="-342900">
+              <a:spcAft>
+                <a:spcPts val="600"/>
+              </a:spcAft>
+              <a:buSzPct val="100000"/>
+              <a:buChar char="•"/>
+            </a:pPr>
+            <a:r>
+              <a:rPr lang="en-US" sz="1400" dirty="0">
+                <a:solidFill>
+                  <a:srgbClr val="1F2937"/>
+                </a:solidFill>
+                <a:latin typeface="Calibri" pitchFamily="34" charset="0"/>
+                <a:ea typeface="Calibri" pitchFamily="34" charset="-122"/>
+                <a:cs typeface="Calibri" pitchFamily="34" charset="-120"/>
+              </a:rPr>
+              <a:t>But AI hallucinates APIs/CVEs and writes insecure code</a:t>
+            </a:r>
+            <a:endParaRPr lang="en-US" sz="1400" dirty="0"/>
+          </a:p>
+          <a:p>
+            <a:pPr marL="342900" indent="-342900">
+              <a:spcAft>
+                <a:spcPts val="600"/>
+              </a:spcAft>
+              <a:buSzPct val="100000"/>
+              <a:buChar char="•"/>
+            </a:pPr>
+            <a:r>
+              <a:rPr lang="en-US" sz="1400" dirty="0">
+                <a:solidFill>
+                  <a:srgbClr val="1F2937"/>
+                </a:solidFill>
+                <a:latin typeface="Calibri" pitchFamily="34" charset="0"/>
+                <a:ea typeface="Calibri" pitchFamily="34" charset="-122"/>
+                <a:cs typeface="Calibri" pitchFamily="34" charset="-120"/>
+              </a:rPr>
+              <a:t>You're graded on understanding, not the answer:</a:t>
+            </a:r>
+            <a:endParaRPr lang="en-US" sz="1400" dirty="0"/>
+          </a:p>
+          <a:p>
+            <a:pPr lvl="1" marL="685800" indent="-342900">
+              <a:spcAft>
+                <a:spcPts val="600"/>
+              </a:spcAft>
+              <a:buSzPct val="100000"/>
+              <a:buChar char="•"/>
+            </a:pPr>
+            <a:r>
+              <a:rPr lang="en-US" sz="1400" dirty="0">
+                <a:solidFill>
+                  <a:srgbClr val="1F2937"/>
+                </a:solidFill>
+                <a:latin typeface="Calibri" pitchFamily="34" charset="0"/>
+                <a:ea typeface="Calibri" pitchFamily="34" charset="-122"/>
+                <a:cs typeface="Calibri" pitchFamily="34" charset="-120"/>
+              </a:rPr>
+              <a:t>random live re-demos — explain it or score zero</a:t>
+            </a:r>
+            <a:endParaRPr lang="en-US" sz="1400" dirty="0"/>
+          </a:p>
+          <a:p>
+            <a:pPr lvl="1" marL="685800" indent="-342900">
+              <a:spcAft>
+                <a:spcPts val="600"/>
+              </a:spcAft>
+              <a:buSzPct val="100000"/>
+              <a:buChar char="•"/>
+            </a:pPr>
+            <a:r>
+              <a:rPr lang="en-US" sz="1400" dirty="0">
+                <a:solidFill>
+                  <a:srgbClr val="1F2937"/>
+                </a:solidFill>
+                <a:latin typeface="Calibri" pitchFamily="34" charset="0"/>
+                <a:ea typeface="Calibri" pitchFamily="34" charset="-122"/>
+                <a:cs typeface="Calibri" pitchFamily="34" charset="-120"/>
+              </a:rPr>
+              <a:t>your flags are unique to you — copying is traceable</a:t>
+            </a:r>
+            <a:endParaRPr lang="en-US" sz="1400" dirty="0"/>
+          </a:p>
+          <a:p>
+            <a:pPr lvl="1" marL="685800" indent="-342900">
+              <a:spcAft>
+                <a:spcPts val="600"/>
+              </a:spcAft>
+              <a:buSzPct val="100000"/>
+              <a:buChar char="•"/>
+            </a:pPr>
+            <a:r>
+              <a:rPr lang="en-US" sz="1400" dirty="0">
+                <a:solidFill>
+                  <a:srgbClr val="1F2937"/>
+                </a:solidFill>
+                <a:latin typeface="Calibri" pitchFamily="34" charset="0"/>
+                <a:ea typeface="Calibri" pitchFamily="34" charset="-122"/>
+                <a:cs typeface="Calibri" pitchFamily="34" charset="-120"/>
+              </a:rPr>
+              <a:t>every lab has an "Audit the AI" task: find what its answer gets wrong</a:t>
+            </a:r>
+            <a:endParaRPr lang="en-US" sz="1400" dirty="0"/>
+          </a:p>
+          <a:p>
+            <a:pPr marL="342900" indent="-342900">
+              <a:spcAft>
+                <a:spcPts val="600"/>
+              </a:spcAft>
+              <a:buSzPct val="100000"/>
+              <a:buChar char="•"/>
+            </a:pPr>
+            <a:r>
+              <a:rPr lang="en-US" sz="1400" dirty="0">
+                <a:solidFill>
+                  <a:srgbClr val="1F2937"/>
+                </a:solidFill>
+                <a:latin typeface="Calibri" pitchFamily="34" charset="0"/>
+                <a:ea typeface="Calibri" pitchFamily="34" charset="-122"/>
+                <a:cs typeface="Calibri" pitchFamily="34" charset="-120"/>
+              </a:rPr>
+              <a:t>Use AI to learn faster — never to skip the thinking</a:t>
+            </a:r>
+            <a:endParaRPr lang="en-US" sz="1400" dirty="0"/>
+          </a:p>
+        </p:txBody>
+      </p:sp>
+      <p:sp>
+        <p:nvSpPr>
+          <p:cNvPr id="7" name="Text 4"/>
+          <p:cNvSpPr/>
+          <p:nvPr/>
+        </p:nvSpPr>
+        <p:spPr>
+          <a:xfrm>
+            <a:off x="457200" y="4800600"/>
+            <a:ext cx="6949440" cy="274320"/>
+          </a:xfrm>
+          <a:prstGeom prst="rect">
+            <a:avLst/>
+          </a:prstGeom>
+          <a:noFill/>
+          <a:ln/>
+        </p:spPr>
+        <p:txBody>
+          <a:bodyPr wrap="square" lIns="0" tIns="0" rIns="0" bIns="0" rtlCol="0" anchor="ctr"/>
+          <a:lstStyle/>
+          <a:p>
+            <a:pPr indent="0" marL="0">
+              <a:buNone/>
+            </a:pPr>
+            <a:r>
+              <a:rPr lang="en-US" sz="900" dirty="0">
+                <a:solidFill>
+                  <a:srgbClr val="64748B"/>
+                </a:solidFill>
+                <a:latin typeface="Calibri" pitchFamily="34" charset="0"/>
+                <a:ea typeface="Calibri" pitchFamily="34" charset="-122"/>
+                <a:cs typeface="Calibri" pitchFamily="34" charset="-120"/>
+              </a:rPr>
+              <a:t>Software Security · Week 1</a:t>
+            </a:r>
+            <a:endParaRPr lang="en-US" sz="900" dirty="0"/>
+          </a:p>
+        </p:txBody>
+      </p:sp>
+      <p:pic>
+        <p:nvPicPr>
+          <p:cNvPr id="8" name="Image 1" descr="/Users/pop7/Library/CloudStorage/OneDrive-MonsterConnectCo.,Ltd/Lecture/KOSEN69 - software-security/slides/pptx/assets/logo-small.png">    </p:cNvPr>
+          <p:cNvPicPr>
+            <a:picLocks noChangeAspect="1"/>
+          </p:cNvPicPr>
+          <p:nvPr/>
+        </p:nvPicPr>
+        <p:blipFill>
+          <a:blip r:embed="rId2"/>
+          <a:stretch>
+            <a:fillRect/>
+          </a:stretch>
+        </p:blipFill>
+        <p:spPr>
+          <a:xfrm>
+            <a:off x="7882128" y="4700016"/>
+            <a:ext cx="768096" cy="356616"/>
+          </a:xfrm>
+          <a:prstGeom prst="rect">
+            <a:avLst/>
+          </a:prstGeom>
+        </p:spPr>
+      </p:pic>
+    </p:spTree>
+  </p:cSld>
+  <p:clrMapOvr>
+    <a:masterClrMapping/>
+  </p:clrMapOvr>
+</p:sld>
+</file>
+
+<file path=ppt/slides/slide21.xml><?xml version="1.0" encoding="utf-8"?>
+<p:sld xmlns:a="http://schemas.openxmlformats.org/drawingml/2006/main" xmlns:r="http://schemas.openxmlformats.org/officeDocument/2006/relationships" xmlns:p="http://schemas.openxmlformats.org/presentationml/2006/main">
+  <p:cSld name="Slide 21">
+    <p:bg>
+      <p:bgPr>
+        <a:solidFill>
+          <a:srgbClr val="FFFFFF"/>
+        </a:solidFill>
+      </p:bgPr>
+    </p:bg>
+    <p:spTree>
+      <p:nvGrpSpPr>
+        <p:cNvPr id="1" name=""/>
+        <p:cNvGrpSpPr/>
+        <p:nvPr/>
+      </p:nvGrpSpPr>
+      <p:grpSpPr>
+        <a:xfrm>
+          <a:off x="0" y="0"/>
+          <a:ext cx="0" cy="0"/>
+          <a:chOff x="0" y="0"/>
+          <a:chExt cx="0" cy="0"/>
+        </a:xfrm>
+      </p:grpSpPr>
+      <p:sp>
+        <p:nvSpPr>
+          <p:cNvPr id="2" name="Shape 0"/>
+          <p:cNvSpPr/>
+          <p:nvPr/>
+        </p:nvSpPr>
+        <p:spPr>
+          <a:xfrm>
+            <a:off x="457200" y="384048"/>
+            <a:ext cx="530352" cy="530352"/>
+          </a:xfrm>
+          <a:prstGeom prst="ellipse">
+            <a:avLst/>
+          </a:prstGeom>
+          <a:solidFill>
+            <a:srgbClr val="E35205"/>
+          </a:solidFill>
+          <a:ln/>
+          <a:effectLst>
+            <a:outerShdw sx="100000" sy="100000" kx="0" ky="0" algn="bl" rotWithShape="0" blurRad="76200" dist="25400" dir="5400000">
+              <a:srgbClr val="000000">
+                <a:alpha val="12000"/>
+              </a:srgbClr>
+            </a:outerShdw>
+          </a:effectLst>
+        </p:spPr>
+      </p:sp>
+      <p:pic>
+        <p:nvPicPr>
+          <p:cNvPr id="3" name="Image 0" descr="preencoded.png">    </p:cNvPr>
+          <p:cNvPicPr>
+            <a:picLocks noChangeAspect="1"/>
+          </p:cNvPicPr>
+          <p:nvPr/>
+        </p:nvPicPr>
+        <p:blipFill>
+          <a:blip r:embed="rId1"/>
+          <a:stretch>
+            <a:fillRect/>
+          </a:stretch>
+        </p:blipFill>
+        <p:spPr>
+          <a:xfrm>
+            <a:off x="594360" y="521208"/>
+            <a:ext cx="256032" cy="256032"/>
+          </a:xfrm>
+          <a:prstGeom prst="rect">
+            <a:avLst/>
+          </a:prstGeom>
+        </p:spPr>
+      </p:pic>
+      <p:sp>
+        <p:nvSpPr>
+          <p:cNvPr id="4" name="Text 1"/>
+          <p:cNvSpPr/>
+          <p:nvPr/>
+        </p:nvSpPr>
+        <p:spPr>
+          <a:xfrm>
+            <a:off x="1143000" y="329184"/>
+            <a:ext cx="7498080" cy="603504"/>
+          </a:xfrm>
+          <a:prstGeom prst="rect">
+            <a:avLst/>
+          </a:prstGeom>
+          <a:noFill/>
+          <a:ln/>
+        </p:spPr>
+        <p:txBody>
+          <a:bodyPr wrap="square" lIns="0" tIns="0" rIns="0" bIns="0" rtlCol="0" anchor="ctr"/>
+          <a:lstStyle/>
+          <a:p>
+            <a:pPr indent="0" marL="0">
+              <a:buNone/>
+            </a:pPr>
+            <a:r>
+              <a:rPr lang="en-US" sz="2600" b="1" dirty="0">
+                <a:solidFill>
+                  <a:srgbClr val="1F2937"/>
+                </a:solidFill>
+                <a:latin typeface="Arial" pitchFamily="34" charset="0"/>
+                <a:ea typeface="Arial" pitchFamily="34" charset="-122"/>
+                <a:cs typeface="Arial" pitchFamily="34" charset="-120"/>
+              </a:rPr>
+              <a:t>Key takeaways</a:t>
+            </a:r>
+            <a:endParaRPr lang="en-US" sz="2600" dirty="0"/>
+          </a:p>
+        </p:txBody>
+      </p:sp>
+      <p:sp>
+        <p:nvSpPr>
+          <p:cNvPr id="5" name="Shape 2"/>
+          <p:cNvSpPr/>
+          <p:nvPr/>
+        </p:nvSpPr>
+        <p:spPr>
+          <a:xfrm>
+            <a:off x="457200" y="1325880"/>
+            <a:ext cx="8229600" cy="1207008"/>
+          </a:xfrm>
+          <a:prstGeom prst="roundRect">
+            <a:avLst>
+              <a:gd name="adj" fmla="val 6061"/>
+            </a:avLst>
+          </a:prstGeom>
+          <a:solidFill>
+            <a:srgbClr val="F1F5F9"/>
+          </a:solidFill>
+          <a:ln/>
+          <a:effectLst>
+            <a:outerShdw sx="100000" sy="100000" kx="0" ky="0" algn="bl" rotWithShape="0" blurRad="76200" dist="25400" dir="5400000">
+              <a:srgbClr val="000000">
+                <a:alpha val="12000"/>
+              </a:srgbClr>
+            </a:outerShdw>
+          </a:effectLst>
+        </p:spPr>
+      </p:sp>
+      <p:sp>
+        <p:nvSpPr>
+          <p:cNvPr id="6" name="Text 3"/>
+          <p:cNvSpPr/>
+          <p:nvPr/>
+        </p:nvSpPr>
+        <p:spPr>
+          <a:xfrm>
+            <a:off x="731520" y="1435608"/>
+            <a:ext cx="7680960" cy="987552"/>
+          </a:xfrm>
+          <a:prstGeom prst="rect">
+            <a:avLst/>
+          </a:prstGeom>
+          <a:noFill/>
+          <a:ln/>
+        </p:spPr>
+        <p:txBody>
+          <a:bodyPr wrap="square" lIns="0" tIns="0" rIns="0" bIns="0" rtlCol="0" anchor="t">
+            <a:normAutofit/>
+          </a:bodyPr>
+          <a:lstStyle/>
+          <a:p>
+            <a:pPr marL="342900" indent="-342900">
+              <a:spcAft>
+                <a:spcPts val="600"/>
+              </a:spcAft>
+              <a:buSzPct val="100000"/>
+              <a:buChar char="•"/>
+            </a:pPr>
+            <a:r>
+              <a:rPr lang="en-US" sz="1400" dirty="0">
+                <a:solidFill>
+                  <a:srgbClr val="1F2937"/>
+                </a:solidFill>
+                <a:latin typeface="Calibri" pitchFamily="34" charset="0"/>
+                <a:ea typeface="Calibri" pitchFamily="34" charset="-122"/>
+                <a:cs typeface="Calibri" pitchFamily="34" charset="-120"/>
+              </a:rPr>
+              <a:t>Design for security; don't bolt it on</a:t>
+            </a:r>
+            <a:endParaRPr lang="en-US" sz="1400" dirty="0"/>
+          </a:p>
+          <a:p>
+            <a:pPr marL="342900" indent="-342900">
+              <a:spcAft>
+                <a:spcPts val="600"/>
+              </a:spcAft>
+              <a:buSzPct val="100000"/>
+              <a:buChar char="•"/>
+            </a:pPr>
+            <a:r>
+              <a:rPr lang="en-US" sz="1400" dirty="0">
+                <a:solidFill>
+                  <a:srgbClr val="1F2937"/>
+                </a:solidFill>
+                <a:latin typeface="Calibri" pitchFamily="34" charset="0"/>
+                <a:ea typeface="Calibri" pitchFamily="34" charset="-122"/>
+                <a:cs typeface="Calibri" pitchFamily="34" charset="-120"/>
+              </a:rPr>
+              <a:t>Attackers need one gap — model the whole surface</a:t>
+            </a:r>
+            <a:endParaRPr lang="en-US" sz="1400" dirty="0"/>
+          </a:p>
+          <a:p>
+            <a:pPr marL="342900" indent="-342900">
+              <a:spcAft>
+                <a:spcPts val="600"/>
+              </a:spcAft>
+              <a:buSzPct val="100000"/>
+              <a:buChar char="•"/>
+            </a:pPr>
+            <a:r>
+              <a:rPr lang="en-US" sz="1400" dirty="0">
+                <a:solidFill>
+                  <a:srgbClr val="1F2937"/>
+                </a:solidFill>
+                <a:latin typeface="Calibri" pitchFamily="34" charset="0"/>
+                <a:ea typeface="Calibri" pitchFamily="34" charset="-122"/>
+                <a:cs typeface="Calibri" pitchFamily="34" charset="-120"/>
+              </a:rPr>
+              <a:t>STRIDE + DFD = a repeatable way to find design flaws</a:t>
+            </a:r>
+            <a:endParaRPr lang="en-US" sz="1400" dirty="0"/>
+          </a:p>
+        </p:txBody>
+      </p:sp>
+      <p:sp>
+        <p:nvSpPr>
+          <p:cNvPr id="7" name="Text 4"/>
+          <p:cNvSpPr/>
+          <p:nvPr/>
+        </p:nvSpPr>
+        <p:spPr>
+          <a:xfrm>
+            <a:off x="457200" y="4800600"/>
+            <a:ext cx="6949440" cy="274320"/>
+          </a:xfrm>
+          <a:prstGeom prst="rect">
+            <a:avLst/>
+          </a:prstGeom>
+          <a:noFill/>
+          <a:ln/>
+        </p:spPr>
+        <p:txBody>
+          <a:bodyPr wrap="square" lIns="0" tIns="0" rIns="0" bIns="0" rtlCol="0" anchor="ctr"/>
+          <a:lstStyle/>
+          <a:p>
+            <a:pPr indent="0" marL="0">
+              <a:buNone/>
+            </a:pPr>
+            <a:r>
+              <a:rPr lang="en-US" sz="900" dirty="0">
+                <a:solidFill>
+                  <a:srgbClr val="64748B"/>
+                </a:solidFill>
+                <a:latin typeface="Calibri" pitchFamily="34" charset="0"/>
+                <a:ea typeface="Calibri" pitchFamily="34" charset="-122"/>
+                <a:cs typeface="Calibri" pitchFamily="34" charset="-120"/>
+              </a:rPr>
+              <a:t>Software Security · Week 1</a:t>
+            </a:r>
+            <a:endParaRPr lang="en-US" sz="900" dirty="0"/>
+          </a:p>
+        </p:txBody>
+      </p:sp>
+      <p:pic>
+        <p:nvPicPr>
+          <p:cNvPr id="8" name="Image 1" descr="/Users/pop7/Library/CloudStorage/OneDrive-MonsterConnectCo.,Ltd/Lecture/KOSEN69 - software-security/slides/pptx/assets/logo-small.png">    </p:cNvPr>
+          <p:cNvPicPr>
+            <a:picLocks noChangeAspect="1"/>
+          </p:cNvPicPr>
+          <p:nvPr/>
+        </p:nvPicPr>
+        <p:blipFill>
+          <a:blip r:embed="rId2"/>
+          <a:stretch>
+            <a:fillRect/>
+          </a:stretch>
+        </p:blipFill>
+        <p:spPr>
+          <a:xfrm>
+            <a:off x="7882128" y="4700016"/>
+            <a:ext cx="768096" cy="356616"/>
+          </a:xfrm>
+          <a:prstGeom prst="rect">
+            <a:avLst/>
+          </a:prstGeom>
+        </p:spPr>
+      </p:pic>
+    </p:spTree>
+  </p:cSld>
+  <p:clrMapOvr>
+    <a:masterClrMapping/>
+  </p:clrMapOvr>
+</p:sld>
+</file>
+
+<file path=ppt/slides/slide22.xml><?xml version="1.0" encoding="utf-8"?>
+<p:sld xmlns:a="http://schemas.openxmlformats.org/drawingml/2006/main" xmlns:r="http://schemas.openxmlformats.org/officeDocument/2006/relationships" xmlns:p="http://schemas.openxmlformats.org/presentationml/2006/main">
+  <p:cSld name="Slide 22">
+    <p:bg>
+      <p:bgPr>
+        <a:solidFill>
+          <a:srgbClr val="FFFFFF"/>
+        </a:solidFill>
+      </p:bgPr>
+    </p:bg>
+    <p:spTree>
+      <p:nvGrpSpPr>
+        <p:cNvPr id="1" name=""/>
+        <p:cNvGrpSpPr/>
+        <p:nvPr/>
+      </p:nvGrpSpPr>
+      <p:grpSpPr>
+        <a:xfrm>
+          <a:off x="0" y="0"/>
+          <a:ext cx="0" cy="0"/>
+          <a:chOff x="0" y="0"/>
+          <a:chExt cx="0" cy="0"/>
+        </a:xfrm>
+      </p:grpSpPr>
+      <p:sp>
+        <p:nvSpPr>
+          <p:cNvPr id="2" name="Text 0"/>
+          <p:cNvSpPr/>
+          <p:nvPr/>
+        </p:nvSpPr>
+        <p:spPr>
+          <a:xfrm>
+            <a:off x="640080" y="1737360"/>
+            <a:ext cx="7863840" cy="1097280"/>
+          </a:xfrm>
+          <a:prstGeom prst="rect">
+            <a:avLst/>
+          </a:prstGeom>
+          <a:noFill/>
+          <a:ln/>
+        </p:spPr>
+        <p:txBody>
+          <a:bodyPr wrap="square" lIns="0" tIns="0" rIns="0" bIns="0" rtlCol="0" anchor="ctr"/>
+          <a:lstStyle/>
+          <a:p>
+            <a:pPr indent="0" marL="0">
+              <a:buNone/>
+            </a:pPr>
+            <a:r>
+              <a:rPr lang="en-US" sz="4600" b="1" dirty="0">
+                <a:solidFill>
+                  <a:srgbClr val="1F2937"/>
+                </a:solidFill>
+                <a:latin typeface="Arial" pitchFamily="34" charset="0"/>
+                <a:ea typeface="Arial" pitchFamily="34" charset="-122"/>
+                <a:cs typeface="Arial" pitchFamily="34" charset="-120"/>
+              </a:rPr>
+              <a:t>Questions?</a:t>
+            </a:r>
+            <a:endParaRPr lang="en-US" sz="4600" dirty="0"/>
+          </a:p>
+        </p:txBody>
+      </p:sp>
+      <p:sp>
+        <p:nvSpPr>
+          <p:cNvPr id="3" name="Text 1"/>
+          <p:cNvSpPr/>
+          <p:nvPr/>
+        </p:nvSpPr>
+        <p:spPr>
+          <a:xfrm>
+            <a:off x="658368" y="2834640"/>
+            <a:ext cx="7863840" cy="731520"/>
+          </a:xfrm>
+          <a:prstGeom prst="rect">
+            <a:avLst/>
+          </a:prstGeom>
+          <a:noFill/>
+          <a:ln/>
+        </p:spPr>
+        <p:txBody>
+          <a:bodyPr wrap="square" lIns="0" tIns="0" rIns="0" bIns="0" rtlCol="0" anchor="ctr"/>
+          <a:lstStyle/>
+          <a:p>
+            <a:pPr indent="0" marL="0">
+              <a:buNone/>
+            </a:pPr>
+            <a:r>
+              <a:rPr lang="en-US" sz="1800" dirty="0">
+                <a:solidFill>
+                  <a:srgbClr val="E35205"/>
+                </a:solidFill>
+                <a:latin typeface="Calibri" pitchFamily="34" charset="0"/>
+                <a:ea typeface="Calibri" pitchFamily="34" charset="-122"/>
+                <a:cs typeface="Calibri" pitchFamily="34" charset="-120"/>
+              </a:rPr>
+              <a:t>Next week: Secure SDLC, tooling &amp; fuzzing</a:t>
+            </a:r>
+            <a:endParaRPr lang="en-US" sz="1800" dirty="0"/>
+          </a:p>
+        </p:txBody>
+      </p:sp>
+      <p:pic>
+        <p:nvPicPr>
+          <p:cNvPr id="4" name="Image 0" descr="/Users/pop7/Library/CloudStorage/OneDrive-MonsterConnectCo.,Ltd/Lecture/KOSEN69 - software-security/slides/pptx/assets/logo-small.png">    </p:cNvPr>
+          <p:cNvPicPr>
+            <a:picLocks noChangeAspect="1"/>
+          </p:cNvPicPr>
+          <p:nvPr/>
+        </p:nvPicPr>
+        <p:blipFill>
+          <a:blip r:embed="rId1"/>
+          <a:stretch>
+            <a:fillRect/>
+          </a:stretch>
+        </p:blipFill>
+        <p:spPr>
+          <a:xfrm>
+            <a:off x="7882128" y="4700016"/>
+            <a:ext cx="768096" cy="356616"/>
+          </a:xfrm>
+          <a:prstGeom prst="rect">
+            <a:avLst/>
+          </a:prstGeom>
+        </p:spPr>
+      </p:pic>
+    </p:spTree>
+  </p:cSld>
+  <p:clrMapOvr>
+    <a:masterClrMapping/>
+  </p:clrMapOvr>
+</p:sld>
+</file>
+
 <file path=ppt/slides/slide3.xml><?xml version="1.0" encoding="utf-8"?>
 <p:sld xmlns:a="http://schemas.openxmlformats.org/drawingml/2006/main" xmlns:r="http://schemas.openxmlformats.org/officeDocument/2006/relationships" xmlns:p="http://schemas.openxmlformats.org/presentationml/2006/main">
   <p:cSld name="Slide 3">
@@ -7067,43 +8382,14 @@
       </p:sp>
       <p:sp>
         <p:nvSpPr>
-          <p:cNvPr id="5" name="Shape 2"/>
-          <p:cNvSpPr/>
-          <p:nvPr/>
-        </p:nvSpPr>
-        <p:spPr>
-          <a:xfrm>
-            <a:off x="457200" y="1325880"/>
-            <a:ext cx="8229600" cy="1207008"/>
-          </a:xfrm>
-          <a:prstGeom prst="roundRect">
-            <a:avLst>
-              <a:gd name="adj" fmla="val 6061"/>
-            </a:avLst>
-          </a:prstGeom>
-          <a:solidFill>
-            <a:srgbClr val="F1F5F9"/>
-          </a:solidFill>
-          <a:ln/>
-          <a:effectLst>
-            <a:outerShdw sx="100000" sy="100000" kx="0" ky="0" algn="bl" rotWithShape="0" blurRad="76200" dist="25400" dir="5400000">
-              <a:srgbClr val="000000">
-                <a:alpha val="12000"/>
-              </a:srgbClr>
-            </a:outerShdw>
-          </a:effectLst>
-        </p:spPr>
-      </p:sp>
-      <p:sp>
-        <p:nvSpPr>
-          <p:cNvPr id="6" name="Text 3"/>
-          <p:cNvSpPr/>
-          <p:nvPr/>
-        </p:nvSpPr>
-        <p:spPr>
-          <a:xfrm>
-            <a:off x="731520" y="1435608"/>
-            <a:ext cx="7680960" cy="987552"/>
+          <p:cNvPr id="5" name="Text 2"/>
+          <p:cNvSpPr/>
+          <p:nvPr/>
+        </p:nvSpPr>
+        <p:spPr>
+          <a:xfrm>
+            <a:off x="548640" y="1325880"/>
+            <a:ext cx="8046720" cy="1097280"/>
           </a:xfrm>
           <a:prstGeom prst="rect">
             <a:avLst/>
@@ -7117,12 +8403,8 @@
           </a:bodyPr>
           <a:lstStyle/>
           <a:p>
-            <a:pPr marL="342900" indent="-342900">
-              <a:spcAft>
-                <a:spcPts val="600"/>
-              </a:spcAft>
-              <a:buSzPct val="100000"/>
-              <a:buChar char="•"/>
+            <a:pPr indent="0" marL="0">
+              <a:buNone/>
             </a:pPr>
             <a:r>
               <a:rPr lang="en-US" sz="1400" dirty="0">
@@ -7133,63 +8415,21 @@
                 <a:ea typeface="Calibri" pitchFamily="34" charset="-122"/>
                 <a:cs typeface="Calibri" pitchFamily="34" charset="-120"/>
               </a:rPr>
-              <a:t>Confidentiality — only the right people can read data</a:t>
+              <a:t>See diagram: A triangle connecting three properties. Confidentiality, at the top: only the right people can read it. Integrity, at bottom left: no one can silently change it. Availability, at bottom right: it's there when you need it. (web only)</a:t>
             </a:r>
             <a:endParaRPr lang="en-US" sz="1400" dirty="0"/>
           </a:p>
-          <a:p>
-            <a:pPr marL="342900" indent="-342900">
-              <a:spcAft>
-                <a:spcPts val="600"/>
-              </a:spcAft>
-              <a:buSzPct val="100000"/>
-              <a:buChar char="•"/>
-            </a:pPr>
-            <a:r>
-              <a:rPr lang="en-US" sz="1400" dirty="0">
-                <a:solidFill>
-                  <a:srgbClr val="1F2937"/>
-                </a:solidFill>
-                <a:latin typeface="Calibri" pitchFamily="34" charset="0"/>
-                <a:ea typeface="Calibri" pitchFamily="34" charset="-122"/>
-                <a:cs typeface="Calibri" pitchFamily="34" charset="-120"/>
-              </a:rPr>
-              <a:t>Integrity — data/code can't be tampered with undetected</a:t>
-            </a:r>
-            <a:endParaRPr lang="en-US" sz="1400" dirty="0"/>
-          </a:p>
-          <a:p>
-            <a:pPr marL="342900" indent="-342900">
-              <a:spcAft>
-                <a:spcPts val="600"/>
-              </a:spcAft>
-              <a:buSzPct val="100000"/>
-              <a:buChar char="•"/>
-            </a:pPr>
-            <a:r>
-              <a:rPr lang="en-US" sz="1400" dirty="0">
-                <a:solidFill>
-                  <a:srgbClr val="1F2937"/>
-                </a:solidFill>
-                <a:latin typeface="Calibri" pitchFamily="34" charset="0"/>
-                <a:ea typeface="Calibri" pitchFamily="34" charset="-122"/>
-                <a:cs typeface="Calibri" pitchFamily="34" charset="-120"/>
-              </a:rPr>
-              <a:t>Availability — the system is there when needed</a:t>
-            </a:r>
-            <a:endParaRPr lang="en-US" sz="1400" dirty="0"/>
-          </a:p>
-        </p:txBody>
-      </p:sp>
-      <p:sp>
-        <p:nvSpPr>
-          <p:cNvPr id="7" name="Shape 4"/>
-          <p:cNvSpPr/>
-          <p:nvPr/>
-        </p:nvSpPr>
-        <p:spPr>
-          <a:xfrm>
-            <a:off x="457200" y="2697480"/>
+        </p:txBody>
+      </p:sp>
+      <p:sp>
+        <p:nvSpPr>
+          <p:cNvPr id="6" name="Shape 3"/>
+          <p:cNvSpPr/>
+          <p:nvPr/>
+        </p:nvSpPr>
+        <p:spPr>
+          <a:xfrm>
+            <a:off x="457200" y="2514600"/>
             <a:ext cx="8229600" cy="822960"/>
           </a:xfrm>
           <a:prstGeom prst="roundRect">
@@ -7205,13 +8445,13 @@
       </p:sp>
       <p:sp>
         <p:nvSpPr>
-          <p:cNvPr id="8" name="Text 5"/>
-          <p:cNvSpPr/>
-          <p:nvPr/>
-        </p:nvSpPr>
-        <p:spPr>
-          <a:xfrm>
-            <a:off x="731520" y="2697480"/>
+          <p:cNvPr id="7" name="Text 4"/>
+          <p:cNvSpPr/>
+          <p:nvPr/>
+        </p:nvSpPr>
+        <p:spPr>
+          <a:xfrm>
+            <a:off x="731520" y="2514600"/>
             <a:ext cx="7680960" cy="822960"/>
           </a:xfrm>
           <a:prstGeom prst="rect">
@@ -7246,7 +8486,7 @@
       </p:sp>
       <p:sp>
         <p:nvSpPr>
-          <p:cNvPr id="9" name="Text 6"/>
+          <p:cNvPr id="8" name="Text 5"/>
           <p:cNvSpPr/>
           <p:nvPr/>
         </p:nvSpPr>
@@ -7285,7 +8525,7 @@
       </p:sp>
       <p:pic>
         <p:nvPicPr>
-          <p:cNvPr id="10" name="Image 1" descr="/Users/pop7/Library/CloudStorage/OneDrive-MonsterConnectCo.,Ltd/Lecture/KOSEN69 - software-security/slides/pptx/assets/logo-small.png">    </p:cNvPr>
+          <p:cNvPr id="9" name="Image 1" descr="/Users/pop7/Library/CloudStorage/OneDrive-MonsterConnectCo.,Ltd/Lecture/KOSEN69 - software-security/slides/pptx/assets/logo-small.png">    </p:cNvPr>
           <p:cNvPicPr>
             <a:picLocks noChangeAspect="1"/>
           </p:cNvPicPr>
@@ -7423,7 +8663,7 @@
                 <a:ea typeface="Arial" pitchFamily="34" charset="-122"/>
                 <a:cs typeface="Arial" pitchFamily="34" charset="-120"/>
               </a:rPr>
-              <a:t>Attacker vs. defender mindset</a:t>
+              <a:t>Classify the incident</a:t>
             </a:r>
             <a:endParaRPr lang="en-US" sz="2600" dirty="0"/>
           </a:p>
@@ -7431,43 +8671,14 @@
       </p:sp>
       <p:sp>
         <p:nvSpPr>
-          <p:cNvPr id="5" name="Shape 2"/>
-          <p:cNvSpPr/>
-          <p:nvPr/>
-        </p:nvSpPr>
-        <p:spPr>
-          <a:xfrm>
-            <a:off x="457200" y="1325880"/>
-            <a:ext cx="8229600" cy="1517904"/>
-          </a:xfrm>
-          <a:prstGeom prst="roundRect">
-            <a:avLst>
-              <a:gd name="adj" fmla="val 4819"/>
-            </a:avLst>
-          </a:prstGeom>
-          <a:solidFill>
-            <a:srgbClr val="F1F5F9"/>
-          </a:solidFill>
-          <a:ln/>
-          <a:effectLst>
-            <a:outerShdw sx="100000" sy="100000" kx="0" ky="0" algn="bl" rotWithShape="0" blurRad="76200" dist="25400" dir="5400000">
-              <a:srgbClr val="000000">
-                <a:alpha val="12000"/>
-              </a:srgbClr>
-            </a:outerShdw>
-          </a:effectLst>
-        </p:spPr>
-      </p:sp>
-      <p:sp>
-        <p:nvSpPr>
-          <p:cNvPr id="6" name="Text 3"/>
-          <p:cNvSpPr/>
-          <p:nvPr/>
-        </p:nvSpPr>
-        <p:spPr>
-          <a:xfrm>
-            <a:off x="731520" y="1435608"/>
-            <a:ext cx="7680960" cy="1298448"/>
+          <p:cNvPr id="5" name="Text 2"/>
+          <p:cNvSpPr/>
+          <p:nvPr/>
+        </p:nvSpPr>
+        <p:spPr>
+          <a:xfrm>
+            <a:off x="548640" y="1325880"/>
+            <a:ext cx="8046720" cy="1097280"/>
           </a:xfrm>
           <a:prstGeom prst="rect">
             <a:avLst/>
@@ -7481,12 +8692,8 @@
           </a:bodyPr>
           <a:lstStyle/>
           <a:p>
-            <a:pPr marL="342900" indent="-342900">
-              <a:spcAft>
-                <a:spcPts val="600"/>
-              </a:spcAft>
-              <a:buSzPct val="100000"/>
-              <a:buChar char="•"/>
+            <a:pPr indent="0" marL="0">
+              <a:buNone/>
             </a:pPr>
             <a:r>
               <a:rPr lang="en-US" sz="1400" dirty="0">
@@ -7497,17 +8704,13 @@
                 <a:ea typeface="Calibri" pitchFamily="34" charset="-122"/>
                 <a:cs typeface="Calibri" pitchFamily="34" charset="-120"/>
               </a:rPr>
-              <a:t>Defenders must close every hole</a:t>
+              <a:t>Six real-shaped incidents. Guess the property before the reveal — most classes call one out loud before the buttons are even clicked.</a:t>
             </a:r>
             <a:endParaRPr lang="en-US" sz="1400" dirty="0"/>
           </a:p>
           <a:p>
-            <a:pPr marL="342900" indent="-342900">
-              <a:spcAft>
-                <a:spcPts val="600"/>
-              </a:spcAft>
-              <a:buSzPct val="100000"/>
-              <a:buChar char="•"/>
+            <a:pPr indent="0" marL="0">
+              <a:buNone/>
             </a:pPr>
             <a:r>
               <a:rPr lang="en-US" sz="1400" dirty="0">
@@ -7518,87 +8721,45 @@
                 <a:ea typeface="Calibri" pitchFamily="34" charset="-122"/>
                 <a:cs typeface="Calibri" pitchFamily="34" charset="-120"/>
               </a:rPr>
-              <a:t>Attackers need one</a:t>
+              <a:t>Try it live: /sim/cia-triad (interactive simulation, web only)</a:t>
             </a:r>
             <a:endParaRPr lang="en-US" sz="1400" dirty="0"/>
           </a:p>
-          <a:p>
-            <a:pPr marL="342900" indent="-342900">
-              <a:spcAft>
-                <a:spcPts val="600"/>
-              </a:spcAft>
-              <a:buSzPct val="100000"/>
-              <a:buChar char="•"/>
-            </a:pPr>
-            <a:r>
-              <a:rPr lang="en-US" sz="1400" dirty="0">
-                <a:solidFill>
-                  <a:srgbClr val="1F2937"/>
+        </p:txBody>
+      </p:sp>
+      <p:sp>
+        <p:nvSpPr>
+          <p:cNvPr id="6" name="Text 3"/>
+          <p:cNvSpPr/>
+          <p:nvPr/>
+        </p:nvSpPr>
+        <p:spPr>
+          <a:xfrm>
+            <a:off x="457200" y="4800600"/>
+            <a:ext cx="6949440" cy="274320"/>
+          </a:xfrm>
+          <a:prstGeom prst="rect">
+            <a:avLst/>
+          </a:prstGeom>
+          <a:noFill/>
+          <a:ln/>
+        </p:spPr>
+        <p:txBody>
+          <a:bodyPr wrap="square" lIns="0" tIns="0" rIns="0" bIns="0" rtlCol="0" anchor="ctr"/>
+          <a:lstStyle/>
+          <a:p>
+            <a:pPr indent="0" marL="0">
+              <a:buNone/>
+            </a:pPr>
+            <a:r>
+              <a:rPr lang="en-US" sz="900" dirty="0">
+                <a:solidFill>
+                  <a:srgbClr val="64748B"/>
                 </a:solidFill>
                 <a:latin typeface="Calibri" pitchFamily="34" charset="0"/>
                 <a:ea typeface="Calibri" pitchFamily="34" charset="-122"/>
                 <a:cs typeface="Calibri" pitchFamily="34" charset="-120"/>
               </a:rPr>
-              <a:t>Think in abuse cases, not just use cases</a:t>
-            </a:r>
-            <a:endParaRPr lang="en-US" sz="1400" dirty="0"/>
-          </a:p>
-          <a:p>
-            <a:pPr marL="342900" indent="-342900">
-              <a:spcAft>
-                <a:spcPts val="600"/>
-              </a:spcAft>
-              <a:buSzPct val="100000"/>
-              <a:buChar char="•"/>
-            </a:pPr>
-            <a:r>
-              <a:rPr lang="en-US" sz="1400" dirty="0">
-                <a:solidFill>
-                  <a:srgbClr val="1F2937"/>
-                </a:solidFill>
-                <a:latin typeface="Calibri" pitchFamily="34" charset="0"/>
-                <a:ea typeface="Calibri" pitchFamily="34" charset="-122"/>
-                <a:cs typeface="Calibri" pitchFamily="34" charset="-120"/>
-              </a:rPr>
-              <a:t>"What can go wrong here?" at every boundary</a:t>
-            </a:r>
-            <a:endParaRPr lang="en-US" sz="1400" dirty="0"/>
-          </a:p>
-        </p:txBody>
-      </p:sp>
-      <p:sp>
-        <p:nvSpPr>
-          <p:cNvPr id="7" name="Text 4"/>
-          <p:cNvSpPr/>
-          <p:nvPr/>
-        </p:nvSpPr>
-        <p:spPr>
-          <a:xfrm>
-            <a:off x="457200" y="4800600"/>
-            <a:ext cx="6949440" cy="274320"/>
-          </a:xfrm>
-          <a:prstGeom prst="rect">
-            <a:avLst/>
-          </a:prstGeom>
-          <a:noFill/>
-          <a:ln/>
-        </p:spPr>
-        <p:txBody>
-          <a:bodyPr wrap="square" lIns="0" tIns="0" rIns="0" bIns="0" rtlCol="0" anchor="ctr"/>
-          <a:lstStyle/>
-          <a:p>
-            <a:pPr indent="0" marL="0">
-              <a:buNone/>
-            </a:pPr>
-            <a:r>
-              <a:rPr lang="en-US" sz="900" dirty="0">
-                <a:solidFill>
-                  <a:srgbClr val="64748B"/>
-                </a:solidFill>
-                <a:latin typeface="Calibri" pitchFamily="34" charset="0"/>
-                <a:ea typeface="Calibri" pitchFamily="34" charset="-122"/>
-                <a:cs typeface="Calibri" pitchFamily="34" charset="-120"/>
-              </a:rPr>
               <a:t>Software Security · Week 1</a:t>
             </a:r>
             <a:endParaRPr lang="en-US" sz="900" dirty="0"/>
@@ -7607,7 +8768,7 @@
       </p:sp>
       <p:pic>
         <p:nvPicPr>
-          <p:cNvPr id="8" name="Image 1" descr="/Users/pop7/Library/CloudStorage/OneDrive-MonsterConnectCo.,Ltd/Lecture/KOSEN69 - software-security/slides/pptx/assets/logo-small.png">    </p:cNvPr>
+          <p:cNvPr id="7" name="Image 1" descr="/Users/pop7/Library/CloudStorage/OneDrive-MonsterConnectCo.,Ltd/Lecture/KOSEN69 - software-security/slides/pptx/assets/logo-small.png">    </p:cNvPr>
           <p:cNvPicPr>
             <a:picLocks noChangeAspect="1"/>
           </p:cNvPicPr>
@@ -7745,7 +8906,7 @@
                 <a:ea typeface="Arial" pitchFamily="34" charset="-122"/>
                 <a:cs typeface="Arial" pitchFamily="34" charset="-120"/>
               </a:rPr>
-              <a:t>Trust boundaries &amp; attack surface</a:t>
+              <a:t>Attacker vs. defender mindset</a:t>
             </a:r>
             <a:endParaRPr lang="en-US" sz="2600" dirty="0"/>
           </a:p>
@@ -7760,11 +8921,11 @@
         <p:spPr>
           <a:xfrm>
             <a:off x="457200" y="1325880"/>
-            <a:ext cx="8229600" cy="1207008"/>
+            <a:ext cx="8229600" cy="1517904"/>
           </a:xfrm>
           <a:prstGeom prst="roundRect">
             <a:avLst>
-              <a:gd name="adj" fmla="val 6061"/>
+              <a:gd name="adj" fmla="val 4819"/>
             </a:avLst>
           </a:prstGeom>
           <a:solidFill>
@@ -7789,7 +8950,7 @@
         <p:spPr>
           <a:xfrm>
             <a:off x="731520" y="1435608"/>
-            <a:ext cx="7680960" cy="987552"/>
+            <a:ext cx="7680960" cy="1298448"/>
           </a:xfrm>
           <a:prstGeom prst="rect">
             <a:avLst/>
@@ -7819,7 +8980,7 @@
                 <a:ea typeface="Calibri" pitchFamily="34" charset="-122"/>
                 <a:cs typeface="Calibri" pitchFamily="34" charset="-120"/>
               </a:rPr>
-              <a:t>Trust boundary: where data crosses between components of different privilege</a:t>
+              <a:t>Defenders must close every hole</a:t>
             </a:r>
             <a:endParaRPr lang="en-US" sz="1400" dirty="0"/>
           </a:p>
@@ -7840,12 +9001,12 @@
                 <a:ea typeface="Calibri" pitchFamily="34" charset="-122"/>
                 <a:cs typeface="Calibri" pitchFamily="34" charset="-120"/>
               </a:rPr>
-              <a:t>Attack surface: every input an attacker can reach</a:t>
+              <a:t>Attackers need one</a:t>
             </a:r>
             <a:endParaRPr lang="en-US" sz="1400" dirty="0"/>
           </a:p>
           <a:p>
-            <a:pPr lvl="1" marL="685800" indent="-342900">
+            <a:pPr marL="342900" indent="-342900">
               <a:spcAft>
                 <a:spcPts val="600"/>
               </a:spcAft>
@@ -7861,7 +9022,28 @@
                 <a:ea typeface="Calibri" pitchFamily="34" charset="-122"/>
                 <a:cs typeface="Calibri" pitchFamily="34" charset="-120"/>
               </a:rPr>
-              <a:t>HTTP params, headers, cookies, file uploads, APIs, env vars, dependencies</a:t>
+              <a:t>Think in abuse cases, not just use cases</a:t>
+            </a:r>
+            <a:endParaRPr lang="en-US" sz="1400" dirty="0"/>
+          </a:p>
+          <a:p>
+            <a:pPr marL="342900" indent="-342900">
+              <a:spcAft>
+                <a:spcPts val="600"/>
+              </a:spcAft>
+              <a:buSzPct val="100000"/>
+              <a:buChar char="•"/>
+            </a:pPr>
+            <a:r>
+              <a:rPr lang="en-US" sz="1400" dirty="0">
+                <a:solidFill>
+                  <a:srgbClr val="1F2937"/>
+                </a:solidFill>
+                <a:latin typeface="Calibri" pitchFamily="34" charset="0"/>
+                <a:ea typeface="Calibri" pitchFamily="34" charset="-122"/>
+                <a:cs typeface="Calibri" pitchFamily="34" charset="-120"/>
+              </a:rPr>
+              <a:t>"What can go wrong here?" at every boundary</a:t>
             </a:r>
             <a:endParaRPr lang="en-US" sz="1400" dirty="0"/>
           </a:p>
@@ -8046,7 +9228,7 @@
                 <a:ea typeface="Arial" pitchFamily="34" charset="-122"/>
                 <a:cs typeface="Arial" pitchFamily="34" charset="-120"/>
               </a:rPr>
-              <a:t>Worked example: the /upload endpoint</a:t>
+              <a:t>Trust boundaries &amp; attack surface</a:t>
             </a:r>
             <a:endParaRPr lang="en-US" sz="2600" dirty="0"/>
           </a:p>
@@ -8061,113 +9243,11 @@
         <p:spPr>
           <a:xfrm>
             <a:off x="457200" y="1325880"/>
-            <a:ext cx="8229600" cy="932688"/>
+            <a:ext cx="8229600" cy="1207008"/>
           </a:xfrm>
           <a:prstGeom prst="roundRect">
             <a:avLst>
-              <a:gd name="adj" fmla="val 5882"/>
-            </a:avLst>
-          </a:prstGeom>
-          <a:solidFill>
-            <a:srgbClr val="0A1020"/>
-          </a:solidFill>
-          <a:ln w="12700">
-            <a:solidFill>
-              <a:srgbClr val="E8EDF3"/>
-            </a:solidFill>
-            <a:prstDash val="solid"/>
-          </a:ln>
-        </p:spPr>
-      </p:sp>
-      <p:sp>
-        <p:nvSpPr>
-          <p:cNvPr id="6" name="Text 3"/>
-          <p:cNvSpPr/>
-          <p:nvPr/>
-        </p:nvSpPr>
-        <p:spPr>
-          <a:xfrm>
-            <a:off x="640080" y="1399032"/>
-            <a:ext cx="7863840" cy="786384"/>
-          </a:xfrm>
-          <a:prstGeom prst="rect">
-            <a:avLst/>
-          </a:prstGeom>
-          <a:noFill/>
-          <a:ln/>
-        </p:spPr>
-        <p:txBody>
-          <a:bodyPr wrap="square" lIns="0" tIns="0" rIns="0" bIns="0" rtlCol="0" anchor="t">
-            <a:normAutofit/>
-          </a:bodyPr>
-          <a:lstStyle/>
-          <a:p>
-            <a:pPr indent="0" marL="0">
-              <a:buNone/>
-            </a:pPr>
-            <a:r>
-              <a:rPr lang="en-US" sz="1150" dirty="0">
-                <a:solidFill>
-                  <a:srgbClr val="9FE7D6"/>
-                </a:solidFill>
-                <a:latin typeface="Courier New" pitchFamily="34" charset="0"/>
-                <a:ea typeface="Courier New" pitchFamily="34" charset="-122"/>
-                <a:cs typeface="Courier New" pitchFamily="34" charset="-120"/>
-              </a:rPr>
-              <a:t>Browser  --(file)--&gt;  [Flask app]  --save f.filename--&gt;  uploads/</a:t>
-            </a:r>
-            <a:endParaRPr lang="en-US" sz="1150" dirty="0"/>
-          </a:p>
-          <a:p>
-            <a:pPr indent="0" marL="0">
-              <a:buNone/>
-            </a:pPr>
-            <a:r>
-              <a:rPr lang="en-US" sz="1150" dirty="0">
-                <a:solidFill>
-                  <a:srgbClr val="9FE7D6"/>
-                </a:solidFill>
-                <a:latin typeface="Courier New" pitchFamily="34" charset="0"/>
-                <a:ea typeface="Courier New" pitchFamily="34" charset="-122"/>
-                <a:cs typeface="Courier New" pitchFamily="34" charset="-120"/>
-              </a:rPr>
-              <a:t>                            |                               ^</a:t>
-            </a:r>
-            <a:endParaRPr lang="en-US" sz="1150" dirty="0"/>
-          </a:p>
-          <a:p>
-            <a:pPr indent="0" marL="0">
-              <a:buNone/>
-            </a:pPr>
-            <a:r>
-              <a:rPr lang="en-US" sz="1150" dirty="0">
-                <a:solidFill>
-                  <a:srgbClr val="9FE7D6"/>
-                </a:solidFill>
-                <a:latin typeface="Courier New" pitchFamily="34" charset="0"/>
-                <a:ea typeface="Courier New" pitchFamily="34" charset="-122"/>
-                <a:cs typeface="Courier New" pitchFamily="34" charset="-120"/>
-              </a:rPr>
-              <a:t>                       /files/&lt;name&gt;  --------serves back---</a:t>
-            </a:r>
-            <a:endParaRPr lang="en-US" sz="1150" dirty="0"/>
-          </a:p>
-        </p:txBody>
-      </p:sp>
-      <p:sp>
-        <p:nvSpPr>
-          <p:cNvPr id="7" name="Shape 4"/>
-          <p:cNvSpPr/>
-          <p:nvPr/>
-        </p:nvSpPr>
-        <p:spPr>
-          <a:xfrm>
-            <a:off x="457200" y="2423160"/>
-            <a:ext cx="8229600" cy="2121408"/>
-          </a:xfrm>
-          <a:prstGeom prst="roundRect">
-            <a:avLst>
-              <a:gd name="adj" fmla="val 3448"/>
+              <a:gd name="adj" fmla="val 6061"/>
             </a:avLst>
           </a:prstGeom>
           <a:solidFill>
@@ -8185,14 +9265,14 @@
       </p:sp>
       <p:sp>
         <p:nvSpPr>
-          <p:cNvPr id="8" name="Text 5"/>
-          <p:cNvSpPr/>
-          <p:nvPr/>
-        </p:nvSpPr>
-        <p:spPr>
-          <a:xfrm>
-            <a:off x="731520" y="2532888"/>
-            <a:ext cx="7680960" cy="1901952"/>
+          <p:cNvPr id="6" name="Text 3"/>
+          <p:cNvSpPr/>
+          <p:nvPr/>
+        </p:nvSpPr>
+        <p:spPr>
+          <a:xfrm>
+            <a:off x="731520" y="1435608"/>
+            <a:ext cx="7680960" cy="987552"/>
           </a:xfrm>
           <a:prstGeom prst="rect">
             <a:avLst/>
@@ -8222,7 +9302,7 @@
                 <a:ea typeface="Calibri" pitchFamily="34" charset="-122"/>
                 <a:cs typeface="Calibri" pitchFamily="34" charset="-120"/>
               </a:rPr>
-              <a:t>Crosses the Internet → app trust boundary</a:t>
+              <a:t>Trust boundary: where data crosses between components of different privilege</a:t>
             </a:r>
             <a:endParaRPr lang="en-US" sz="1400" dirty="0"/>
           </a:p>
@@ -8243,12 +9323,12 @@
                 <a:ea typeface="Calibri" pitchFamily="34" charset="-122"/>
                 <a:cs typeface="Calibri" pitchFamily="34" charset="-120"/>
               </a:rPr>
-              <a:t>Inputs: the file bytes and the filename (attacker-controlled)</a:t>
+              <a:t>Attack surface: every input an attacker can reach</a:t>
             </a:r>
             <a:endParaRPr lang="en-US" sz="1400" dirty="0"/>
           </a:p>
           <a:p>
-            <a:pPr marL="342900" indent="-342900">
+            <a:pPr lvl="1" marL="685800" indent="-342900">
               <a:spcAft>
                 <a:spcPts val="600"/>
               </a:spcAft>
@@ -8264,17 +9344,37 @@
                 <a:ea typeface="Calibri" pitchFamily="34" charset="-122"/>
                 <a:cs typeface="Calibri" pitchFamily="34" charset="-120"/>
               </a:rPr>
-              <a:t>../../escaped.txt as a filename → the app saves it there — arbitrary-file-write, unauthenticated, anywhere the process can reach (not "overwrite a same-name file" — write to a path you chose)</a:t>
+              <a:t>HTTP params, headers, cookies, file uploads, APIs, env vars, dependencies</a:t>
             </a:r>
             <a:endParaRPr lang="en-US" sz="1400" dirty="0"/>
           </a:p>
-          <a:p>
-            <a:pPr marL="342900" indent="-342900">
-              <a:spcAft>
-                <a:spcPts val="600"/>
-              </a:spcAft>
-              <a:buSzPct val="100000"/>
-              <a:buChar char="•"/>
+        </p:txBody>
+      </p:sp>
+      <p:sp>
+        <p:nvSpPr>
+          <p:cNvPr id="7" name="Text 4"/>
+          <p:cNvSpPr/>
+          <p:nvPr/>
+        </p:nvSpPr>
+        <p:spPr>
+          <a:xfrm>
+            <a:off x="548640" y="2697480"/>
+            <a:ext cx="8046720" cy="822960"/>
+          </a:xfrm>
+          <a:prstGeom prst="rect">
+            <a:avLst/>
+          </a:prstGeom>
+          <a:noFill/>
+          <a:ln/>
+        </p:spPr>
+        <p:txBody>
+          <a:bodyPr wrap="square" lIns="0" tIns="0" rIns="0" bIns="0" rtlCol="0" anchor="t">
+            <a:normAutofit/>
+          </a:bodyPr>
+          <a:lstStyle/>
+          <a:p>
+            <a:pPr indent="0" marL="0">
+              <a:buNone/>
             </a:pPr>
             <a:r>
               <a:rPr lang="en-US" sz="1400" dirty="0">
@@ -8285,7 +9385,7 @@
                 <a:ea typeface="Calibri" pitchFamily="34" charset="-122"/>
                 <a:cs typeface="Calibri" pitchFamily="34" charset="-120"/>
               </a:rPr>
-              <a:t>/files/&lt;name&gt; (the read path) is comparatively well-defended — Werkzeug's safe_join blocks the same trick</a:t>
+              <a:t>See diagram: Three trust zones — public internet, application tier, data tier — with the two boundaries a request crosses between them (web only)</a:t>
             </a:r>
             <a:endParaRPr lang="en-US" sz="1400" dirty="0"/>
           </a:p>
@@ -8293,7 +9393,7 @@
       </p:sp>
       <p:sp>
         <p:nvSpPr>
-          <p:cNvPr id="9" name="Text 6"/>
+          <p:cNvPr id="8" name="Text 5"/>
           <p:cNvSpPr/>
           <p:nvPr/>
         </p:nvSpPr>
@@ -8332,7 +9432,7 @@
       </p:sp>
       <p:pic>
         <p:nvPicPr>
-          <p:cNvPr id="10" name="Image 1" descr="/Users/pop7/Library/CloudStorage/OneDrive-MonsterConnectCo.,Ltd/Lecture/KOSEN69 - software-security/slides/pptx/assets/logo-small.png">    </p:cNvPr>
+          <p:cNvPr id="9" name="Image 1" descr="/Users/pop7/Library/CloudStorage/OneDrive-MonsterConnectCo.,Ltd/Lecture/KOSEN69 - software-security/slides/pptx/assets/logo-small.png">    </p:cNvPr>
           <p:cNvPicPr>
             <a:picLocks noChangeAspect="1"/>
           </p:cNvPicPr>
@@ -8470,1348 +9570,22 @@
                 <a:ea typeface="Arial" pitchFamily="34" charset="-122"/>
                 <a:cs typeface="Arial" pitchFamily="34" charset="-120"/>
               </a:rPr>
-              <a:t>STRIDE</a:t>
+              <a:t>Worked example: the /upload endpoint</a:t>
             </a:r>
             <a:endParaRPr lang="en-US" sz="2600" dirty="0"/>
           </a:p>
         </p:txBody>
       </p:sp>
-      <p:graphicFrame>
-        <p:nvGraphicFramePr>
-          <p:cNvPr id="9" name="Table 0"/>
-          <p:cNvGraphicFramePr>
-            <a:graphicFrameLocks noGrp="1"/>
-          </p:cNvGraphicFramePr>
-          <p:nvPr>
-            <p:extLst>
-              <p:ext uri="{D42A27DB-BD31-4B8C-83A1-F6EECF244321}">
-                <p14:modId xmlns:p14="http://schemas.microsoft.com/office/powerpoint/2010/main" val="1579011935"/>
-              </p:ext>
-            </p:extLst>
-          </p:nvPr>
-        </p:nvGraphicFramePr>
-        <p:xfrm>
-          <a:off x="457200" y="1325880"/>
-          <a:ext cx="8229600" cy="914400"/>
-        </p:xfrm>
-        <a:graphic>
-          <a:graphicData uri="http://schemas.openxmlformats.org/drawingml/2006/table">
-            <a:tbl>
-              <a:tblPr/>
-              <a:tblGrid>
-                <a:gridCol w="2743200"/>
-                <a:gridCol w="2743200"/>
-                <a:gridCol w="2743200"/>
-              </a:tblGrid>
-              <a:tr h="420624">
-                <a:tc>
-                  <a:txBody>
-                    <a:bodyPr/>
-                    <a:lstStyle/>
-                    <a:p>
-                      <a:pPr algn="l" indent="0" marL="0">
-                        <a:buNone/>
-                      </a:pPr>
-                      <a:r>
-                        <a:rPr lang="en-US" sz="1250" b="1" dirty="0">
-                          <a:solidFill>
-                            <a:srgbClr val="0E1726"/>
-                          </a:solidFill>
-                        </a:rPr>
-                        <a:t>Letter</a:t>
-                      </a:r>
-                      <a:endParaRPr lang="en-US" sz="1250" dirty="0"/>
-                    </a:p>
-                  </a:txBody>
-                  <a:tcPr marL="76200" marR="76200" marT="38100" marB="38100" anchor="ctr">
-                    <a:lnL w="12700" cap="flat" cmpd="sng" algn="ctr">
-                      <a:solidFill>
-                        <a:srgbClr val="FFFFFF"/>
-                      </a:solidFill>
-                      <a:prstDash val="solid"/>
-                      <a:round/>
-                      <a:headEnd type="none" w="med" len="med"/>
-                      <a:tailEnd type="none" w="med" len="med"/>
-                    </a:lnL>
-                    <a:lnR w="12700" cap="flat" cmpd="sng" algn="ctr">
-                      <a:solidFill>
-                        <a:srgbClr val="FFFFFF"/>
-                      </a:solidFill>
-                      <a:prstDash val="solid"/>
-                      <a:round/>
-                      <a:headEnd type="none" w="med" len="med"/>
-                      <a:tailEnd type="none" w="med" len="med"/>
-                    </a:lnR>
-                    <a:lnT w="12700" cap="flat" cmpd="sng" algn="ctr">
-                      <a:solidFill>
-                        <a:srgbClr val="FFFFFF"/>
-                      </a:solidFill>
-                      <a:prstDash val="solid"/>
-                      <a:round/>
-                      <a:headEnd type="none" w="med" len="med"/>
-                      <a:tailEnd type="none" w="med" len="med"/>
-                    </a:lnT>
-                    <a:lnB w="12700" cap="flat" cmpd="sng" algn="ctr">
-                      <a:solidFill>
-                        <a:srgbClr val="FFFFFF"/>
-                      </a:solidFill>
-                      <a:prstDash val="solid"/>
-                      <a:round/>
-                      <a:headEnd type="none" w="med" len="med"/>
-                      <a:tailEnd type="none" w="med" len="med"/>
-                    </a:lnB>
-                    <a:solidFill>
-                      <a:srgbClr val="E35205"/>
-                    </a:solidFill>
-                  </a:tcPr>
-                </a:tc>
-                <a:tc>
-                  <a:txBody>
-                    <a:bodyPr/>
-                    <a:lstStyle/>
-                    <a:p>
-                      <a:pPr algn="l" indent="0" marL="0">
-                        <a:buNone/>
-                      </a:pPr>
-                      <a:r>
-                        <a:rPr lang="en-US" sz="1250" b="1" dirty="0">
-                          <a:solidFill>
-                            <a:srgbClr val="0E1726"/>
-                          </a:solidFill>
-                        </a:rPr>
-                        <a:t>Threat</a:t>
-                      </a:r>
-                      <a:endParaRPr lang="en-US" sz="1250" dirty="0"/>
-                    </a:p>
-                  </a:txBody>
-                  <a:tcPr marL="76200" marR="76200" marT="38100" marB="38100" anchor="ctr">
-                    <a:lnL w="12700" cap="flat" cmpd="sng" algn="ctr">
-                      <a:solidFill>
-                        <a:srgbClr val="FFFFFF"/>
-                      </a:solidFill>
-                      <a:prstDash val="solid"/>
-                      <a:round/>
-                      <a:headEnd type="none" w="med" len="med"/>
-                      <a:tailEnd type="none" w="med" len="med"/>
-                    </a:lnL>
-                    <a:lnR w="12700" cap="flat" cmpd="sng" algn="ctr">
-                      <a:solidFill>
-                        <a:srgbClr val="FFFFFF"/>
-                      </a:solidFill>
-                      <a:prstDash val="solid"/>
-                      <a:round/>
-                      <a:headEnd type="none" w="med" len="med"/>
-                      <a:tailEnd type="none" w="med" len="med"/>
-                    </a:lnR>
-                    <a:lnT w="12700" cap="flat" cmpd="sng" algn="ctr">
-                      <a:solidFill>
-                        <a:srgbClr val="FFFFFF"/>
-                      </a:solidFill>
-                      <a:prstDash val="solid"/>
-                      <a:round/>
-                      <a:headEnd type="none" w="med" len="med"/>
-                      <a:tailEnd type="none" w="med" len="med"/>
-                    </a:lnT>
-                    <a:lnB w="12700" cap="flat" cmpd="sng" algn="ctr">
-                      <a:solidFill>
-                        <a:srgbClr val="FFFFFF"/>
-                      </a:solidFill>
-                      <a:prstDash val="solid"/>
-                      <a:round/>
-                      <a:headEnd type="none" w="med" len="med"/>
-                      <a:tailEnd type="none" w="med" len="med"/>
-                    </a:lnB>
-                    <a:solidFill>
-                      <a:srgbClr val="E35205"/>
-                    </a:solidFill>
-                  </a:tcPr>
-                </a:tc>
-                <a:tc>
-                  <a:txBody>
-                    <a:bodyPr/>
-                    <a:lstStyle/>
-                    <a:p>
-                      <a:pPr algn="l" indent="0" marL="0">
-                        <a:buNone/>
-                      </a:pPr>
-                      <a:r>
-                        <a:rPr lang="en-US" sz="1250" b="1" dirty="0">
-                          <a:solidFill>
-                            <a:srgbClr val="0E1726"/>
-                          </a:solidFill>
-                        </a:rPr>
-                        <a:t>Property violated</a:t>
-                      </a:r>
-                      <a:endParaRPr lang="en-US" sz="1250" dirty="0"/>
-                    </a:p>
-                  </a:txBody>
-                  <a:tcPr marL="76200" marR="76200" marT="38100" marB="38100" anchor="ctr">
-                    <a:lnL w="12700" cap="flat" cmpd="sng" algn="ctr">
-                      <a:solidFill>
-                        <a:srgbClr val="FFFFFF"/>
-                      </a:solidFill>
-                      <a:prstDash val="solid"/>
-                      <a:round/>
-                      <a:headEnd type="none" w="med" len="med"/>
-                      <a:tailEnd type="none" w="med" len="med"/>
-                    </a:lnL>
-                    <a:lnR w="12700" cap="flat" cmpd="sng" algn="ctr">
-                      <a:solidFill>
-                        <a:srgbClr val="FFFFFF"/>
-                      </a:solidFill>
-                      <a:prstDash val="solid"/>
-                      <a:round/>
-                      <a:headEnd type="none" w="med" len="med"/>
-                      <a:tailEnd type="none" w="med" len="med"/>
-                    </a:lnR>
-                    <a:lnT w="12700" cap="flat" cmpd="sng" algn="ctr">
-                      <a:solidFill>
-                        <a:srgbClr val="FFFFFF"/>
-                      </a:solidFill>
-                      <a:prstDash val="solid"/>
-                      <a:round/>
-                      <a:headEnd type="none" w="med" len="med"/>
-                      <a:tailEnd type="none" w="med" len="med"/>
-                    </a:lnT>
-                    <a:lnB w="12700" cap="flat" cmpd="sng" algn="ctr">
-                      <a:solidFill>
-                        <a:srgbClr val="FFFFFF"/>
-                      </a:solidFill>
-                      <a:prstDash val="solid"/>
-                      <a:round/>
-                      <a:headEnd type="none" w="med" len="med"/>
-                      <a:tailEnd type="none" w="med" len="med"/>
-                    </a:lnB>
-                    <a:solidFill>
-                      <a:srgbClr val="E35205"/>
-                    </a:solidFill>
-                  </a:tcPr>
-                </a:tc>
-              </a:tr>
-              <a:tr h="420624">
-                <a:tc>
-                  <a:txBody>
-                    <a:bodyPr/>
-                    <a:lstStyle/>
-                    <a:p>
-                      <a:pPr algn="l" indent="0" marL="0">
-                        <a:buNone/>
-                      </a:pPr>
-                      <a:r>
-                        <a:rPr lang="en-US" sz="1200" dirty="0">
-                          <a:solidFill>
-                            <a:srgbClr val="1F2937"/>
-                          </a:solidFill>
-                        </a:rPr>
-                        <a:t>S</a:t>
-                      </a:r>
-                      <a:endParaRPr lang="en-US" sz="1200" dirty="0"/>
-                    </a:p>
-                  </a:txBody>
-                  <a:tcPr marL="76200" marR="76200" marT="38100" marB="38100" anchor="ctr">
-                    <a:lnL w="12700" cap="flat" cmpd="sng" algn="ctr">
-                      <a:solidFill>
-                        <a:srgbClr val="FFFFFF"/>
-                      </a:solidFill>
-                      <a:prstDash val="solid"/>
-                      <a:round/>
-                      <a:headEnd type="none" w="med" len="med"/>
-                      <a:tailEnd type="none" w="med" len="med"/>
-                    </a:lnL>
-                    <a:lnR w="12700" cap="flat" cmpd="sng" algn="ctr">
-                      <a:solidFill>
-                        <a:srgbClr val="FFFFFF"/>
-                      </a:solidFill>
-                      <a:prstDash val="solid"/>
-                      <a:round/>
-                      <a:headEnd type="none" w="med" len="med"/>
-                      <a:tailEnd type="none" w="med" len="med"/>
-                    </a:lnR>
-                    <a:lnT w="12700" cap="flat" cmpd="sng" algn="ctr">
-                      <a:solidFill>
-                        <a:srgbClr val="FFFFFF"/>
-                      </a:solidFill>
-                      <a:prstDash val="solid"/>
-                      <a:round/>
-                      <a:headEnd type="none" w="med" len="med"/>
-                      <a:tailEnd type="none" w="med" len="med"/>
-                    </a:lnT>
-                    <a:lnB w="12700" cap="flat" cmpd="sng" algn="ctr">
-                      <a:solidFill>
-                        <a:srgbClr val="FFFFFF"/>
-                      </a:solidFill>
-                      <a:prstDash val="solid"/>
-                      <a:round/>
-                      <a:headEnd type="none" w="med" len="med"/>
-                      <a:tailEnd type="none" w="med" len="med"/>
-                    </a:lnB>
-                    <a:solidFill>
-                      <a:srgbClr val="F1F5F9"/>
-                    </a:solidFill>
-                  </a:tcPr>
-                </a:tc>
-                <a:tc>
-                  <a:txBody>
-                    <a:bodyPr/>
-                    <a:lstStyle/>
-                    <a:p>
-                      <a:pPr algn="l" indent="0" marL="0">
-                        <a:buNone/>
-                      </a:pPr>
-                      <a:r>
-                        <a:rPr lang="en-US" sz="1200" dirty="0">
-                          <a:solidFill>
-                            <a:srgbClr val="1F2937"/>
-                          </a:solidFill>
-                        </a:rPr>
-                        <a:t>Spoofing</a:t>
-                      </a:r>
-                      <a:endParaRPr lang="en-US" sz="1200" dirty="0"/>
-                    </a:p>
-                  </a:txBody>
-                  <a:tcPr marL="76200" marR="76200" marT="38100" marB="38100" anchor="ctr">
-                    <a:lnL w="12700" cap="flat" cmpd="sng" algn="ctr">
-                      <a:solidFill>
-                        <a:srgbClr val="FFFFFF"/>
-                      </a:solidFill>
-                      <a:prstDash val="solid"/>
-                      <a:round/>
-                      <a:headEnd type="none" w="med" len="med"/>
-                      <a:tailEnd type="none" w="med" len="med"/>
-                    </a:lnL>
-                    <a:lnR w="12700" cap="flat" cmpd="sng" algn="ctr">
-                      <a:solidFill>
-                        <a:srgbClr val="FFFFFF"/>
-                      </a:solidFill>
-                      <a:prstDash val="solid"/>
-                      <a:round/>
-                      <a:headEnd type="none" w="med" len="med"/>
-                      <a:tailEnd type="none" w="med" len="med"/>
-                    </a:lnR>
-                    <a:lnT w="12700" cap="flat" cmpd="sng" algn="ctr">
-                      <a:solidFill>
-                        <a:srgbClr val="FFFFFF"/>
-                      </a:solidFill>
-                      <a:prstDash val="solid"/>
-                      <a:round/>
-                      <a:headEnd type="none" w="med" len="med"/>
-                      <a:tailEnd type="none" w="med" len="med"/>
-                    </a:lnT>
-                    <a:lnB w="12700" cap="flat" cmpd="sng" algn="ctr">
-                      <a:solidFill>
-                        <a:srgbClr val="FFFFFF"/>
-                      </a:solidFill>
-                      <a:prstDash val="solid"/>
-                      <a:round/>
-                      <a:headEnd type="none" w="med" len="med"/>
-                      <a:tailEnd type="none" w="med" len="med"/>
-                    </a:lnB>
-                    <a:solidFill>
-                      <a:srgbClr val="F1F5F9"/>
-                    </a:solidFill>
-                  </a:tcPr>
-                </a:tc>
-                <a:tc>
-                  <a:txBody>
-                    <a:bodyPr/>
-                    <a:lstStyle/>
-                    <a:p>
-                      <a:pPr algn="l" indent="0" marL="0">
-                        <a:buNone/>
-                      </a:pPr>
-                      <a:r>
-                        <a:rPr lang="en-US" sz="1200" dirty="0">
-                          <a:solidFill>
-                            <a:srgbClr val="1F2937"/>
-                          </a:solidFill>
-                        </a:rPr>
-                        <a:t>Authentication</a:t>
-                      </a:r>
-                      <a:endParaRPr lang="en-US" sz="1200" dirty="0"/>
-                    </a:p>
-                  </a:txBody>
-                  <a:tcPr marL="76200" marR="76200" marT="38100" marB="38100" anchor="ctr">
-                    <a:lnL w="12700" cap="flat" cmpd="sng" algn="ctr">
-                      <a:solidFill>
-                        <a:srgbClr val="FFFFFF"/>
-                      </a:solidFill>
-                      <a:prstDash val="solid"/>
-                      <a:round/>
-                      <a:headEnd type="none" w="med" len="med"/>
-                      <a:tailEnd type="none" w="med" len="med"/>
-                    </a:lnL>
-                    <a:lnR w="12700" cap="flat" cmpd="sng" algn="ctr">
-                      <a:solidFill>
-                        <a:srgbClr val="FFFFFF"/>
-                      </a:solidFill>
-                      <a:prstDash val="solid"/>
-                      <a:round/>
-                      <a:headEnd type="none" w="med" len="med"/>
-                      <a:tailEnd type="none" w="med" len="med"/>
-                    </a:lnR>
-                    <a:lnT w="12700" cap="flat" cmpd="sng" algn="ctr">
-                      <a:solidFill>
-                        <a:srgbClr val="FFFFFF"/>
-                      </a:solidFill>
-                      <a:prstDash val="solid"/>
-                      <a:round/>
-                      <a:headEnd type="none" w="med" len="med"/>
-                      <a:tailEnd type="none" w="med" len="med"/>
-                    </a:lnT>
-                    <a:lnB w="12700" cap="flat" cmpd="sng" algn="ctr">
-                      <a:solidFill>
-                        <a:srgbClr val="FFFFFF"/>
-                      </a:solidFill>
-                      <a:prstDash val="solid"/>
-                      <a:round/>
-                      <a:headEnd type="none" w="med" len="med"/>
-                      <a:tailEnd type="none" w="med" len="med"/>
-                    </a:lnB>
-                    <a:solidFill>
-                      <a:srgbClr val="F1F5F9"/>
-                    </a:solidFill>
-                  </a:tcPr>
-                </a:tc>
-              </a:tr>
-              <a:tr h="420624">
-                <a:tc>
-                  <a:txBody>
-                    <a:bodyPr/>
-                    <a:lstStyle/>
-                    <a:p>
-                      <a:pPr algn="l" indent="0" marL="0">
-                        <a:buNone/>
-                      </a:pPr>
-                      <a:r>
-                        <a:rPr lang="en-US" sz="1200" dirty="0">
-                          <a:solidFill>
-                            <a:srgbClr val="1F2937"/>
-                          </a:solidFill>
-                        </a:rPr>
-                        <a:t>T</a:t>
-                      </a:r>
-                      <a:endParaRPr lang="en-US" sz="1200" dirty="0"/>
-                    </a:p>
-                  </a:txBody>
-                  <a:tcPr marL="76200" marR="76200" marT="38100" marB="38100" anchor="ctr">
-                    <a:lnL w="12700" cap="flat" cmpd="sng" algn="ctr">
-                      <a:solidFill>
-                        <a:srgbClr val="FFFFFF"/>
-                      </a:solidFill>
-                      <a:prstDash val="solid"/>
-                      <a:round/>
-                      <a:headEnd type="none" w="med" len="med"/>
-                      <a:tailEnd type="none" w="med" len="med"/>
-                    </a:lnL>
-                    <a:lnR w="12700" cap="flat" cmpd="sng" algn="ctr">
-                      <a:solidFill>
-                        <a:srgbClr val="FFFFFF"/>
-                      </a:solidFill>
-                      <a:prstDash val="solid"/>
-                      <a:round/>
-                      <a:headEnd type="none" w="med" len="med"/>
-                      <a:tailEnd type="none" w="med" len="med"/>
-                    </a:lnR>
-                    <a:lnT w="12700" cap="flat" cmpd="sng" algn="ctr">
-                      <a:solidFill>
-                        <a:srgbClr val="FFFFFF"/>
-                      </a:solidFill>
-                      <a:prstDash val="solid"/>
-                      <a:round/>
-                      <a:headEnd type="none" w="med" len="med"/>
-                      <a:tailEnd type="none" w="med" len="med"/>
-                    </a:lnT>
-                    <a:lnB w="12700" cap="flat" cmpd="sng" algn="ctr">
-                      <a:solidFill>
-                        <a:srgbClr val="FFFFFF"/>
-                      </a:solidFill>
-                      <a:prstDash val="solid"/>
-                      <a:round/>
-                      <a:headEnd type="none" w="med" len="med"/>
-                      <a:tailEnd type="none" w="med" len="med"/>
-                    </a:lnB>
-                    <a:solidFill>
-                      <a:srgbClr val="E8EDF3"/>
-                    </a:solidFill>
-                  </a:tcPr>
-                </a:tc>
-                <a:tc>
-                  <a:txBody>
-                    <a:bodyPr/>
-                    <a:lstStyle/>
-                    <a:p>
-                      <a:pPr algn="l" indent="0" marL="0">
-                        <a:buNone/>
-                      </a:pPr>
-                      <a:r>
-                        <a:rPr lang="en-US" sz="1200" dirty="0">
-                          <a:solidFill>
-                            <a:srgbClr val="1F2937"/>
-                          </a:solidFill>
-                        </a:rPr>
-                        <a:t>Tampering</a:t>
-                      </a:r>
-                      <a:endParaRPr lang="en-US" sz="1200" dirty="0"/>
-                    </a:p>
-                  </a:txBody>
-                  <a:tcPr marL="76200" marR="76200" marT="38100" marB="38100" anchor="ctr">
-                    <a:lnL w="12700" cap="flat" cmpd="sng" algn="ctr">
-                      <a:solidFill>
-                        <a:srgbClr val="FFFFFF"/>
-                      </a:solidFill>
-                      <a:prstDash val="solid"/>
-                      <a:round/>
-                      <a:headEnd type="none" w="med" len="med"/>
-                      <a:tailEnd type="none" w="med" len="med"/>
-                    </a:lnL>
-                    <a:lnR w="12700" cap="flat" cmpd="sng" algn="ctr">
-                      <a:solidFill>
-                        <a:srgbClr val="FFFFFF"/>
-                      </a:solidFill>
-                      <a:prstDash val="solid"/>
-                      <a:round/>
-                      <a:headEnd type="none" w="med" len="med"/>
-                      <a:tailEnd type="none" w="med" len="med"/>
-                    </a:lnR>
-                    <a:lnT w="12700" cap="flat" cmpd="sng" algn="ctr">
-                      <a:solidFill>
-                        <a:srgbClr val="FFFFFF"/>
-                      </a:solidFill>
-                      <a:prstDash val="solid"/>
-                      <a:round/>
-                      <a:headEnd type="none" w="med" len="med"/>
-                      <a:tailEnd type="none" w="med" len="med"/>
-                    </a:lnT>
-                    <a:lnB w="12700" cap="flat" cmpd="sng" algn="ctr">
-                      <a:solidFill>
-                        <a:srgbClr val="FFFFFF"/>
-                      </a:solidFill>
-                      <a:prstDash val="solid"/>
-                      <a:round/>
-                      <a:headEnd type="none" w="med" len="med"/>
-                      <a:tailEnd type="none" w="med" len="med"/>
-                    </a:lnB>
-                    <a:solidFill>
-                      <a:srgbClr val="E8EDF3"/>
-                    </a:solidFill>
-                  </a:tcPr>
-                </a:tc>
-                <a:tc>
-                  <a:txBody>
-                    <a:bodyPr/>
-                    <a:lstStyle/>
-                    <a:p>
-                      <a:pPr algn="l" indent="0" marL="0">
-                        <a:buNone/>
-                      </a:pPr>
-                      <a:r>
-                        <a:rPr lang="en-US" sz="1200" dirty="0">
-                          <a:solidFill>
-                            <a:srgbClr val="1F2937"/>
-                          </a:solidFill>
-                        </a:rPr>
-                        <a:t>Integrity</a:t>
-                      </a:r>
-                      <a:endParaRPr lang="en-US" sz="1200" dirty="0"/>
-                    </a:p>
-                  </a:txBody>
-                  <a:tcPr marL="76200" marR="76200" marT="38100" marB="38100" anchor="ctr">
-                    <a:lnL w="12700" cap="flat" cmpd="sng" algn="ctr">
-                      <a:solidFill>
-                        <a:srgbClr val="FFFFFF"/>
-                      </a:solidFill>
-                      <a:prstDash val="solid"/>
-                      <a:round/>
-                      <a:headEnd type="none" w="med" len="med"/>
-                      <a:tailEnd type="none" w="med" len="med"/>
-                    </a:lnL>
-                    <a:lnR w="12700" cap="flat" cmpd="sng" algn="ctr">
-                      <a:solidFill>
-                        <a:srgbClr val="FFFFFF"/>
-                      </a:solidFill>
-                      <a:prstDash val="solid"/>
-                      <a:round/>
-                      <a:headEnd type="none" w="med" len="med"/>
-                      <a:tailEnd type="none" w="med" len="med"/>
-                    </a:lnR>
-                    <a:lnT w="12700" cap="flat" cmpd="sng" algn="ctr">
-                      <a:solidFill>
-                        <a:srgbClr val="FFFFFF"/>
-                      </a:solidFill>
-                      <a:prstDash val="solid"/>
-                      <a:round/>
-                      <a:headEnd type="none" w="med" len="med"/>
-                      <a:tailEnd type="none" w="med" len="med"/>
-                    </a:lnT>
-                    <a:lnB w="12700" cap="flat" cmpd="sng" algn="ctr">
-                      <a:solidFill>
-                        <a:srgbClr val="FFFFFF"/>
-                      </a:solidFill>
-                      <a:prstDash val="solid"/>
-                      <a:round/>
-                      <a:headEnd type="none" w="med" len="med"/>
-                      <a:tailEnd type="none" w="med" len="med"/>
-                    </a:lnB>
-                    <a:solidFill>
-                      <a:srgbClr val="E8EDF3"/>
-                    </a:solidFill>
-                  </a:tcPr>
-                </a:tc>
-              </a:tr>
-              <a:tr h="420624">
-                <a:tc>
-                  <a:txBody>
-                    <a:bodyPr/>
-                    <a:lstStyle/>
-                    <a:p>
-                      <a:pPr algn="l" indent="0" marL="0">
-                        <a:buNone/>
-                      </a:pPr>
-                      <a:r>
-                        <a:rPr lang="en-US" sz="1200" dirty="0">
-                          <a:solidFill>
-                            <a:srgbClr val="1F2937"/>
-                          </a:solidFill>
-                        </a:rPr>
-                        <a:t>R</a:t>
-                      </a:r>
-                      <a:endParaRPr lang="en-US" sz="1200" dirty="0"/>
-                    </a:p>
-                  </a:txBody>
-                  <a:tcPr marL="76200" marR="76200" marT="38100" marB="38100" anchor="ctr">
-                    <a:lnL w="12700" cap="flat" cmpd="sng" algn="ctr">
-                      <a:solidFill>
-                        <a:srgbClr val="FFFFFF"/>
-                      </a:solidFill>
-                      <a:prstDash val="solid"/>
-                      <a:round/>
-                      <a:headEnd type="none" w="med" len="med"/>
-                      <a:tailEnd type="none" w="med" len="med"/>
-                    </a:lnL>
-                    <a:lnR w="12700" cap="flat" cmpd="sng" algn="ctr">
-                      <a:solidFill>
-                        <a:srgbClr val="FFFFFF"/>
-                      </a:solidFill>
-                      <a:prstDash val="solid"/>
-                      <a:round/>
-                      <a:headEnd type="none" w="med" len="med"/>
-                      <a:tailEnd type="none" w="med" len="med"/>
-                    </a:lnR>
-                    <a:lnT w="12700" cap="flat" cmpd="sng" algn="ctr">
-                      <a:solidFill>
-                        <a:srgbClr val="FFFFFF"/>
-                      </a:solidFill>
-                      <a:prstDash val="solid"/>
-                      <a:round/>
-                      <a:headEnd type="none" w="med" len="med"/>
-                      <a:tailEnd type="none" w="med" len="med"/>
-                    </a:lnT>
-                    <a:lnB w="12700" cap="flat" cmpd="sng" algn="ctr">
-                      <a:solidFill>
-                        <a:srgbClr val="FFFFFF"/>
-                      </a:solidFill>
-                      <a:prstDash val="solid"/>
-                      <a:round/>
-                      <a:headEnd type="none" w="med" len="med"/>
-                      <a:tailEnd type="none" w="med" len="med"/>
-                    </a:lnB>
-                    <a:solidFill>
-                      <a:srgbClr val="F1F5F9"/>
-                    </a:solidFill>
-                  </a:tcPr>
-                </a:tc>
-                <a:tc>
-                  <a:txBody>
-                    <a:bodyPr/>
-                    <a:lstStyle/>
-                    <a:p>
-                      <a:pPr algn="l" indent="0" marL="0">
-                        <a:buNone/>
-                      </a:pPr>
-                      <a:r>
-                        <a:rPr lang="en-US" sz="1200" dirty="0">
-                          <a:solidFill>
-                            <a:srgbClr val="1F2937"/>
-                          </a:solidFill>
-                        </a:rPr>
-                        <a:t>Repudiation</a:t>
-                      </a:r>
-                      <a:endParaRPr lang="en-US" sz="1200" dirty="0"/>
-                    </a:p>
-                  </a:txBody>
-                  <a:tcPr marL="76200" marR="76200" marT="38100" marB="38100" anchor="ctr">
-                    <a:lnL w="12700" cap="flat" cmpd="sng" algn="ctr">
-                      <a:solidFill>
-                        <a:srgbClr val="FFFFFF"/>
-                      </a:solidFill>
-                      <a:prstDash val="solid"/>
-                      <a:round/>
-                      <a:headEnd type="none" w="med" len="med"/>
-                      <a:tailEnd type="none" w="med" len="med"/>
-                    </a:lnL>
-                    <a:lnR w="12700" cap="flat" cmpd="sng" algn="ctr">
-                      <a:solidFill>
-                        <a:srgbClr val="FFFFFF"/>
-                      </a:solidFill>
-                      <a:prstDash val="solid"/>
-                      <a:round/>
-                      <a:headEnd type="none" w="med" len="med"/>
-                      <a:tailEnd type="none" w="med" len="med"/>
-                    </a:lnR>
-                    <a:lnT w="12700" cap="flat" cmpd="sng" algn="ctr">
-                      <a:solidFill>
-                        <a:srgbClr val="FFFFFF"/>
-                      </a:solidFill>
-                      <a:prstDash val="solid"/>
-                      <a:round/>
-                      <a:headEnd type="none" w="med" len="med"/>
-                      <a:tailEnd type="none" w="med" len="med"/>
-                    </a:lnT>
-                    <a:lnB w="12700" cap="flat" cmpd="sng" algn="ctr">
-                      <a:solidFill>
-                        <a:srgbClr val="FFFFFF"/>
-                      </a:solidFill>
-                      <a:prstDash val="solid"/>
-                      <a:round/>
-                      <a:headEnd type="none" w="med" len="med"/>
-                      <a:tailEnd type="none" w="med" len="med"/>
-                    </a:lnB>
-                    <a:solidFill>
-                      <a:srgbClr val="F1F5F9"/>
-                    </a:solidFill>
-                  </a:tcPr>
-                </a:tc>
-                <a:tc>
-                  <a:txBody>
-                    <a:bodyPr/>
-                    <a:lstStyle/>
-                    <a:p>
-                      <a:pPr algn="l" indent="0" marL="0">
-                        <a:buNone/>
-                      </a:pPr>
-                      <a:r>
-                        <a:rPr lang="en-US" sz="1200" dirty="0">
-                          <a:solidFill>
-                            <a:srgbClr val="1F2937"/>
-                          </a:solidFill>
-                        </a:rPr>
-                        <a:t>Non-repudiation</a:t>
-                      </a:r>
-                      <a:endParaRPr lang="en-US" sz="1200" dirty="0"/>
-                    </a:p>
-                  </a:txBody>
-                  <a:tcPr marL="76200" marR="76200" marT="38100" marB="38100" anchor="ctr">
-                    <a:lnL w="12700" cap="flat" cmpd="sng" algn="ctr">
-                      <a:solidFill>
-                        <a:srgbClr val="FFFFFF"/>
-                      </a:solidFill>
-                      <a:prstDash val="solid"/>
-                      <a:round/>
-                      <a:headEnd type="none" w="med" len="med"/>
-                      <a:tailEnd type="none" w="med" len="med"/>
-                    </a:lnL>
-                    <a:lnR w="12700" cap="flat" cmpd="sng" algn="ctr">
-                      <a:solidFill>
-                        <a:srgbClr val="FFFFFF"/>
-                      </a:solidFill>
-                      <a:prstDash val="solid"/>
-                      <a:round/>
-                      <a:headEnd type="none" w="med" len="med"/>
-                      <a:tailEnd type="none" w="med" len="med"/>
-                    </a:lnR>
-                    <a:lnT w="12700" cap="flat" cmpd="sng" algn="ctr">
-                      <a:solidFill>
-                        <a:srgbClr val="FFFFFF"/>
-                      </a:solidFill>
-                      <a:prstDash val="solid"/>
-                      <a:round/>
-                      <a:headEnd type="none" w="med" len="med"/>
-                      <a:tailEnd type="none" w="med" len="med"/>
-                    </a:lnT>
-                    <a:lnB w="12700" cap="flat" cmpd="sng" algn="ctr">
-                      <a:solidFill>
-                        <a:srgbClr val="FFFFFF"/>
-                      </a:solidFill>
-                      <a:prstDash val="solid"/>
-                      <a:round/>
-                      <a:headEnd type="none" w="med" len="med"/>
-                      <a:tailEnd type="none" w="med" len="med"/>
-                    </a:lnB>
-                    <a:solidFill>
-                      <a:srgbClr val="F1F5F9"/>
-                    </a:solidFill>
-                  </a:tcPr>
-                </a:tc>
-              </a:tr>
-              <a:tr h="420624">
-                <a:tc>
-                  <a:txBody>
-                    <a:bodyPr/>
-                    <a:lstStyle/>
-                    <a:p>
-                      <a:pPr algn="l" indent="0" marL="0">
-                        <a:buNone/>
-                      </a:pPr>
-                      <a:r>
-                        <a:rPr lang="en-US" sz="1200" dirty="0">
-                          <a:solidFill>
-                            <a:srgbClr val="1F2937"/>
-                          </a:solidFill>
-                        </a:rPr>
-                        <a:t>I</a:t>
-                      </a:r>
-                      <a:endParaRPr lang="en-US" sz="1200" dirty="0"/>
-                    </a:p>
-                  </a:txBody>
-                  <a:tcPr marL="76200" marR="76200" marT="38100" marB="38100" anchor="ctr">
-                    <a:lnL w="12700" cap="flat" cmpd="sng" algn="ctr">
-                      <a:solidFill>
-                        <a:srgbClr val="FFFFFF"/>
-                      </a:solidFill>
-                      <a:prstDash val="solid"/>
-                      <a:round/>
-                      <a:headEnd type="none" w="med" len="med"/>
-                      <a:tailEnd type="none" w="med" len="med"/>
-                    </a:lnL>
-                    <a:lnR w="12700" cap="flat" cmpd="sng" algn="ctr">
-                      <a:solidFill>
-                        <a:srgbClr val="FFFFFF"/>
-                      </a:solidFill>
-                      <a:prstDash val="solid"/>
-                      <a:round/>
-                      <a:headEnd type="none" w="med" len="med"/>
-                      <a:tailEnd type="none" w="med" len="med"/>
-                    </a:lnR>
-                    <a:lnT w="12700" cap="flat" cmpd="sng" algn="ctr">
-                      <a:solidFill>
-                        <a:srgbClr val="FFFFFF"/>
-                      </a:solidFill>
-                      <a:prstDash val="solid"/>
-                      <a:round/>
-                      <a:headEnd type="none" w="med" len="med"/>
-                      <a:tailEnd type="none" w="med" len="med"/>
-                    </a:lnT>
-                    <a:lnB w="12700" cap="flat" cmpd="sng" algn="ctr">
-                      <a:solidFill>
-                        <a:srgbClr val="FFFFFF"/>
-                      </a:solidFill>
-                      <a:prstDash val="solid"/>
-                      <a:round/>
-                      <a:headEnd type="none" w="med" len="med"/>
-                      <a:tailEnd type="none" w="med" len="med"/>
-                    </a:lnB>
-                    <a:solidFill>
-                      <a:srgbClr val="E8EDF3"/>
-                    </a:solidFill>
-                  </a:tcPr>
-                </a:tc>
-                <a:tc>
-                  <a:txBody>
-                    <a:bodyPr/>
-                    <a:lstStyle/>
-                    <a:p>
-                      <a:pPr algn="l" indent="0" marL="0">
-                        <a:buNone/>
-                      </a:pPr>
-                      <a:r>
-                        <a:rPr lang="en-US" sz="1200" dirty="0">
-                          <a:solidFill>
-                            <a:srgbClr val="1F2937"/>
-                          </a:solidFill>
-                        </a:rPr>
-                        <a:t>Information disclosure</a:t>
-                      </a:r>
-                      <a:endParaRPr lang="en-US" sz="1200" dirty="0"/>
-                    </a:p>
-                  </a:txBody>
-                  <a:tcPr marL="76200" marR="76200" marT="38100" marB="38100" anchor="ctr">
-                    <a:lnL w="12700" cap="flat" cmpd="sng" algn="ctr">
-                      <a:solidFill>
-                        <a:srgbClr val="FFFFFF"/>
-                      </a:solidFill>
-                      <a:prstDash val="solid"/>
-                      <a:round/>
-                      <a:headEnd type="none" w="med" len="med"/>
-                      <a:tailEnd type="none" w="med" len="med"/>
-                    </a:lnL>
-                    <a:lnR w="12700" cap="flat" cmpd="sng" algn="ctr">
-                      <a:solidFill>
-                        <a:srgbClr val="FFFFFF"/>
-                      </a:solidFill>
-                      <a:prstDash val="solid"/>
-                      <a:round/>
-                      <a:headEnd type="none" w="med" len="med"/>
-                      <a:tailEnd type="none" w="med" len="med"/>
-                    </a:lnR>
-                    <a:lnT w="12700" cap="flat" cmpd="sng" algn="ctr">
-                      <a:solidFill>
-                        <a:srgbClr val="FFFFFF"/>
-                      </a:solidFill>
-                      <a:prstDash val="solid"/>
-                      <a:round/>
-                      <a:headEnd type="none" w="med" len="med"/>
-                      <a:tailEnd type="none" w="med" len="med"/>
-                    </a:lnT>
-                    <a:lnB w="12700" cap="flat" cmpd="sng" algn="ctr">
-                      <a:solidFill>
-                        <a:srgbClr val="FFFFFF"/>
-                      </a:solidFill>
-                      <a:prstDash val="solid"/>
-                      <a:round/>
-                      <a:headEnd type="none" w="med" len="med"/>
-                      <a:tailEnd type="none" w="med" len="med"/>
-                    </a:lnB>
-                    <a:solidFill>
-                      <a:srgbClr val="E8EDF3"/>
-                    </a:solidFill>
-                  </a:tcPr>
-                </a:tc>
-                <a:tc>
-                  <a:txBody>
-                    <a:bodyPr/>
-                    <a:lstStyle/>
-                    <a:p>
-                      <a:pPr algn="l" indent="0" marL="0">
-                        <a:buNone/>
-                      </a:pPr>
-                      <a:r>
-                        <a:rPr lang="en-US" sz="1200" dirty="0">
-                          <a:solidFill>
-                            <a:srgbClr val="1F2937"/>
-                          </a:solidFill>
-                        </a:rPr>
-                        <a:t>Confidentiality</a:t>
-                      </a:r>
-                      <a:endParaRPr lang="en-US" sz="1200" dirty="0"/>
-                    </a:p>
-                  </a:txBody>
-                  <a:tcPr marL="76200" marR="76200" marT="38100" marB="38100" anchor="ctr">
-                    <a:lnL w="12700" cap="flat" cmpd="sng" algn="ctr">
-                      <a:solidFill>
-                        <a:srgbClr val="FFFFFF"/>
-                      </a:solidFill>
-                      <a:prstDash val="solid"/>
-                      <a:round/>
-                      <a:headEnd type="none" w="med" len="med"/>
-                      <a:tailEnd type="none" w="med" len="med"/>
-                    </a:lnL>
-                    <a:lnR w="12700" cap="flat" cmpd="sng" algn="ctr">
-                      <a:solidFill>
-                        <a:srgbClr val="FFFFFF"/>
-                      </a:solidFill>
-                      <a:prstDash val="solid"/>
-                      <a:round/>
-                      <a:headEnd type="none" w="med" len="med"/>
-                      <a:tailEnd type="none" w="med" len="med"/>
-                    </a:lnR>
-                    <a:lnT w="12700" cap="flat" cmpd="sng" algn="ctr">
-                      <a:solidFill>
-                        <a:srgbClr val="FFFFFF"/>
-                      </a:solidFill>
-                      <a:prstDash val="solid"/>
-                      <a:round/>
-                      <a:headEnd type="none" w="med" len="med"/>
-                      <a:tailEnd type="none" w="med" len="med"/>
-                    </a:lnT>
-                    <a:lnB w="12700" cap="flat" cmpd="sng" algn="ctr">
-                      <a:solidFill>
-                        <a:srgbClr val="FFFFFF"/>
-                      </a:solidFill>
-                      <a:prstDash val="solid"/>
-                      <a:round/>
-                      <a:headEnd type="none" w="med" len="med"/>
-                      <a:tailEnd type="none" w="med" len="med"/>
-                    </a:lnB>
-                    <a:solidFill>
-                      <a:srgbClr val="E8EDF3"/>
-                    </a:solidFill>
-                  </a:tcPr>
-                </a:tc>
-              </a:tr>
-              <a:tr h="420624">
-                <a:tc>
-                  <a:txBody>
-                    <a:bodyPr/>
-                    <a:lstStyle/>
-                    <a:p>
-                      <a:pPr algn="l" indent="0" marL="0">
-                        <a:buNone/>
-                      </a:pPr>
-                      <a:r>
-                        <a:rPr lang="en-US" sz="1200" dirty="0">
-                          <a:solidFill>
-                            <a:srgbClr val="1F2937"/>
-                          </a:solidFill>
-                        </a:rPr>
-                        <a:t>D</a:t>
-                      </a:r>
-                      <a:endParaRPr lang="en-US" sz="1200" dirty="0"/>
-                    </a:p>
-                  </a:txBody>
-                  <a:tcPr marL="76200" marR="76200" marT="38100" marB="38100" anchor="ctr">
-                    <a:lnL w="12700" cap="flat" cmpd="sng" algn="ctr">
-                      <a:solidFill>
-                        <a:srgbClr val="FFFFFF"/>
-                      </a:solidFill>
-                      <a:prstDash val="solid"/>
-                      <a:round/>
-                      <a:headEnd type="none" w="med" len="med"/>
-                      <a:tailEnd type="none" w="med" len="med"/>
-                    </a:lnL>
-                    <a:lnR w="12700" cap="flat" cmpd="sng" algn="ctr">
-                      <a:solidFill>
-                        <a:srgbClr val="FFFFFF"/>
-                      </a:solidFill>
-                      <a:prstDash val="solid"/>
-                      <a:round/>
-                      <a:headEnd type="none" w="med" len="med"/>
-                      <a:tailEnd type="none" w="med" len="med"/>
-                    </a:lnR>
-                    <a:lnT w="12700" cap="flat" cmpd="sng" algn="ctr">
-                      <a:solidFill>
-                        <a:srgbClr val="FFFFFF"/>
-                      </a:solidFill>
-                      <a:prstDash val="solid"/>
-                      <a:round/>
-                      <a:headEnd type="none" w="med" len="med"/>
-                      <a:tailEnd type="none" w="med" len="med"/>
-                    </a:lnT>
-                    <a:lnB w="12700" cap="flat" cmpd="sng" algn="ctr">
-                      <a:solidFill>
-                        <a:srgbClr val="FFFFFF"/>
-                      </a:solidFill>
-                      <a:prstDash val="solid"/>
-                      <a:round/>
-                      <a:headEnd type="none" w="med" len="med"/>
-                      <a:tailEnd type="none" w="med" len="med"/>
-                    </a:lnB>
-                    <a:solidFill>
-                      <a:srgbClr val="F1F5F9"/>
-                    </a:solidFill>
-                  </a:tcPr>
-                </a:tc>
-                <a:tc>
-                  <a:txBody>
-                    <a:bodyPr/>
-                    <a:lstStyle/>
-                    <a:p>
-                      <a:pPr algn="l" indent="0" marL="0">
-                        <a:buNone/>
-                      </a:pPr>
-                      <a:r>
-                        <a:rPr lang="en-US" sz="1200" dirty="0">
-                          <a:solidFill>
-                            <a:srgbClr val="1F2937"/>
-                          </a:solidFill>
-                        </a:rPr>
-                        <a:t>Denial of service</a:t>
-                      </a:r>
-                      <a:endParaRPr lang="en-US" sz="1200" dirty="0"/>
-                    </a:p>
-                  </a:txBody>
-                  <a:tcPr marL="76200" marR="76200" marT="38100" marB="38100" anchor="ctr">
-                    <a:lnL w="12700" cap="flat" cmpd="sng" algn="ctr">
-                      <a:solidFill>
-                        <a:srgbClr val="FFFFFF"/>
-                      </a:solidFill>
-                      <a:prstDash val="solid"/>
-                      <a:round/>
-                      <a:headEnd type="none" w="med" len="med"/>
-                      <a:tailEnd type="none" w="med" len="med"/>
-                    </a:lnL>
-                    <a:lnR w="12700" cap="flat" cmpd="sng" algn="ctr">
-                      <a:solidFill>
-                        <a:srgbClr val="FFFFFF"/>
-                      </a:solidFill>
-                      <a:prstDash val="solid"/>
-                      <a:round/>
-                      <a:headEnd type="none" w="med" len="med"/>
-                      <a:tailEnd type="none" w="med" len="med"/>
-                    </a:lnR>
-                    <a:lnT w="12700" cap="flat" cmpd="sng" algn="ctr">
-                      <a:solidFill>
-                        <a:srgbClr val="FFFFFF"/>
-                      </a:solidFill>
-                      <a:prstDash val="solid"/>
-                      <a:round/>
-                      <a:headEnd type="none" w="med" len="med"/>
-                      <a:tailEnd type="none" w="med" len="med"/>
-                    </a:lnT>
-                    <a:lnB w="12700" cap="flat" cmpd="sng" algn="ctr">
-                      <a:solidFill>
-                        <a:srgbClr val="FFFFFF"/>
-                      </a:solidFill>
-                      <a:prstDash val="solid"/>
-                      <a:round/>
-                      <a:headEnd type="none" w="med" len="med"/>
-                      <a:tailEnd type="none" w="med" len="med"/>
-                    </a:lnB>
-                    <a:solidFill>
-                      <a:srgbClr val="F1F5F9"/>
-                    </a:solidFill>
-                  </a:tcPr>
-                </a:tc>
-                <a:tc>
-                  <a:txBody>
-                    <a:bodyPr/>
-                    <a:lstStyle/>
-                    <a:p>
-                      <a:pPr algn="l" indent="0" marL="0">
-                        <a:buNone/>
-                      </a:pPr>
-                      <a:r>
-                        <a:rPr lang="en-US" sz="1200" dirty="0">
-                          <a:solidFill>
-                            <a:srgbClr val="1F2937"/>
-                          </a:solidFill>
-                        </a:rPr>
-                        <a:t>Availability</a:t>
-                      </a:r>
-                      <a:endParaRPr lang="en-US" sz="1200" dirty="0"/>
-                    </a:p>
-                  </a:txBody>
-                  <a:tcPr marL="76200" marR="76200" marT="38100" marB="38100" anchor="ctr">
-                    <a:lnL w="12700" cap="flat" cmpd="sng" algn="ctr">
-                      <a:solidFill>
-                        <a:srgbClr val="FFFFFF"/>
-                      </a:solidFill>
-                      <a:prstDash val="solid"/>
-                      <a:round/>
-                      <a:headEnd type="none" w="med" len="med"/>
-                      <a:tailEnd type="none" w="med" len="med"/>
-                    </a:lnL>
-                    <a:lnR w="12700" cap="flat" cmpd="sng" algn="ctr">
-                      <a:solidFill>
-                        <a:srgbClr val="FFFFFF"/>
-                      </a:solidFill>
-                      <a:prstDash val="solid"/>
-                      <a:round/>
-                      <a:headEnd type="none" w="med" len="med"/>
-                      <a:tailEnd type="none" w="med" len="med"/>
-                    </a:lnR>
-                    <a:lnT w="12700" cap="flat" cmpd="sng" algn="ctr">
-                      <a:solidFill>
-                        <a:srgbClr val="FFFFFF"/>
-                      </a:solidFill>
-                      <a:prstDash val="solid"/>
-                      <a:round/>
-                      <a:headEnd type="none" w="med" len="med"/>
-                      <a:tailEnd type="none" w="med" len="med"/>
-                    </a:lnT>
-                    <a:lnB w="12700" cap="flat" cmpd="sng" algn="ctr">
-                      <a:solidFill>
-                        <a:srgbClr val="FFFFFF"/>
-                      </a:solidFill>
-                      <a:prstDash val="solid"/>
-                      <a:round/>
-                      <a:headEnd type="none" w="med" len="med"/>
-                      <a:tailEnd type="none" w="med" len="med"/>
-                    </a:lnB>
-                    <a:solidFill>
-                      <a:srgbClr val="F1F5F9"/>
-                    </a:solidFill>
-                  </a:tcPr>
-                </a:tc>
-              </a:tr>
-              <a:tr h="420624">
-                <a:tc>
-                  <a:txBody>
-                    <a:bodyPr/>
-                    <a:lstStyle/>
-                    <a:p>
-                      <a:pPr algn="l" indent="0" marL="0">
-                        <a:buNone/>
-                      </a:pPr>
-                      <a:r>
-                        <a:rPr lang="en-US" sz="1200" dirty="0">
-                          <a:solidFill>
-                            <a:srgbClr val="1F2937"/>
-                          </a:solidFill>
-                        </a:rPr>
-                        <a:t>E</a:t>
-                      </a:r>
-                      <a:endParaRPr lang="en-US" sz="1200" dirty="0"/>
-                    </a:p>
-                  </a:txBody>
-                  <a:tcPr marL="76200" marR="76200" marT="38100" marB="38100" anchor="ctr">
-                    <a:lnL w="12700" cap="flat" cmpd="sng" algn="ctr">
-                      <a:solidFill>
-                        <a:srgbClr val="FFFFFF"/>
-                      </a:solidFill>
-                      <a:prstDash val="solid"/>
-                      <a:round/>
-                      <a:headEnd type="none" w="med" len="med"/>
-                      <a:tailEnd type="none" w="med" len="med"/>
-                    </a:lnL>
-                    <a:lnR w="12700" cap="flat" cmpd="sng" algn="ctr">
-                      <a:solidFill>
-                        <a:srgbClr val="FFFFFF"/>
-                      </a:solidFill>
-                      <a:prstDash val="solid"/>
-                      <a:round/>
-                      <a:headEnd type="none" w="med" len="med"/>
-                      <a:tailEnd type="none" w="med" len="med"/>
-                    </a:lnR>
-                    <a:lnT w="12700" cap="flat" cmpd="sng" algn="ctr">
-                      <a:solidFill>
-                        <a:srgbClr val="FFFFFF"/>
-                      </a:solidFill>
-                      <a:prstDash val="solid"/>
-                      <a:round/>
-                      <a:headEnd type="none" w="med" len="med"/>
-                      <a:tailEnd type="none" w="med" len="med"/>
-                    </a:lnT>
-                    <a:lnB w="12700" cap="flat" cmpd="sng" algn="ctr">
-                      <a:solidFill>
-                        <a:srgbClr val="FFFFFF"/>
-                      </a:solidFill>
-                      <a:prstDash val="solid"/>
-                      <a:round/>
-                      <a:headEnd type="none" w="med" len="med"/>
-                      <a:tailEnd type="none" w="med" len="med"/>
-                    </a:lnB>
-                    <a:solidFill>
-                      <a:srgbClr val="E8EDF3"/>
-                    </a:solidFill>
-                  </a:tcPr>
-                </a:tc>
-                <a:tc>
-                  <a:txBody>
-                    <a:bodyPr/>
-                    <a:lstStyle/>
-                    <a:p>
-                      <a:pPr algn="l" indent="0" marL="0">
-                        <a:buNone/>
-                      </a:pPr>
-                      <a:r>
-                        <a:rPr lang="en-US" sz="1200" dirty="0">
-                          <a:solidFill>
-                            <a:srgbClr val="1F2937"/>
-                          </a:solidFill>
-                        </a:rPr>
-                        <a:t>Elevation of privilege</a:t>
-                      </a:r>
-                      <a:endParaRPr lang="en-US" sz="1200" dirty="0"/>
-                    </a:p>
-                  </a:txBody>
-                  <a:tcPr marL="76200" marR="76200" marT="38100" marB="38100" anchor="ctr">
-                    <a:lnL w="12700" cap="flat" cmpd="sng" algn="ctr">
-                      <a:solidFill>
-                        <a:srgbClr val="FFFFFF"/>
-                      </a:solidFill>
-                      <a:prstDash val="solid"/>
-                      <a:round/>
-                      <a:headEnd type="none" w="med" len="med"/>
-                      <a:tailEnd type="none" w="med" len="med"/>
-                    </a:lnL>
-                    <a:lnR w="12700" cap="flat" cmpd="sng" algn="ctr">
-                      <a:solidFill>
-                        <a:srgbClr val="FFFFFF"/>
-                      </a:solidFill>
-                      <a:prstDash val="solid"/>
-                      <a:round/>
-                      <a:headEnd type="none" w="med" len="med"/>
-                      <a:tailEnd type="none" w="med" len="med"/>
-                    </a:lnR>
-                    <a:lnT w="12700" cap="flat" cmpd="sng" algn="ctr">
-                      <a:solidFill>
-                        <a:srgbClr val="FFFFFF"/>
-                      </a:solidFill>
-                      <a:prstDash val="solid"/>
-                      <a:round/>
-                      <a:headEnd type="none" w="med" len="med"/>
-                      <a:tailEnd type="none" w="med" len="med"/>
-                    </a:lnT>
-                    <a:lnB w="12700" cap="flat" cmpd="sng" algn="ctr">
-                      <a:solidFill>
-                        <a:srgbClr val="FFFFFF"/>
-                      </a:solidFill>
-                      <a:prstDash val="solid"/>
-                      <a:round/>
-                      <a:headEnd type="none" w="med" len="med"/>
-                      <a:tailEnd type="none" w="med" len="med"/>
-                    </a:lnB>
-                    <a:solidFill>
-                      <a:srgbClr val="E8EDF3"/>
-                    </a:solidFill>
-                  </a:tcPr>
-                </a:tc>
-                <a:tc>
-                  <a:txBody>
-                    <a:bodyPr/>
-                    <a:lstStyle/>
-                    <a:p>
-                      <a:pPr algn="l" indent="0" marL="0">
-                        <a:buNone/>
-                      </a:pPr>
-                      <a:r>
-                        <a:rPr lang="en-US" sz="1200" dirty="0">
-                          <a:solidFill>
-                            <a:srgbClr val="1F2937"/>
-                          </a:solidFill>
-                        </a:rPr>
-                        <a:t>Authorization</a:t>
-                      </a:r>
-                      <a:endParaRPr lang="en-US" sz="1200" dirty="0"/>
-                    </a:p>
-                  </a:txBody>
-                  <a:tcPr marL="76200" marR="76200" marT="38100" marB="38100" anchor="ctr">
-                    <a:lnL w="12700" cap="flat" cmpd="sng" algn="ctr">
-                      <a:solidFill>
-                        <a:srgbClr val="FFFFFF"/>
-                      </a:solidFill>
-                      <a:prstDash val="solid"/>
-                      <a:round/>
-                      <a:headEnd type="none" w="med" len="med"/>
-                      <a:tailEnd type="none" w="med" len="med"/>
-                    </a:lnL>
-                    <a:lnR w="12700" cap="flat" cmpd="sng" algn="ctr">
-                      <a:solidFill>
-                        <a:srgbClr val="FFFFFF"/>
-                      </a:solidFill>
-                      <a:prstDash val="solid"/>
-                      <a:round/>
-                      <a:headEnd type="none" w="med" len="med"/>
-                      <a:tailEnd type="none" w="med" len="med"/>
-                    </a:lnR>
-                    <a:lnT w="12700" cap="flat" cmpd="sng" algn="ctr">
-                      <a:solidFill>
-                        <a:srgbClr val="FFFFFF"/>
-                      </a:solidFill>
-                      <a:prstDash val="solid"/>
-                      <a:round/>
-                      <a:headEnd type="none" w="med" len="med"/>
-                      <a:tailEnd type="none" w="med" len="med"/>
-                    </a:lnT>
-                    <a:lnB w="12700" cap="flat" cmpd="sng" algn="ctr">
-                      <a:solidFill>
-                        <a:srgbClr val="FFFFFF"/>
-                      </a:solidFill>
-                      <a:prstDash val="solid"/>
-                      <a:round/>
-                      <a:headEnd type="none" w="med" len="med"/>
-                      <a:tailEnd type="none" w="med" len="med"/>
-                    </a:lnB>
-                    <a:solidFill>
-                      <a:srgbClr val="E8EDF3"/>
-                    </a:solidFill>
-                  </a:tcPr>
-                </a:tc>
-              </a:tr>
-            </a:tbl>
-          </a:graphicData>
-        </a:graphic>
-      </p:graphicFrame>
-      <p:sp>
-        <p:nvSpPr>
-          <p:cNvPr id="6" name="Text 2"/>
-          <p:cNvSpPr/>
-          <p:nvPr/>
-        </p:nvSpPr>
-        <p:spPr>
-          <a:xfrm>
-            <a:off x="457200" y="4800600"/>
-            <a:ext cx="6949440" cy="274320"/>
+      <p:sp>
+        <p:nvSpPr>
+          <p:cNvPr id="5" name="Text 2"/>
+          <p:cNvSpPr/>
+          <p:nvPr/>
+        </p:nvSpPr>
+        <p:spPr>
+          <a:xfrm>
+            <a:off x="548640" y="1325880"/>
+            <a:ext cx="8046720" cy="1920240"/>
           </a:xfrm>
           <a:prstGeom prst="rect">
             <a:avLst/>
@@ -9820,21 +9594,157 @@
           <a:ln/>
         </p:spPr>
         <p:txBody>
-          <a:bodyPr wrap="square" lIns="0" tIns="0" rIns="0" bIns="0" rtlCol="0" anchor="ctr"/>
+          <a:bodyPr wrap="square" lIns="0" tIns="0" rIns="0" bIns="0" rtlCol="0" anchor="t">
+            <a:normAutofit/>
+          </a:bodyPr>
           <a:lstStyle/>
           <a:p>
             <a:pPr indent="0" marL="0">
               <a:buNone/>
             </a:pPr>
             <a:r>
-              <a:rPr lang="en-US" sz="900" dirty="0">
-                <a:solidFill>
-                  <a:srgbClr val="64748B"/>
+              <a:rPr lang="en-US" sz="1400" dirty="0">
+                <a:solidFill>
+                  <a:srgbClr val="1F2937"/>
                 </a:solidFill>
                 <a:latin typeface="Calibri" pitchFamily="34" charset="0"/>
                 <a:ea typeface="Calibri" pitchFamily="34" charset="-122"/>
                 <a:cs typeface="Calibri" pitchFamily="34" charset="-120"/>
               </a:rPr>
+              <a:t>See diagram: A data-flow diagram. The browser sends a file and its filename to the Flask app, crossing the boundary from the public internet into the server. Inside the server, the Flask app writes to the uploads directory using the raw, attacker-controlled filename — an unauthenticated arbitrary file write. Separately, the app reads back from uploads through the /files/name path, which is defended against path traversal. (web only)</a:t>
+            </a:r>
+            <a:endParaRPr lang="en-US" sz="1400" dirty="0"/>
+          </a:p>
+        </p:txBody>
+      </p:sp>
+      <p:sp>
+        <p:nvSpPr>
+          <p:cNvPr id="6" name="Shape 3"/>
+          <p:cNvSpPr/>
+          <p:nvPr/>
+        </p:nvSpPr>
+        <p:spPr>
+          <a:xfrm>
+            <a:off x="457200" y="3337560"/>
+            <a:ext cx="8229600" cy="896112"/>
+          </a:xfrm>
+          <a:prstGeom prst="roundRect">
+            <a:avLst>
+              <a:gd name="adj" fmla="val 8163"/>
+            </a:avLst>
+          </a:prstGeom>
+          <a:solidFill>
+            <a:srgbClr val="F1F5F9"/>
+          </a:solidFill>
+          <a:ln/>
+          <a:effectLst>
+            <a:outerShdw sx="100000" sy="100000" kx="0" ky="0" algn="bl" rotWithShape="0" blurRad="76200" dist="25400" dir="5400000">
+              <a:srgbClr val="000000">
+                <a:alpha val="12000"/>
+              </a:srgbClr>
+            </a:outerShdw>
+          </a:effectLst>
+        </p:spPr>
+      </p:sp>
+      <p:sp>
+        <p:nvSpPr>
+          <p:cNvPr id="7" name="Text 4"/>
+          <p:cNvSpPr/>
+          <p:nvPr/>
+        </p:nvSpPr>
+        <p:spPr>
+          <a:xfrm>
+            <a:off x="731520" y="3447288"/>
+            <a:ext cx="7680960" cy="676656"/>
+          </a:xfrm>
+          <a:prstGeom prst="rect">
+            <a:avLst/>
+          </a:prstGeom>
+          <a:noFill/>
+          <a:ln/>
+        </p:spPr>
+        <p:txBody>
+          <a:bodyPr wrap="square" lIns="0" tIns="0" rIns="0" bIns="0" rtlCol="0" anchor="t">
+            <a:normAutofit/>
+          </a:bodyPr>
+          <a:lstStyle/>
+          <a:p>
+            <a:pPr marL="342900" indent="-342900">
+              <a:spcAft>
+                <a:spcPts val="600"/>
+              </a:spcAft>
+              <a:buSzPct val="100000"/>
+              <a:buChar char="•"/>
+            </a:pPr>
+            <a:r>
+              <a:rPr lang="en-US" sz="1400" dirty="0">
+                <a:solidFill>
+                  <a:srgbClr val="1F2937"/>
+                </a:solidFill>
+                <a:latin typeface="Calibri" pitchFamily="34" charset="0"/>
+                <a:ea typeface="Calibri" pitchFamily="34" charset="-122"/>
+                <a:cs typeface="Calibri" pitchFamily="34" charset="-120"/>
+              </a:rPr>
+              <a:t>Crosses the Internet → app trust boundary</a:t>
+            </a:r>
+            <a:endParaRPr lang="en-US" sz="1400" dirty="0"/>
+          </a:p>
+          <a:p>
+            <a:pPr marL="342900" indent="-342900">
+              <a:spcAft>
+                <a:spcPts val="600"/>
+              </a:spcAft>
+              <a:buSzPct val="100000"/>
+              <a:buChar char="•"/>
+            </a:pPr>
+            <a:r>
+              <a:rPr lang="en-US" sz="1400" dirty="0">
+                <a:solidFill>
+                  <a:srgbClr val="1F2937"/>
+                </a:solidFill>
+                <a:latin typeface="Calibri" pitchFamily="34" charset="0"/>
+                <a:ea typeface="Calibri" pitchFamily="34" charset="-122"/>
+                <a:cs typeface="Calibri" pitchFamily="34" charset="-120"/>
+              </a:rPr>
+              <a:t>Inputs: the file bytes and the filename (attacker-controlled)</a:t>
+            </a:r>
+            <a:endParaRPr lang="en-US" sz="1400" dirty="0"/>
+          </a:p>
+        </p:txBody>
+      </p:sp>
+      <p:sp>
+        <p:nvSpPr>
+          <p:cNvPr id="8" name="Text 5"/>
+          <p:cNvSpPr/>
+          <p:nvPr/>
+        </p:nvSpPr>
+        <p:spPr>
+          <a:xfrm>
+            <a:off x="457200" y="4800600"/>
+            <a:ext cx="6949440" cy="274320"/>
+          </a:xfrm>
+          <a:prstGeom prst="rect">
+            <a:avLst/>
+          </a:prstGeom>
+          <a:noFill/>
+          <a:ln/>
+        </p:spPr>
+        <p:txBody>
+          <a:bodyPr wrap="square" lIns="0" tIns="0" rIns="0" bIns="0" rtlCol="0" anchor="ctr"/>
+          <a:lstStyle/>
+          <a:p>
+            <a:pPr indent="0" marL="0">
+              <a:buNone/>
+            </a:pPr>
+            <a:r>
+              <a:rPr lang="en-US" sz="900" dirty="0">
+                <a:solidFill>
+                  <a:srgbClr val="64748B"/>
+                </a:solidFill>
+                <a:latin typeface="Calibri" pitchFamily="34" charset="0"/>
+                <a:ea typeface="Calibri" pitchFamily="34" charset="-122"/>
+                <a:cs typeface="Calibri" pitchFamily="34" charset="-120"/>
+              </a:rPr>
               <a:t>Software Security · Week 1</a:t>
             </a:r>
             <a:endParaRPr lang="en-US" sz="900" dirty="0"/>
@@ -9843,7 +9753,7 @@
       </p:sp>
       <p:pic>
         <p:nvPicPr>
-          <p:cNvPr id="7" name="Image 1" descr="/Users/pop7/Library/CloudStorage/OneDrive-MonsterConnectCo.,Ltd/Lecture/KOSEN69 - software-security/slides/pptx/assets/logo-small.png">    </p:cNvPr>
+          <p:cNvPr id="9" name="Image 1" descr="/Users/pop7/Library/CloudStorage/OneDrive-MonsterConnectCo.,Ltd/Lecture/KOSEN69 - software-security/slides/pptx/assets/logo-small.png">    </p:cNvPr>
           <p:cNvPicPr>
             <a:picLocks noChangeAspect="1"/>
           </p:cNvPicPr>
@@ -9981,7 +9891,7 @@
                 <a:ea typeface="Arial" pitchFamily="34" charset="-122"/>
                 <a:cs typeface="Arial" pitchFamily="34" charset="-120"/>
               </a:rPr>
-              <a:t>STRIDE applied to /upload</a:t>
+              <a:t>Worked example: the /upload endpoint (cont.)</a:t>
             </a:r>
             <a:endParaRPr lang="en-US" sz="2600" dirty="0"/>
           </a:p>
@@ -9996,11 +9906,11 @@
         <p:spPr>
           <a:xfrm>
             <a:off x="457200" y="1325880"/>
-            <a:ext cx="8229600" cy="2743200"/>
+            <a:ext cx="8229600" cy="1499616"/>
           </a:xfrm>
           <a:prstGeom prst="roundRect">
             <a:avLst>
-              <a:gd name="adj" fmla="val 2667"/>
+              <a:gd name="adj" fmla="val 4878"/>
             </a:avLst>
           </a:prstGeom>
           <a:solidFill>
@@ -10025,7 +9935,7 @@
         <p:spPr>
           <a:xfrm>
             <a:off x="731520" y="1435608"/>
-            <a:ext cx="7680960" cy="2523744"/>
+            <a:ext cx="7680960" cy="1280160"/>
           </a:xfrm>
           <a:prstGeom prst="rect">
             <a:avLst/>
@@ -10055,7 +9965,7 @@
                 <a:ea typeface="Calibri" pitchFamily="34" charset="-122"/>
                 <a:cs typeface="Calibri" pitchFamily="34" charset="-120"/>
               </a:rPr>
-              <a:t>S — no auth: anyone can upload as "anyone"</a:t>
+              <a:t>../../escaped.txt as a filename → the app saves it there — arbitrary-file-write, unauthenticated, anywhere the process can reach (not "overwrite a same-name file" — write to a path you chose)</a:t>
             </a:r>
             <a:endParaRPr lang="en-US" sz="1400" dirty="0"/>
           </a:p>
@@ -10076,91 +9986,7 @@
                 <a:ea typeface="Calibri" pitchFamily="34" charset="-122"/>
                 <a:cs typeface="Calibri" pitchFamily="34" charset="-120"/>
               </a:rPr>
-              <a:t>T — ../ filename writes outside uploads/ — arbitrary-file-write, not just an overwrite</a:t>
-            </a:r>
-            <a:endParaRPr lang="en-US" sz="1400" dirty="0"/>
-          </a:p>
-          <a:p>
-            <a:pPr marL="342900" indent="-342900">
-              <a:spcAft>
-                <a:spcPts val="600"/>
-              </a:spcAft>
-              <a:buSzPct val="100000"/>
-              <a:buChar char="•"/>
-            </a:pPr>
-            <a:r>
-              <a:rPr lang="en-US" sz="1400" dirty="0">
-                <a:solidFill>
-                  <a:srgbClr val="1F2937"/>
-                </a:solidFill>
-                <a:latin typeface="Calibri" pitchFamily="34" charset="0"/>
-                <a:ea typeface="Calibri" pitchFamily="34" charset="-122"/>
-                <a:cs typeface="Calibri" pitchFamily="34" charset="-120"/>
-              </a:rPr>
-              <a:t>R — no logs → can't prove who uploaded the malware</a:t>
-            </a:r>
-            <a:endParaRPr lang="en-US" sz="1400" dirty="0"/>
-          </a:p>
-          <a:p>
-            <a:pPr marL="342900" indent="-342900">
-              <a:spcAft>
-                <a:spcPts val="600"/>
-              </a:spcAft>
-              <a:buSzPct val="100000"/>
-              <a:buChar char="•"/>
-            </a:pPr>
-            <a:r>
-              <a:rPr lang="en-US" sz="1400" dirty="0">
-                <a:solidFill>
-                  <a:srgbClr val="1F2937"/>
-                </a:solidFill>
-                <a:latin typeface="Calibri" pitchFamily="34" charset="0"/>
-                <a:ea typeface="Calibri" pitchFamily="34" charset="-122"/>
-                <a:cs typeface="Calibri" pitchFamily="34" charset="-120"/>
-              </a:rPr>
-              <a:t>I — the read path (/files/&lt;name&gt;) is comparatively well-defended (Werkzeug blocks traversal there) — this element's real risk is on the write side, not this letter</a:t>
-            </a:r>
-            <a:endParaRPr lang="en-US" sz="1400" dirty="0"/>
-          </a:p>
-          <a:p>
-            <a:pPr marL="342900" indent="-342900">
-              <a:spcAft>
-                <a:spcPts val="600"/>
-              </a:spcAft>
-              <a:buSzPct val="100000"/>
-              <a:buChar char="•"/>
-            </a:pPr>
-            <a:r>
-              <a:rPr lang="en-US" sz="1400" dirty="0">
-                <a:solidFill>
-                  <a:srgbClr val="1F2937"/>
-                </a:solidFill>
-                <a:latin typeface="Calibri" pitchFamily="34" charset="0"/>
-                <a:ea typeface="Calibri" pitchFamily="34" charset="-122"/>
-                <a:cs typeface="Calibri" pitchFamily="34" charset="-120"/>
-              </a:rPr>
-              <a:t>D — no size limit → fill the disk</a:t>
-            </a:r>
-            <a:endParaRPr lang="en-US" sz="1400" dirty="0"/>
-          </a:p>
-          <a:p>
-            <a:pPr marL="342900" indent="-342900">
-              <a:spcAft>
-                <a:spcPts val="600"/>
-              </a:spcAft>
-              <a:buSzPct val="100000"/>
-              <a:buChar char="•"/>
-            </a:pPr>
-            <a:r>
-              <a:rPr lang="en-US" sz="1400" dirty="0">
-                <a:solidFill>
-                  <a:srgbClr val="1F2937"/>
-                </a:solidFill>
-                <a:latin typeface="Calibri" pitchFamily="34" charset="0"/>
-                <a:ea typeface="Calibri" pitchFamily="34" charset="-122"/>
-                <a:cs typeface="Calibri" pitchFamily="34" charset="-120"/>
-              </a:rPr>
-              <a:t>E — upload shell.php, then request it → code execution</a:t>
+              <a:t>/files/&lt;name&gt; (the read path) is comparatively well-defended — the same trick doesn't work against it</a:t>
             </a:r>
             <a:endParaRPr lang="en-US" sz="1400" dirty="0"/>
           </a:p>

--- a/slides/pptx/week01.pptx
+++ b/slides/pptx/week01.pptx
@@ -1139,7 +1139,7 @@
           <a:p>
             <a:r>
               <a:rPr lang="en-US" dirty="0"/>
-              <a:t>Explain the game before the lab: it gamifies the STRIDE pass we just did. Each suit = a STRIDE category; you play a card by naming a concrete threat on the DFD. Make it competitive (leaderboard). It lowers the barrier for students who freeze on a blank page. ~3 min.</a:t>
+              <a:t>Explain the game before the lab: it gamifies the STRIDE pass we just did. Each suit = a STRIDE category; you play a card by naming a concrete threat on the DFD. Make it competitive (leaderboard). It lowers the barrier for students who freeze on a blank page. Mention the digital deck up front so no one wastes time hunting for a printer. ~3 min.</a:t>
             </a:r>
             <a:endParaRPr lang="en-US" dirty="0"/>
           </a:p>
@@ -4643,11 +4643,11 @@
         <p:spPr>
           <a:xfrm>
             <a:off x="457200" y="1325880"/>
-            <a:ext cx="8229600" cy="1517904"/>
+            <a:ext cx="8229600" cy="2029968"/>
           </a:xfrm>
           <a:prstGeom prst="roundRect">
             <a:avLst>
-              <a:gd name="adj" fmla="val 4819"/>
+              <a:gd name="adj" fmla="val 3604"/>
             </a:avLst>
           </a:prstGeom>
           <a:solidFill>
@@ -4672,7 +4672,7 @@
         <p:spPr>
           <a:xfrm>
             <a:off x="731520" y="1435608"/>
-            <a:ext cx="7680960" cy="1298448"/>
+            <a:ext cx="7680960" cy="1810512"/>
           </a:xfrm>
           <a:prstGeom prst="rect">
             <a:avLst/>
@@ -4702,7 +4702,7 @@
                 <a:ea typeface="Calibri" pitchFamily="34" charset="-122"/>
                 <a:cs typeface="Calibri" pitchFamily="34" charset="-120"/>
               </a:rPr>
-              <a:t>Microsoft's free STRIDE card deck</a:t>
+              <a:t>Microsoft's free STRIDE card deck — github.com/adamshostack/eop</a:t>
             </a:r>
             <a:endParaRPr lang="en-US" sz="1400" dirty="0"/>
           </a:p>
@@ -4766,6 +4766,27 @@
                 <a:cs typeface="Calibri" pitchFamily="34" charset="-120"/>
               </a:rPr>
               <a:t>Outcome: a team-built STRIDE model</a:t>
+            </a:r>
+            <a:endParaRPr lang="en-US" sz="1400" dirty="0"/>
+          </a:p>
+          <a:p>
+            <a:pPr marL="342900" indent="-342900">
+              <a:spcAft>
+                <a:spcPts val="600"/>
+              </a:spcAft>
+              <a:buSzPct val="100000"/>
+              <a:buChar char="•"/>
+            </a:pPr>
+            <a:r>
+              <a:rPr lang="en-US" sz="1400" dirty="0">
+                <a:solidFill>
+                  <a:srgbClr val="1F2937"/>
+                </a:solidFill>
+                <a:latin typeface="Calibri" pitchFamily="34" charset="0"/>
+                <a:ea typeface="Calibri" pitchFamily="34" charset="-122"/>
+                <a:cs typeface="Calibri" pitchFamily="34" charset="-120"/>
+              </a:rPr>
+              <a:t>No printer? Worksheet Task 3 has a built-in digital deck — same 78 cards, one shared screen</a:t>
             </a:r>
             <a:endParaRPr lang="en-US" sz="1400" dirty="0"/>
           </a:p>
